--- a/2026.10.10AI与通信融合研究进展调研三.pptx
+++ b/2026.10.10AI与通信融合研究进展调研三.pptx
@@ -10672,7 +10672,7 @@
         <p:spPr>
           <a:xfrm>
             <a:off x="565150" y="339090"/>
-            <a:ext cx="10309225" cy="612775"/>
+            <a:ext cx="6024343" cy="612775"/>
           </a:xfrm>
         </p:spPr>
         <p:txBody>
@@ -10722,7 +10722,7 @@
         <p:spPr>
           <a:xfrm>
             <a:off x="258445" y="951865"/>
-            <a:ext cx="11734165" cy="5515719"/>
+            <a:ext cx="11734165" cy="5535978"/>
           </a:xfrm>
           <a:prstGeom prst="rect">
             <a:avLst/>
@@ -10739,7 +10739,7 @@
           <a:p>
             <a:pPr indent="0">
               <a:lnSpc>
-                <a:spcPct val="120000"/>
+                <a:spcPct val="100000"/>
               </a:lnSpc>
               <a:buFont typeface="Arial" panose="020B0604020202020204" pitchFamily="34" charset="0"/>
               <a:buNone/>
@@ -10764,7 +10764,41 @@
                 <a:ea typeface="微软雅黑" charset="-122"/>
                 <a:sym typeface="+mn-ea"/>
               </a:rPr>
-              <a:t>终端吞吐量预测：融合历史经验与即时观测，辅助视频码率选择</a:t>
+              <a:t>苹果专利：终端吞吐量预测</a:t>
+            </a:r>
+            <a:r>
+              <a:rPr lang="zh-CN" altLang="en-US" b="1" dirty="0">
+                <a:solidFill>
+                  <a:schemeClr val="tx1"/>
+                </a:solidFill>
+                <a:latin typeface="微软雅黑" charset="0"/>
+                <a:ea typeface="微软雅黑" charset="0"/>
+                <a:sym typeface="+mn-ea"/>
+              </a:rPr>
+              <a:t>——</a:t>
+            </a:r>
+            <a:r>
+              <a:rPr lang="zh-CN" altLang="en-US" b="1" dirty="0">
+                <a:solidFill>
+                  <a:schemeClr val="tx1"/>
+                </a:solidFill>
+                <a:latin typeface="微软雅黑" charset="-122"/>
+                <a:ea typeface="微软雅黑" charset="-122"/>
+                <a:sym typeface="+mn-ea"/>
+              </a:rPr>
+              <a:t>融合历史经验与即时观测，辅助视频码率选择</a:t>
+            </a:r>
+            <a:r>
+              <a:rPr lang="en-US" altLang="zh-CN" b="1" baseline="30000" dirty="0">
+                <a:solidFill>
+                  <a:srgbClr val="000000"/>
+                </a:solidFill>
+                <a:latin typeface="微软雅黑" charset="-122"/>
+                <a:ea typeface="微软雅黑" charset="-122"/>
+                <a:cs typeface="+mn-ea"/>
+                <a:sym typeface="+mn-ea"/>
+              </a:rPr>
+              <a:t>[1]</a:t>
             </a:r>
             <a:endParaRPr lang="zh-CN" altLang="en-US" b="1" dirty="0">
               <a:solidFill>
@@ -10786,13 +10820,118 @@
             <a:r>
               <a:rPr lang="zh-CN" altLang="en-US" sz="1400" b="1" dirty="0">
                 <a:solidFill>
-                  <a:schemeClr val="tx1"/>
+                  <a:srgbClr val="FF0000"/>
+                </a:solidFill>
+                <a:latin typeface="微软雅黑" charset="-122"/>
+                <a:ea typeface="微软雅黑" charset="-122"/>
+                <a:sym typeface="+mn-ea"/>
+              </a:rPr>
+              <a:t>创新与价值：</a:t>
+            </a:r>
+            <a:r>
+              <a:rPr lang="zh-CN" altLang="en-US" sz="1400" dirty="0">
+                <a:solidFill>
+                  <a:schemeClr val="tx1"/>
+                </a:solidFill>
+                <a:latin typeface="微软雅黑" charset="-122"/>
+                <a:ea typeface="微软雅黑" charset="-122"/>
+                <a:sym typeface="+mn-ea"/>
+              </a:rPr>
+              <a:t>该方法面向</a:t>
+            </a:r>
+            <a:r>
+              <a:rPr lang="zh-CN" altLang="en-US" sz="1400" b="1" dirty="0">
+                <a:solidFill>
+                  <a:schemeClr val="tx1"/>
+                </a:solidFill>
+                <a:latin typeface="微软雅黑" charset="-122"/>
+                <a:ea typeface="微软雅黑" charset="-122"/>
+                <a:sym typeface="+mn-ea"/>
+              </a:rPr>
+              <a:t>播放启动和网络切换时吞吐量难以准确估计</a:t>
+            </a:r>
+            <a:r>
+              <a:rPr lang="zh-CN" altLang="en-US" sz="1400" dirty="0">
+                <a:solidFill>
+                  <a:schemeClr val="tx1"/>
+                </a:solidFill>
+                <a:latin typeface="微软雅黑" charset="-122"/>
+                <a:ea typeface="微软雅黑" charset="-122"/>
+                <a:sym typeface="+mn-ea"/>
+              </a:rPr>
+              <a:t>的问题，将终端历史模型的预测与当前网络测量形成的估计相结合，并根据可靠程度调整权重，为播放器更早选择合适的视频码率提供依据。其价值在于</a:t>
+            </a:r>
+            <a:r>
+              <a:rPr lang="zh-CN" altLang="en-US" sz="1400" b="1" dirty="0">
+                <a:solidFill>
+                  <a:schemeClr val="tx1"/>
+                </a:solidFill>
+                <a:latin typeface="微软雅黑" charset="-122"/>
+                <a:ea typeface="微软雅黑" charset="-122"/>
+                <a:sym typeface="+mn-ea"/>
+              </a:rPr>
+              <a:t>兼顾播放流畅性与画质</a:t>
+            </a:r>
+            <a:r>
+              <a:rPr lang="zh-CN" altLang="en-US" sz="1400" dirty="0">
+                <a:solidFill>
+                  <a:schemeClr val="tx1"/>
+                </a:solidFill>
+                <a:latin typeface="微软雅黑" charset="-122"/>
+                <a:ea typeface="微软雅黑" charset="-122"/>
+                <a:sym typeface="+mn-ea"/>
+              </a:rPr>
+              <a:t>：减少吞吐量高估导致的卡顿风险，也避免观测不足时过于保守地选择低码率。</a:t>
+            </a:r>
+            <a:endParaRPr lang="zh-CN" altLang="en-US" sz="1400" dirty="0">
+              <a:solidFill>
+                <a:schemeClr val="tx1"/>
+              </a:solidFill>
+              <a:latin typeface="微软雅黑" charset="-122"/>
+              <a:ea typeface="微软雅黑" charset="-122"/>
+              <a:sym typeface="+mn-ea"/>
+            </a:endParaRPr>
+          </a:p>
+          <a:p>
+            <a:pPr indent="0">
+              <a:lnSpc>
+                <a:spcPct val="120000"/>
+              </a:lnSpc>
+              <a:buFont typeface="Arial" panose="020B0604020202020204" pitchFamily="34" charset="0"/>
+              <a:buNone/>
+            </a:pPr>
+            <a:r>
+              <a:rPr lang="zh-CN" altLang="en-US" sz="1400" b="1" dirty="0">
+                <a:solidFill>
+                  <a:srgbClr val="FF0000"/>
                 </a:solidFill>
                 <a:latin typeface="微软雅黑" charset="-122"/>
                 <a:ea typeface="微软雅黑" charset="-122"/>
                 <a:sym typeface="+mn-ea"/>
               </a:rPr>
               <a:t>技术概述：</a:t>
+            </a:r>
+            <a:r>
+              <a:rPr lang="zh-CN" altLang="en-US" sz="1400" dirty="0">
+                <a:solidFill>
+                  <a:schemeClr val="tx1"/>
+                </a:solidFill>
+                <a:latin typeface="微软雅黑" charset="-122"/>
+                <a:ea typeface="微软雅黑" charset="-122"/>
+                <a:sym typeface="+mn-ea"/>
+              </a:rPr>
+              <a:t>流媒体通常将同一内容提供为多个码率版本，播放器逐段决定下载哪个版本。选择过高可能使下载跟不上播放，选择过低则可能损失画质。播放刚启动或网络刚切换时，终端尚未积累足够的当前网络观测，难以可靠地估计可用吞吐量。</a:t>
+            </a:r>
+            <a:r>
+              <a:rPr lang="zh-CN" altLang="en-US" sz="1400" b="1" dirty="0">
+                <a:solidFill>
+                  <a:schemeClr val="tx1"/>
+                </a:solidFill>
+                <a:latin typeface="微软雅黑" charset="-122"/>
+                <a:ea typeface="微软雅黑" charset="-122"/>
+                <a:sym typeface="+mn-ea"/>
+              </a:rPr>
+              <a:t>苹果提出在终端建立历史吞吐量模型，与即时估计融合，再将结果用于视频分片选择。历史经验补充观测不足，即时测量帮助修正当前判断。</a:t>
             </a:r>
             <a:endParaRPr lang="zh-CN" altLang="en-US" sz="1400" b="1" dirty="0">
               <a:solidFill>
@@ -10820,45 +10959,6 @@
                 <a:ea typeface="微软雅黑" charset="-122"/>
                 <a:sym typeface="+mn-ea"/>
               </a:rPr>
-              <a:t>流媒体通常将同一内容提供为多个码率版本，播放器逐段决定下载哪个版本。选择过高可能使下载跟不上播放，选择过低则可能损失画质。播放刚启动或网络刚切换时，终端尚未积累足够的当前网络观测，难以可靠地估计可用吞吐量。</a:t>
-            </a:r>
-            <a:r>
-              <a:rPr lang="zh-CN" altLang="en-US" sz="1400" b="1" dirty="0">
-                <a:solidFill>
-                  <a:schemeClr val="tx1"/>
-                </a:solidFill>
-                <a:latin typeface="微软雅黑" charset="-122"/>
-                <a:ea typeface="微软雅黑" charset="-122"/>
-                <a:sym typeface="+mn-ea"/>
-              </a:rPr>
-              <a:t>苹果提出在终端建立历史吞吐量模型，与即时估计融合，再将结果用于视频分片选择。历史经验补充观测不足，即时测量帮助修正当前判断。</a:t>
-            </a:r>
-            <a:endParaRPr lang="zh-CN" altLang="en-US" sz="1400" b="1" dirty="0">
-              <a:solidFill>
-                <a:schemeClr val="tx1"/>
-              </a:solidFill>
-              <a:latin typeface="微软雅黑" charset="-122"/>
-              <a:ea typeface="微软雅黑" charset="-122"/>
-              <a:sym typeface="+mn-ea"/>
-            </a:endParaRPr>
-          </a:p>
-          <a:p>
-            <a:pPr indent="0">
-              <a:lnSpc>
-                <a:spcPct val="120000"/>
-              </a:lnSpc>
-              <a:buFont typeface="Arial" panose="020B0604020202020204" pitchFamily="34" charset="0"/>
-              <a:buNone/>
-            </a:pPr>
-            <a:r>
-              <a:rPr lang="zh-CN" altLang="en-US" sz="1400" dirty="0">
-                <a:solidFill>
-                  <a:schemeClr val="tx1"/>
-                </a:solidFill>
-                <a:latin typeface="微软雅黑" charset="-122"/>
-                <a:ea typeface="微软雅黑" charset="-122"/>
-                <a:sym typeface="+mn-ea"/>
-              </a:rPr>
               <a:t>输入包括历史吞吐量、网络类型与标识、时间或位置等上下文，以及当前接收速率或缓冲状态。</a:t>
             </a:r>
             <a:r>
@@ -10895,7 +10995,7 @@
           <a:p>
             <a:pPr indent="0">
               <a:lnSpc>
-                <a:spcPct val="130000"/>
+                <a:spcPct val="120000"/>
               </a:lnSpc>
               <a:buFont typeface="Arial" panose="020B0604020202020204" pitchFamily="34" charset="0"/>
               <a:buNone/>
@@ -10903,7 +11003,7 @@
             <a:r>
               <a:rPr lang="zh-CN" altLang="en-US" sz="1400" b="1" dirty="0">
                 <a:solidFill>
-                  <a:schemeClr val="tx1"/>
+                  <a:srgbClr val="FF0000"/>
                 </a:solidFill>
                 <a:latin typeface="微软雅黑" charset="-122"/>
                 <a:ea typeface="微软雅黑" charset="-122"/>
@@ -10913,7 +11013,7 @@
             </a:r>
             <a:endParaRPr lang="zh-CN" altLang="en-US" sz="1400" b="1" dirty="0">
               <a:solidFill>
-                <a:schemeClr val="tx1"/>
+                <a:srgbClr val="FF0000"/>
               </a:solidFill>
               <a:latin typeface="微软雅黑" charset="-122"/>
               <a:ea typeface="微软雅黑" charset="-122"/>
@@ -10923,7 +11023,7 @@
           <a:p>
             <a:pPr indent="0">
               <a:lnSpc>
-                <a:spcPct val="130000"/>
+                <a:spcPct val="120000"/>
               </a:lnSpc>
               <a:buFont typeface="Arial" panose="020B0604020202020204" pitchFamily="34" charset="0"/>
               <a:buNone/>
@@ -10995,7 +11095,7 @@
           <a:p>
             <a:pPr indent="0">
               <a:lnSpc>
-                <a:spcPct val="130000"/>
+                <a:spcPct val="120000"/>
               </a:lnSpc>
               <a:buFont typeface="Arial" panose="020B0604020202020204" pitchFamily="34" charset="0"/>
               <a:buNone/>
@@ -11056,7 +11156,7 @@
           <a:p>
             <a:pPr indent="0">
               <a:lnSpc>
-                <a:spcPct val="130000"/>
+                <a:spcPct val="120000"/>
               </a:lnSpc>
               <a:buFont typeface="Arial" panose="020B0604020202020204" pitchFamily="34" charset="0"/>
               <a:buNone/>
@@ -11117,7 +11217,7 @@
           <a:p>
             <a:pPr indent="0">
               <a:lnSpc>
-                <a:spcPct val="130000"/>
+                <a:spcPct val="120000"/>
               </a:lnSpc>
               <a:buFont typeface="Arial" panose="020B0604020202020204" pitchFamily="34" charset="0"/>
               <a:buNone/>
@@ -11178,7 +11278,7 @@
           <a:p>
             <a:pPr indent="0">
               <a:lnSpc>
-                <a:spcPct val="130000"/>
+                <a:spcPct val="120000"/>
               </a:lnSpc>
               <a:buFont typeface="Arial" panose="020B0604020202020204" pitchFamily="34" charset="0"/>
               <a:buNone/>
@@ -11186,7 +11286,7 @@
             <a:r>
               <a:rPr lang="zh-CN" altLang="en-US" sz="1400" b="1" dirty="0">
                 <a:solidFill>
-                  <a:schemeClr val="tx1"/>
+                  <a:srgbClr val="FF0000"/>
                 </a:solidFill>
                 <a:latin typeface="微软雅黑" charset="-122"/>
                 <a:ea typeface="微软雅黑" charset="-122"/>
@@ -11194,7 +11294,40 @@
               </a:rPr>
               <a:t>研究成熟度与启示：</a:t>
             </a:r>
-            <a:endParaRPr lang="zh-CN" altLang="en-US" sz="1400" b="1" dirty="0">
+            <a:r>
+              <a:rPr lang="zh-CN" altLang="en-US" sz="1400" dirty="0">
+                <a:solidFill>
+                  <a:schemeClr val="tx1"/>
+                </a:solidFill>
+                <a:latin typeface="微软雅黑" charset="-122"/>
+                <a:ea typeface="微软雅黑" charset="-122"/>
+                <a:sym typeface="+mn-ea"/>
+              </a:rPr>
+              <a:t>公开文本给出终端实现流程，但未提供代码及播放性能对照实验。验证应同时观察</a:t>
+            </a:r>
+            <a:r>
+              <a:rPr lang="zh-CN" altLang="en-US" sz="1400" b="1" dirty="0">
+                <a:solidFill>
+                  <a:schemeClr val="tx1"/>
+                </a:solidFill>
+                <a:latin typeface="微软雅黑" charset="-122"/>
+                <a:ea typeface="微软雅黑" charset="-122"/>
+                <a:sym typeface="+mn-ea"/>
+              </a:rPr>
+              <a:t>吞吐量估计误差、卡顿和视频质量</a:t>
+            </a:r>
+            <a:r>
+              <a:rPr lang="zh-CN" altLang="en-US" sz="1400" dirty="0">
+                <a:solidFill>
+                  <a:schemeClr val="tx1"/>
+                </a:solidFill>
+                <a:latin typeface="微软雅黑" charset="-122"/>
+                <a:ea typeface="微软雅黑" charset="-122"/>
+                <a:sym typeface="+mn-ea"/>
+              </a:rPr>
+              <a:t>，确认预测改善能否转化为播放体验收益。</a:t>
+            </a:r>
+            <a:endParaRPr lang="zh-CN" altLang="en-US" sz="1400" dirty="0">
               <a:solidFill>
                 <a:schemeClr val="tx1"/>
               </a:solidFill>
@@ -11203,76 +11336,40 @@
               <a:sym typeface="+mn-ea"/>
             </a:endParaRPr>
           </a:p>
-          <a:p>
-            <a:pPr indent="0">
-              <a:lnSpc>
-                <a:spcPct val="130000"/>
-              </a:lnSpc>
-              <a:buFont typeface="Arial" panose="020B0604020202020204" pitchFamily="34" charset="0"/>
-              <a:buNone/>
-            </a:pPr>
-            <a:r>
-              <a:rPr lang="zh-CN" altLang="en-US" sz="1400" dirty="0">
-                <a:solidFill>
-                  <a:schemeClr val="tx1"/>
-                </a:solidFill>
-                <a:latin typeface="微软雅黑" charset="-122"/>
-                <a:ea typeface="微软雅黑" charset="-122"/>
-                <a:sym typeface="+mn-ea"/>
-              </a:rPr>
-              <a:t>公开文本给出</a:t>
-            </a:r>
-            <a:r>
-              <a:rPr lang="zh-CN" altLang="en-US" sz="1400" b="1" dirty="0">
-                <a:solidFill>
-                  <a:schemeClr val="tx1"/>
-                </a:solidFill>
-                <a:latin typeface="微软雅黑" charset="-122"/>
-                <a:ea typeface="微软雅黑" charset="-122"/>
-                <a:sym typeface="+mn-ea"/>
-              </a:rPr>
-              <a:t>实现流程</a:t>
-            </a:r>
-            <a:r>
-              <a:rPr lang="zh-CN" altLang="en-US" sz="1400" dirty="0">
-                <a:solidFill>
-                  <a:schemeClr val="tx1"/>
-                </a:solidFill>
-                <a:latin typeface="微软雅黑" charset="-122"/>
-                <a:ea typeface="微软雅黑" charset="-122"/>
-                <a:sym typeface="+mn-ea"/>
-              </a:rPr>
-              <a:t>，但未提供可复现代码及定量对照实验。评价时应关联记录预测、融合结果、选定码率和播放状态，重点观察网络突降时的持续高估，以及首帧等待、卡顿时长和视频质量。</a:t>
-            </a:r>
-            <a:r>
-              <a:rPr lang="zh-CN" altLang="en-US" sz="1400" b="1" dirty="0">
-                <a:solidFill>
-                  <a:schemeClr val="tx1"/>
-                </a:solidFill>
-                <a:latin typeface="微软雅黑" charset="-122"/>
-                <a:ea typeface="微软雅黑" charset="-122"/>
-                <a:sym typeface="+mn-ea"/>
-              </a:rPr>
-              <a:t>平均预测误差较小，仍需由播放结果确认收益</a:t>
-            </a:r>
-            <a:r>
-              <a:rPr lang="zh-CN" altLang="en-US" sz="1400" dirty="0">
-                <a:solidFill>
-                  <a:schemeClr val="tx1"/>
-                </a:solidFill>
-                <a:latin typeface="微软雅黑" charset="-122"/>
-                <a:ea typeface="微软雅黑" charset="-122"/>
-                <a:sym typeface="+mn-ea"/>
-              </a:rPr>
-              <a:t>。</a:t>
-            </a:r>
-            <a:endParaRPr lang="zh-CN" altLang="en-US" sz="1400" dirty="0">
-              <a:solidFill>
-                <a:schemeClr val="tx1"/>
-              </a:solidFill>
-              <a:latin typeface="微软雅黑" charset="-122"/>
-              <a:ea typeface="微软雅黑" charset="-122"/>
-              <a:sym typeface="+mn-ea"/>
+        </p:txBody>
+      </p:sp>
+      <p:sp>
+        <p:nvSpPr>
+          <p:cNvPr id="3" name="文本框 2"/>
+          <p:cNvSpPr txBox="1"/>
+          <p:nvPr userDrawn="1"/>
+        </p:nvSpPr>
+        <p:spPr>
+          <a:xfrm>
+            <a:off x="6713645" y="324566"/>
+            <a:ext cx="4128794" cy="641803"/>
+          </a:xfrm>
+          <a:prstGeom prst="rect">
+            <a:avLst/>
+          </a:prstGeom>
+        </p:spPr>
+        <p:txBody>
+          <a:bodyPr wrap="square" rtlCol="0">
+            <a:noAutofit/>
+          </a:bodyPr>
+          <a:p>
+            <a:r>
+              <a:rPr lang="en-US" altLang="zh-CN" sz="1200">
+                <a:latin typeface="Times New Roman" panose="02020603050405020304" charset="0"/>
+                <a:ea typeface="Times New Roman" panose="02020603050405020304" charset="0"/>
+                <a:cs typeface="Times New Roman" panose="02020603050405020304" charset="0"/>
+              </a:rPr>
+              <a:t>[1] APPLE INC. On-device machine learning-based network bandwidth prediction to improve adaptive media streaming performance: US20250202793A1[P]. 2025-06-19.</a:t>
+            </a:r>
+            <a:endParaRPr lang="en-US" altLang="zh-CN" sz="1200">
+              <a:latin typeface="Times New Roman" panose="02020603050405020304" charset="0"/>
+              <a:ea typeface="Times New Roman" panose="02020603050405020304" charset="0"/>
+              <a:cs typeface="Times New Roman" panose="02020603050405020304" charset="0"/>
             </a:endParaRPr>
           </a:p>
         </p:txBody>
@@ -11313,7 +11410,7 @@
         <p:spPr>
           <a:xfrm>
             <a:off x="565150" y="339090"/>
-            <a:ext cx="10309225" cy="612775"/>
+            <a:ext cx="5403477" cy="612775"/>
           </a:xfrm>
         </p:spPr>
         <p:txBody>
@@ -11362,7 +11459,7 @@
         </p:nvSpPr>
         <p:spPr>
           <a:xfrm>
-            <a:off x="258445" y="951865"/>
+            <a:off x="228956" y="966387"/>
             <a:ext cx="11734165" cy="5503648"/>
           </a:xfrm>
           <a:prstGeom prst="rect">
@@ -11394,7 +11491,7 @@
                 <a:ea typeface="微软雅黑" charset="-122"/>
                 <a:sym typeface="+mn-ea"/>
               </a:rPr>
-              <a:t>2. AI </a:t>
+              <a:t>2. </a:t>
             </a:r>
             <a:r>
               <a:rPr lang="zh-CN" altLang="en-US" b="1" dirty="0">
@@ -11405,7 +11502,65 @@
                 <a:ea typeface="微软雅黑" charset="-122"/>
                 <a:sym typeface="+mn-ea"/>
               </a:rPr>
-              <a:t>无线承载映射：根据业务要求与运行状态选择传输承载</a:t>
+              <a:t>苹果专利：</a:t>
+            </a:r>
+            <a:r>
+              <a:rPr lang="en-US" altLang="zh-CN" b="1" dirty="0">
+                <a:solidFill>
+                  <a:schemeClr val="tx1"/>
+                </a:solidFill>
+                <a:latin typeface="微软雅黑" charset="-122"/>
+                <a:ea typeface="微软雅黑" charset="-122"/>
+                <a:sym typeface="+mn-ea"/>
+              </a:rPr>
+              <a:t>AI </a:t>
+            </a:r>
+            <a:r>
+              <a:rPr lang="zh-CN" altLang="en-US" b="1" dirty="0">
+                <a:solidFill>
+                  <a:schemeClr val="tx1"/>
+                </a:solidFill>
+                <a:latin typeface="微软雅黑" charset="-122"/>
+                <a:ea typeface="微软雅黑" charset="-122"/>
+                <a:sym typeface="+mn-ea"/>
+              </a:rPr>
+              <a:t>无线承载映射——根据业务要求与运行状态选择传输承载</a:t>
+            </a:r>
+            <a:r>
+              <a:rPr lang="en-US" altLang="zh-CN" b="1" baseline="30000" dirty="0">
+                <a:solidFill>
+                  <a:srgbClr val="000000"/>
+                </a:solidFill>
+                <a:latin typeface="微软雅黑" charset="-122"/>
+                <a:ea typeface="微软雅黑" charset="-122"/>
+                <a:cs typeface="+mn-ea"/>
+                <a:sym typeface="+mn-ea"/>
+              </a:rPr>
+              <a:t>[</a:t>
+            </a:r>
+            <a:r>
+              <a:rPr lang="en-US" altLang="zh-CN" b="1" baseline="30000" dirty="0">
+                <a:solidFill>
+                  <a:srgbClr val="000000"/>
+                </a:solidFill>
+                <a:latin typeface="微软雅黑" charset="0"/>
+                <a:ea typeface="微软雅黑" charset="0"/>
+                <a:cs typeface="+mn-ea"/>
+                <a:sym typeface="+mn-ea"/>
+              </a:rPr>
+              <a:t>2</a:t>
+            </a:r>
+            <a:r>
+              <a:rPr lang="en-US" altLang="zh-CN" b="1" baseline="30000" dirty="0">
+                <a:solidFill>
+                  <a:srgbClr val="000000"/>
+                </a:solidFill>
+                <a:latin typeface="微软雅黑" charset="-122"/>
+                <a:ea typeface="微软雅黑" charset="-122"/>
+                <a:cs typeface="+mn-ea"/>
+                <a:sym typeface="+mn-ea"/>
+              </a:rPr>
+              <a:t>]</a:t>
             </a:r>
             <a:endParaRPr lang="zh-CN" altLang="en-US" b="1" dirty="0">
               <a:solidFill>
@@ -11419,7 +11574,7 @@
           <a:p>
             <a:pPr indent="0">
               <a:lnSpc>
-                <a:spcPct val="130000"/>
+                <a:spcPct val="140000"/>
               </a:lnSpc>
               <a:buFont typeface="Arial" panose="020B0604020202020204" pitchFamily="34" charset="0"/>
               <a:buNone/>
@@ -11427,13 +11582,360 @@
             <a:r>
               <a:rPr lang="zh-CN" altLang="en-US" sz="1400" b="1" dirty="0">
                 <a:solidFill>
-                  <a:schemeClr val="tx1"/>
+                  <a:srgbClr val="FF0000"/>
+                </a:solidFill>
+                <a:latin typeface="微软雅黑" charset="-122"/>
+                <a:ea typeface="微软雅黑" charset="-122"/>
+                <a:sym typeface="+mn-ea"/>
+              </a:rPr>
+              <a:t>创新与价值：</a:t>
+            </a:r>
+            <a:r>
+              <a:rPr lang="zh-CN" altLang="en-US" sz="1400" dirty="0">
+                <a:solidFill>
+                  <a:schemeClr val="tx1"/>
+                </a:solidFill>
+                <a:latin typeface="微软雅黑" charset="-122"/>
+                <a:ea typeface="微软雅黑" charset="-122"/>
+                <a:sym typeface="+mn-ea"/>
+              </a:rPr>
+              <a:t>不同业务对吞吐量和时延的要求不同，同一种业务在网络条件变化后，也可能需要调整其使用的无线承载。该方法将</a:t>
+            </a:r>
+            <a:r>
+              <a:rPr lang="en-US" altLang="zh-CN" sz="1400" dirty="0">
+                <a:solidFill>
+                  <a:schemeClr val="tx1"/>
+                </a:solidFill>
+                <a:latin typeface="微软雅黑" charset="-122"/>
+                <a:ea typeface="微软雅黑" charset="-122"/>
+                <a:sym typeface="+mn-ea"/>
+              </a:rPr>
+              <a:t> </a:t>
+            </a:r>
+            <a:r>
+              <a:rPr lang="en-US" altLang="zh-CN" sz="1400" b="1" dirty="0">
+                <a:solidFill>
+                  <a:schemeClr val="tx1"/>
+                </a:solidFill>
+                <a:latin typeface="微软雅黑" charset="-122"/>
+                <a:ea typeface="微软雅黑" charset="-122"/>
+                <a:sym typeface="+mn-ea"/>
+              </a:rPr>
+              <a:t>QoS </a:t>
+            </a:r>
+            <a:r>
+              <a:rPr lang="zh-CN" altLang="en-US" sz="1400" b="1" dirty="0">
+                <a:solidFill>
+                  <a:schemeClr val="tx1"/>
+                </a:solidFill>
+                <a:latin typeface="微软雅黑" charset="-122"/>
+                <a:ea typeface="微软雅黑" charset="-122"/>
+                <a:sym typeface="+mn-ea"/>
+              </a:rPr>
+              <a:t>流到数据无线承载的映射作为可优化的决策</a:t>
+            </a:r>
+            <a:r>
+              <a:rPr lang="zh-CN" altLang="en-US" sz="1400" dirty="0">
+                <a:solidFill>
+                  <a:schemeClr val="tx1"/>
+                </a:solidFill>
+                <a:latin typeface="微软雅黑" charset="-122"/>
+                <a:ea typeface="微软雅黑" charset="-122"/>
+                <a:sym typeface="+mn-ea"/>
+              </a:rPr>
+              <a:t>，利用强化学习结合业务需求、承载状态和网络反馈选择映射关系。其价值在于让承载配置更好地适应当前条件，以</a:t>
+            </a:r>
+            <a:r>
+              <a:rPr lang="zh-CN" altLang="en-US" sz="1400" b="1" dirty="0">
+                <a:solidFill>
+                  <a:schemeClr val="tx1"/>
+                </a:solidFill>
+                <a:latin typeface="微软雅黑" charset="-122"/>
+                <a:ea typeface="微软雅黑" charset="-122"/>
+                <a:sym typeface="+mn-ea"/>
+              </a:rPr>
+              <a:t>实际吞吐量、时延等</a:t>
+            </a:r>
+            <a:r>
+              <a:rPr lang="en-US" altLang="zh-CN" sz="1400" b="1" dirty="0">
+                <a:solidFill>
+                  <a:schemeClr val="tx1"/>
+                </a:solidFill>
+                <a:latin typeface="微软雅黑" charset="-122"/>
+                <a:ea typeface="微软雅黑" charset="-122"/>
+                <a:sym typeface="+mn-ea"/>
+              </a:rPr>
+              <a:t> QoS </a:t>
+            </a:r>
+            <a:r>
+              <a:rPr lang="zh-CN" altLang="en-US" sz="1400" b="1" dirty="0">
+                <a:solidFill>
+                  <a:schemeClr val="tx1"/>
+                </a:solidFill>
+                <a:latin typeface="微软雅黑" charset="-122"/>
+                <a:ea typeface="微软雅黑" charset="-122"/>
+                <a:sym typeface="+mn-ea"/>
+              </a:rPr>
+              <a:t>表现指导调整</a:t>
+            </a:r>
+            <a:r>
+              <a:rPr lang="zh-CN" altLang="en-US" sz="1400" dirty="0">
+                <a:solidFill>
+                  <a:schemeClr val="tx1"/>
+                </a:solidFill>
+                <a:latin typeface="微软雅黑" charset="-122"/>
+                <a:ea typeface="微软雅黑" charset="-122"/>
+                <a:sym typeface="+mn-ea"/>
+              </a:rPr>
+              <a:t>，支持多业务通信质量保障。</a:t>
+            </a:r>
+            <a:endParaRPr lang="zh-CN" altLang="en-US" sz="1400" dirty="0">
+              <a:solidFill>
+                <a:schemeClr val="tx1"/>
+              </a:solidFill>
+              <a:latin typeface="微软雅黑" charset="-122"/>
+              <a:ea typeface="微软雅黑" charset="-122"/>
+              <a:sym typeface="+mn-ea"/>
+            </a:endParaRPr>
+          </a:p>
+          <a:p>
+            <a:pPr indent="0">
+              <a:lnSpc>
+                <a:spcPct val="140000"/>
+              </a:lnSpc>
+              <a:buFont typeface="Arial" panose="020B0604020202020204" pitchFamily="34" charset="0"/>
+              <a:buNone/>
+            </a:pPr>
+            <a:r>
+              <a:rPr lang="zh-CN" altLang="en-US" sz="1400" b="1" dirty="0">
+                <a:solidFill>
+                  <a:srgbClr val="FF0000"/>
                 </a:solidFill>
                 <a:latin typeface="微软雅黑" charset="-122"/>
                 <a:ea typeface="微软雅黑" charset="-122"/>
                 <a:sym typeface="+mn-ea"/>
               </a:rPr>
               <a:t>技术概述：</a:t>
+            </a:r>
+            <a:r>
+              <a:rPr lang="zh-CN" altLang="en-US" sz="1400" dirty="0">
+                <a:solidFill>
+                  <a:schemeClr val="tx1"/>
+                </a:solidFill>
+                <a:latin typeface="微软雅黑" charset="-122"/>
+                <a:ea typeface="微软雅黑" charset="-122"/>
+                <a:sym typeface="+mn-ea"/>
+              </a:rPr>
+              <a:t>实时通话、视频和后台传输对时延、吞吐量及可靠性的要求不同。</a:t>
+            </a:r>
+            <a:r>
+              <a:rPr lang="en-US" altLang="zh-CN" sz="1400" dirty="0">
+                <a:solidFill>
+                  <a:schemeClr val="tx1"/>
+                </a:solidFill>
+                <a:latin typeface="微软雅黑" charset="-122"/>
+                <a:ea typeface="微软雅黑" charset="-122"/>
+                <a:sym typeface="+mn-ea"/>
+              </a:rPr>
+              <a:t>5G </a:t>
+            </a:r>
+            <a:r>
+              <a:rPr lang="zh-CN" altLang="en-US" sz="1400" dirty="0">
+                <a:solidFill>
+                  <a:schemeClr val="tx1"/>
+                </a:solidFill>
+                <a:latin typeface="微软雅黑" charset="-122"/>
+                <a:ea typeface="微软雅黑" charset="-122"/>
+                <a:sym typeface="+mn-ea"/>
+              </a:rPr>
+              <a:t>通过</a:t>
+            </a:r>
+            <a:r>
+              <a:rPr lang="en-US" altLang="zh-CN" sz="1400" dirty="0">
+                <a:solidFill>
+                  <a:schemeClr val="tx1"/>
+                </a:solidFill>
+                <a:latin typeface="微软雅黑" charset="-122"/>
+                <a:ea typeface="微软雅黑" charset="-122"/>
+                <a:sym typeface="+mn-ea"/>
+              </a:rPr>
+              <a:t> QoS </a:t>
+            </a:r>
+            <a:r>
+              <a:rPr lang="zh-CN" altLang="en-US" sz="1400" dirty="0">
+                <a:solidFill>
+                  <a:schemeClr val="tx1"/>
+                </a:solidFill>
+                <a:latin typeface="微软雅黑" charset="-122"/>
+                <a:ea typeface="微软雅黑" charset="-122"/>
+                <a:sym typeface="+mn-ea"/>
+              </a:rPr>
+              <a:t>流表达服务质量要求，再将数据映射到无线承载</a:t>
+            </a:r>
+            <a:r>
+              <a:rPr lang="en-US" altLang="zh-CN" sz="1400" dirty="0">
+                <a:solidFill>
+                  <a:schemeClr val="tx1"/>
+                </a:solidFill>
+                <a:latin typeface="微软雅黑" charset="-122"/>
+                <a:ea typeface="微软雅黑" charset="-122"/>
+                <a:sym typeface="+mn-ea"/>
+              </a:rPr>
+              <a:t> DRB</a:t>
+            </a:r>
+            <a:r>
+              <a:rPr lang="zh-CN" altLang="en-US" sz="1400" dirty="0">
+                <a:solidFill>
+                  <a:schemeClr val="tx1"/>
+                </a:solidFill>
+                <a:latin typeface="微软雅黑" charset="-122"/>
+                <a:ea typeface="微软雅黑" charset="-122"/>
+                <a:sym typeface="+mn-ea"/>
+              </a:rPr>
+              <a:t>。多个</a:t>
+            </a:r>
+            <a:r>
+              <a:rPr lang="en-US" altLang="zh-CN" sz="1400" dirty="0">
+                <a:solidFill>
+                  <a:schemeClr val="tx1"/>
+                </a:solidFill>
+                <a:latin typeface="微软雅黑" charset="-122"/>
+                <a:ea typeface="微软雅黑" charset="-122"/>
+                <a:sym typeface="+mn-ea"/>
+              </a:rPr>
+              <a:t> QoS </a:t>
+            </a:r>
+            <a:r>
+              <a:rPr lang="zh-CN" altLang="en-US" sz="1400" dirty="0">
+                <a:solidFill>
+                  <a:schemeClr val="tx1"/>
+                </a:solidFill>
+                <a:latin typeface="微软雅黑" charset="-122"/>
+                <a:ea typeface="微软雅黑" charset="-122"/>
+                <a:sym typeface="+mn-ea"/>
+              </a:rPr>
+              <a:t>流可以共用一个</a:t>
+            </a:r>
+            <a:r>
+              <a:rPr lang="en-US" altLang="zh-CN" sz="1400" dirty="0">
+                <a:solidFill>
+                  <a:schemeClr val="tx1"/>
+                </a:solidFill>
+                <a:latin typeface="微软雅黑" charset="-122"/>
+                <a:ea typeface="微软雅黑" charset="-122"/>
+                <a:sym typeface="+mn-ea"/>
+              </a:rPr>
+              <a:t> DRB</a:t>
+            </a:r>
+            <a:r>
+              <a:rPr lang="zh-CN" altLang="en-US" sz="1400" dirty="0">
+                <a:solidFill>
+                  <a:schemeClr val="tx1"/>
+                </a:solidFill>
+                <a:latin typeface="微软雅黑" charset="-122"/>
+                <a:ea typeface="微软雅黑" charset="-122"/>
+                <a:sym typeface="+mn-ea"/>
+              </a:rPr>
+              <a:t>，也可以使用不同</a:t>
+            </a:r>
+            <a:r>
+              <a:rPr lang="en-US" altLang="zh-CN" sz="1400" dirty="0">
+                <a:solidFill>
+                  <a:schemeClr val="tx1"/>
+                </a:solidFill>
+                <a:latin typeface="微软雅黑" charset="-122"/>
+                <a:ea typeface="微软雅黑" charset="-122"/>
+                <a:sym typeface="+mn-ea"/>
+              </a:rPr>
+              <a:t> DRB</a:t>
+            </a:r>
+            <a:r>
+              <a:rPr lang="zh-CN" altLang="en-US" sz="1400" dirty="0">
+                <a:solidFill>
+                  <a:schemeClr val="tx1"/>
+                </a:solidFill>
+                <a:latin typeface="微软雅黑" charset="-122"/>
+                <a:ea typeface="微软雅黑" charset="-122"/>
+                <a:sym typeface="+mn-ea"/>
+              </a:rPr>
+              <a:t>，由</a:t>
+            </a:r>
+            <a:r>
+              <a:rPr lang="en-US" altLang="zh-CN" sz="1400" dirty="0">
+                <a:solidFill>
+                  <a:schemeClr val="tx1"/>
+                </a:solidFill>
+                <a:latin typeface="微软雅黑" charset="-122"/>
+                <a:ea typeface="微软雅黑" charset="-122"/>
+                <a:sym typeface="+mn-ea"/>
+              </a:rPr>
+              <a:t> SDAP </a:t>
+            </a:r>
+            <a:r>
+              <a:rPr lang="zh-CN" altLang="en-US" sz="1400" dirty="0">
+                <a:solidFill>
+                  <a:schemeClr val="tx1"/>
+                </a:solidFill>
+                <a:latin typeface="微软雅黑" charset="-122"/>
+                <a:ea typeface="微软雅黑" charset="-122"/>
+                <a:sym typeface="+mn-ea"/>
+              </a:rPr>
+              <a:t>协议执行映射。现有标准支持配置和更新映射规则。</a:t>
+            </a:r>
+            <a:r>
+              <a:rPr lang="zh-CN" altLang="en-US" sz="1400" b="1" dirty="0">
+                <a:solidFill>
+                  <a:schemeClr val="tx1"/>
+                </a:solidFill>
+                <a:latin typeface="微软雅黑" charset="-122"/>
+                <a:ea typeface="微软雅黑" charset="-122"/>
+                <a:sym typeface="+mn-ea"/>
+              </a:rPr>
+              <a:t>苹果提出引入</a:t>
+            </a:r>
+            <a:r>
+              <a:rPr lang="en-US" altLang="zh-CN" sz="1400" b="1" dirty="0">
+                <a:solidFill>
+                  <a:schemeClr val="tx1"/>
+                </a:solidFill>
+                <a:latin typeface="微软雅黑" charset="-122"/>
+                <a:ea typeface="微软雅黑" charset="-122"/>
+                <a:sym typeface="+mn-ea"/>
+              </a:rPr>
+              <a:t> AI </a:t>
+            </a:r>
+            <a:r>
+              <a:rPr lang="zh-CN" altLang="en-US" sz="1400" b="1" dirty="0">
+                <a:solidFill>
+                  <a:schemeClr val="tx1"/>
+                </a:solidFill>
+                <a:latin typeface="微软雅黑" charset="-122"/>
+                <a:ea typeface="微软雅黑" charset="-122"/>
+                <a:sym typeface="+mn-ea"/>
+              </a:rPr>
+              <a:t>辅助选择，其中给出深度</a:t>
+            </a:r>
+            <a:r>
+              <a:rPr lang="en-US" altLang="zh-CN" sz="1400" b="1" dirty="0">
+                <a:solidFill>
+                  <a:schemeClr val="tx1"/>
+                </a:solidFill>
+                <a:latin typeface="微软雅黑" charset="-122"/>
+                <a:ea typeface="微软雅黑" charset="-122"/>
+                <a:sym typeface="+mn-ea"/>
+              </a:rPr>
+              <a:t> Q </a:t>
+            </a:r>
+            <a:r>
+              <a:rPr lang="zh-CN" altLang="en-US" sz="1400" b="1" dirty="0">
+                <a:solidFill>
+                  <a:schemeClr val="tx1"/>
+                </a:solidFill>
+                <a:latin typeface="微软雅黑" charset="-122"/>
+                <a:ea typeface="微软雅黑" charset="-122"/>
+                <a:sym typeface="+mn-ea"/>
+              </a:rPr>
+              <a:t>学习方案，利用运行反馈学习业务流与承载的对应关系。</a:t>
             </a:r>
             <a:endParaRPr lang="zh-CN" altLang="en-US" sz="1400" b="1" dirty="0">
               <a:solidFill>
@@ -11461,7 +11963,7 @@
                 <a:ea typeface="微软雅黑" charset="-122"/>
                 <a:sym typeface="+mn-ea"/>
               </a:rPr>
-              <a:t>实时通话、视频和后台传输对时延、吞吐量及可靠性的要求不同。</a:t>
+              <a:t>输入包括当前映射、业务</a:t>
             </a:r>
             <a:r>
               <a:rPr lang="en-US" altLang="zh-CN" sz="1400" dirty="0">
@@ -11472,7 +11974,7 @@
                 <a:ea typeface="微软雅黑" charset="-122"/>
                 <a:sym typeface="+mn-ea"/>
               </a:rPr>
-              <a:t>5G </a:t>
+              <a:t> QoS </a:t>
             </a:r>
             <a:r>
               <a:rPr lang="zh-CN" altLang="en-US" sz="1400" dirty="0">
@@ -11483,10 +11985,21 @@
                 <a:ea typeface="微软雅黑" charset="-122"/>
                 <a:sym typeface="+mn-ea"/>
               </a:rPr>
-              <a:t>通过</a:t>
-            </a:r>
-            <a:r>
-              <a:rPr lang="en-US" altLang="zh-CN" sz="1400" dirty="0">
+              <a:t>要求、承载历史测量和信道信息。</a:t>
+            </a:r>
+            <a:r>
+              <a:rPr lang="zh-CN" altLang="en-US" sz="1400" b="1" dirty="0">
+                <a:solidFill>
+                  <a:schemeClr val="tx1"/>
+                </a:solidFill>
+                <a:latin typeface="微软雅黑" charset="-122"/>
+                <a:ea typeface="微软雅黑" charset="-122"/>
+                <a:sym typeface="+mn-ea"/>
+              </a:rPr>
+              <a:t>决策输出是</a:t>
+            </a:r>
+            <a:r>
+              <a:rPr lang="en-US" altLang="zh-CN" sz="1400" b="1" dirty="0">
                 <a:solidFill>
                   <a:schemeClr val="tx1"/>
                 </a:solidFill>
@@ -11497,40 +12010,62 @@
               <a:t> QoS </a:t>
             </a:r>
             <a:r>
-              <a:rPr lang="zh-CN" altLang="en-US" sz="1400" dirty="0">
-                <a:solidFill>
-                  <a:schemeClr val="tx1"/>
-                </a:solidFill>
-                <a:latin typeface="微软雅黑" charset="-122"/>
-                <a:ea typeface="微软雅黑" charset="-122"/>
-                <a:sym typeface="+mn-ea"/>
-              </a:rPr>
-              <a:t>流表达服务质量要求，再将数据映射到无线承载</a:t>
-            </a:r>
-            <a:r>
-              <a:rPr lang="en-US" altLang="zh-CN" sz="1400" dirty="0">
-                <a:solidFill>
-                  <a:schemeClr val="tx1"/>
-                </a:solidFill>
-                <a:latin typeface="微软雅黑" charset="-122"/>
-                <a:ea typeface="微软雅黑" charset="-122"/>
-                <a:sym typeface="+mn-ea"/>
-              </a:rPr>
-              <a:t> DRB</a:t>
-            </a:r>
-            <a:r>
-              <a:rPr lang="zh-CN" altLang="en-US" sz="1400" dirty="0">
-                <a:solidFill>
-                  <a:schemeClr val="tx1"/>
-                </a:solidFill>
-                <a:latin typeface="微软雅黑" charset="-122"/>
-                <a:ea typeface="微软雅黑" charset="-122"/>
-                <a:sym typeface="+mn-ea"/>
-              </a:rPr>
-              <a:t>。多个</a:t>
-            </a:r>
-            <a:r>
-              <a:rPr lang="en-US" altLang="zh-CN" sz="1400" dirty="0">
+              <a:rPr lang="zh-CN" altLang="en-US" sz="1400" b="1" dirty="0">
+                <a:solidFill>
+                  <a:schemeClr val="tx1"/>
+                </a:solidFill>
+                <a:latin typeface="微软雅黑" charset="-122"/>
+                <a:ea typeface="微软雅黑" charset="-122"/>
+                <a:sym typeface="+mn-ea"/>
+              </a:rPr>
+              <a:t>流与可用</a:t>
+            </a:r>
+            <a:r>
+              <a:rPr lang="en-US" altLang="zh-CN" sz="1400" b="1" dirty="0">
+                <a:solidFill>
+                  <a:schemeClr val="tx1"/>
+                </a:solidFill>
+                <a:latin typeface="微软雅黑" charset="-122"/>
+                <a:ea typeface="微软雅黑" charset="-122"/>
+                <a:sym typeface="+mn-ea"/>
+              </a:rPr>
+              <a:t> DRB </a:t>
+            </a:r>
+            <a:r>
+              <a:rPr lang="zh-CN" altLang="en-US" sz="1400" b="1" dirty="0">
+                <a:solidFill>
+                  <a:schemeClr val="tx1"/>
+                </a:solidFill>
+                <a:latin typeface="微软雅黑" charset="-122"/>
+                <a:ea typeface="微软雅黑" charset="-122"/>
+                <a:sym typeface="+mn-ea"/>
+              </a:rPr>
+              <a:t>的对应关系，</a:t>
+            </a:r>
+            <a:r>
+              <a:rPr lang="en-US" altLang="zh-CN" sz="1400" b="1" dirty="0">
+                <a:solidFill>
+                  <a:schemeClr val="tx1"/>
+                </a:solidFill>
+                <a:latin typeface="微软雅黑" charset="-122"/>
+                <a:ea typeface="微软雅黑" charset="-122"/>
+                <a:sym typeface="+mn-ea"/>
+              </a:rPr>
+              <a:t>QFI </a:t>
+            </a:r>
+            <a:r>
+              <a:rPr lang="zh-CN" altLang="en-US" sz="1400" b="1" dirty="0">
+                <a:solidFill>
+                  <a:schemeClr val="tx1"/>
+                </a:solidFill>
+                <a:latin typeface="微软雅黑" charset="-122"/>
+                <a:ea typeface="微软雅黑" charset="-122"/>
+                <a:sym typeface="+mn-ea"/>
+              </a:rPr>
+              <a:t>用于标识</a:t>
+            </a:r>
+            <a:r>
+              <a:rPr lang="en-US" altLang="zh-CN" sz="1400" b="1" dirty="0">
                 <a:solidFill>
                   <a:schemeClr val="tx1"/>
                 </a:solidFill>
@@ -11541,83 +12076,6 @@
               <a:t> QoS </a:t>
             </a:r>
             <a:r>
-              <a:rPr lang="zh-CN" altLang="en-US" sz="1400" dirty="0">
-                <a:solidFill>
-                  <a:schemeClr val="tx1"/>
-                </a:solidFill>
-                <a:latin typeface="微软雅黑" charset="-122"/>
-                <a:ea typeface="微软雅黑" charset="-122"/>
-                <a:sym typeface="+mn-ea"/>
-              </a:rPr>
-              <a:t>流可以共用一个</a:t>
-            </a:r>
-            <a:r>
-              <a:rPr lang="en-US" altLang="zh-CN" sz="1400" dirty="0">
-                <a:solidFill>
-                  <a:schemeClr val="tx1"/>
-                </a:solidFill>
-                <a:latin typeface="微软雅黑" charset="-122"/>
-                <a:ea typeface="微软雅黑" charset="-122"/>
-                <a:sym typeface="+mn-ea"/>
-              </a:rPr>
-              <a:t> DRB</a:t>
-            </a:r>
-            <a:r>
-              <a:rPr lang="zh-CN" altLang="en-US" sz="1400" dirty="0">
-                <a:solidFill>
-                  <a:schemeClr val="tx1"/>
-                </a:solidFill>
-                <a:latin typeface="微软雅黑" charset="-122"/>
-                <a:ea typeface="微软雅黑" charset="-122"/>
-                <a:sym typeface="+mn-ea"/>
-              </a:rPr>
-              <a:t>，也可以使用不同</a:t>
-            </a:r>
-            <a:r>
-              <a:rPr lang="en-US" altLang="zh-CN" sz="1400" dirty="0">
-                <a:solidFill>
-                  <a:schemeClr val="tx1"/>
-                </a:solidFill>
-                <a:latin typeface="微软雅黑" charset="-122"/>
-                <a:ea typeface="微软雅黑" charset="-122"/>
-                <a:sym typeface="+mn-ea"/>
-              </a:rPr>
-              <a:t> DRB</a:t>
-            </a:r>
-            <a:r>
-              <a:rPr lang="zh-CN" altLang="en-US" sz="1400" dirty="0">
-                <a:solidFill>
-                  <a:schemeClr val="tx1"/>
-                </a:solidFill>
-                <a:latin typeface="微软雅黑" charset="-122"/>
-                <a:ea typeface="微软雅黑" charset="-122"/>
-                <a:sym typeface="+mn-ea"/>
-              </a:rPr>
-              <a:t>，由</a:t>
-            </a:r>
-            <a:r>
-              <a:rPr lang="en-US" altLang="zh-CN" sz="1400" dirty="0">
-                <a:solidFill>
-                  <a:schemeClr val="tx1"/>
-                </a:solidFill>
-                <a:latin typeface="微软雅黑" charset="-122"/>
-                <a:ea typeface="微软雅黑" charset="-122"/>
-                <a:sym typeface="+mn-ea"/>
-              </a:rPr>
-              <a:t> SDAP </a:t>
-            </a:r>
-            <a:r>
-              <a:rPr lang="zh-CN" altLang="en-US" sz="1400" dirty="0">
-                <a:solidFill>
-                  <a:schemeClr val="tx1"/>
-                </a:solidFill>
-                <a:latin typeface="微软雅黑" charset="-122"/>
-                <a:ea typeface="微软雅黑" charset="-122"/>
-                <a:sym typeface="+mn-ea"/>
-              </a:rPr>
-              <a:t>协议执行映射。现有标准支持配置和更新映射规则。</a:t>
-            </a:r>
-            <a:r>
               <a:rPr lang="zh-CN" altLang="en-US" sz="1400" b="1" dirty="0">
                 <a:solidFill>
                   <a:schemeClr val="tx1"/>
@@ -11626,51 +12084,7 @@
                 <a:ea typeface="微软雅黑" charset="-122"/>
                 <a:sym typeface="+mn-ea"/>
               </a:rPr>
-              <a:t>苹果提出引入</a:t>
-            </a:r>
-            <a:r>
-              <a:rPr lang="en-US" altLang="zh-CN" sz="1400" b="1" dirty="0">
-                <a:solidFill>
-                  <a:schemeClr val="tx1"/>
-                </a:solidFill>
-                <a:latin typeface="微软雅黑" charset="-122"/>
-                <a:ea typeface="微软雅黑" charset="-122"/>
-                <a:sym typeface="+mn-ea"/>
-              </a:rPr>
-              <a:t> AI </a:t>
-            </a:r>
-            <a:r>
-              <a:rPr lang="zh-CN" altLang="en-US" sz="1400" b="1" dirty="0">
-                <a:solidFill>
-                  <a:schemeClr val="tx1"/>
-                </a:solidFill>
-                <a:latin typeface="微软雅黑" charset="-122"/>
-                <a:ea typeface="微软雅黑" charset="-122"/>
-                <a:sym typeface="+mn-ea"/>
-              </a:rPr>
-              <a:t>辅助选择，其中给出深度</a:t>
-            </a:r>
-            <a:r>
-              <a:rPr lang="en-US" altLang="zh-CN" sz="1400" b="1" dirty="0">
-                <a:solidFill>
-                  <a:schemeClr val="tx1"/>
-                </a:solidFill>
-                <a:latin typeface="微软雅黑" charset="-122"/>
-                <a:ea typeface="微软雅黑" charset="-122"/>
-                <a:sym typeface="+mn-ea"/>
-              </a:rPr>
-              <a:t> Q </a:t>
-            </a:r>
-            <a:r>
-              <a:rPr lang="zh-CN" altLang="en-US" sz="1400" b="1" dirty="0">
-                <a:solidFill>
-                  <a:schemeClr val="tx1"/>
-                </a:solidFill>
-                <a:latin typeface="微软雅黑" charset="-122"/>
-                <a:ea typeface="微软雅黑" charset="-122"/>
-                <a:sym typeface="+mn-ea"/>
-              </a:rPr>
-              <a:t>学习方案，利用运行反馈学习业务流与承载的对应关系。</a:t>
+              <a:t>流。</a:t>
             </a:r>
             <a:endParaRPr lang="zh-CN" altLang="en-US" sz="1400" b="1" dirty="0">
               <a:solidFill>
@@ -11684,12 +12098,62 @@
           <a:p>
             <a:pPr indent="0">
               <a:lnSpc>
-                <a:spcPct val="130000"/>
+                <a:spcPct val="120000"/>
               </a:lnSpc>
               <a:buFont typeface="Arial" panose="020B0604020202020204" pitchFamily="34" charset="0"/>
               <a:buNone/>
             </a:pPr>
             <a:r>
+              <a:rPr lang="zh-CN" altLang="en-US" sz="1400" b="1" dirty="0">
+                <a:solidFill>
+                  <a:srgbClr val="FF0000"/>
+                </a:solidFill>
+                <a:latin typeface="微软雅黑" charset="-122"/>
+                <a:ea typeface="微软雅黑" charset="-122"/>
+                <a:sym typeface="+mn-ea"/>
+              </a:rPr>
+              <a:t>研究方法：</a:t>
+            </a:r>
+            <a:endParaRPr lang="zh-CN" altLang="en-US" sz="1400" b="1" dirty="0">
+              <a:solidFill>
+                <a:srgbClr val="FF0000"/>
+              </a:solidFill>
+              <a:latin typeface="微软雅黑" charset="-122"/>
+              <a:ea typeface="微软雅黑" charset="-122"/>
+              <a:sym typeface="+mn-ea"/>
+            </a:endParaRPr>
+          </a:p>
+          <a:p>
+            <a:pPr indent="0">
+              <a:lnSpc>
+                <a:spcPct val="120000"/>
+              </a:lnSpc>
+              <a:buFont typeface="Arial" panose="020B0604020202020204" pitchFamily="34" charset="0"/>
+              <a:buNone/>
+            </a:pPr>
+            <a:r>
+              <a:rPr lang="en-US" sz="1400" b="1" dirty="0">
+                <a:solidFill>
+                  <a:schemeClr val="tx1"/>
+                </a:solidFill>
+                <a:latin typeface="微软雅黑" charset="-122"/>
+                <a:ea typeface="微软雅黑" charset="-122"/>
+                <a:sym typeface="+mn-ea"/>
+              </a:rPr>
+              <a:t>a. </a:t>
+            </a:r>
+            <a:r>
+              <a:rPr lang="zh-CN" altLang="en-US" sz="1400" b="1" dirty="0">
+                <a:solidFill>
+                  <a:schemeClr val="tx1"/>
+                </a:solidFill>
+                <a:latin typeface="微软雅黑" charset="-122"/>
+                <a:ea typeface="微软雅黑" charset="-122"/>
+                <a:sym typeface="+mn-ea"/>
+              </a:rPr>
+              <a:t>用业务需求和承载状态描述决策条件。</a:t>
+            </a:r>
+            <a:r>
               <a:rPr lang="zh-CN" altLang="en-US" sz="1400" dirty="0">
                 <a:solidFill>
                   <a:schemeClr val="tx1"/>
@@ -11698,7 +12162,7 @@
                 <a:ea typeface="微软雅黑" charset="-122"/>
                 <a:sym typeface="+mn-ea"/>
               </a:rPr>
-              <a:t>输入包括当前映射、业务</a:t>
+              <a:t>状态包含当前映射、</a:t>
             </a:r>
             <a:r>
               <a:rPr lang="en-US" altLang="zh-CN" sz="1400" dirty="0">
@@ -11709,6 +12173,50 @@
                 <a:ea typeface="微软雅黑" charset="-122"/>
                 <a:sym typeface="+mn-ea"/>
               </a:rPr>
+              <a:t>QoS </a:t>
+            </a:r>
+            <a:r>
+              <a:rPr lang="zh-CN" altLang="en-US" sz="1400" dirty="0">
+                <a:solidFill>
+                  <a:schemeClr val="tx1"/>
+                </a:solidFill>
+                <a:latin typeface="微软雅黑" charset="-122"/>
+                <a:ea typeface="微软雅黑" charset="-122"/>
+                <a:sym typeface="+mn-ea"/>
+              </a:rPr>
+              <a:t>要求、承载历史测量及信道信息。</a:t>
+            </a:r>
+            <a:r>
+              <a:rPr lang="en-US" altLang="zh-CN" sz="1400" dirty="0">
+                <a:solidFill>
+                  <a:schemeClr val="tx1"/>
+                </a:solidFill>
+                <a:latin typeface="微软雅黑" charset="-122"/>
+                <a:ea typeface="微软雅黑" charset="-122"/>
+                <a:sym typeface="+mn-ea"/>
+              </a:rPr>
+              <a:t>QFI </a:t>
+            </a:r>
+            <a:r>
+              <a:rPr lang="zh-CN" altLang="en-US" sz="1400" dirty="0">
+                <a:solidFill>
+                  <a:schemeClr val="tx1"/>
+                </a:solidFill>
+                <a:latin typeface="微软雅黑" charset="-122"/>
+                <a:ea typeface="微软雅黑" charset="-122"/>
+                <a:sym typeface="+mn-ea"/>
+              </a:rPr>
+              <a:t>标识</a:t>
+            </a:r>
+            <a:r>
+              <a:rPr lang="en-US" altLang="zh-CN" sz="1400" dirty="0">
+                <a:solidFill>
+                  <a:schemeClr val="tx1"/>
+                </a:solidFill>
+                <a:latin typeface="微软雅黑" charset="-122"/>
+                <a:ea typeface="微软雅黑" charset="-122"/>
+                <a:sym typeface="+mn-ea"/>
+              </a:rPr>
               <a:t> QoS </a:t>
             </a:r>
             <a:r>
@@ -11720,7 +12228,145 @@
                 <a:ea typeface="微软雅黑" charset="-122"/>
                 <a:sym typeface="+mn-ea"/>
               </a:rPr>
-              <a:t>要求、承载历史测量和信道信息。</a:t>
+              <a:t>流，</a:t>
+            </a:r>
+            <a:r>
+              <a:rPr lang="en-US" altLang="zh-CN" sz="1400" dirty="0">
+                <a:solidFill>
+                  <a:schemeClr val="tx1"/>
+                </a:solidFill>
+                <a:latin typeface="微软雅黑" charset="-122"/>
+                <a:ea typeface="微软雅黑" charset="-122"/>
+                <a:sym typeface="+mn-ea"/>
+              </a:rPr>
+              <a:t>DRB </a:t>
+            </a:r>
+            <a:r>
+              <a:rPr lang="zh-CN" altLang="en-US" sz="1400" dirty="0">
+                <a:solidFill>
+                  <a:schemeClr val="tx1"/>
+                </a:solidFill>
+                <a:latin typeface="微软雅黑" charset="-122"/>
+                <a:ea typeface="微软雅黑" charset="-122"/>
+                <a:sym typeface="+mn-ea"/>
+              </a:rPr>
+              <a:t>是可选择的无线承载。模型需要同时了解</a:t>
+            </a:r>
+            <a:r>
+              <a:rPr lang="en-US" altLang="zh-CN" sz="1400" dirty="0">
+                <a:solidFill>
+                  <a:schemeClr val="tx1"/>
+                </a:solidFill>
+                <a:latin typeface="微软雅黑" charset="-122"/>
+                <a:ea typeface="微软雅黑" charset="-122"/>
+                <a:sym typeface="+mn-ea"/>
+              </a:rPr>
+              <a:t>“</a:t>
+            </a:r>
+            <a:r>
+              <a:rPr lang="zh-CN" altLang="en-US" sz="1400" dirty="0">
+                <a:solidFill>
+                  <a:schemeClr val="tx1"/>
+                </a:solidFill>
+                <a:latin typeface="微软雅黑" charset="-122"/>
+                <a:ea typeface="微软雅黑" charset="-122"/>
+                <a:sym typeface="+mn-ea"/>
+              </a:rPr>
+              <a:t>业务要求怎样的服务</a:t>
+            </a:r>
+            <a:r>
+              <a:rPr lang="en-US" altLang="zh-CN" sz="1400" dirty="0">
+                <a:solidFill>
+                  <a:schemeClr val="tx1"/>
+                </a:solidFill>
+                <a:latin typeface="微软雅黑" charset="-122"/>
+                <a:ea typeface="微软雅黑" charset="-122"/>
+                <a:sym typeface="+mn-ea"/>
+              </a:rPr>
+              <a:t>”</a:t>
+            </a:r>
+            <a:r>
+              <a:rPr lang="zh-CN" altLang="en-US" sz="1400" dirty="0">
+                <a:solidFill>
+                  <a:schemeClr val="tx1"/>
+                </a:solidFill>
+                <a:latin typeface="微软雅黑" charset="-122"/>
+                <a:ea typeface="微软雅黑" charset="-122"/>
+                <a:sym typeface="+mn-ea"/>
+              </a:rPr>
+              <a:t>和</a:t>
+            </a:r>
+            <a:r>
+              <a:rPr lang="en-US" altLang="zh-CN" sz="1400" dirty="0">
+                <a:solidFill>
+                  <a:schemeClr val="tx1"/>
+                </a:solidFill>
+                <a:latin typeface="微软雅黑" charset="-122"/>
+                <a:ea typeface="微软雅黑" charset="-122"/>
+                <a:sym typeface="+mn-ea"/>
+              </a:rPr>
+              <a:t>“</a:t>
+            </a:r>
+            <a:r>
+              <a:rPr lang="zh-CN" altLang="en-US" sz="1400" dirty="0">
+                <a:solidFill>
+                  <a:schemeClr val="tx1"/>
+                </a:solidFill>
+                <a:latin typeface="微软雅黑" charset="-122"/>
+                <a:ea typeface="微软雅黑" charset="-122"/>
+                <a:sym typeface="+mn-ea"/>
+              </a:rPr>
+              <a:t>当前有哪些承载可用</a:t>
+            </a:r>
+            <a:r>
+              <a:rPr lang="en-US" altLang="zh-CN" sz="1400" dirty="0">
+                <a:solidFill>
+                  <a:schemeClr val="tx1"/>
+                </a:solidFill>
+                <a:latin typeface="微软雅黑" charset="-122"/>
+                <a:ea typeface="微软雅黑" charset="-122"/>
+                <a:sym typeface="+mn-ea"/>
+              </a:rPr>
+              <a:t>”</a:t>
+            </a:r>
+            <a:r>
+              <a:rPr lang="zh-CN" altLang="en-US" sz="1400" dirty="0">
+                <a:solidFill>
+                  <a:schemeClr val="tx1"/>
+                </a:solidFill>
+                <a:latin typeface="微软雅黑" charset="-122"/>
+                <a:ea typeface="微软雅黑" charset="-122"/>
+                <a:sym typeface="+mn-ea"/>
+              </a:rPr>
+              <a:t>。</a:t>
+            </a:r>
+            <a:endParaRPr lang="zh-CN" altLang="en-US" sz="1400" dirty="0">
+              <a:solidFill>
+                <a:schemeClr val="tx1"/>
+              </a:solidFill>
+              <a:latin typeface="微软雅黑" charset="-122"/>
+              <a:ea typeface="微软雅黑" charset="-122"/>
+              <a:sym typeface="+mn-ea"/>
+            </a:endParaRPr>
+          </a:p>
+          <a:p>
+            <a:pPr indent="0">
+              <a:lnSpc>
+                <a:spcPct val="120000"/>
+              </a:lnSpc>
+              <a:buFont typeface="Arial" panose="020B0604020202020204" pitchFamily="34" charset="0"/>
+              <a:buNone/>
+            </a:pPr>
+            <a:r>
+              <a:rPr lang="en-US" altLang="zh-CN" sz="1400" b="1" dirty="0">
+                <a:solidFill>
+                  <a:schemeClr val="tx1"/>
+                </a:solidFill>
+                <a:latin typeface="微软雅黑" charset="-122"/>
+                <a:ea typeface="微软雅黑" charset="-122"/>
+                <a:sym typeface="+mn-ea"/>
+              </a:rPr>
+              <a:t>b. DQN </a:t>
             </a:r>
             <a:r>
               <a:rPr lang="zh-CN" altLang="en-US" sz="1400" b="1" dirty="0">
@@ -11731,10 +12377,65 @@
                 <a:ea typeface="微软雅黑" charset="-122"/>
                 <a:sym typeface="+mn-ea"/>
               </a:rPr>
-              <a:t>决策输出是</a:t>
-            </a:r>
-            <a:r>
-              <a:rPr lang="en-US" altLang="zh-CN" sz="1400" b="1" dirty="0">
+              <a:t>评估候选连接，形成映射方案。</a:t>
+            </a:r>
+            <a:r>
+              <a:rPr lang="zh-CN" altLang="en-US" sz="1400" dirty="0">
+                <a:solidFill>
+                  <a:schemeClr val="tx1"/>
+                </a:solidFill>
+                <a:latin typeface="微软雅黑" charset="-122"/>
+                <a:ea typeface="微软雅黑" charset="-122"/>
+                <a:sym typeface="+mn-ea"/>
+              </a:rPr>
+              <a:t>深度</a:t>
+            </a:r>
+            <a:r>
+              <a:rPr lang="en-US" altLang="zh-CN" sz="1400" dirty="0">
+                <a:solidFill>
+                  <a:schemeClr val="tx1"/>
+                </a:solidFill>
+                <a:latin typeface="微软雅黑" charset="-122"/>
+                <a:ea typeface="微软雅黑" charset="-122"/>
+                <a:sym typeface="+mn-ea"/>
+              </a:rPr>
+              <a:t> Q </a:t>
+            </a:r>
+            <a:r>
+              <a:rPr lang="zh-CN" altLang="en-US" sz="1400" dirty="0">
+                <a:solidFill>
+                  <a:schemeClr val="tx1"/>
+                </a:solidFill>
+                <a:latin typeface="微软雅黑" charset="-122"/>
+                <a:ea typeface="微软雅黑" charset="-122"/>
+                <a:sym typeface="+mn-ea"/>
+              </a:rPr>
+              <a:t>网络评估将业务流连接到不同</a:t>
+            </a:r>
+            <a:r>
+              <a:rPr lang="en-US" altLang="zh-CN" sz="1400" dirty="0">
+                <a:solidFill>
+                  <a:schemeClr val="tx1"/>
+                </a:solidFill>
+                <a:latin typeface="微软雅黑" charset="-122"/>
+                <a:ea typeface="微软雅黑" charset="-122"/>
+                <a:sym typeface="+mn-ea"/>
+              </a:rPr>
+              <a:t> DRB </a:t>
+            </a:r>
+            <a:r>
+              <a:rPr lang="zh-CN" altLang="en-US" sz="1400" dirty="0">
+                <a:solidFill>
+                  <a:schemeClr val="tx1"/>
+                </a:solidFill>
+                <a:latin typeface="微软雅黑" charset="-122"/>
+                <a:ea typeface="微软雅黑" charset="-122"/>
+                <a:sym typeface="+mn-ea"/>
+              </a:rPr>
+              <a:t>的动作，原文给出逐步建立映射的示例。执行后，将吞吐量、时延等</a:t>
+            </a:r>
+            <a:r>
+              <a:rPr lang="en-US" altLang="zh-CN" sz="1400" dirty="0">
                 <a:solidFill>
                   <a:schemeClr val="tx1"/>
                 </a:solidFill>
@@ -11745,6 +12446,17 @@
               <a:t> QoS </a:t>
             </a:r>
             <a:r>
+              <a:rPr lang="zh-CN" altLang="en-US" sz="1400" dirty="0">
+                <a:solidFill>
+                  <a:schemeClr val="tx1"/>
+                </a:solidFill>
+                <a:latin typeface="微软雅黑" charset="-122"/>
+                <a:ea typeface="微软雅黑" charset="-122"/>
+                <a:sym typeface="+mn-ea"/>
+              </a:rPr>
+              <a:t>测量转化为奖励，通过交互改进选择。</a:t>
+            </a:r>
+            <a:r>
               <a:rPr lang="zh-CN" altLang="en-US" sz="1400" b="1" dirty="0">
                 <a:solidFill>
                   <a:schemeClr val="tx1"/>
@@ -11753,73 +12465,7 @@
                 <a:ea typeface="微软雅黑" charset="-122"/>
                 <a:sym typeface="+mn-ea"/>
               </a:rPr>
-              <a:t>流与可用</a:t>
-            </a:r>
-            <a:r>
-              <a:rPr lang="en-US" altLang="zh-CN" sz="1400" b="1" dirty="0">
-                <a:solidFill>
-                  <a:schemeClr val="tx1"/>
-                </a:solidFill>
-                <a:latin typeface="微软雅黑" charset="-122"/>
-                <a:ea typeface="微软雅黑" charset="-122"/>
-                <a:sym typeface="+mn-ea"/>
-              </a:rPr>
-              <a:t> DRB </a:t>
-            </a:r>
-            <a:r>
-              <a:rPr lang="zh-CN" altLang="en-US" sz="1400" b="1" dirty="0">
-                <a:solidFill>
-                  <a:schemeClr val="tx1"/>
-                </a:solidFill>
-                <a:latin typeface="微软雅黑" charset="-122"/>
-                <a:ea typeface="微软雅黑" charset="-122"/>
-                <a:sym typeface="+mn-ea"/>
-              </a:rPr>
-              <a:t>的对应关系，</a:t>
-            </a:r>
-            <a:r>
-              <a:rPr lang="en-US" altLang="zh-CN" sz="1400" b="1" dirty="0">
-                <a:solidFill>
-                  <a:schemeClr val="tx1"/>
-                </a:solidFill>
-                <a:latin typeface="微软雅黑" charset="-122"/>
-                <a:ea typeface="微软雅黑" charset="-122"/>
-                <a:sym typeface="+mn-ea"/>
-              </a:rPr>
-              <a:t>QFI </a:t>
-            </a:r>
-            <a:r>
-              <a:rPr lang="zh-CN" altLang="en-US" sz="1400" b="1" dirty="0">
-                <a:solidFill>
-                  <a:schemeClr val="tx1"/>
-                </a:solidFill>
-                <a:latin typeface="微软雅黑" charset="-122"/>
-                <a:ea typeface="微软雅黑" charset="-122"/>
-                <a:sym typeface="+mn-ea"/>
-              </a:rPr>
-              <a:t>用于标识</a:t>
-            </a:r>
-            <a:r>
-              <a:rPr lang="en-US" altLang="zh-CN" sz="1400" b="1" dirty="0">
-                <a:solidFill>
-                  <a:schemeClr val="tx1"/>
-                </a:solidFill>
-                <a:latin typeface="微软雅黑" charset="-122"/>
-                <a:ea typeface="微软雅黑" charset="-122"/>
-                <a:sym typeface="+mn-ea"/>
-              </a:rPr>
-              <a:t> QoS </a:t>
-            </a:r>
-            <a:r>
-              <a:rPr lang="zh-CN" altLang="en-US" sz="1400" b="1" dirty="0">
-                <a:solidFill>
-                  <a:schemeClr val="tx1"/>
-                </a:solidFill>
-                <a:latin typeface="微软雅黑" charset="-122"/>
-                <a:ea typeface="微软雅黑" charset="-122"/>
-                <a:sym typeface="+mn-ea"/>
-              </a:rPr>
-              <a:t>流。</a:t>
+              <a:t>奖励用于引导学习，实际业务要求仍需单独检查。</a:t>
             </a:r>
             <a:endParaRPr lang="zh-CN" altLang="en-US" sz="1400" b="1" dirty="0">
               <a:solidFill>
@@ -11833,12 +12479,23 @@
           <a:p>
             <a:pPr indent="0">
               <a:lnSpc>
-                <a:spcPct val="130000"/>
+                <a:spcPct val="120000"/>
               </a:lnSpc>
               <a:buFont typeface="Arial" panose="020B0604020202020204" pitchFamily="34" charset="0"/>
               <a:buNone/>
             </a:pPr>
             <a:r>
+              <a:rPr lang="en-US" altLang="zh-CN" sz="1400" b="1" dirty="0">
+                <a:solidFill>
+                  <a:schemeClr val="tx1"/>
+                </a:solidFill>
+                <a:latin typeface="微软雅黑" charset="-122"/>
+                <a:ea typeface="微软雅黑" charset="-122"/>
+                <a:sym typeface="+mn-ea"/>
+              </a:rPr>
+              <a:t>c. </a:t>
+            </a:r>
+            <a:r>
               <a:rPr lang="zh-CN" altLang="en-US" sz="1400" b="1" dirty="0">
                 <a:solidFill>
                   <a:schemeClr val="tx1"/>
@@ -11847,7 +12504,195 @@
                 <a:ea typeface="微软雅黑" charset="-122"/>
                 <a:sym typeface="+mn-ea"/>
               </a:rPr>
-              <a:t>研究方法：</a:t>
+              <a:t>状态变化后重新推理，并处理输入不足。</a:t>
+            </a:r>
+            <a:r>
+              <a:rPr lang="en-US" altLang="zh-CN" sz="1400" dirty="0">
+                <a:solidFill>
+                  <a:schemeClr val="tx1"/>
+                </a:solidFill>
+                <a:latin typeface="微软雅黑" charset="-122"/>
+                <a:ea typeface="微软雅黑" charset="-122"/>
+                <a:sym typeface="+mn-ea"/>
+              </a:rPr>
+              <a:t>QoS </a:t>
+            </a:r>
+            <a:r>
+              <a:rPr lang="zh-CN" altLang="en-US" sz="1400" dirty="0">
+                <a:solidFill>
+                  <a:schemeClr val="tx1"/>
+                </a:solidFill>
+                <a:latin typeface="微软雅黑" charset="-122"/>
+                <a:ea typeface="微软雅黑" charset="-122"/>
+                <a:sym typeface="+mn-ea"/>
+              </a:rPr>
+              <a:t>变化、</a:t>
+            </a:r>
+            <a:r>
+              <a:rPr lang="en-US" altLang="zh-CN" sz="1400" dirty="0">
+                <a:solidFill>
+                  <a:schemeClr val="tx1"/>
+                </a:solidFill>
+                <a:latin typeface="微软雅黑" charset="-122"/>
+                <a:ea typeface="微软雅黑" charset="-122"/>
+                <a:sym typeface="+mn-ea"/>
+              </a:rPr>
+              <a:t>QoS </a:t>
+            </a:r>
+            <a:r>
+              <a:rPr lang="zh-CN" altLang="en-US" sz="1400" dirty="0">
+                <a:solidFill>
+                  <a:schemeClr val="tx1"/>
+                </a:solidFill>
+                <a:latin typeface="微软雅黑" charset="-122"/>
+                <a:ea typeface="微软雅黑" charset="-122"/>
+                <a:sym typeface="+mn-ea"/>
+              </a:rPr>
+              <a:t>流或</a:t>
+            </a:r>
+            <a:r>
+              <a:rPr lang="en-US" altLang="zh-CN" sz="1400" dirty="0">
+                <a:solidFill>
+                  <a:schemeClr val="tx1"/>
+                </a:solidFill>
+                <a:latin typeface="微软雅黑" charset="-122"/>
+                <a:ea typeface="微软雅黑" charset="-122"/>
+                <a:sym typeface="+mn-ea"/>
+              </a:rPr>
+              <a:t> DRB </a:t>
+            </a:r>
+            <a:r>
+              <a:rPr lang="zh-CN" altLang="en-US" sz="1400" dirty="0">
+                <a:solidFill>
+                  <a:schemeClr val="tx1"/>
+                </a:solidFill>
+                <a:latin typeface="微软雅黑" charset="-122"/>
+                <a:ea typeface="微软雅黑" charset="-122"/>
+                <a:sym typeface="+mn-ea"/>
+              </a:rPr>
+              <a:t>建立与释放可触发决策。缺少近期特征时，终端可向网络请求信息。这使系统能够响应新的业务组合，同时要求正确处理过期输入和失效承载。</a:t>
+            </a:r>
+            <a:endParaRPr lang="zh-CN" altLang="en-US" sz="1400" dirty="0">
+              <a:solidFill>
+                <a:schemeClr val="tx1"/>
+              </a:solidFill>
+              <a:latin typeface="微软雅黑" charset="-122"/>
+              <a:ea typeface="微软雅黑" charset="-122"/>
+              <a:sym typeface="+mn-ea"/>
+            </a:endParaRPr>
+          </a:p>
+          <a:p>
+            <a:pPr indent="0">
+              <a:lnSpc>
+                <a:spcPct val="120000"/>
+              </a:lnSpc>
+              <a:buFont typeface="Arial" panose="020B0604020202020204" pitchFamily="34" charset="0"/>
+              <a:buNone/>
+            </a:pPr>
+            <a:r>
+              <a:rPr lang="en-US" altLang="zh-CN" sz="1400" b="1" dirty="0">
+                <a:solidFill>
+                  <a:schemeClr val="tx1"/>
+                </a:solidFill>
+                <a:latin typeface="微软雅黑" charset="-122"/>
+                <a:ea typeface="微软雅黑" charset="-122"/>
+                <a:sym typeface="+mn-ea"/>
+              </a:rPr>
+              <a:t>d. </a:t>
+            </a:r>
+            <a:r>
+              <a:rPr lang="zh-CN" altLang="en-US" sz="1400" b="1" dirty="0">
+                <a:solidFill>
+                  <a:schemeClr val="tx1"/>
+                </a:solidFill>
+                <a:latin typeface="微软雅黑" charset="-122"/>
+                <a:ea typeface="微软雅黑" charset="-122"/>
+                <a:sym typeface="+mn-ea"/>
+              </a:rPr>
+              <a:t>终端与网络共同完成模型使用和管理。</a:t>
+            </a:r>
+            <a:r>
+              <a:rPr lang="zh-CN" altLang="en-US" sz="1400" dirty="0">
+                <a:solidFill>
+                  <a:schemeClr val="tx1"/>
+                </a:solidFill>
+                <a:latin typeface="微软雅黑" charset="-122"/>
+                <a:ea typeface="微软雅黑" charset="-122"/>
+                <a:sym typeface="+mn-ea"/>
+              </a:rPr>
+              <a:t>专利讨论终端训练、网络训练后下发及共同训练等路径。终端执行映射推理，网络参与模型启用和监测；模型不可用或条件不满足时，可采用固定映射。</a:t>
+            </a:r>
+            <a:endParaRPr lang="zh-CN" altLang="en-US" sz="1400" dirty="0">
+              <a:solidFill>
+                <a:schemeClr val="tx1"/>
+              </a:solidFill>
+              <a:latin typeface="微软雅黑" charset="-122"/>
+              <a:ea typeface="微软雅黑" charset="-122"/>
+              <a:sym typeface="+mn-ea"/>
+            </a:endParaRPr>
+          </a:p>
+          <a:p>
+            <a:pPr indent="0">
+              <a:lnSpc>
+                <a:spcPct val="140000"/>
+              </a:lnSpc>
+              <a:buFont typeface="Arial" panose="020B0604020202020204" pitchFamily="34" charset="0"/>
+              <a:buNone/>
+            </a:pPr>
+            <a:r>
+              <a:rPr lang="zh-CN" altLang="en-US" sz="1400" b="1" dirty="0">
+                <a:solidFill>
+                  <a:srgbClr val="FF0000"/>
+                </a:solidFill>
+                <a:latin typeface="微软雅黑" charset="-122"/>
+                <a:ea typeface="微软雅黑" charset="-122"/>
+                <a:sym typeface="+mn-ea"/>
+              </a:rPr>
+              <a:t>研究成熟度与启示：</a:t>
+            </a:r>
+            <a:r>
+              <a:rPr lang="zh-CN" altLang="en-US" sz="1400" dirty="0">
+                <a:solidFill>
+                  <a:schemeClr val="tx1"/>
+                </a:solidFill>
+                <a:latin typeface="微软雅黑" charset="-122"/>
+                <a:ea typeface="微软雅黑" charset="-122"/>
+                <a:sym typeface="+mn-ea"/>
+              </a:rPr>
+              <a:t>专利给出映射建模、训练交互和推理触发流程，未提供定量对照实验。评价应检查</a:t>
+            </a:r>
+            <a:r>
+              <a:rPr lang="zh-CN" altLang="en-US" sz="1400" b="1" dirty="0">
+                <a:solidFill>
+                  <a:schemeClr val="tx1"/>
+                </a:solidFill>
+                <a:latin typeface="微软雅黑" charset="-122"/>
+                <a:ea typeface="微软雅黑" charset="-122"/>
+                <a:sym typeface="+mn-ea"/>
+              </a:rPr>
+              <a:t>业务</a:t>
+            </a:r>
+            <a:r>
+              <a:rPr lang="en-US" altLang="zh-CN" sz="1400" b="1" dirty="0">
+                <a:solidFill>
+                  <a:schemeClr val="tx1"/>
+                </a:solidFill>
+                <a:latin typeface="微软雅黑" charset="-122"/>
+                <a:ea typeface="微软雅黑" charset="-122"/>
+                <a:sym typeface="+mn-ea"/>
+              </a:rPr>
+              <a:t> QoS </a:t>
+            </a:r>
+            <a:r>
+              <a:rPr lang="zh-CN" altLang="en-US" sz="1400" b="1" dirty="0">
+                <a:solidFill>
+                  <a:schemeClr val="tx1"/>
+                </a:solidFill>
+                <a:latin typeface="微软雅黑" charset="-122"/>
+                <a:ea typeface="微软雅黑" charset="-122"/>
+                <a:sym typeface="+mn-ea"/>
+              </a:rPr>
+              <a:t>是否改善，以及映射调整的开销和稳定性。</a:t>
             </a:r>
             <a:endParaRPr lang="zh-CN" altLang="en-US" sz="1400" b="1" dirty="0">
               <a:solidFill>
@@ -11858,590 +12703,40 @@
               <a:sym typeface="+mn-ea"/>
             </a:endParaRPr>
           </a:p>
-          <a:p>
-            <a:pPr indent="0">
-              <a:lnSpc>
-                <a:spcPct val="140000"/>
-              </a:lnSpc>
-              <a:buFont typeface="Arial" panose="020B0604020202020204" pitchFamily="34" charset="0"/>
-              <a:buNone/>
-            </a:pPr>
-            <a:r>
-              <a:rPr lang="en-US" sz="1400" b="1" dirty="0">
-                <a:solidFill>
-                  <a:schemeClr val="tx1"/>
-                </a:solidFill>
-                <a:latin typeface="微软雅黑" charset="-122"/>
-                <a:ea typeface="微软雅黑" charset="-122"/>
-                <a:sym typeface="+mn-ea"/>
-              </a:rPr>
-              <a:t>a. </a:t>
-            </a:r>
-            <a:r>
-              <a:rPr lang="zh-CN" altLang="en-US" sz="1400" b="1" dirty="0">
-                <a:solidFill>
-                  <a:schemeClr val="tx1"/>
-                </a:solidFill>
-                <a:latin typeface="微软雅黑" charset="-122"/>
-                <a:ea typeface="微软雅黑" charset="-122"/>
-                <a:sym typeface="+mn-ea"/>
-              </a:rPr>
-              <a:t>用业务需求和承载状态描述决策条件。</a:t>
-            </a:r>
-            <a:r>
-              <a:rPr lang="zh-CN" altLang="en-US" sz="1400" dirty="0">
-                <a:solidFill>
-                  <a:schemeClr val="tx1"/>
-                </a:solidFill>
-                <a:latin typeface="微软雅黑" charset="-122"/>
-                <a:ea typeface="微软雅黑" charset="-122"/>
-                <a:sym typeface="+mn-ea"/>
-              </a:rPr>
-              <a:t>状态包含当前映射、</a:t>
-            </a:r>
-            <a:r>
-              <a:rPr lang="en-US" altLang="zh-CN" sz="1400" dirty="0">
-                <a:solidFill>
-                  <a:schemeClr val="tx1"/>
-                </a:solidFill>
-                <a:latin typeface="微软雅黑" charset="-122"/>
-                <a:ea typeface="微软雅黑" charset="-122"/>
-                <a:sym typeface="+mn-ea"/>
-              </a:rPr>
-              <a:t>QoS </a:t>
-            </a:r>
-            <a:r>
-              <a:rPr lang="zh-CN" altLang="en-US" sz="1400" dirty="0">
-                <a:solidFill>
-                  <a:schemeClr val="tx1"/>
-                </a:solidFill>
-                <a:latin typeface="微软雅黑" charset="-122"/>
-                <a:ea typeface="微软雅黑" charset="-122"/>
-                <a:sym typeface="+mn-ea"/>
-              </a:rPr>
-              <a:t>要求、承载历史测量及信道信息。</a:t>
-            </a:r>
-            <a:r>
-              <a:rPr lang="en-US" altLang="zh-CN" sz="1400" dirty="0">
-                <a:solidFill>
-                  <a:schemeClr val="tx1"/>
-                </a:solidFill>
-                <a:latin typeface="微软雅黑" charset="-122"/>
-                <a:ea typeface="微软雅黑" charset="-122"/>
-                <a:sym typeface="+mn-ea"/>
-              </a:rPr>
-              <a:t>QFI </a:t>
-            </a:r>
-            <a:r>
-              <a:rPr lang="zh-CN" altLang="en-US" sz="1400" dirty="0">
-                <a:solidFill>
-                  <a:schemeClr val="tx1"/>
-                </a:solidFill>
-                <a:latin typeface="微软雅黑" charset="-122"/>
-                <a:ea typeface="微软雅黑" charset="-122"/>
-                <a:sym typeface="+mn-ea"/>
-              </a:rPr>
-              <a:t>标识</a:t>
-            </a:r>
-            <a:r>
-              <a:rPr lang="en-US" altLang="zh-CN" sz="1400" dirty="0">
-                <a:solidFill>
-                  <a:schemeClr val="tx1"/>
-                </a:solidFill>
-                <a:latin typeface="微软雅黑" charset="-122"/>
-                <a:ea typeface="微软雅黑" charset="-122"/>
-                <a:sym typeface="+mn-ea"/>
-              </a:rPr>
-              <a:t> QoS </a:t>
-            </a:r>
-            <a:r>
-              <a:rPr lang="zh-CN" altLang="en-US" sz="1400" dirty="0">
-                <a:solidFill>
-                  <a:schemeClr val="tx1"/>
-                </a:solidFill>
-                <a:latin typeface="微软雅黑" charset="-122"/>
-                <a:ea typeface="微软雅黑" charset="-122"/>
-                <a:sym typeface="+mn-ea"/>
-              </a:rPr>
-              <a:t>流，</a:t>
-            </a:r>
-            <a:r>
-              <a:rPr lang="en-US" altLang="zh-CN" sz="1400" dirty="0">
-                <a:solidFill>
-                  <a:schemeClr val="tx1"/>
-                </a:solidFill>
-                <a:latin typeface="微软雅黑" charset="-122"/>
-                <a:ea typeface="微软雅黑" charset="-122"/>
-                <a:sym typeface="+mn-ea"/>
-              </a:rPr>
-              <a:t>DRB </a:t>
-            </a:r>
-            <a:r>
-              <a:rPr lang="zh-CN" altLang="en-US" sz="1400" dirty="0">
-                <a:solidFill>
-                  <a:schemeClr val="tx1"/>
-                </a:solidFill>
-                <a:latin typeface="微软雅黑" charset="-122"/>
-                <a:ea typeface="微软雅黑" charset="-122"/>
-                <a:sym typeface="+mn-ea"/>
-              </a:rPr>
-              <a:t>是可选择的无线承载。模型需要同时了解</a:t>
-            </a:r>
-            <a:r>
-              <a:rPr lang="en-US" altLang="zh-CN" sz="1400" dirty="0">
-                <a:solidFill>
-                  <a:schemeClr val="tx1"/>
-                </a:solidFill>
-                <a:latin typeface="微软雅黑" charset="-122"/>
-                <a:ea typeface="微软雅黑" charset="-122"/>
-                <a:sym typeface="+mn-ea"/>
-              </a:rPr>
-              <a:t>“</a:t>
-            </a:r>
-            <a:r>
-              <a:rPr lang="zh-CN" altLang="en-US" sz="1400" dirty="0">
-                <a:solidFill>
-                  <a:schemeClr val="tx1"/>
-                </a:solidFill>
-                <a:latin typeface="微软雅黑" charset="-122"/>
-                <a:ea typeface="微软雅黑" charset="-122"/>
-                <a:sym typeface="+mn-ea"/>
-              </a:rPr>
-              <a:t>业务要求怎样的服务</a:t>
-            </a:r>
-            <a:r>
-              <a:rPr lang="en-US" altLang="zh-CN" sz="1400" dirty="0">
-                <a:solidFill>
-                  <a:schemeClr val="tx1"/>
-                </a:solidFill>
-                <a:latin typeface="微软雅黑" charset="-122"/>
-                <a:ea typeface="微软雅黑" charset="-122"/>
-                <a:sym typeface="+mn-ea"/>
-              </a:rPr>
-              <a:t>”</a:t>
-            </a:r>
-            <a:r>
-              <a:rPr lang="zh-CN" altLang="en-US" sz="1400" dirty="0">
-                <a:solidFill>
-                  <a:schemeClr val="tx1"/>
-                </a:solidFill>
-                <a:latin typeface="微软雅黑" charset="-122"/>
-                <a:ea typeface="微软雅黑" charset="-122"/>
-                <a:sym typeface="+mn-ea"/>
-              </a:rPr>
-              <a:t>和</a:t>
-            </a:r>
-            <a:r>
-              <a:rPr lang="en-US" altLang="zh-CN" sz="1400" dirty="0">
-                <a:solidFill>
-                  <a:schemeClr val="tx1"/>
-                </a:solidFill>
-                <a:latin typeface="微软雅黑" charset="-122"/>
-                <a:ea typeface="微软雅黑" charset="-122"/>
-                <a:sym typeface="+mn-ea"/>
-              </a:rPr>
-              <a:t>“</a:t>
-            </a:r>
-            <a:r>
-              <a:rPr lang="zh-CN" altLang="en-US" sz="1400" dirty="0">
-                <a:solidFill>
-                  <a:schemeClr val="tx1"/>
-                </a:solidFill>
-                <a:latin typeface="微软雅黑" charset="-122"/>
-                <a:ea typeface="微软雅黑" charset="-122"/>
-                <a:sym typeface="+mn-ea"/>
-              </a:rPr>
-              <a:t>当前有哪些承载可用</a:t>
-            </a:r>
-            <a:r>
-              <a:rPr lang="en-US" altLang="zh-CN" sz="1400" dirty="0">
-                <a:solidFill>
-                  <a:schemeClr val="tx1"/>
-                </a:solidFill>
-                <a:latin typeface="微软雅黑" charset="-122"/>
-                <a:ea typeface="微软雅黑" charset="-122"/>
-                <a:sym typeface="+mn-ea"/>
-              </a:rPr>
-              <a:t>”</a:t>
-            </a:r>
-            <a:r>
-              <a:rPr lang="zh-CN" altLang="en-US" sz="1400" dirty="0">
-                <a:solidFill>
-                  <a:schemeClr val="tx1"/>
-                </a:solidFill>
-                <a:latin typeface="微软雅黑" charset="-122"/>
-                <a:ea typeface="微软雅黑" charset="-122"/>
-                <a:sym typeface="+mn-ea"/>
-              </a:rPr>
-              <a:t>。</a:t>
-            </a:r>
-            <a:endParaRPr lang="zh-CN" altLang="en-US" sz="1400" dirty="0">
-              <a:solidFill>
-                <a:schemeClr val="tx1"/>
-              </a:solidFill>
-              <a:latin typeface="微软雅黑" charset="-122"/>
-              <a:ea typeface="微软雅黑" charset="-122"/>
-              <a:sym typeface="+mn-ea"/>
-            </a:endParaRPr>
-          </a:p>
-          <a:p>
-            <a:pPr indent="0">
-              <a:lnSpc>
-                <a:spcPct val="140000"/>
-              </a:lnSpc>
-              <a:buFont typeface="Arial" panose="020B0604020202020204" pitchFamily="34" charset="0"/>
-              <a:buNone/>
-            </a:pPr>
-            <a:r>
-              <a:rPr lang="en-US" altLang="zh-CN" sz="1400" b="1" dirty="0">
-                <a:solidFill>
-                  <a:schemeClr val="tx1"/>
-                </a:solidFill>
-                <a:latin typeface="微软雅黑" charset="-122"/>
-                <a:ea typeface="微软雅黑" charset="-122"/>
-                <a:sym typeface="+mn-ea"/>
-              </a:rPr>
-              <a:t>b. DQN </a:t>
-            </a:r>
-            <a:r>
-              <a:rPr lang="zh-CN" altLang="en-US" sz="1400" b="1" dirty="0">
-                <a:solidFill>
-                  <a:schemeClr val="tx1"/>
-                </a:solidFill>
-                <a:latin typeface="微软雅黑" charset="-122"/>
-                <a:ea typeface="微软雅黑" charset="-122"/>
-                <a:sym typeface="+mn-ea"/>
-              </a:rPr>
-              <a:t>评估候选连接，形成映射方案。</a:t>
-            </a:r>
-            <a:r>
-              <a:rPr lang="zh-CN" altLang="en-US" sz="1400" dirty="0">
-                <a:solidFill>
-                  <a:schemeClr val="tx1"/>
-                </a:solidFill>
-                <a:latin typeface="微软雅黑" charset="-122"/>
-                <a:ea typeface="微软雅黑" charset="-122"/>
-                <a:sym typeface="+mn-ea"/>
-              </a:rPr>
-              <a:t>深度</a:t>
-            </a:r>
-            <a:r>
-              <a:rPr lang="en-US" altLang="zh-CN" sz="1400" dirty="0">
-                <a:solidFill>
-                  <a:schemeClr val="tx1"/>
-                </a:solidFill>
-                <a:latin typeface="微软雅黑" charset="-122"/>
-                <a:ea typeface="微软雅黑" charset="-122"/>
-                <a:sym typeface="+mn-ea"/>
-              </a:rPr>
-              <a:t> Q </a:t>
-            </a:r>
-            <a:r>
-              <a:rPr lang="zh-CN" altLang="en-US" sz="1400" dirty="0">
-                <a:solidFill>
-                  <a:schemeClr val="tx1"/>
-                </a:solidFill>
-                <a:latin typeface="微软雅黑" charset="-122"/>
-                <a:ea typeface="微软雅黑" charset="-122"/>
-                <a:sym typeface="+mn-ea"/>
-              </a:rPr>
-              <a:t>网络评估将业务流连接到不同</a:t>
-            </a:r>
-            <a:r>
-              <a:rPr lang="en-US" altLang="zh-CN" sz="1400" dirty="0">
-                <a:solidFill>
-                  <a:schemeClr val="tx1"/>
-                </a:solidFill>
-                <a:latin typeface="微软雅黑" charset="-122"/>
-                <a:ea typeface="微软雅黑" charset="-122"/>
-                <a:sym typeface="+mn-ea"/>
-              </a:rPr>
-              <a:t> DRB </a:t>
-            </a:r>
-            <a:r>
-              <a:rPr lang="zh-CN" altLang="en-US" sz="1400" dirty="0">
-                <a:solidFill>
-                  <a:schemeClr val="tx1"/>
-                </a:solidFill>
-                <a:latin typeface="微软雅黑" charset="-122"/>
-                <a:ea typeface="微软雅黑" charset="-122"/>
-                <a:sym typeface="+mn-ea"/>
-              </a:rPr>
-              <a:t>的动作，原文给出逐步建立映射的示例。执行后，将吞吐量、时延等</a:t>
-            </a:r>
-            <a:r>
-              <a:rPr lang="en-US" altLang="zh-CN" sz="1400" dirty="0">
-                <a:solidFill>
-                  <a:schemeClr val="tx1"/>
-                </a:solidFill>
-                <a:latin typeface="微软雅黑" charset="-122"/>
-                <a:ea typeface="微软雅黑" charset="-122"/>
-                <a:sym typeface="+mn-ea"/>
-              </a:rPr>
-              <a:t> QoS </a:t>
-            </a:r>
-            <a:r>
-              <a:rPr lang="zh-CN" altLang="en-US" sz="1400" dirty="0">
-                <a:solidFill>
-                  <a:schemeClr val="tx1"/>
-                </a:solidFill>
-                <a:latin typeface="微软雅黑" charset="-122"/>
-                <a:ea typeface="微软雅黑" charset="-122"/>
-                <a:sym typeface="+mn-ea"/>
-              </a:rPr>
-              <a:t>测量转化为奖励，通过交互改进选择。</a:t>
-            </a:r>
-            <a:r>
-              <a:rPr lang="zh-CN" altLang="en-US" sz="1400" b="1" dirty="0">
-                <a:solidFill>
-                  <a:schemeClr val="tx1"/>
-                </a:solidFill>
-                <a:latin typeface="微软雅黑" charset="-122"/>
-                <a:ea typeface="微软雅黑" charset="-122"/>
-                <a:sym typeface="+mn-ea"/>
-              </a:rPr>
-              <a:t>奖励用于引导学习，实际业务要求仍需单独检查。</a:t>
-            </a:r>
-            <a:endParaRPr lang="zh-CN" altLang="en-US" sz="1400" b="1" dirty="0">
-              <a:solidFill>
-                <a:schemeClr val="tx1"/>
-              </a:solidFill>
-              <a:latin typeface="微软雅黑" charset="-122"/>
-              <a:ea typeface="微软雅黑" charset="-122"/>
-              <a:sym typeface="+mn-ea"/>
-            </a:endParaRPr>
-          </a:p>
-          <a:p>
-            <a:pPr indent="0">
-              <a:lnSpc>
-                <a:spcPct val="140000"/>
-              </a:lnSpc>
-              <a:buFont typeface="Arial" panose="020B0604020202020204" pitchFamily="34" charset="0"/>
-              <a:buNone/>
-            </a:pPr>
-            <a:r>
-              <a:rPr lang="en-US" altLang="zh-CN" sz="1400" b="1" dirty="0">
-                <a:solidFill>
-                  <a:schemeClr val="tx1"/>
-                </a:solidFill>
-                <a:latin typeface="微软雅黑" charset="-122"/>
-                <a:ea typeface="微软雅黑" charset="-122"/>
-                <a:sym typeface="+mn-ea"/>
-              </a:rPr>
-              <a:t>c. </a:t>
-            </a:r>
-            <a:r>
-              <a:rPr lang="zh-CN" altLang="en-US" sz="1400" b="1" dirty="0">
-                <a:solidFill>
-                  <a:schemeClr val="tx1"/>
-                </a:solidFill>
-                <a:latin typeface="微软雅黑" charset="-122"/>
-                <a:ea typeface="微软雅黑" charset="-122"/>
-                <a:sym typeface="+mn-ea"/>
-              </a:rPr>
-              <a:t>状态变化后重新推理，并处理输入不足。</a:t>
-            </a:r>
-            <a:r>
-              <a:rPr lang="en-US" altLang="zh-CN" sz="1400" dirty="0">
-                <a:solidFill>
-                  <a:schemeClr val="tx1"/>
-                </a:solidFill>
-                <a:latin typeface="微软雅黑" charset="-122"/>
-                <a:ea typeface="微软雅黑" charset="-122"/>
-                <a:sym typeface="+mn-ea"/>
-              </a:rPr>
-              <a:t>QoS </a:t>
-            </a:r>
-            <a:r>
-              <a:rPr lang="zh-CN" altLang="en-US" sz="1400" dirty="0">
-                <a:solidFill>
-                  <a:schemeClr val="tx1"/>
-                </a:solidFill>
-                <a:latin typeface="微软雅黑" charset="-122"/>
-                <a:ea typeface="微软雅黑" charset="-122"/>
-                <a:sym typeface="+mn-ea"/>
-              </a:rPr>
-              <a:t>变化、</a:t>
-            </a:r>
-            <a:r>
-              <a:rPr lang="en-US" altLang="zh-CN" sz="1400" dirty="0">
-                <a:solidFill>
-                  <a:schemeClr val="tx1"/>
-                </a:solidFill>
-                <a:latin typeface="微软雅黑" charset="-122"/>
-                <a:ea typeface="微软雅黑" charset="-122"/>
-                <a:sym typeface="+mn-ea"/>
-              </a:rPr>
-              <a:t>QoS </a:t>
-            </a:r>
-            <a:r>
-              <a:rPr lang="zh-CN" altLang="en-US" sz="1400" dirty="0">
-                <a:solidFill>
-                  <a:schemeClr val="tx1"/>
-                </a:solidFill>
-                <a:latin typeface="微软雅黑" charset="-122"/>
-                <a:ea typeface="微软雅黑" charset="-122"/>
-                <a:sym typeface="+mn-ea"/>
-              </a:rPr>
-              <a:t>流或</a:t>
-            </a:r>
-            <a:r>
-              <a:rPr lang="en-US" altLang="zh-CN" sz="1400" dirty="0">
-                <a:solidFill>
-                  <a:schemeClr val="tx1"/>
-                </a:solidFill>
-                <a:latin typeface="微软雅黑" charset="-122"/>
-                <a:ea typeface="微软雅黑" charset="-122"/>
-                <a:sym typeface="+mn-ea"/>
-              </a:rPr>
-              <a:t> DRB </a:t>
-            </a:r>
-            <a:r>
-              <a:rPr lang="zh-CN" altLang="en-US" sz="1400" dirty="0">
-                <a:solidFill>
-                  <a:schemeClr val="tx1"/>
-                </a:solidFill>
-                <a:latin typeface="微软雅黑" charset="-122"/>
-                <a:ea typeface="微软雅黑" charset="-122"/>
-                <a:sym typeface="+mn-ea"/>
-              </a:rPr>
-              <a:t>建立与释放可触发决策。缺少近期特征时，终端可向网络请求信息。这使系统能够响应新的业务组合，同时要求正确处理过期输入和失效承载。</a:t>
-            </a:r>
-            <a:endParaRPr lang="zh-CN" altLang="en-US" sz="1400" dirty="0">
-              <a:solidFill>
-                <a:schemeClr val="tx1"/>
-              </a:solidFill>
-              <a:latin typeface="微软雅黑" charset="-122"/>
-              <a:ea typeface="微软雅黑" charset="-122"/>
-              <a:sym typeface="+mn-ea"/>
-            </a:endParaRPr>
-          </a:p>
-          <a:p>
-            <a:pPr indent="0">
-              <a:lnSpc>
-                <a:spcPct val="140000"/>
-              </a:lnSpc>
-              <a:buFont typeface="Arial" panose="020B0604020202020204" pitchFamily="34" charset="0"/>
-              <a:buNone/>
-            </a:pPr>
-            <a:r>
-              <a:rPr lang="en-US" altLang="zh-CN" sz="1400" b="1" dirty="0">
-                <a:solidFill>
-                  <a:schemeClr val="tx1"/>
-                </a:solidFill>
-                <a:latin typeface="微软雅黑" charset="-122"/>
-                <a:ea typeface="微软雅黑" charset="-122"/>
-                <a:sym typeface="+mn-ea"/>
-              </a:rPr>
-              <a:t>d. </a:t>
-            </a:r>
-            <a:r>
-              <a:rPr lang="zh-CN" altLang="en-US" sz="1400" b="1" dirty="0">
-                <a:solidFill>
-                  <a:schemeClr val="tx1"/>
-                </a:solidFill>
-                <a:latin typeface="微软雅黑" charset="-122"/>
-                <a:ea typeface="微软雅黑" charset="-122"/>
-                <a:sym typeface="+mn-ea"/>
-              </a:rPr>
-              <a:t>终端与网络共同完成模型使用和管理。</a:t>
-            </a:r>
-            <a:r>
-              <a:rPr lang="zh-CN" altLang="en-US" sz="1400" dirty="0">
-                <a:solidFill>
-                  <a:schemeClr val="tx1"/>
-                </a:solidFill>
-                <a:latin typeface="微软雅黑" charset="-122"/>
-                <a:ea typeface="微软雅黑" charset="-122"/>
-                <a:sym typeface="+mn-ea"/>
-              </a:rPr>
-              <a:t>专利讨论终端训练、网络训练后下发及共同训练等路径。终端执行映射推理，网络参与模型启用和监测；模型不可用或条件不满足时，可采用固定映射。</a:t>
-            </a:r>
-            <a:endParaRPr lang="zh-CN" altLang="en-US" sz="1400" dirty="0">
-              <a:solidFill>
-                <a:schemeClr val="tx1"/>
-              </a:solidFill>
-              <a:latin typeface="微软雅黑" charset="-122"/>
-              <a:ea typeface="微软雅黑" charset="-122"/>
-              <a:sym typeface="+mn-ea"/>
-            </a:endParaRPr>
-          </a:p>
-          <a:p>
-            <a:pPr indent="0">
-              <a:lnSpc>
-                <a:spcPct val="140000"/>
-              </a:lnSpc>
-              <a:buFont typeface="Arial" panose="020B0604020202020204" pitchFamily="34" charset="0"/>
-              <a:buNone/>
-            </a:pPr>
-            <a:r>
-              <a:rPr lang="zh-CN" altLang="en-US" sz="1400" b="1" dirty="0">
-                <a:solidFill>
-                  <a:schemeClr val="tx1"/>
-                </a:solidFill>
-                <a:latin typeface="微软雅黑" charset="-122"/>
-                <a:ea typeface="微软雅黑" charset="-122"/>
-                <a:sym typeface="+mn-ea"/>
-              </a:rPr>
-              <a:t>部署位置与反馈闭环：</a:t>
-            </a:r>
-            <a:endParaRPr lang="zh-CN" altLang="en-US" sz="1400" b="1" dirty="0">
-              <a:solidFill>
-                <a:schemeClr val="tx1"/>
-              </a:solidFill>
-              <a:latin typeface="微软雅黑" charset="-122"/>
-              <a:ea typeface="微软雅黑" charset="-122"/>
-              <a:sym typeface="+mn-ea"/>
-            </a:endParaRPr>
-          </a:p>
-          <a:p>
-            <a:pPr indent="0">
-              <a:lnSpc>
-                <a:spcPct val="140000"/>
-              </a:lnSpc>
-              <a:buFont typeface="Arial" panose="020B0604020202020204" pitchFamily="34" charset="0"/>
-              <a:buNone/>
-            </a:pPr>
-            <a:r>
-              <a:rPr lang="zh-CN" altLang="en-US" sz="1400" dirty="0">
-                <a:solidFill>
-                  <a:schemeClr val="tx1"/>
-                </a:solidFill>
-                <a:latin typeface="微软雅黑" charset="-122"/>
-                <a:ea typeface="微软雅黑" charset="-122"/>
-                <a:sym typeface="+mn-ea"/>
-              </a:rPr>
-              <a:t>公开文本给出模型交互和映射流程，但未提供可复现代码及定量对照实验。建议保持其他协议和调度参数一致，比较配置规则与</a:t>
-            </a:r>
-            <a:r>
-              <a:rPr lang="en-US" altLang="zh-CN" sz="1400" dirty="0">
-                <a:solidFill>
-                  <a:schemeClr val="tx1"/>
-                </a:solidFill>
-                <a:latin typeface="微软雅黑" charset="-122"/>
-                <a:ea typeface="微软雅黑" charset="-122"/>
-                <a:sym typeface="+mn-ea"/>
-              </a:rPr>
-              <a:t> AI </a:t>
-            </a:r>
-            <a:r>
-              <a:rPr lang="zh-CN" altLang="en-US" sz="1400" dirty="0">
-                <a:solidFill>
-                  <a:schemeClr val="tx1"/>
-                </a:solidFill>
-                <a:latin typeface="微软雅黑" charset="-122"/>
-                <a:ea typeface="微软雅黑" charset="-122"/>
-                <a:sym typeface="+mn-ea"/>
-              </a:rPr>
-              <a:t>映射，检查映射合法性、各业务达标比例、决策耗时和重映射开销，并加入新业务、承载释放及输入缺失场景。</a:t>
-            </a:r>
-            <a:endParaRPr lang="zh-CN" altLang="en-US" sz="1400" dirty="0">
-              <a:solidFill>
-                <a:schemeClr val="tx1"/>
-              </a:solidFill>
-              <a:latin typeface="微软雅黑" charset="-122"/>
-              <a:ea typeface="微软雅黑" charset="-122"/>
-              <a:sym typeface="+mn-ea"/>
+        </p:txBody>
+      </p:sp>
+      <p:sp>
+        <p:nvSpPr>
+          <p:cNvPr id="3" name="文本框 2"/>
+          <p:cNvSpPr txBox="1"/>
+          <p:nvPr userDrawn="1"/>
+        </p:nvSpPr>
+        <p:spPr>
+          <a:xfrm>
+            <a:off x="6455079" y="324566"/>
+            <a:ext cx="4387360" cy="641803"/>
+          </a:xfrm>
+          <a:prstGeom prst="rect">
+            <a:avLst/>
+          </a:prstGeom>
+        </p:spPr>
+        <p:txBody>
+          <a:bodyPr wrap="square" rtlCol="0">
+            <a:noAutofit/>
+          </a:bodyPr>
+          <a:p>
+            <a:r>
+              <a:rPr lang="en-US" altLang="zh-CN" sz="1200">
+                <a:latin typeface="Times New Roman" panose="02020603050405020304" charset="0"/>
+                <a:ea typeface="Times New Roman" panose="02020603050405020304" charset="0"/>
+                <a:cs typeface="Times New Roman" panose="02020603050405020304" charset="0"/>
+              </a:rPr>
+              <a:t>[2] APPLE INC. Systems and methods for artificial intelligence/machine learning based quality of service flow to data radio bearer mapping design: WO2026000129A1[P]. 2026-01-02.</a:t>
+            </a:r>
+            <a:endParaRPr lang="en-US" altLang="zh-CN" sz="1200">
+              <a:latin typeface="Times New Roman" panose="02020603050405020304" charset="0"/>
+              <a:ea typeface="Times New Roman" panose="02020603050405020304" charset="0"/>
+              <a:cs typeface="Times New Roman" panose="02020603050405020304" charset="0"/>
             </a:endParaRPr>
           </a:p>
         </p:txBody>
@@ -12482,7 +12777,7 @@
         <p:spPr>
           <a:xfrm>
             <a:off x="565150" y="339090"/>
-            <a:ext cx="10309225" cy="612775"/>
+            <a:ext cx="5206718" cy="612775"/>
           </a:xfrm>
         </p:spPr>
         <p:txBody>
@@ -12574,7 +12869,65 @@
                 <a:ea typeface="微软雅黑" charset="-122"/>
                 <a:sym typeface="+mn-ea"/>
               </a:rPr>
-              <a:t>预测辅助移动性管理：连接无线状态预测、切换条件与实测监测</a:t>
+              <a:t>苹果专利：预测辅助移动性管理</a:t>
+            </a:r>
+            <a:r>
+              <a:rPr lang="zh-CN" altLang="en-US" b="1" dirty="0">
+                <a:solidFill>
+                  <a:schemeClr val="tx1"/>
+                </a:solidFill>
+                <a:latin typeface="微软雅黑" charset="0"/>
+                <a:ea typeface="微软雅黑" charset="0"/>
+                <a:sym typeface="+mn-ea"/>
+              </a:rPr>
+              <a:t>——</a:t>
+            </a:r>
+            <a:r>
+              <a:rPr lang="zh-CN" altLang="en-US" b="1" dirty="0">
+                <a:solidFill>
+                  <a:schemeClr val="tx1"/>
+                </a:solidFill>
+                <a:latin typeface="微软雅黑" charset="-122"/>
+                <a:ea typeface="微软雅黑" charset="-122"/>
+                <a:sym typeface="+mn-ea"/>
+              </a:rPr>
+              <a:t>连接无线状态预测、切换条件与实测监测</a:t>
+            </a:r>
+            <a:r>
+              <a:rPr lang="en-US" altLang="zh-CN" b="1" baseline="30000" dirty="0">
+                <a:solidFill>
+                  <a:srgbClr val="000000"/>
+                </a:solidFill>
+                <a:latin typeface="微软雅黑" charset="-122"/>
+                <a:ea typeface="微软雅黑" charset="-122"/>
+                <a:cs typeface="+mn-ea"/>
+                <a:sym typeface="+mn-ea"/>
+              </a:rPr>
+              <a:t>[</a:t>
+            </a:r>
+            <a:r>
+              <a:rPr lang="en-US" altLang="zh-CN" b="1" baseline="30000" dirty="0">
+                <a:solidFill>
+                  <a:srgbClr val="000000"/>
+                </a:solidFill>
+                <a:latin typeface="微软雅黑" charset="0"/>
+                <a:ea typeface="微软雅黑" charset="0"/>
+                <a:cs typeface="+mn-ea"/>
+                <a:sym typeface="+mn-ea"/>
+              </a:rPr>
+              <a:t>3</a:t>
+            </a:r>
+            <a:r>
+              <a:rPr lang="en-US" altLang="zh-CN" b="1" baseline="30000" dirty="0">
+                <a:solidFill>
+                  <a:srgbClr val="000000"/>
+                </a:solidFill>
+                <a:latin typeface="微软雅黑" charset="-122"/>
+                <a:ea typeface="微软雅黑" charset="-122"/>
+                <a:cs typeface="+mn-ea"/>
+                <a:sym typeface="+mn-ea"/>
+              </a:rPr>
+              <a:t>]</a:t>
             </a:r>
             <a:endParaRPr lang="zh-CN" altLang="en-US" b="1" dirty="0">
               <a:solidFill>
@@ -13160,6 +13513,42 @@
               <a:latin typeface="微软雅黑" charset="-122"/>
               <a:ea typeface="微软雅黑" charset="-122"/>
               <a:sym typeface="+mn-ea"/>
+            </a:endParaRPr>
+          </a:p>
+        </p:txBody>
+      </p:sp>
+      <p:sp>
+        <p:nvSpPr>
+          <p:cNvPr id="3" name="文本框 2"/>
+          <p:cNvSpPr txBox="1"/>
+          <p:nvPr userDrawn="1"/>
+        </p:nvSpPr>
+        <p:spPr>
+          <a:xfrm>
+            <a:off x="6696846" y="324566"/>
+            <a:ext cx="4145593" cy="641803"/>
+          </a:xfrm>
+          <a:prstGeom prst="rect">
+            <a:avLst/>
+          </a:prstGeom>
+        </p:spPr>
+        <p:txBody>
+          <a:bodyPr wrap="square" rtlCol="0">
+            <a:noAutofit/>
+          </a:bodyPr>
+          <a:p>
+            <a:r>
+              <a:rPr lang="en-US" altLang="zh-CN" sz="1200">
+                <a:latin typeface="Times New Roman" panose="02020603050405020304" charset="0"/>
+                <a:ea typeface="Times New Roman" panose="02020603050405020304" charset="0"/>
+                <a:cs typeface="Times New Roman" panose="02020603050405020304" charset="0"/>
+              </a:rPr>
+              <a:t>[3] APPLE INC. Systems and methods for predictive measurements for artificial intelligence/machine learning based mobility enhancement: WO2025043703A1[P]. 2025-03-06.</a:t>
+            </a:r>
+            <a:endParaRPr lang="en-US" altLang="zh-CN" sz="1200">
+              <a:latin typeface="Times New Roman" panose="02020603050405020304" charset="0"/>
+              <a:ea typeface="Times New Roman" panose="02020603050405020304" charset="0"/>
+              <a:cs typeface="Times New Roman" panose="02020603050405020304" charset="0"/>
             </a:endParaRPr>
           </a:p>
         </p:txBody>
@@ -13200,7 +13589,7 @@
         <p:spPr>
           <a:xfrm>
             <a:off x="565150" y="339090"/>
-            <a:ext cx="10309225" cy="612775"/>
+            <a:ext cx="5491781" cy="612775"/>
           </a:xfrm>
         </p:spPr>
         <p:txBody>
@@ -13303,7 +13692,65 @@
                 <a:ea typeface="微软雅黑" charset="-122"/>
                 <a:sym typeface="+mn-ea"/>
               </a:rPr>
-              <a:t>苹果部署后验证：检查模型适用性与预测表现，动态管理使用状态</a:t>
+              <a:t>苹果专利：部署后验证</a:t>
+            </a:r>
+            <a:r>
+              <a:rPr lang="zh-CN" altLang="en-US" b="1" dirty="0">
+                <a:solidFill>
+                  <a:schemeClr val="tx1"/>
+                </a:solidFill>
+                <a:latin typeface="微软雅黑" charset="0"/>
+                <a:ea typeface="微软雅黑" charset="0"/>
+                <a:sym typeface="+mn-ea"/>
+              </a:rPr>
+              <a:t>——</a:t>
+            </a:r>
+            <a:r>
+              <a:rPr lang="zh-CN" altLang="en-US" b="1" dirty="0">
+                <a:solidFill>
+                  <a:schemeClr val="tx1"/>
+                </a:solidFill>
+                <a:latin typeface="微软雅黑" charset="-122"/>
+                <a:ea typeface="微软雅黑" charset="-122"/>
+                <a:sym typeface="+mn-ea"/>
+              </a:rPr>
+              <a:t>检查模型适用性与预测表现，动态管理使用状态</a:t>
+            </a:r>
+            <a:r>
+              <a:rPr lang="en-US" altLang="zh-CN" b="1" baseline="30000" dirty="0">
+                <a:solidFill>
+                  <a:srgbClr val="000000"/>
+                </a:solidFill>
+                <a:latin typeface="微软雅黑" charset="-122"/>
+                <a:ea typeface="微软雅黑" charset="-122"/>
+                <a:cs typeface="+mn-ea"/>
+                <a:sym typeface="+mn-ea"/>
+              </a:rPr>
+              <a:t>[</a:t>
+            </a:r>
+            <a:r>
+              <a:rPr lang="en-US" altLang="zh-CN" b="1" baseline="30000" dirty="0">
+                <a:solidFill>
+                  <a:srgbClr val="000000"/>
+                </a:solidFill>
+                <a:latin typeface="微软雅黑" charset="0"/>
+                <a:ea typeface="微软雅黑" charset="0"/>
+                <a:cs typeface="+mn-ea"/>
+                <a:sym typeface="+mn-ea"/>
+              </a:rPr>
+              <a:t>4</a:t>
+            </a:r>
+            <a:r>
+              <a:rPr lang="en-US" altLang="zh-CN" b="1" baseline="30000" dirty="0">
+                <a:solidFill>
+                  <a:srgbClr val="000000"/>
+                </a:solidFill>
+                <a:latin typeface="微软雅黑" charset="-122"/>
+                <a:ea typeface="微软雅黑" charset="-122"/>
+                <a:cs typeface="+mn-ea"/>
+                <a:sym typeface="+mn-ea"/>
+              </a:rPr>
+              <a:t>]</a:t>
             </a:r>
             <a:endParaRPr lang="zh-CN" altLang="en-US" b="1" dirty="0">
               <a:solidFill>
@@ -14186,6 +14633,42 @@
               <a:latin typeface="微软雅黑" charset="-122"/>
               <a:ea typeface="微软雅黑" charset="-122"/>
               <a:sym typeface="+mn-ea"/>
+            </a:endParaRPr>
+          </a:p>
+        </p:txBody>
+      </p:sp>
+      <p:sp>
+        <p:nvSpPr>
+          <p:cNvPr id="3" name="文本框 2"/>
+          <p:cNvSpPr txBox="1"/>
+          <p:nvPr userDrawn="1"/>
+        </p:nvSpPr>
+        <p:spPr>
+          <a:xfrm>
+            <a:off x="6874657" y="324566"/>
+            <a:ext cx="3967782" cy="641803"/>
+          </a:xfrm>
+          <a:prstGeom prst="rect">
+            <a:avLst/>
+          </a:prstGeom>
+        </p:spPr>
+        <p:txBody>
+          <a:bodyPr wrap="square" rtlCol="0">
+            <a:noAutofit/>
+          </a:bodyPr>
+          <a:p>
+            <a:r>
+              <a:rPr lang="en-US" altLang="zh-CN" sz="1200">
+                <a:latin typeface="Times New Roman" panose="02020603050405020304" charset="0"/>
+                <a:ea typeface="Times New Roman" panose="02020603050405020304" charset="0"/>
+                <a:cs typeface="Times New Roman" panose="02020603050405020304" charset="0"/>
+              </a:rPr>
+              <a:t>[4] APPLE INC. Dynamic model management and post-deployment verification for beam management spatial prediction: US20260039366A1[P]. 2026-02-05.</a:t>
+            </a:r>
+            <a:endParaRPr lang="en-US" altLang="zh-CN" sz="1200">
+              <a:latin typeface="Times New Roman" panose="02020603050405020304" charset="0"/>
+              <a:ea typeface="Times New Roman" panose="02020603050405020304" charset="0"/>
+              <a:cs typeface="Times New Roman" panose="02020603050405020304" charset="0"/>
             </a:endParaRPr>
           </a:p>
         </p:txBody>
@@ -14226,7 +14709,7 @@
         <p:spPr>
           <a:xfrm>
             <a:off x="565150" y="339090"/>
-            <a:ext cx="10309225" cy="612775"/>
+            <a:ext cx="5507725" cy="612775"/>
           </a:xfrm>
         </p:spPr>
         <p:txBody>
@@ -14318,7 +14801,29 @@
                 <a:ea typeface="微软雅黑" charset="-122"/>
                 <a:sym typeface="+mn-ea"/>
               </a:rPr>
-              <a:t>苹果联合测试判据：同时检查波束身份与</a:t>
+              <a:t>苹果专利：联合测试判据</a:t>
+            </a:r>
+            <a:r>
+              <a:rPr lang="zh-CN" altLang="en-US" b="1" dirty="0">
+                <a:solidFill>
+                  <a:schemeClr val="tx1"/>
+                </a:solidFill>
+                <a:latin typeface="微软雅黑" charset="0"/>
+                <a:ea typeface="微软雅黑" charset="0"/>
+                <a:sym typeface="+mn-ea"/>
+              </a:rPr>
+              <a:t>——</a:t>
+            </a:r>
+            <a:r>
+              <a:rPr lang="zh-CN" altLang="en-US" b="1" dirty="0">
+                <a:solidFill>
+                  <a:schemeClr val="tx1"/>
+                </a:solidFill>
+                <a:latin typeface="微软雅黑" charset="-122"/>
+                <a:ea typeface="微软雅黑" charset="-122"/>
+                <a:sym typeface="+mn-ea"/>
+              </a:rPr>
+              <a:t>同时检查波束身份与</a:t>
             </a:r>
             <a:r>
               <a:rPr lang="en-US" altLang="zh-CN" b="1" dirty="0">
@@ -14341,6 +14846,42 @@
                 <a:sym typeface="+mn-ea"/>
               </a:rPr>
               <a:t>预测</a:t>
+            </a:r>
+            <a:r>
+              <a:rPr lang="en-US" altLang="zh-CN" b="1" baseline="30000" dirty="0">
+                <a:solidFill>
+                  <a:srgbClr val="000000"/>
+                </a:solidFill>
+                <a:latin typeface="微软雅黑" charset="-122"/>
+                <a:ea typeface="微软雅黑" charset="-122"/>
+                <a:cs typeface="+mn-ea"/>
+                <a:sym typeface="+mn-ea"/>
+              </a:rPr>
+              <a:t>[</a:t>
+            </a:r>
+            <a:r>
+              <a:rPr lang="en-US" altLang="zh-CN" b="1" baseline="30000" dirty="0">
+                <a:solidFill>
+                  <a:srgbClr val="000000"/>
+                </a:solidFill>
+                <a:latin typeface="微软雅黑" charset="0"/>
+                <a:ea typeface="微软雅黑" charset="0"/>
+                <a:cs typeface="+mn-ea"/>
+                <a:sym typeface="+mn-ea"/>
+              </a:rPr>
+              <a:t>5</a:t>
+            </a:r>
+            <a:r>
+              <a:rPr lang="en-US" altLang="zh-CN" b="1" baseline="30000" dirty="0">
+                <a:solidFill>
+                  <a:srgbClr val="000000"/>
+                </a:solidFill>
+                <a:latin typeface="微软雅黑" charset="-122"/>
+                <a:ea typeface="微软雅黑" charset="-122"/>
+                <a:cs typeface="+mn-ea"/>
+                <a:sym typeface="+mn-ea"/>
+              </a:rPr>
+              <a:t>]</a:t>
             </a:r>
             <a:endParaRPr lang="zh-CN" altLang="en-US" b="1" dirty="0">
               <a:solidFill>
@@ -14926,6 +15467,42 @@
               <a:latin typeface="微软雅黑" charset="-122"/>
               <a:ea typeface="微软雅黑" charset="-122"/>
               <a:sym typeface="+mn-ea"/>
+            </a:endParaRPr>
+          </a:p>
+        </p:txBody>
+      </p:sp>
+      <p:sp>
+        <p:nvSpPr>
+          <p:cNvPr id="3" name="文本框 2"/>
+          <p:cNvSpPr txBox="1"/>
+          <p:nvPr userDrawn="1"/>
+        </p:nvSpPr>
+        <p:spPr>
+          <a:xfrm>
+            <a:off x="6632607" y="324566"/>
+            <a:ext cx="4331389" cy="641803"/>
+          </a:xfrm>
+          <a:prstGeom prst="rect">
+            <a:avLst/>
+          </a:prstGeom>
+        </p:spPr>
+        <p:txBody>
+          <a:bodyPr wrap="square" rtlCol="0">
+            <a:noAutofit/>
+          </a:bodyPr>
+          <a:p>
+            <a:r>
+              <a:rPr lang="en-US" altLang="zh-CN" sz="1200">
+                <a:latin typeface="Times New Roman" panose="02020603050405020304" charset="0"/>
+                <a:ea typeface="Times New Roman" panose="02020603050405020304" charset="0"/>
+                <a:cs typeface="Times New Roman" panose="02020603050405020304" charset="0"/>
+              </a:rPr>
+              <a:t>[5] APPLE INC. Beam measurement accuracy test metric for artificial intelligence / machine language (AI/ML) based beam management: WO2025212462A1[P]. 2025-10-09.</a:t>
+            </a:r>
+            <a:endParaRPr lang="en-US" altLang="zh-CN" sz="1200">
+              <a:latin typeface="Times New Roman" panose="02020603050405020304" charset="0"/>
+              <a:ea typeface="Times New Roman" panose="02020603050405020304" charset="0"/>
+              <a:cs typeface="Times New Roman" panose="02020603050405020304" charset="0"/>
             </a:endParaRPr>
           </a:p>
         </p:txBody>
@@ -14966,7 +15543,7 @@
         <p:spPr>
           <a:xfrm>
             <a:off x="565150" y="339090"/>
-            <a:ext cx="10309225" cy="612775"/>
+            <a:ext cx="5539926" cy="612775"/>
           </a:xfrm>
         </p:spPr>
         <p:txBody>
@@ -15082,6 +15659,42 @@
               </a:rPr>
               <a:t>测试</a:t>
             </a:r>
+            <a:r>
+              <a:rPr lang="en-US" altLang="zh-CN" b="1" baseline="30000" dirty="0">
+                <a:solidFill>
+                  <a:srgbClr val="000000"/>
+                </a:solidFill>
+                <a:latin typeface="微软雅黑" charset="-122"/>
+                <a:ea typeface="微软雅黑" charset="-122"/>
+                <a:cs typeface="+mn-ea"/>
+                <a:sym typeface="+mn-ea"/>
+              </a:rPr>
+              <a:t>[</a:t>
+            </a:r>
+            <a:r>
+              <a:rPr lang="en-US" altLang="zh-CN" b="1" baseline="30000" dirty="0">
+                <a:solidFill>
+                  <a:srgbClr val="000000"/>
+                </a:solidFill>
+                <a:latin typeface="微软雅黑" charset="0"/>
+                <a:ea typeface="微软雅黑" charset="0"/>
+                <a:cs typeface="+mn-ea"/>
+                <a:sym typeface="+mn-ea"/>
+              </a:rPr>
+              <a:t>6</a:t>
+            </a:r>
+            <a:r>
+              <a:rPr lang="en-US" altLang="zh-CN" b="1" baseline="30000" dirty="0">
+                <a:solidFill>
+                  <a:srgbClr val="000000"/>
+                </a:solidFill>
+                <a:latin typeface="微软雅黑" charset="-122"/>
+                <a:ea typeface="微软雅黑" charset="-122"/>
+                <a:cs typeface="+mn-ea"/>
+                <a:sym typeface="+mn-ea"/>
+              </a:rPr>
+              <a:t>]</a:t>
+            </a:r>
             <a:endParaRPr lang="zh-CN" altLang="en-US" b="1" dirty="0">
               <a:solidFill>
                 <a:schemeClr val="tx1"/>
@@ -15776,6 +16389,42 @@
               <a:latin typeface="微软雅黑" charset="-122"/>
               <a:ea typeface="微软雅黑" charset="-122"/>
               <a:sym typeface="+mn-ea"/>
+            </a:endParaRPr>
+          </a:p>
+        </p:txBody>
+      </p:sp>
+      <p:sp>
+        <p:nvSpPr>
+          <p:cNvPr id="3" name="文本框 2"/>
+          <p:cNvSpPr txBox="1"/>
+          <p:nvPr userDrawn="1"/>
+        </p:nvSpPr>
+        <p:spPr>
+          <a:xfrm>
+            <a:off x="6401842" y="178864"/>
+            <a:ext cx="4537731" cy="787505"/>
+          </a:xfrm>
+          <a:prstGeom prst="rect">
+            <a:avLst/>
+          </a:prstGeom>
+        </p:spPr>
+        <p:txBody>
+          <a:bodyPr wrap="square" rtlCol="0">
+            <a:noAutofit/>
+          </a:bodyPr>
+          <a:p>
+            <a:r>
+              <a:rPr lang="en-US" altLang="zh-CN" sz="1200">
+                <a:latin typeface="Times New Roman" panose="02020603050405020304" charset="0"/>
+                <a:ea typeface="Times New Roman" panose="02020603050405020304" charset="0"/>
+                <a:cs typeface="Times New Roman" panose="02020603050405020304" charset="0"/>
+              </a:rPr>
+              <a:t>[6] TANG B, SHAH V K, MAROJEVIC V, et al. AI testing framework for Next-G O-RAN networks: Requirements, design, and research opportunities[J]. IEEE Wireless Communications, 2023, 30(1): 70-77. DOI: 10.1109/MWC.001.2200213.</a:t>
+            </a:r>
+            <a:endParaRPr lang="en-US" altLang="zh-CN" sz="1200">
+              <a:latin typeface="Times New Roman" panose="02020603050405020304" charset="0"/>
+              <a:ea typeface="Times New Roman" panose="02020603050405020304" charset="0"/>
+              <a:cs typeface="Times New Roman" panose="02020603050405020304" charset="0"/>
             </a:endParaRPr>
           </a:p>
         </p:txBody>
@@ -15816,7 +16465,7 @@
         <p:spPr>
           <a:xfrm>
             <a:off x="565150" y="339090"/>
-            <a:ext cx="10309225" cy="612775"/>
+            <a:ext cx="5538115" cy="612775"/>
           </a:xfrm>
         </p:spPr>
         <p:txBody>
@@ -15932,6 +16581,42 @@
               </a:rPr>
               <a:t>测试：构建可信的多波束环境，支撑预测评估</a:t>
             </a:r>
+            <a:r>
+              <a:rPr lang="en-US" altLang="zh-CN" b="1" baseline="30000" dirty="0">
+                <a:solidFill>
+                  <a:srgbClr val="000000"/>
+                </a:solidFill>
+                <a:latin typeface="微软雅黑" charset="-122"/>
+                <a:ea typeface="微软雅黑" charset="-122"/>
+                <a:cs typeface="+mn-ea"/>
+                <a:sym typeface="+mn-ea"/>
+              </a:rPr>
+              <a:t>[</a:t>
+            </a:r>
+            <a:r>
+              <a:rPr lang="en-US" altLang="zh-CN" b="1" baseline="30000" dirty="0">
+                <a:solidFill>
+                  <a:srgbClr val="000000"/>
+                </a:solidFill>
+                <a:latin typeface="微软雅黑" charset="0"/>
+                <a:ea typeface="微软雅黑" charset="0"/>
+                <a:cs typeface="+mn-ea"/>
+                <a:sym typeface="+mn-ea"/>
+              </a:rPr>
+              <a:t>7</a:t>
+            </a:r>
+            <a:r>
+              <a:rPr lang="en-US" altLang="zh-CN" b="1" baseline="30000" dirty="0">
+                <a:solidFill>
+                  <a:srgbClr val="000000"/>
+                </a:solidFill>
+                <a:latin typeface="微软雅黑" charset="-122"/>
+                <a:ea typeface="微软雅黑" charset="-122"/>
+                <a:cs typeface="+mn-ea"/>
+                <a:sym typeface="+mn-ea"/>
+              </a:rPr>
+              <a:t>]</a:t>
+            </a:r>
             <a:endParaRPr lang="zh-CN" altLang="en-US" b="1" dirty="0">
               <a:solidFill>
                 <a:schemeClr val="tx1"/>
@@ -16857,6 +17542,42 @@
               <a:latin typeface="微软雅黑" charset="-122"/>
               <a:ea typeface="微软雅黑" charset="-122"/>
               <a:sym typeface="+mn-ea"/>
+            </a:endParaRPr>
+          </a:p>
+        </p:txBody>
+      </p:sp>
+      <p:sp>
+        <p:nvSpPr>
+          <p:cNvPr id="3" name="文本框 2"/>
+          <p:cNvSpPr txBox="1"/>
+          <p:nvPr userDrawn="1"/>
+        </p:nvSpPr>
+        <p:spPr>
+          <a:xfrm>
+            <a:off x="6318584" y="162490"/>
+            <a:ext cx="4655541" cy="803879"/>
+          </a:xfrm>
+          <a:prstGeom prst="rect">
+            <a:avLst/>
+          </a:prstGeom>
+        </p:spPr>
+        <p:txBody>
+          <a:bodyPr wrap="square" rtlCol="0">
+            <a:noAutofit/>
+          </a:bodyPr>
+          <a:p>
+            <a:r>
+              <a:rPr lang="en-US" altLang="zh-CN" sz="1200">
+                <a:latin typeface="Times New Roman" panose="02020603050405020304" charset="0"/>
+                <a:ea typeface="Times New Roman" panose="02020603050405020304" charset="0"/>
+                <a:cs typeface="Times New Roman" panose="02020603050405020304" charset="0"/>
+              </a:rPr>
+              <a:t>[7] WANG Z, YAN M, ZHAO W, et al. Over-the-air testing on artificial intelligence-based beam management evaluation of millimeter-wave devices[J]. IEEE Transactions on Antennas and Propagation, 2026, 74(3): 2770-2781. DOI: 10.1109/TAP.2025.3637525.</a:t>
+            </a:r>
+            <a:endParaRPr lang="en-US" altLang="zh-CN" sz="1200">
+              <a:latin typeface="Times New Roman" panose="02020603050405020304" charset="0"/>
+              <a:ea typeface="Times New Roman" panose="02020603050405020304" charset="0"/>
+              <a:cs typeface="Times New Roman" panose="02020603050405020304" charset="0"/>
             </a:endParaRPr>
           </a:p>
         </p:txBody>

--- a/2026.10.10AI与通信融合研究进展调研三.pptx
+++ b/2026.10.10AI与通信融合研究进展调研三.pptx
@@ -12,12 +12,14 @@
     <p:sldId id="258" r:id="rId5"/>
     <p:sldId id="260" r:id="rId6"/>
     <p:sldId id="259" r:id="rId7"/>
-    <p:sldId id="261" r:id="rId8"/>
-    <p:sldId id="262" r:id="rId9"/>
-    <p:sldId id="263" r:id="rId10"/>
-    <p:sldId id="264" r:id="rId11"/>
-    <p:sldId id="265" r:id="rId12"/>
-    <p:sldId id="266" r:id="rId13"/>
+    <p:sldId id="267" r:id="rId8"/>
+    <p:sldId id="261" r:id="rId9"/>
+    <p:sldId id="269" r:id="rId10"/>
+    <p:sldId id="262" r:id="rId11"/>
+    <p:sldId id="263" r:id="rId12"/>
+    <p:sldId id="264" r:id="rId13"/>
+    <p:sldId id="265" r:id="rId14"/>
+    <p:sldId id="266" r:id="rId15"/>
   </p:sldIdLst>
   <p:sldSz cx="12192000" cy="6858000"/>
   <p:notesSz cx="6858000" cy="9144000"/>
@@ -543,6 +545,241 @@
   <p:cSld>
     <p:spTree>
       <p:nvGrpSpPr>
+        <p:cNvPr id="38" name=""/>
+        <p:cNvGrpSpPr/>
+        <p:nvPr/>
+      </p:nvGrpSpPr>
+      <p:grpSpPr>
+        <a:xfrm>
+          <a:off x="0" y="0"/>
+          <a:ext cx="0" cy="0"/>
+          <a:chOff x="0" y="0"/>
+          <a:chExt cx="0" cy="0"/>
+        </a:xfrm>
+      </p:grpSpPr>
+      <p:sp>
+        <p:nvSpPr>
+          <p:cNvPr id="39" name="幻灯片图像占位符 1"/>
+          <p:cNvSpPr/>
+          <p:nvPr>
+            <p:ph type="sldImg" idx="2"/>
+          </p:nvPr>
+        </p:nvSpPr>
+        <p:spPr/>
+        <p:txBody>
+          <a:bodyPr/>
+          <a:p/>
+        </p:txBody>
+      </p:sp>
+      <p:sp>
+        <p:nvSpPr>
+          <p:cNvPr id="40" name="文本占位符 2"/>
+          <p:cNvSpPr/>
+          <p:nvPr>
+            <p:ph type="body" idx="3"/>
+          </p:nvPr>
+        </p:nvSpPr>
+        <p:spPr/>
+        <p:txBody>
+          <a:bodyPr/>
+          <a:p>
+            <a:r>
+              <a:rPr lang="zh-CN" altLang="en-US" sz="1800">
+                <a:solidFill>
+                  <a:schemeClr val="tx1"/>
+                </a:solidFill>
+              </a:rPr>
+              <a:t>这一篇进一步帮助我们理解怎样组织测试。它主要面向网络侧控制应用。关注怎样把通信 </a:t>
+            </a:r>
+            <a:r>
+              <a:rPr lang="en-US" altLang="zh-CN" sz="1800">
+                <a:solidFill>
+                  <a:schemeClr val="tx1"/>
+                </a:solidFill>
+              </a:rPr>
+              <a:t>AI </a:t>
+            </a:r>
+            <a:r>
+              <a:rPr lang="zh-CN" altLang="en-US" sz="1800">
+                <a:solidFill>
+                  <a:schemeClr val="tx1"/>
+                </a:solidFill>
+              </a:rPr>
+              <a:t>测试组织成一套能重复运行的系统。测试人员先配置场景和步骤，服务器再统一分发任务，由执行节点施加测试条件并收集反馈。这样，模型更新前后可以在相同用例下进行比较，也方便复现已经发现的问题。</a:t>
+            </a:r>
+            <a:endParaRPr lang="zh-CN" altLang="en-US" sz="1800">
+              <a:solidFill>
+                <a:schemeClr val="tx1"/>
+              </a:solidFill>
+            </a:endParaRPr>
+          </a:p>
+          <a:p>
+            <a:r>
+              <a:rPr lang="zh-CN" altLang="en-US" sz="1800">
+                <a:solidFill>
+                  <a:schemeClr val="tx1"/>
+                </a:solidFill>
+              </a:rPr>
+              <a:t>框架还引入测试侧 </a:t>
+            </a:r>
+            <a:r>
+              <a:rPr lang="en-US" altLang="zh-CN" sz="1800">
+                <a:solidFill>
+                  <a:schemeClr val="tx1"/>
+                </a:solidFill>
+              </a:rPr>
+              <a:t>AI</a:t>
+            </a:r>
+            <a:r>
+              <a:rPr lang="zh-CN" altLang="en-US" sz="1800">
+                <a:solidFill>
+                  <a:schemeClr val="tx1"/>
+                </a:solidFill>
+              </a:rPr>
+              <a:t>，尝试根据反馈寻找容易失效的输入。被测 </a:t>
+            </a:r>
+            <a:r>
+              <a:rPr lang="en-US" altLang="zh-CN" sz="1800">
+                <a:solidFill>
+                  <a:schemeClr val="tx1"/>
+                </a:solidFill>
+              </a:rPr>
+              <a:t>AI </a:t>
+            </a:r>
+            <a:r>
+              <a:rPr lang="zh-CN" altLang="en-US" sz="1800">
+                <a:solidFill>
+                  <a:schemeClr val="tx1"/>
+                </a:solidFill>
+              </a:rPr>
+              <a:t>负责通信决策，测试侧 </a:t>
+            </a:r>
+            <a:r>
+              <a:rPr lang="en-US" altLang="zh-CN" sz="1800">
+                <a:solidFill>
+                  <a:schemeClr val="tx1"/>
+                </a:solidFill>
+              </a:rPr>
+              <a:t>AI </a:t>
+            </a:r>
+            <a:r>
+              <a:rPr lang="zh-CN" altLang="en-US" sz="1800">
+                <a:solidFill>
+                  <a:schemeClr val="tx1"/>
+                </a:solidFill>
+              </a:rPr>
+              <a:t>负责探索测试场景。</a:t>
+            </a:r>
+            <a:endParaRPr lang="zh-CN" altLang="en-US"/>
+          </a:p>
+        </p:txBody>
+      </p:sp>
+    </p:spTree>
+  </p:cSld>
+  <p:clrMapOvr>
+    <a:masterClrMapping/>
+  </p:clrMapOvr>
+</p:notes>
+</file>
+
+<file path=ppt/notesSlides/notesSlide11.xml><?xml version="1.0" encoding="utf-8"?>
+<p:notes xmlns:a="http://schemas.openxmlformats.org/drawingml/2006/main" xmlns:r="http://schemas.openxmlformats.org/officeDocument/2006/relationships" xmlns:p="http://schemas.openxmlformats.org/presentationml/2006/main">
+  <p:cSld>
+    <p:spTree>
+      <p:nvGrpSpPr>
+        <p:cNvPr id="38" name=""/>
+        <p:cNvGrpSpPr/>
+        <p:nvPr/>
+      </p:nvGrpSpPr>
+      <p:grpSpPr>
+        <a:xfrm>
+          <a:off x="0" y="0"/>
+          <a:ext cx="0" cy="0"/>
+          <a:chOff x="0" y="0"/>
+          <a:chExt cx="0" cy="0"/>
+        </a:xfrm>
+      </p:grpSpPr>
+      <p:sp>
+        <p:nvSpPr>
+          <p:cNvPr id="39" name="幻灯片图像占位符 1"/>
+          <p:cNvSpPr/>
+          <p:nvPr>
+            <p:ph type="sldImg" idx="2"/>
+          </p:nvPr>
+        </p:nvSpPr>
+        <p:spPr/>
+        <p:txBody>
+          <a:bodyPr/>
+          <a:p/>
+        </p:txBody>
+      </p:sp>
+      <p:sp>
+        <p:nvSpPr>
+          <p:cNvPr id="40" name="文本占位符 2"/>
+          <p:cNvSpPr/>
+          <p:nvPr>
+            <p:ph type="body" idx="3"/>
+          </p:nvPr>
+        </p:nvSpPr>
+        <p:spPr/>
+        <p:txBody>
+          <a:bodyPr/>
+          <a:p>
+            <a:r>
+              <a:rPr lang="zh-CN" altLang="en-US" sz="1800">
+                <a:solidFill>
+                  <a:schemeClr val="tx1"/>
+                </a:solidFill>
+              </a:rPr>
+              <a:t>最后一篇直接关注终端波束预测怎样在无线实验室中验证。模型只测部分波束，却要推断其他候选，因此实验室不仅要提供输入，还要准确呈现用于核验预测的无线环境。</a:t>
+            </a:r>
+            <a:endParaRPr lang="zh-CN" altLang="en-US" sz="1800">
+              <a:solidFill>
+                <a:schemeClr val="tx1"/>
+              </a:solidFill>
+            </a:endParaRPr>
+          </a:p>
+          <a:p>
+            <a:r>
+              <a:rPr lang="zh-CN" altLang="en-US" sz="1800">
+                <a:solidFill>
+                  <a:schemeClr val="tx1"/>
+                </a:solidFill>
+              </a:rPr>
+              <a:t>作者考虑不同发射波束对传播路径的影响，在多探头暗室中重建相应信道，并提出完整覆盖和针对指定用例的两种方案。评价时先用 BPSP 检查环境重建质量，再看模型是否预测对最佳波束。</a:t>
+            </a:r>
+            <a:endParaRPr lang="zh-CN" altLang="en-US" sz="1800">
+              <a:solidFill>
+                <a:schemeClr val="tx1"/>
+              </a:solidFill>
+            </a:endParaRPr>
+          </a:p>
+          <a:p>
+            <a:r>
+              <a:rPr lang="zh-CN" altLang="en-US" sz="1800">
+                <a:solidFill>
+                  <a:schemeClr val="tx1"/>
+                </a:solidFill>
+              </a:rPr>
+              <a:t>本文既有暗室实测，也有模型验证。方案 B 的测量数据预测准确率达到 93.5%，接近 97.7% 的仿真基准。</a:t>
+            </a:r>
+            <a:endParaRPr lang="zh-CN" altLang="en-US"/>
+          </a:p>
+        </p:txBody>
+      </p:sp>
+    </p:spTree>
+  </p:cSld>
+  <p:clrMapOvr>
+    <a:masterClrMapping/>
+  </p:clrMapOvr>
+</p:notes>
+</file>
+
+<file path=ppt/notesSlides/notesSlide12.xml><?xml version="1.0" encoding="utf-8"?>
+<p:notes xmlns:a="http://schemas.openxmlformats.org/drawingml/2006/main" xmlns:r="http://schemas.openxmlformats.org/officeDocument/2006/relationships" xmlns:p="http://schemas.openxmlformats.org/presentationml/2006/main">
+  <p:cSld>
+    <p:spTree>
+      <p:nvGrpSpPr>
         <p:cNvPr id="1" name=""/>
         <p:cNvGrpSpPr/>
         <p:nvPr/>
@@ -789,7 +1026,7 @@
                   <a:schemeClr val="tx1"/>
                 </a:solidFill>
               </a:rPr>
-              <a:t>第二篇进入通信协议栈，研究不同业务应该映射到哪个无线承载。模型结合业务要求和承载状态作选择，再利用实际 QoS 反馈改进策略。</a:t>
+              <a:t>第二篇关注手机同时运行多种业务时，怎样选择合适的无线承载。我们知道实时通话重视低时延，视频传输则需要足够的吞吐量，后台上传则可以容忍一定等待。5G 将数据组织为具有不同服务质量要求的 QoS 流，再映射到数据无线承载，多个流也可以共用一个承载。</a:t>
             </a:r>
             <a:endParaRPr lang="zh-CN" altLang="en-US" sz="1800">
               <a:solidFill>
@@ -804,7 +1041,22 @@
                   <a:schemeClr val="tx1"/>
                 </a:solidFill>
               </a:rPr>
-              <a:t>这里要理解，承载映射改变的是数据的传输组织方式，效果还需要调度和无线资源配合。因此，验证应先确认映射正确可执行，再检查各类业务是否真正达标。还要观察业务新增、承载释放和输入缺失时能否及时调整，避免只看到奖励提高，却忽略实际业务退化。</a:t>
+              <a:t>苹果提出利用深度 Q 网络，结合业务要求、当前映射及承载运行状态，选择流与承载的对应关系，并在训练中利用实际吞吐量、时延等反馈改进策略。业务或承载发生变化时，模型可以重新选择；信息不足时向网络请求补充，模型不可用时采用固定映射。</a:t>
+            </a:r>
+            <a:endParaRPr lang="zh-CN" altLang="en-US" sz="1800">
+              <a:solidFill>
+                <a:schemeClr val="tx1"/>
+              </a:solidFill>
+            </a:endParaRPr>
+          </a:p>
+          <a:p>
+            <a:r>
+              <a:rPr lang="zh-CN" altLang="en-US" sz="1800">
+                <a:solidFill>
+                  <a:schemeClr val="tx1"/>
+                </a:solidFill>
+              </a:rPr>
+              <a:t>其价值在于让承载选择适应业务和网络变化，但尚未提供量化收益。验证时应确认映射可执行，并检查各类业务是否真正达标。</a:t>
             </a:r>
             <a:endParaRPr lang="zh-CN" altLang="en-US"/>
           </a:p>
@@ -823,36 +1075,29 @@
   <p:cSld>
     <p:spTree>
       <p:nvGrpSpPr>
-        <p:cNvPr id="38" name=""/>
+        <p:cNvPr id="1" name=""/>
         <p:cNvGrpSpPr/>
         <p:nvPr/>
       </p:nvGrpSpPr>
-      <p:grpSpPr>
-        <a:xfrm>
-          <a:off x="0" y="0"/>
-          <a:ext cx="0" cy="0"/>
-          <a:chOff x="0" y="0"/>
-          <a:chExt cx="0" cy="0"/>
-        </a:xfrm>
-      </p:grpSpPr>
+      <p:grpSpPr/>
       <p:sp>
         <p:nvSpPr>
-          <p:cNvPr id="39" name="幻灯片图像占位符 1"/>
-          <p:cNvSpPr/>
+          <p:cNvPr id="2" name="幻灯片图像占位符 1"/>
+          <p:cNvSpPr>
+            <a:spLocks noGrp="1"/>
+          </p:cNvSpPr>
           <p:nvPr>
             <p:ph type="sldImg" idx="2"/>
           </p:nvPr>
         </p:nvSpPr>
         <p:spPr/>
-        <p:txBody>
-          <a:bodyPr/>
-          <a:p/>
-        </p:txBody>
       </p:sp>
       <p:sp>
         <p:nvSpPr>
-          <p:cNvPr id="40" name="文本占位符 2"/>
-          <p:cNvSpPr/>
+          <p:cNvPr id="3" name="文本占位符 2"/>
+          <p:cNvSpPr>
+            <a:spLocks noGrp="1"/>
+          </p:cNvSpPr>
           <p:nvPr>
             <p:ph type="body" idx="3"/>
           </p:nvPr>
@@ -862,27 +1107,24 @@
           <a:bodyPr/>
           <a:p>
             <a:r>
-              <a:rPr lang="zh-CN" altLang="en-US" sz="1800">
-                <a:solidFill>
-                  <a:schemeClr val="tx1"/>
-                </a:solidFill>
-              </a:rPr>
-              <a:t>第三篇研究无线测量预测怎样参与切换。它既包括预测未来状态，也包括利用邻近波束补充另一波束的信息，网络再配置这些预测如何用于条件判断。</a:t>
-            </a:r>
-            <a:endParaRPr lang="zh-CN" altLang="en-US" sz="1800">
-              <a:solidFill>
-                <a:schemeClr val="tx1"/>
-              </a:solidFill>
-            </a:endParaRPr>
-          </a:p>
-          <a:p>
-            <a:r>
-              <a:rPr lang="zh-CN" altLang="en-US" sz="1800">
-                <a:solidFill>
-                  <a:schemeClr val="tx1"/>
-                </a:solidFill>
-              </a:rPr>
-              <a:t>预测准确性和切换效果需要分别观察，再建立关联。误差如果出现在门限附近，可能改变触发时机；即使预测准确，接入过程仍可能失败。因此，测试要对齐预测对象和目标时间，跟踪后续切换结果，并检查失准后能否恢复有效测量，在可靠性收益与测量开销之间作评价。</a:t>
+              <a:rPr lang="zh-CN" altLang="en-US"/>
+              <a:t>这张图展示承载映射策略怎样通过交互学习。左边是终端，中间是基站，右边举例说明一个 </a:t>
+            </a:r>
+            <a:r>
+              <a:rPr lang="en-US" altLang="zh-CN"/>
+              <a:t>QoS </a:t>
+            </a:r>
+            <a:r>
+              <a:rPr lang="zh-CN" altLang="en-US"/>
+              <a:t>流从原承载调整到另一承载。终端先根据当前状态选择动作，基站检测映射变化，再根据实际 </a:t>
+            </a:r>
+            <a:r>
+              <a:rPr lang="en-US" altLang="zh-CN"/>
+              <a:t>QoS </a:t>
+            </a:r>
+            <a:r>
+              <a:rPr lang="zh-CN" altLang="en-US"/>
+              <a:t>表现返回奖励。终端利用反馈更新模型，并继续尝试和评价后续选择。图中的循环表示多次训练交互，使模型逐步学会怎样选择承载；训练完成后的运行推理，则利用已学到的模型作决策。</a:t>
             </a:r>
             <a:endParaRPr lang="zh-CN" altLang="en-US"/>
           </a:p>
@@ -945,37 +1187,7 @@
                   <a:schemeClr val="tx1"/>
                 </a:solidFill>
               </a:rPr>
-              <a:t>这一篇关注模型部署后的可靠使用。它把评价分成几个层次：先看当前环境和输入是否适合模型，再检查输出有没有异常，最后取得对应实测结果，判断预测准确性。</a:t>
-            </a:r>
-            <a:endParaRPr lang="zh-CN" altLang="en-US" sz="1800">
-              <a:solidFill>
-                <a:schemeClr val="tx1"/>
-              </a:solidFill>
-            </a:endParaRPr>
-          </a:p>
-          <a:p>
-            <a:r>
-              <a:rPr lang="zh-CN" altLang="en-US" sz="1800">
-                <a:solidFill>
-                  <a:schemeClr val="tx1"/>
-                </a:solidFill>
-              </a:rPr>
-              <a:t>这样做可以帮助区分错误来源。例如，环境已经超出模型适用范围时，需要先处理适用性问题；如果条件正常，但预测与实测持续不一致，则需要进一步关注模型性能。测试结论应说明模型在什么条件下有效，以及问题出现在哪一个环节。</a:t>
-            </a:r>
-            <a:endParaRPr lang="zh-CN" altLang="en-US" sz="1800">
-              <a:solidFill>
-                <a:schemeClr val="tx1"/>
-              </a:solidFill>
-            </a:endParaRPr>
-          </a:p>
-          <a:p>
-            <a:r>
-              <a:rPr lang="zh-CN" altLang="en-US" sz="1800">
-                <a:solidFill>
-                  <a:schemeClr val="tx1"/>
-                </a:solidFill>
-              </a:rPr>
-              <a:t>启用与验证分开管理也便于测试候选模型。候选可以先产生评估结果，积累依据，再决定怎样使用。实施时还要关注回退是否有效，以及补充测量的频率和成本。最终需要形成能够追溯到模型版本和运行条件的验证记录。</a:t>
+              <a:t>第三篇关注手机移动过程中，怎样利用无线测量预测辅助切换。已有的测量反映的是过去或当前状态，而实际切换时，无线环境可能已经变化。苹果提出了两类预测：一类是根据已有测量估计后续时刻的信号状态，另一类是利用邻近波束推断其他波束的信息，为移动性管理提供更及时、完整的依据。网络通过配置决定这些预测能否参与切换条件判断，以及需要达到怎样的可靠程度。同时，终端或网络利用对应实测监测预测误差，失准时停止或切换模型，恢复实际测量。验证时，需要把预测准确性与实际切换结果结合起来观察。</a:t>
             </a:r>
             <a:endParaRPr lang="zh-CN" altLang="en-US"/>
           </a:p>
@@ -994,36 +1206,29 @@
   <p:cSld>
     <p:spTree>
       <p:nvGrpSpPr>
-        <p:cNvPr id="38" name=""/>
+        <p:cNvPr id="1" name=""/>
         <p:cNvGrpSpPr/>
         <p:nvPr/>
       </p:nvGrpSpPr>
-      <p:grpSpPr>
-        <a:xfrm>
-          <a:off x="0" y="0"/>
-          <a:ext cx="0" cy="0"/>
-          <a:chOff x="0" y="0"/>
-          <a:chExt cx="0" cy="0"/>
-        </a:xfrm>
-      </p:grpSpPr>
+      <p:grpSpPr/>
       <p:sp>
         <p:nvSpPr>
-          <p:cNvPr id="39" name="幻灯片图像占位符 1"/>
-          <p:cNvSpPr/>
+          <p:cNvPr id="2" name="幻灯片图像占位符 1"/>
+          <p:cNvSpPr>
+            <a:spLocks noGrp="1"/>
+          </p:cNvSpPr>
           <p:nvPr>
             <p:ph type="sldImg" idx="2"/>
           </p:nvPr>
         </p:nvSpPr>
         <p:spPr/>
-        <p:txBody>
-          <a:bodyPr/>
-          <a:p/>
-        </p:txBody>
       </p:sp>
       <p:sp>
         <p:nvSpPr>
-          <p:cNvPr id="40" name="文本占位符 2"/>
-          <p:cNvSpPr/>
+          <p:cNvPr id="3" name="文本占位符 2"/>
+          <p:cNvSpPr>
+            <a:spLocks noGrp="1"/>
+          </p:cNvSpPr>
           <p:nvPr>
             <p:ph type="body" idx="3"/>
           </p:nvPr>
@@ -1034,28 +1239,7 @@
           <a:p>
             <a:r>
               <a:rPr lang="zh-CN" altLang="en-US"/>
-              <a:t>这一篇主要回答波束预测怎样才算合格。模型可能既输出波束身份，又输出功率，因此评价要与实际使用的信息对应。</a:t>
-            </a:r>
-            <a:endParaRPr lang="zh-CN" altLang="en-US"/>
-          </a:p>
-          <a:p>
-            <a:r>
-              <a:rPr lang="zh-CN" altLang="en-US"/>
-              <a:t>例如，模型选出了正确波束，但对功率明显高估。如果只看波束命中率，这个问题就可能被遗漏。后续功能如果还会使用功率预测，就需要把它纳入验证。</a:t>
-            </a:r>
-            <a:endParaRPr lang="zh-CN" altLang="en-US"/>
-          </a:p>
-          <a:p>
-            <a:r>
-              <a:rPr lang="zh-CN" altLang="en-US"/>
-              <a:t>专利通过二维容差框联合检查这两个结果，并允许按候选优先级配置条件。测试报告既要给出联合结论，也要保留身份和功率各自的误差。这样，失败时才能解释究竟是哪一项不满足要求。</a:t>
-            </a:r>
-            <a:endParaRPr lang="zh-CN" altLang="en-US"/>
-          </a:p>
-          <a:p>
-            <a:r>
-              <a:rPr lang="zh-CN" altLang="en-US"/>
-              <a:t>实施时还需要统一参考和复测条件。特别是编号是否对应相近方向，要由码本决定；预测与测量也需要配对，避免将无线变化造成的差异全部归因于模型。</a:t>
+              <a:t>这张图从上到下展示预测模型如何投入使用。左边是终端侧服务器，中间是手机，右边是基站。手机先报告预测能力，按照网络配置采集数据，并由服务器完成图示的离线训练。模型准备好后，手机通知网络，由网络选择并激活模型。随后，预测在手机上运行，手机按配置上报实际或预测测量。流程下半部分是性能监控：终端或网络将预测与对应实测比较，必要时切换或停用模型，恢复传统测量报告。（这个讲完记得停一下等老板指示）</a:t>
             </a:r>
             <a:endParaRPr lang="zh-CN" altLang="en-US"/>
           </a:p>
@@ -1118,7 +1302,24 @@
                   <a:schemeClr val="tx1"/>
                 </a:solidFill>
               </a:rPr>
-              <a:t>前两篇说明验证什么，OAIC-T 进一步帮助我们理解怎样组织测试。它主要面向网络侧控制应用，所以这里借鉴的是平台设计。</a:t>
+              <a:t>然后是</a:t>
+            </a:r>
+            <a:r>
+              <a:rPr lang="zh-CN" altLang="en-US" sz="1800">
+                <a:solidFill>
+                  <a:schemeClr val="tx1"/>
+                </a:solidFill>
+                <a:cs typeface="Arial" panose="020B0604020202020204" pitchFamily="34" charset="0"/>
+              </a:rPr>
+              <a:t>方向二</a:t>
+            </a:r>
+            <a:r>
+              <a:rPr lang="zh-CN" altLang="en-US" sz="1800">
+                <a:solidFill>
+                  <a:schemeClr val="tx1"/>
+                </a:solidFill>
+              </a:rPr>
+              <a:t>关注的是，波束预测模型部署到手机后，怎样判断它还能不能可靠地参与通信。环境发生变化时，过去表现良好的模型也可能失准，因此需要在运行中继续检查。</a:t>
             </a:r>
             <a:endParaRPr lang="zh-CN" altLang="en-US" sz="1800">
               <a:solidFill>
@@ -1133,7 +1334,7 @@
                   <a:schemeClr val="tx1"/>
                 </a:solidFill>
               </a:rPr>
-              <a:t>测试需要保存的不只是最终指标，还包括环境配置和执行步骤。例如，某个请求组合触发了异常，只有保留对应条件，之后才能重复验证。服务器统一安排任务，Actor 完成具体交互，脚本和日志将过程记录下来。</a:t>
+              <a:t>苹果把监测分为三个层面：先判断当前输入和环境是否适合模型，再检查预测输出有没有异常，随后通过基站配合取得对应波束的实测结果，核验预测准确性。这三层检查分别回答“是否适用”“是否异常”和“是否准确”。</a:t>
             </a:r>
             <a:endParaRPr lang="zh-CN" altLang="en-US" sz="1800">
               <a:solidFill>
@@ -1148,7 +1349,7 @@
                   <a:schemeClr val="tx1"/>
                 </a:solidFill>
               </a:rPr>
-              <a:t>迁移到终端时，可以把读取测量、获取模型输出、取得参考和计算误差写成动作，再逐步开发终端及仪表接口。第一步可以先保证测试可重复、结果可追溯，再加入更主动的场景搜索。代码已经公开，但具体能力仍要结合版本核查，不能将论文讨论的所有方法都视为完整实现。</a:t>
+              <a:t>方案还区分模型评估与实际使用。候选模型可以先运行并接受验证，输出暂不影响通信，再根据结果决定是否采用。这篇的主要价值就是为模型持续使用和替换提供依据。</a:t>
             </a:r>
             <a:endParaRPr lang="zh-CN" altLang="en-US"/>
           </a:p>
@@ -1211,7 +1412,7 @@
                   <a:schemeClr val="tx1"/>
                 </a:solidFill>
               </a:rPr>
-              <a:t>最后一篇关注测试环境本身。模型在实验室表现下降时，需要判断是模型问题，还是测试装置没有准确呈现规定的无线条件。</a:t>
+              <a:t>这一篇进一步关注，怎样判断波束预测模型的输出是否合格。这里有两件事需要同时检查：一是候选波束选得对不对，二是对应的功率预测准不准。选中了正确波束，并不代表功率估计可靠；某个波束的功率预测较准，也不能说明候选排序正确。</a:t>
             </a:r>
             <a:endParaRPr lang="zh-CN" altLang="en-US" sz="1800">
               <a:solidFill>
@@ -1226,37 +1427,7 @@
                   <a:schemeClr val="tx1"/>
                 </a:solidFill>
               </a:rPr>
-              <a:t>论文针对快速波束扫描，提前选择固定探头，由信道模拟器处理不同波束对应的环境。它先检查逐波束的重建质量，再使用实测数据验证模型，因此能够分别观察环境和预测表现。</a:t>
-            </a:r>
-            <a:endParaRPr lang="zh-CN" altLang="en-US" sz="1800">
-              <a:solidFill>
-                <a:schemeClr val="tx1"/>
-              </a:solidFill>
-            </a:endParaRPr>
-          </a:p>
-          <a:p>
-            <a:r>
-              <a:rPr lang="zh-CN" altLang="en-US" sz="1800">
-                <a:solidFill>
-                  <a:schemeClr val="tx1"/>
-                </a:solidFill>
-              </a:rPr>
-              <a:t>方法 A 支持更广的波束配置，方法 B 则围绕已知输入和目标构建环境。实验中，同一个模型在两种环境下得到不同准确率，方法 B 更接近仿真基准。这提醒我们，模型对照必须保持参考条件一致，避免把环境差异误认为模型变化。</a:t>
-            </a:r>
-            <a:endParaRPr lang="zh-CN" altLang="en-US" sz="1800">
-              <a:solidFill>
-                <a:schemeClr val="tx1"/>
-              </a:solidFill>
-            </a:endParaRPr>
-          </a:p>
-          <a:p>
-            <a:r>
-              <a:rPr lang="zh-CN" altLang="en-US" sz="1800">
-                <a:solidFill>
-                  <a:schemeClr val="tx1"/>
-                </a:solidFill>
-              </a:rPr>
-              <a:t>这篇已有真实 OTA 依据，后续仍需接入终端接口和判定流程，才能形成完整的验收系统。</a:t>
+              <a:t>苹果提出将波束标识和接收功率放在两个维度上，设置共同的容差范围，再对实测与预测进行联合判断。方案还允许按候选排名配置不同容差，并在规定情况下再次测量，考虑无线信号的短时变化。这篇的价值是让验收依据更完整，具体门限仍需结合测试要求确定。</a:t>
             </a:r>
             <a:endParaRPr lang="zh-CN" altLang="en-US"/>
           </a:p>
@@ -9558,6 +9729,2278 @@
   <p:cSld>
     <p:spTree>
       <p:nvGrpSpPr>
+        <p:cNvPr id="87" name=""/>
+        <p:cNvGrpSpPr/>
+        <p:nvPr/>
+      </p:nvGrpSpPr>
+      <p:grpSpPr>
+        <a:xfrm>
+          <a:off x="0" y="0"/>
+          <a:ext cx="0" cy="0"/>
+          <a:chOff x="0" y="0"/>
+          <a:chExt cx="0" cy="0"/>
+        </a:xfrm>
+      </p:grpSpPr>
+      <p:sp>
+        <p:nvSpPr>
+          <p:cNvPr id="88" name="标题 1"/>
+          <p:cNvSpPr/>
+          <p:nvPr>
+            <p:ph type="title"/>
+          </p:nvPr>
+        </p:nvSpPr>
+        <p:spPr>
+          <a:xfrm>
+            <a:off x="565150" y="339090"/>
+            <a:ext cx="5539926" cy="612775"/>
+          </a:xfrm>
+        </p:spPr>
+        <p:txBody>
+          <a:bodyPr>
+            <a:noAutofit/>
+          </a:bodyPr>
+          <a:lstStyle/>
+          <a:p>
+            <a:r>
+              <a:rPr lang="zh-CN" altLang="en-US" sz="2800" b="1" dirty="0">
+                <a:latin typeface="微软雅黑" charset="-122"/>
+                <a:ea typeface="微软雅黑" charset="-122"/>
+                <a:sym typeface="+mn-ea"/>
+              </a:rPr>
+              <a:t>方向二：通信</a:t>
+            </a:r>
+            <a:r>
+              <a:rPr lang="en-US" altLang="zh-CN" sz="2800" b="1" dirty="0">
+                <a:latin typeface="微软雅黑" charset="-122"/>
+                <a:ea typeface="微软雅黑" charset="-122"/>
+                <a:sym typeface="+mn-ea"/>
+              </a:rPr>
+              <a:t> AI </a:t>
+            </a:r>
+            <a:r>
+              <a:rPr lang="zh-CN" altLang="en-US" sz="2800" b="1" dirty="0">
+                <a:latin typeface="微软雅黑" charset="-122"/>
+                <a:ea typeface="微软雅黑" charset="-122"/>
+                <a:sym typeface="+mn-ea"/>
+              </a:rPr>
+              <a:t>算法的测试验收</a:t>
+            </a:r>
+            <a:endParaRPr lang="zh-CN" altLang="en-US" sz="2800" b="1" dirty="0">
+              <a:latin typeface="微软雅黑" charset="-122"/>
+              <a:ea typeface="微软雅黑" charset="-122"/>
+              <a:sym typeface="+mn-ea"/>
+            </a:endParaRPr>
+          </a:p>
+        </p:txBody>
+      </p:sp>
+      <p:sp>
+        <p:nvSpPr>
+          <p:cNvPr id="2" name="文本框 5"/>
+          <p:cNvSpPr txBox="1"/>
+          <p:nvPr/>
+        </p:nvSpPr>
+        <p:spPr>
+          <a:xfrm>
+            <a:off x="258445" y="1025948"/>
+            <a:ext cx="11734165" cy="5576541"/>
+          </a:xfrm>
+          <a:prstGeom prst="rect">
+            <a:avLst/>
+          </a:prstGeom>
+          <a:noFill/>
+          <a:ln>
+            <a:noFill/>
+          </a:ln>
+        </p:spPr>
+        <p:txBody>
+          <a:bodyPr wrap="square" rtlCol="0" anchor="t">
+            <a:noAutofit/>
+          </a:bodyPr>
+          <a:p>
+            <a:pPr indent="0">
+              <a:lnSpc>
+                <a:spcPct val="130000"/>
+              </a:lnSpc>
+              <a:buFont typeface="Arial" panose="020B0604020202020204" pitchFamily="34" charset="0"/>
+              <a:buNone/>
+            </a:pPr>
+            <a:r>
+              <a:rPr lang="en-US" altLang="zh-CN" b="1" dirty="0">
+                <a:solidFill>
+                  <a:schemeClr val="tx1"/>
+                </a:solidFill>
+                <a:latin typeface="微软雅黑" charset="-122"/>
+                <a:ea typeface="微软雅黑" charset="-122"/>
+                <a:sym typeface="+mn-ea"/>
+              </a:rPr>
+              <a:t>3. </a:t>
+            </a:r>
+            <a:r>
+              <a:rPr lang="zh-CN" altLang="en-US" b="1" dirty="0">
+                <a:solidFill>
+                  <a:schemeClr val="tx1"/>
+                </a:solidFill>
+                <a:latin typeface="微软雅黑" charset="-122"/>
+                <a:ea typeface="微软雅黑" charset="-122"/>
+                <a:sym typeface="+mn-ea"/>
+              </a:rPr>
+              <a:t>论文与开源框架：</a:t>
+            </a:r>
+            <a:r>
+              <a:rPr lang="en-US" altLang="zh-CN" b="1" dirty="0">
+                <a:solidFill>
+                  <a:schemeClr val="tx1"/>
+                </a:solidFill>
+                <a:latin typeface="微软雅黑" charset="-122"/>
+                <a:ea typeface="微软雅黑" charset="-122"/>
+                <a:sym typeface="+mn-ea"/>
+              </a:rPr>
+              <a:t>OAIC-T——</a:t>
+            </a:r>
+            <a:r>
+              <a:rPr lang="zh-CN" altLang="en-US" b="1" dirty="0">
+                <a:solidFill>
+                  <a:schemeClr val="tx1"/>
+                </a:solidFill>
+                <a:latin typeface="微软雅黑" charset="-122"/>
+                <a:ea typeface="微软雅黑" charset="-122"/>
+                <a:sym typeface="+mn-ea"/>
+              </a:rPr>
+              <a:t>组织自动化测试，探索通信</a:t>
+            </a:r>
+            <a:r>
+              <a:rPr lang="en-US" altLang="zh-CN" b="1" dirty="0">
+                <a:solidFill>
+                  <a:schemeClr val="tx1"/>
+                </a:solidFill>
+                <a:latin typeface="微软雅黑" charset="-122"/>
+                <a:ea typeface="微软雅黑" charset="-122"/>
+                <a:sym typeface="+mn-ea"/>
+              </a:rPr>
+              <a:t> AI </a:t>
+            </a:r>
+            <a:r>
+              <a:rPr lang="zh-CN" altLang="en-US" b="1" dirty="0">
+                <a:solidFill>
+                  <a:schemeClr val="tx1"/>
+                </a:solidFill>
+                <a:latin typeface="微软雅黑" charset="-122"/>
+                <a:ea typeface="微软雅黑" charset="-122"/>
+                <a:sym typeface="+mn-ea"/>
+              </a:rPr>
+              <a:t>的失效场景</a:t>
+            </a:r>
+            <a:r>
+              <a:rPr lang="en-US" altLang="zh-CN" b="1" baseline="30000" dirty="0">
+                <a:solidFill>
+                  <a:srgbClr val="000000"/>
+                </a:solidFill>
+                <a:latin typeface="微软雅黑" charset="-122"/>
+                <a:ea typeface="微软雅黑" charset="-122"/>
+                <a:cs typeface="+mn-ea"/>
+                <a:sym typeface="+mn-ea"/>
+              </a:rPr>
+              <a:t>[</a:t>
+            </a:r>
+            <a:r>
+              <a:rPr lang="en-US" altLang="zh-CN" b="1" baseline="30000" dirty="0">
+                <a:solidFill>
+                  <a:srgbClr val="000000"/>
+                </a:solidFill>
+                <a:latin typeface="微软雅黑" charset="0"/>
+                <a:ea typeface="微软雅黑" charset="0"/>
+                <a:cs typeface="+mn-ea"/>
+                <a:sym typeface="+mn-ea"/>
+              </a:rPr>
+              <a:t>6</a:t>
+            </a:r>
+            <a:r>
+              <a:rPr lang="en-US" altLang="zh-CN" b="1" baseline="30000" dirty="0">
+                <a:solidFill>
+                  <a:srgbClr val="000000"/>
+                </a:solidFill>
+                <a:latin typeface="微软雅黑" charset="-122"/>
+                <a:ea typeface="微软雅黑" charset="-122"/>
+                <a:cs typeface="+mn-ea"/>
+                <a:sym typeface="+mn-ea"/>
+              </a:rPr>
+              <a:t>]</a:t>
+            </a:r>
+            <a:endParaRPr lang="zh-CN" altLang="en-US" b="1" dirty="0">
+              <a:solidFill>
+                <a:schemeClr val="tx1"/>
+              </a:solidFill>
+              <a:latin typeface="微软雅黑" charset="-122"/>
+              <a:ea typeface="微软雅黑" charset="-122"/>
+              <a:sym typeface="+mn-ea"/>
+            </a:endParaRPr>
+          </a:p>
+          <a:p>
+            <a:pPr indent="0">
+              <a:lnSpc>
+                <a:spcPct val="130000"/>
+              </a:lnSpc>
+              <a:buFont typeface="Arial" panose="020B0604020202020204" pitchFamily="34" charset="0"/>
+              <a:buNone/>
+            </a:pPr>
+            <a:r>
+              <a:rPr lang="zh-CN" altLang="en-US" sz="1400" b="1" dirty="0">
+                <a:solidFill>
+                  <a:srgbClr val="FF0000"/>
+                </a:solidFill>
+                <a:latin typeface="微软雅黑" charset="-122"/>
+                <a:ea typeface="微软雅黑" charset="-122"/>
+                <a:sym typeface="+mn-ea"/>
+              </a:rPr>
+              <a:t>创新与价值：</a:t>
+            </a:r>
+            <a:r>
+              <a:rPr lang="zh-CN" altLang="en-US" sz="1400" dirty="0">
+                <a:solidFill>
+                  <a:schemeClr val="tx1"/>
+                </a:solidFill>
+                <a:latin typeface="微软雅黑" charset="-122"/>
+                <a:ea typeface="微软雅黑" charset="-122"/>
+                <a:sym typeface="+mn-ea"/>
+              </a:rPr>
+              <a:t>通信</a:t>
+            </a:r>
+            <a:r>
+              <a:rPr lang="en-US" altLang="zh-CN" sz="1400" dirty="0">
+                <a:solidFill>
+                  <a:schemeClr val="tx1"/>
+                </a:solidFill>
+                <a:latin typeface="微软雅黑" charset="-122"/>
+                <a:ea typeface="微软雅黑" charset="-122"/>
+                <a:sym typeface="+mn-ea"/>
+              </a:rPr>
+              <a:t> AI </a:t>
+            </a:r>
+            <a:r>
+              <a:rPr lang="zh-CN" altLang="en-US" sz="1400" dirty="0">
+                <a:solidFill>
+                  <a:schemeClr val="tx1"/>
+                </a:solidFill>
+                <a:latin typeface="微软雅黑" charset="-122"/>
+                <a:ea typeface="微软雅黑" charset="-122"/>
+                <a:sym typeface="+mn-ea"/>
+              </a:rPr>
+              <a:t>接入系统后，需要在不同输入和业务条件下检查其实际决策效果。</a:t>
+            </a:r>
+            <a:r>
+              <a:rPr lang="en-US" altLang="zh-CN" sz="1400" dirty="0">
+                <a:solidFill>
+                  <a:schemeClr val="tx1"/>
+                </a:solidFill>
+                <a:latin typeface="微软雅黑" charset="-122"/>
+                <a:ea typeface="微软雅黑" charset="-122"/>
+                <a:sym typeface="+mn-ea"/>
+              </a:rPr>
+              <a:t>OAIC-T </a:t>
+            </a:r>
+            <a:r>
+              <a:rPr lang="zh-CN" altLang="en-US" sz="1400" dirty="0">
+                <a:solidFill>
+                  <a:schemeClr val="tx1"/>
+                </a:solidFill>
+                <a:latin typeface="微软雅黑" charset="-122"/>
+                <a:ea typeface="微软雅黑" charset="-122"/>
+                <a:sym typeface="+mn-ea"/>
+              </a:rPr>
+              <a:t>将</a:t>
+            </a:r>
+            <a:r>
+              <a:rPr lang="zh-CN" altLang="en-US" sz="1400" b="1" dirty="0">
+                <a:solidFill>
+                  <a:schemeClr val="tx1"/>
+                </a:solidFill>
+                <a:latin typeface="微软雅黑" charset="-122"/>
+                <a:ea typeface="微软雅黑" charset="-122"/>
+                <a:sym typeface="+mn-ea"/>
+              </a:rPr>
+              <a:t>测试配置、任务分发、动作执行和结果记录</a:t>
+            </a:r>
+            <a:r>
+              <a:rPr lang="zh-CN" altLang="en-US" sz="1400" dirty="0">
+                <a:solidFill>
+                  <a:schemeClr val="tx1"/>
+                </a:solidFill>
+                <a:latin typeface="微软雅黑" charset="-122"/>
+                <a:ea typeface="微软雅黑" charset="-122"/>
+                <a:sym typeface="+mn-ea"/>
+              </a:rPr>
+              <a:t>组织成统一框架，并引入智能生成测试输入的思路，尝试发现固定用例难以覆盖的异常条件。其价值在于提高测试的可重复性，为模型更新后的比较与问题复现提供系统基础。</a:t>
+            </a:r>
+            <a:endParaRPr lang="zh-CN" altLang="en-US" sz="1400" dirty="0">
+              <a:solidFill>
+                <a:schemeClr val="tx1"/>
+              </a:solidFill>
+              <a:latin typeface="微软雅黑" charset="-122"/>
+              <a:ea typeface="微软雅黑" charset="-122"/>
+              <a:sym typeface="+mn-ea"/>
+            </a:endParaRPr>
+          </a:p>
+          <a:p>
+            <a:pPr indent="0">
+              <a:lnSpc>
+                <a:spcPct val="130000"/>
+              </a:lnSpc>
+              <a:buFont typeface="Arial" panose="020B0604020202020204" pitchFamily="34" charset="0"/>
+              <a:buNone/>
+            </a:pPr>
+            <a:r>
+              <a:rPr lang="zh-CN" altLang="en-US" sz="1400" b="1" dirty="0">
+                <a:solidFill>
+                  <a:srgbClr val="FF0000"/>
+                </a:solidFill>
+                <a:latin typeface="微软雅黑" charset="-122"/>
+                <a:ea typeface="微软雅黑" charset="-122"/>
+                <a:sym typeface="+mn-ea"/>
+              </a:rPr>
+              <a:t>技术概述：</a:t>
+            </a:r>
+            <a:r>
+              <a:rPr lang="zh-CN" altLang="en-US" sz="1400" dirty="0">
+                <a:solidFill>
+                  <a:schemeClr val="tx1"/>
+                </a:solidFill>
+                <a:latin typeface="微软雅黑" charset="-122"/>
+                <a:ea typeface="微软雅黑" charset="-122"/>
+                <a:sym typeface="+mn-ea"/>
+              </a:rPr>
+              <a:t>框架直接面向</a:t>
+            </a:r>
+            <a:r>
+              <a:rPr lang="en-US" altLang="zh-CN" sz="1400" dirty="0">
+                <a:solidFill>
+                  <a:schemeClr val="tx1"/>
+                </a:solidFill>
+                <a:latin typeface="微软雅黑" charset="-122"/>
+                <a:ea typeface="微软雅黑" charset="-122"/>
+                <a:sym typeface="+mn-ea"/>
+              </a:rPr>
+              <a:t> O-RAN </a:t>
+            </a:r>
+            <a:r>
+              <a:rPr lang="zh-CN" altLang="en-US" sz="1400" dirty="0">
+                <a:solidFill>
+                  <a:schemeClr val="tx1"/>
+                </a:solidFill>
+                <a:latin typeface="微软雅黑" charset="-122"/>
+                <a:ea typeface="微软雅黑" charset="-122"/>
+                <a:sym typeface="+mn-ea"/>
+              </a:rPr>
+              <a:t>中的网络</a:t>
+            </a:r>
+            <a:r>
+              <a:rPr lang="en-US" altLang="zh-CN" sz="1400" dirty="0">
+                <a:solidFill>
+                  <a:schemeClr val="tx1"/>
+                </a:solidFill>
+                <a:latin typeface="微软雅黑" charset="-122"/>
+                <a:ea typeface="微软雅黑" charset="-122"/>
+                <a:sym typeface="+mn-ea"/>
+              </a:rPr>
+              <a:t> AI </a:t>
+            </a:r>
+            <a:r>
+              <a:rPr lang="zh-CN" altLang="en-US" sz="1400" dirty="0">
+                <a:solidFill>
+                  <a:schemeClr val="tx1"/>
+                </a:solidFill>
+                <a:latin typeface="微软雅黑" charset="-122"/>
+                <a:ea typeface="微软雅黑" charset="-122"/>
+                <a:sym typeface="+mn-ea"/>
+              </a:rPr>
+              <a:t>控制应用。测试人员配置场景与步骤，由服务器统一组织执行节点，再通过适配器向被测系统施加输入、取得反馈。被测</a:t>
+            </a:r>
+            <a:r>
+              <a:rPr lang="en-US" altLang="zh-CN" sz="1400" dirty="0">
+                <a:solidFill>
+                  <a:schemeClr val="tx1"/>
+                </a:solidFill>
+                <a:latin typeface="微软雅黑" charset="-122"/>
+                <a:ea typeface="微软雅黑" charset="-122"/>
+                <a:sym typeface="+mn-ea"/>
+              </a:rPr>
+              <a:t> AI </a:t>
+            </a:r>
+            <a:r>
+              <a:rPr lang="zh-CN" altLang="en-US" sz="1400" dirty="0">
+                <a:solidFill>
+                  <a:schemeClr val="tx1"/>
+                </a:solidFill>
+                <a:latin typeface="微软雅黑" charset="-122"/>
+                <a:ea typeface="微软雅黑" charset="-122"/>
+                <a:sym typeface="+mn-ea"/>
+              </a:rPr>
+              <a:t>承担通信控制，测试侧</a:t>
+            </a:r>
+            <a:r>
+              <a:rPr lang="en-US" altLang="zh-CN" sz="1400" dirty="0">
+                <a:solidFill>
+                  <a:schemeClr val="tx1"/>
+                </a:solidFill>
+                <a:latin typeface="微软雅黑" charset="-122"/>
+                <a:ea typeface="微软雅黑" charset="-122"/>
+                <a:sym typeface="+mn-ea"/>
+              </a:rPr>
+              <a:t> AI </a:t>
+            </a:r>
+            <a:r>
+              <a:rPr lang="zh-CN" altLang="en-US" sz="1400" dirty="0">
+                <a:solidFill>
+                  <a:schemeClr val="tx1"/>
+                </a:solidFill>
+                <a:latin typeface="微软雅黑" charset="-122"/>
+                <a:ea typeface="微软雅黑" charset="-122"/>
+                <a:sym typeface="+mn-ea"/>
+              </a:rPr>
+              <a:t>辅助探索输入，两者职责不同。</a:t>
+            </a:r>
+            <a:endParaRPr lang="zh-CN" altLang="en-US" sz="1400" dirty="0">
+              <a:solidFill>
+                <a:schemeClr val="tx1"/>
+              </a:solidFill>
+              <a:latin typeface="微软雅黑" charset="-122"/>
+              <a:ea typeface="微软雅黑" charset="-122"/>
+              <a:sym typeface="+mn-ea"/>
+            </a:endParaRPr>
+          </a:p>
+          <a:p>
+            <a:pPr indent="0">
+              <a:lnSpc>
+                <a:spcPct val="130000"/>
+              </a:lnSpc>
+              <a:buFont typeface="Arial" panose="020B0604020202020204" pitchFamily="34" charset="0"/>
+              <a:buNone/>
+            </a:pPr>
+            <a:r>
+              <a:rPr lang="zh-CN" altLang="en-US" sz="1400" b="1" dirty="0">
+                <a:solidFill>
+                  <a:srgbClr val="000000"/>
+                </a:solidFill>
+                <a:latin typeface="微软雅黑" charset="-122"/>
+                <a:ea typeface="微软雅黑" charset="-122"/>
+                <a:sym typeface="+mn-ea"/>
+              </a:rPr>
+              <a:t>系统输入</a:t>
+            </a:r>
+            <a:r>
+              <a:rPr lang="zh-CN" altLang="en-US" sz="1400" dirty="0">
+                <a:solidFill>
+                  <a:srgbClr val="000000"/>
+                </a:solidFill>
+                <a:latin typeface="微软雅黑" charset="-122"/>
+                <a:ea typeface="微软雅黑" charset="-122"/>
+                <a:sym typeface="+mn-ea"/>
+              </a:rPr>
+              <a:t>包括测试配置、脚本、动作参数及测试数据</a:t>
+            </a:r>
+            <a:r>
+              <a:rPr lang="zh-CN" altLang="en-US" sz="1400" b="1" dirty="0">
+                <a:solidFill>
+                  <a:srgbClr val="000000"/>
+                </a:solidFill>
+                <a:latin typeface="微软雅黑" charset="-122"/>
+                <a:ea typeface="微软雅黑" charset="-122"/>
+                <a:sym typeface="+mn-ea"/>
+              </a:rPr>
+              <a:t>；执行输出</a:t>
+            </a:r>
+            <a:r>
+              <a:rPr lang="zh-CN" altLang="en-US" sz="1400" dirty="0">
+                <a:solidFill>
+                  <a:srgbClr val="000000"/>
+                </a:solidFill>
+                <a:latin typeface="微软雅黑" charset="-122"/>
+                <a:ea typeface="微软雅黑" charset="-122"/>
+                <a:sym typeface="+mn-ea"/>
+              </a:rPr>
+              <a:t>包括运行状态、日志和性能结果。验收还需预先定义评价指标与通过条件，不能仅依据脚本执行成功判定模型合格。</a:t>
+            </a:r>
+            <a:endParaRPr lang="zh-CN" altLang="en-US" sz="1400" dirty="0">
+              <a:solidFill>
+                <a:srgbClr val="000000"/>
+              </a:solidFill>
+              <a:latin typeface="微软雅黑" charset="-122"/>
+              <a:ea typeface="微软雅黑" charset="-122"/>
+              <a:sym typeface="+mn-ea"/>
+            </a:endParaRPr>
+          </a:p>
+          <a:p>
+            <a:pPr indent="0">
+              <a:lnSpc>
+                <a:spcPct val="130000"/>
+              </a:lnSpc>
+              <a:buFont typeface="Arial" panose="020B0604020202020204" pitchFamily="34" charset="0"/>
+              <a:buNone/>
+            </a:pPr>
+            <a:r>
+              <a:rPr lang="zh-CN" altLang="en-US" sz="1400" b="1" dirty="0">
+                <a:solidFill>
+                  <a:srgbClr val="FF0000"/>
+                </a:solidFill>
+                <a:latin typeface="微软雅黑" charset="-122"/>
+                <a:ea typeface="微软雅黑" charset="-122"/>
+                <a:sym typeface="+mn-ea"/>
+              </a:rPr>
+              <a:t>研究方法：</a:t>
+            </a:r>
+            <a:endParaRPr lang="zh-CN" altLang="en-US" sz="1400" b="1" dirty="0">
+              <a:solidFill>
+                <a:srgbClr val="FF0000"/>
+              </a:solidFill>
+              <a:latin typeface="微软雅黑" charset="-122"/>
+              <a:ea typeface="微软雅黑" charset="-122"/>
+              <a:sym typeface="+mn-ea"/>
+            </a:endParaRPr>
+          </a:p>
+          <a:p>
+            <a:pPr indent="0">
+              <a:lnSpc>
+                <a:spcPct val="120000"/>
+              </a:lnSpc>
+              <a:buFont typeface="Arial" panose="020B0604020202020204" pitchFamily="34" charset="0"/>
+              <a:buNone/>
+            </a:pPr>
+            <a:r>
+              <a:rPr lang="en-US" sz="1400" b="1" dirty="0">
+                <a:solidFill>
+                  <a:schemeClr val="tx1"/>
+                </a:solidFill>
+                <a:latin typeface="微软雅黑" charset="-122"/>
+                <a:ea typeface="微软雅黑" charset="-122"/>
+                <a:sym typeface="+mn-ea"/>
+              </a:rPr>
+              <a:t>a. </a:t>
+            </a:r>
+            <a:r>
+              <a:rPr lang="zh-CN" altLang="en-US" sz="1400" b="1" dirty="0">
+                <a:solidFill>
+                  <a:schemeClr val="tx1"/>
+                </a:solidFill>
+                <a:latin typeface="微软雅黑" charset="-122"/>
+                <a:ea typeface="微软雅黑" charset="-122"/>
+                <a:sym typeface="+mn-ea"/>
+              </a:rPr>
+              <a:t>用配置文件和脚本固定测试条件与步骤。</a:t>
+            </a:r>
+            <a:r>
+              <a:rPr lang="zh-CN" altLang="en-US" sz="1400" dirty="0">
+                <a:solidFill>
+                  <a:schemeClr val="tx1"/>
+                </a:solidFill>
+                <a:latin typeface="微软雅黑" charset="-122"/>
+                <a:ea typeface="微软雅黑" charset="-122"/>
+                <a:sym typeface="+mn-ea"/>
+              </a:rPr>
+              <a:t>配置描述节点和环境，脚本描述动作顺序及参数。将测试过程保存下来，便于在相同条件下重新执行，也使模型或控制程序更新后的对照具有一致基础。</a:t>
+            </a:r>
+            <a:endParaRPr lang="zh-CN" altLang="en-US" sz="1400" dirty="0">
+              <a:solidFill>
+                <a:schemeClr val="tx1"/>
+              </a:solidFill>
+              <a:latin typeface="微软雅黑" charset="-122"/>
+              <a:ea typeface="微软雅黑" charset="-122"/>
+              <a:sym typeface="+mn-ea"/>
+            </a:endParaRPr>
+          </a:p>
+          <a:p>
+            <a:pPr indent="0">
+              <a:lnSpc>
+                <a:spcPct val="120000"/>
+              </a:lnSpc>
+              <a:buFont typeface="Arial" panose="020B0604020202020204" pitchFamily="34" charset="0"/>
+              <a:buNone/>
+            </a:pPr>
+            <a:r>
+              <a:rPr lang="en-US" altLang="zh-CN" sz="1400" b="1" dirty="0">
+                <a:solidFill>
+                  <a:schemeClr val="tx1"/>
+                </a:solidFill>
+                <a:latin typeface="微软雅黑" charset="-122"/>
+                <a:ea typeface="微软雅黑" charset="-122"/>
+                <a:sym typeface="+mn-ea"/>
+              </a:rPr>
+              <a:t>b. </a:t>
+            </a:r>
+            <a:r>
+              <a:rPr lang="zh-CN" altLang="en-US" sz="1400" b="1" dirty="0">
+                <a:solidFill>
+                  <a:schemeClr val="tx1"/>
+                </a:solidFill>
+                <a:latin typeface="微软雅黑" charset="-122"/>
+                <a:ea typeface="微软雅黑" charset="-122"/>
+                <a:sym typeface="+mn-ea"/>
+              </a:rPr>
+              <a:t>由服务器协调任务，</a:t>
+            </a:r>
+            <a:r>
+              <a:rPr lang="en-US" altLang="zh-CN" sz="1400" b="1" dirty="0">
+                <a:solidFill>
+                  <a:schemeClr val="tx1"/>
+                </a:solidFill>
+                <a:latin typeface="微软雅黑" charset="-122"/>
+                <a:ea typeface="微软雅黑" charset="-122"/>
+                <a:sym typeface="+mn-ea"/>
+              </a:rPr>
+              <a:t>Actor </a:t>
+            </a:r>
+            <a:r>
+              <a:rPr lang="zh-CN" altLang="en-US" sz="1400" b="1" dirty="0">
+                <a:solidFill>
+                  <a:schemeClr val="tx1"/>
+                </a:solidFill>
+                <a:latin typeface="微软雅黑" charset="-122"/>
+                <a:ea typeface="微软雅黑" charset="-122"/>
+                <a:sym typeface="+mn-ea"/>
+              </a:rPr>
+              <a:t>完成具体交互。</a:t>
+            </a:r>
+            <a:r>
+              <a:rPr lang="zh-CN" altLang="en-US" sz="1400" dirty="0">
+                <a:solidFill>
+                  <a:schemeClr val="tx1"/>
+                </a:solidFill>
+                <a:latin typeface="微软雅黑" charset="-122"/>
+                <a:ea typeface="微软雅黑" charset="-122"/>
+                <a:sym typeface="+mn-ea"/>
+              </a:rPr>
+              <a:t>服务器检查脚本、分配动作并监控状态，</a:t>
+            </a:r>
+            <a:r>
+              <a:rPr lang="en-US" altLang="zh-CN" sz="1400" dirty="0">
+                <a:solidFill>
+                  <a:schemeClr val="tx1"/>
+                </a:solidFill>
+                <a:latin typeface="微软雅黑" charset="-122"/>
+                <a:ea typeface="微软雅黑" charset="-122"/>
+                <a:sym typeface="+mn-ea"/>
+              </a:rPr>
+              <a:t>Actor </a:t>
+            </a:r>
+            <a:r>
+              <a:rPr lang="zh-CN" altLang="en-US" sz="1400" dirty="0">
+                <a:solidFill>
+                  <a:schemeClr val="tx1"/>
+                </a:solidFill>
+                <a:latin typeface="微软雅黑" charset="-122"/>
+                <a:ea typeface="微软雅黑" charset="-122"/>
+                <a:sym typeface="+mn-ea"/>
+              </a:rPr>
+              <a:t>通过适配器与被测系统交互。任务组织与系统接口分开后，可以保留执行框架，逐步替换或增加被测对象。</a:t>
+            </a:r>
+            <a:endParaRPr lang="zh-CN" altLang="en-US" sz="1400" dirty="0">
+              <a:solidFill>
+                <a:schemeClr val="tx1"/>
+              </a:solidFill>
+              <a:latin typeface="微软雅黑" charset="-122"/>
+              <a:ea typeface="微软雅黑" charset="-122"/>
+              <a:sym typeface="+mn-ea"/>
+            </a:endParaRPr>
+          </a:p>
+          <a:p>
+            <a:pPr indent="0">
+              <a:lnSpc>
+                <a:spcPct val="120000"/>
+              </a:lnSpc>
+              <a:buFont typeface="Arial" panose="020B0604020202020204" pitchFamily="34" charset="0"/>
+              <a:buNone/>
+            </a:pPr>
+            <a:r>
+              <a:rPr lang="en-US" altLang="zh-CN" sz="1400" b="1" dirty="0">
+                <a:solidFill>
+                  <a:schemeClr val="tx1"/>
+                </a:solidFill>
+                <a:latin typeface="微软雅黑" charset="-122"/>
+                <a:ea typeface="微软雅黑" charset="-122"/>
+                <a:sym typeface="+mn-ea"/>
+              </a:rPr>
+              <a:t>c. </a:t>
+            </a:r>
+            <a:r>
+              <a:rPr lang="zh-CN" altLang="en-US" sz="1400" b="1" dirty="0">
+                <a:solidFill>
+                  <a:schemeClr val="tx1"/>
+                </a:solidFill>
+                <a:latin typeface="微软雅黑" charset="-122"/>
+                <a:ea typeface="微软雅黑" charset="-122"/>
+                <a:sym typeface="+mn-ea"/>
+              </a:rPr>
+              <a:t>探索容易触发异常的输入组合。</a:t>
+            </a:r>
+            <a:r>
+              <a:rPr lang="zh-CN" altLang="en-US" sz="1400" dirty="0">
+                <a:solidFill>
+                  <a:schemeClr val="tx1"/>
+                </a:solidFill>
+                <a:latin typeface="微软雅黑" charset="-122"/>
+                <a:ea typeface="微软雅黑" charset="-122"/>
+                <a:sym typeface="+mn-ea"/>
+              </a:rPr>
+              <a:t>论文讨论敏感性分析、</a:t>
+            </a:r>
+            <a:r>
+              <a:rPr lang="en-US" altLang="zh-CN" sz="1400" dirty="0">
+                <a:solidFill>
+                  <a:schemeClr val="tx1"/>
+                </a:solidFill>
+                <a:latin typeface="微软雅黑" charset="-122"/>
+                <a:ea typeface="微软雅黑" charset="-122"/>
+                <a:sym typeface="+mn-ea"/>
+              </a:rPr>
+              <a:t>AI </a:t>
+            </a:r>
+            <a:r>
+              <a:rPr lang="zh-CN" altLang="en-US" sz="1400" dirty="0">
+                <a:solidFill>
+                  <a:schemeClr val="tx1"/>
+                </a:solidFill>
+                <a:latin typeface="微软雅黑" charset="-122"/>
+                <a:ea typeface="微软雅黑" charset="-122"/>
+                <a:sym typeface="+mn-ea"/>
+              </a:rPr>
+              <a:t>模糊测试和强化学习等方法，帮助探索较大的输入空间。项目官方</a:t>
+            </a:r>
+            <a:r>
+              <a:rPr lang="en-US" altLang="zh-CN" sz="1400" dirty="0">
+                <a:solidFill>
+                  <a:schemeClr val="tx1"/>
+                </a:solidFill>
+                <a:latin typeface="微软雅黑" charset="-122"/>
+                <a:ea typeface="微软雅黑" charset="-122"/>
+                <a:sym typeface="+mn-ea"/>
+              </a:rPr>
+              <a:t> v2.0 </a:t>
+            </a:r>
+            <a:r>
+              <a:rPr lang="zh-CN" altLang="en-US" sz="1400" dirty="0">
+                <a:solidFill>
+                  <a:schemeClr val="tx1"/>
+                </a:solidFill>
+                <a:latin typeface="微软雅黑" charset="-122"/>
+                <a:ea typeface="微软雅黑" charset="-122"/>
+                <a:sym typeface="+mn-ea"/>
+              </a:rPr>
+              <a:t>公告明确列出，使用遗传算法生成不同</a:t>
+            </a:r>
+            <a:r>
+              <a:rPr lang="en-US" altLang="zh-CN" sz="1400" dirty="0">
+                <a:solidFill>
+                  <a:schemeClr val="tx1"/>
+                </a:solidFill>
+                <a:latin typeface="微软雅黑" charset="-122"/>
+                <a:ea typeface="微软雅黑" charset="-122"/>
+                <a:sym typeface="+mn-ea"/>
+              </a:rPr>
+              <a:t> UE </a:t>
+            </a:r>
+            <a:r>
+              <a:rPr lang="zh-CN" altLang="en-US" sz="1400" dirty="0">
+                <a:solidFill>
+                  <a:schemeClr val="tx1"/>
+                </a:solidFill>
+                <a:latin typeface="微软雅黑" charset="-122"/>
+                <a:ea typeface="微软雅黑" charset="-122"/>
+                <a:sym typeface="+mn-ea"/>
+              </a:rPr>
+              <a:t>流量，测试流量平衡方法。论文提出的研究范围与各版本已实现能力需要分别核查。</a:t>
+            </a:r>
+            <a:endParaRPr lang="zh-CN" altLang="en-US" sz="1400" dirty="0">
+              <a:solidFill>
+                <a:schemeClr val="tx1"/>
+              </a:solidFill>
+              <a:latin typeface="微软雅黑" charset="-122"/>
+              <a:ea typeface="微软雅黑" charset="-122"/>
+              <a:sym typeface="+mn-ea"/>
+            </a:endParaRPr>
+          </a:p>
+          <a:p>
+            <a:pPr indent="0">
+              <a:lnSpc>
+                <a:spcPct val="120000"/>
+              </a:lnSpc>
+              <a:buFont typeface="Arial" panose="020B0604020202020204" pitchFamily="34" charset="0"/>
+              <a:buNone/>
+            </a:pPr>
+            <a:r>
+              <a:rPr lang="en-US" altLang="zh-CN" sz="1400" b="1" dirty="0">
+                <a:solidFill>
+                  <a:schemeClr val="tx1"/>
+                </a:solidFill>
+                <a:latin typeface="微软雅黑" charset="-122"/>
+                <a:ea typeface="微软雅黑" charset="-122"/>
+                <a:sym typeface="+mn-ea"/>
+              </a:rPr>
+              <a:t>d. </a:t>
+            </a:r>
+            <a:r>
+              <a:rPr lang="zh-CN" altLang="en-US" sz="1400" b="1" dirty="0">
+                <a:solidFill>
+                  <a:schemeClr val="tx1"/>
+                </a:solidFill>
+                <a:latin typeface="微软雅黑" charset="-122"/>
+                <a:ea typeface="微软雅黑" charset="-122"/>
+                <a:sym typeface="+mn-ea"/>
+              </a:rPr>
+              <a:t>保存过程与结果，支持失败复现和回归测试。</a:t>
+            </a:r>
+            <a:r>
+              <a:rPr lang="zh-CN" altLang="en-US" sz="1400" dirty="0">
+                <a:solidFill>
+                  <a:schemeClr val="tx1"/>
+                </a:solidFill>
+                <a:latin typeface="微软雅黑" charset="-122"/>
+                <a:ea typeface="微软雅黑" charset="-122"/>
+                <a:sym typeface="+mn-ea"/>
+              </a:rPr>
+              <a:t>记录配置、动作及系统响应，并汇总吞吐量、时延或丢包等性能指标。发现异常后，可以定位到对应条件；修正模型或程序后，再运行相同测试，观察问题是否仍然存在。</a:t>
+            </a:r>
+            <a:endParaRPr lang="zh-CN" altLang="en-US" sz="1400" dirty="0">
+              <a:solidFill>
+                <a:schemeClr val="tx1"/>
+              </a:solidFill>
+              <a:latin typeface="微软雅黑" charset="-122"/>
+              <a:ea typeface="微软雅黑" charset="-122"/>
+              <a:sym typeface="+mn-ea"/>
+            </a:endParaRPr>
+          </a:p>
+          <a:p>
+            <a:pPr indent="0">
+              <a:lnSpc>
+                <a:spcPct val="130000"/>
+              </a:lnSpc>
+              <a:buFont typeface="Arial" panose="020B0604020202020204" pitchFamily="34" charset="0"/>
+              <a:buNone/>
+            </a:pPr>
+            <a:r>
+              <a:rPr lang="zh-CN" altLang="en-US" sz="1400" b="1" dirty="0">
+                <a:solidFill>
+                  <a:srgbClr val="FF0000"/>
+                </a:solidFill>
+                <a:latin typeface="微软雅黑" charset="-122"/>
+                <a:ea typeface="微软雅黑" charset="-122"/>
+                <a:sym typeface="+mn-ea"/>
+              </a:rPr>
+              <a:t>研究成熟度与启示：</a:t>
+            </a:r>
+            <a:r>
+              <a:rPr lang="zh-CN" altLang="en-US" sz="1400" dirty="0">
+                <a:solidFill>
+                  <a:schemeClr val="tx1"/>
+                </a:solidFill>
+                <a:latin typeface="微软雅黑" charset="-122"/>
+                <a:ea typeface="微软雅黑" charset="-122"/>
+                <a:sym typeface="+mn-ea"/>
+              </a:rPr>
+              <a:t>项目已有公开代码和运行文档，可从文档给出的</a:t>
+            </a:r>
+            <a:r>
+              <a:rPr lang="en-US" altLang="zh-CN" sz="1400" dirty="0">
+                <a:solidFill>
+                  <a:schemeClr val="tx1"/>
+                </a:solidFill>
+                <a:latin typeface="微软雅黑" charset="-122"/>
+                <a:ea typeface="微软雅黑" charset="-122"/>
+                <a:sym typeface="+mn-ea"/>
+              </a:rPr>
+              <a:t> ZeroMQ </a:t>
+            </a:r>
+            <a:r>
+              <a:rPr lang="zh-CN" altLang="en-US" sz="1400" dirty="0">
+                <a:solidFill>
+                  <a:schemeClr val="tx1"/>
+                </a:solidFill>
+                <a:latin typeface="微软雅黑" charset="-122"/>
+                <a:ea typeface="微软雅黑" charset="-122"/>
+                <a:sym typeface="+mn-ea"/>
+              </a:rPr>
+              <a:t>虚拟无线模式开始复现。</a:t>
+            </a:r>
+            <a:r>
+              <a:rPr lang="zh-CN" altLang="en-US" sz="1400" b="1" dirty="0">
+                <a:solidFill>
+                  <a:schemeClr val="tx1"/>
+                </a:solidFill>
+                <a:latin typeface="微软雅黑" charset="-122"/>
+                <a:ea typeface="微软雅黑" charset="-122"/>
+                <a:sym typeface="+mn-ea"/>
+              </a:rPr>
+              <a:t>迁移到终端时，可以将读取测量、获取预测、取得参考和计算误差写成测试动作，再由脚本统一组织。</a:t>
+            </a:r>
+            <a:r>
+              <a:rPr lang="zh-CN" altLang="en-US" sz="1400" dirty="0">
+                <a:solidFill>
+                  <a:schemeClr val="tx1"/>
+                </a:solidFill>
+                <a:latin typeface="微软雅黑" charset="-122"/>
+                <a:ea typeface="微软雅黑" charset="-122"/>
+                <a:sym typeface="+mn-ea"/>
+              </a:rPr>
+              <a:t>实际工作仍需补齐终端与仪表适配器，以及对应判据。基础自动化与主动场景搜索可以分阶段建设。</a:t>
+            </a:r>
+            <a:endParaRPr lang="zh-CN" altLang="en-US" sz="1400" dirty="0">
+              <a:solidFill>
+                <a:schemeClr val="tx1"/>
+              </a:solidFill>
+              <a:latin typeface="微软雅黑" charset="-122"/>
+              <a:ea typeface="微软雅黑" charset="-122"/>
+              <a:sym typeface="+mn-ea"/>
+            </a:endParaRPr>
+          </a:p>
+        </p:txBody>
+      </p:sp>
+      <p:sp>
+        <p:nvSpPr>
+          <p:cNvPr id="3" name="文本框 2"/>
+          <p:cNvSpPr txBox="1"/>
+          <p:nvPr userDrawn="1"/>
+        </p:nvSpPr>
+        <p:spPr>
+          <a:xfrm>
+            <a:off x="6401842" y="178864"/>
+            <a:ext cx="4537731" cy="787505"/>
+          </a:xfrm>
+          <a:prstGeom prst="rect">
+            <a:avLst/>
+          </a:prstGeom>
+        </p:spPr>
+        <p:txBody>
+          <a:bodyPr wrap="square" rtlCol="0">
+            <a:noAutofit/>
+          </a:bodyPr>
+          <a:p>
+            <a:r>
+              <a:rPr lang="en-US" altLang="zh-CN" sz="1200">
+                <a:latin typeface="Times New Roman" panose="02020603050405020304" charset="0"/>
+                <a:ea typeface="Times New Roman" panose="02020603050405020304" charset="0"/>
+                <a:cs typeface="Times New Roman" panose="02020603050405020304" charset="0"/>
+              </a:rPr>
+              <a:t>[6] TANG B, SHAH V K, MAROJEVIC V, et al. AI testing framework for Next-G O-RAN networks: Requirements, design, and research opportunities[J]. IEEE Wireless Communications, 2023, 30(1): 70-77. DOI: 10.1109/MWC.001.2200213.</a:t>
+            </a:r>
+            <a:endParaRPr lang="en-US" altLang="zh-CN" sz="1200">
+              <a:latin typeface="Times New Roman" panose="02020603050405020304" charset="0"/>
+              <a:ea typeface="Times New Roman" panose="02020603050405020304" charset="0"/>
+              <a:cs typeface="Times New Roman" panose="02020603050405020304" charset="0"/>
+            </a:endParaRPr>
+          </a:p>
+        </p:txBody>
+      </p:sp>
+    </p:spTree>
+  </p:cSld>
+  <p:clrMapOvr>
+    <a:masterClrMapping/>
+  </p:clrMapOvr>
+</p:sld>
+</file>
+
+<file path=ppt/slides/slide11.xml><?xml version="1.0" encoding="utf-8"?>
+<p:sld xmlns:a="http://schemas.openxmlformats.org/drawingml/2006/main" xmlns:r="http://schemas.openxmlformats.org/officeDocument/2006/relationships" xmlns:p="http://schemas.openxmlformats.org/presentationml/2006/main">
+  <p:cSld>
+    <p:spTree>
+      <p:nvGrpSpPr>
+        <p:cNvPr id="87" name=""/>
+        <p:cNvGrpSpPr/>
+        <p:nvPr/>
+      </p:nvGrpSpPr>
+      <p:grpSpPr>
+        <a:xfrm>
+          <a:off x="0" y="0"/>
+          <a:ext cx="0" cy="0"/>
+          <a:chOff x="0" y="0"/>
+          <a:chExt cx="0" cy="0"/>
+        </a:xfrm>
+      </p:grpSpPr>
+      <p:sp>
+        <p:nvSpPr>
+          <p:cNvPr id="88" name="标题 1"/>
+          <p:cNvSpPr/>
+          <p:nvPr>
+            <p:ph type="title"/>
+          </p:nvPr>
+        </p:nvSpPr>
+        <p:spPr>
+          <a:xfrm>
+            <a:off x="565150" y="339090"/>
+            <a:ext cx="5538115" cy="612775"/>
+          </a:xfrm>
+        </p:spPr>
+        <p:txBody>
+          <a:bodyPr>
+            <a:noAutofit/>
+          </a:bodyPr>
+          <a:lstStyle/>
+          <a:p>
+            <a:r>
+              <a:rPr lang="zh-CN" altLang="en-US" sz="2800" b="1" dirty="0">
+                <a:latin typeface="微软雅黑" charset="-122"/>
+                <a:ea typeface="微软雅黑" charset="-122"/>
+                <a:sym typeface="+mn-ea"/>
+              </a:rPr>
+              <a:t>方向二：通信</a:t>
+            </a:r>
+            <a:r>
+              <a:rPr lang="en-US" altLang="zh-CN" sz="2800" b="1" dirty="0">
+                <a:latin typeface="微软雅黑" charset="-122"/>
+                <a:ea typeface="微软雅黑" charset="-122"/>
+                <a:sym typeface="+mn-ea"/>
+              </a:rPr>
+              <a:t> AI </a:t>
+            </a:r>
+            <a:r>
+              <a:rPr lang="zh-CN" altLang="en-US" sz="2800" b="1" dirty="0">
+                <a:latin typeface="微软雅黑" charset="-122"/>
+                <a:ea typeface="微软雅黑" charset="-122"/>
+                <a:sym typeface="+mn-ea"/>
+              </a:rPr>
+              <a:t>算法的测试验收</a:t>
+            </a:r>
+            <a:endParaRPr lang="zh-CN" altLang="en-US" sz="2800" b="1" dirty="0">
+              <a:latin typeface="微软雅黑" charset="-122"/>
+              <a:ea typeface="微软雅黑" charset="-122"/>
+              <a:sym typeface="+mn-ea"/>
+            </a:endParaRPr>
+          </a:p>
+        </p:txBody>
+      </p:sp>
+      <p:sp>
+        <p:nvSpPr>
+          <p:cNvPr id="2" name="文本框 5"/>
+          <p:cNvSpPr txBox="1"/>
+          <p:nvPr/>
+        </p:nvSpPr>
+        <p:spPr>
+          <a:xfrm>
+            <a:off x="258445" y="1025948"/>
+            <a:ext cx="11734165" cy="5489822"/>
+          </a:xfrm>
+          <a:prstGeom prst="rect">
+            <a:avLst/>
+          </a:prstGeom>
+          <a:noFill/>
+          <a:ln>
+            <a:noFill/>
+          </a:ln>
+        </p:spPr>
+        <p:txBody>
+          <a:bodyPr wrap="square" rtlCol="0" anchor="t">
+            <a:noAutofit/>
+          </a:bodyPr>
+          <a:p>
+            <a:pPr indent="0">
+              <a:lnSpc>
+                <a:spcPct val="120000"/>
+              </a:lnSpc>
+              <a:buFont typeface="Arial" panose="020B0604020202020204" pitchFamily="34" charset="0"/>
+              <a:buNone/>
+            </a:pPr>
+            <a:r>
+              <a:rPr lang="en-US" altLang="zh-CN" b="1" dirty="0">
+                <a:solidFill>
+                  <a:schemeClr val="tx1"/>
+                </a:solidFill>
+                <a:latin typeface="微软雅黑" charset="-122"/>
+                <a:ea typeface="微软雅黑" charset="-122"/>
+                <a:sym typeface="+mn-ea"/>
+              </a:rPr>
+              <a:t>4. </a:t>
+            </a:r>
+            <a:r>
+              <a:rPr lang="zh-CN" altLang="en-US" b="1" dirty="0">
+                <a:solidFill>
+                  <a:schemeClr val="tx1"/>
+                </a:solidFill>
+                <a:latin typeface="微软雅黑" charset="-122"/>
+                <a:ea typeface="微软雅黑" charset="-122"/>
+                <a:sym typeface="+mn-ea"/>
+              </a:rPr>
+              <a:t>论文：终端</a:t>
+            </a:r>
+            <a:r>
+              <a:rPr lang="en-US" altLang="zh-CN" b="1" dirty="0">
+                <a:solidFill>
+                  <a:schemeClr val="tx1"/>
+                </a:solidFill>
+                <a:latin typeface="微软雅黑" charset="-122"/>
+                <a:ea typeface="微软雅黑" charset="-122"/>
+                <a:sym typeface="+mn-ea"/>
+              </a:rPr>
+              <a:t> AI </a:t>
+            </a:r>
+            <a:r>
+              <a:rPr lang="zh-CN" altLang="en-US" b="1" dirty="0">
+                <a:solidFill>
+                  <a:schemeClr val="tx1"/>
+                </a:solidFill>
+                <a:latin typeface="微软雅黑" charset="-122"/>
+                <a:ea typeface="微软雅黑" charset="-122"/>
+                <a:sym typeface="+mn-ea"/>
+              </a:rPr>
+              <a:t>波束管理</a:t>
+            </a:r>
+            <a:r>
+              <a:rPr lang="en-US" altLang="zh-CN" b="1" dirty="0">
+                <a:solidFill>
+                  <a:schemeClr val="tx1"/>
+                </a:solidFill>
+                <a:latin typeface="微软雅黑" charset="-122"/>
+                <a:ea typeface="微软雅黑" charset="-122"/>
+                <a:sym typeface="+mn-ea"/>
+              </a:rPr>
+              <a:t> OTA </a:t>
+            </a:r>
+            <a:r>
+              <a:rPr lang="zh-CN" altLang="en-US" b="1" dirty="0">
+                <a:solidFill>
+                  <a:schemeClr val="tx1"/>
+                </a:solidFill>
+                <a:latin typeface="微软雅黑" charset="-122"/>
+                <a:ea typeface="微软雅黑" charset="-122"/>
+                <a:sym typeface="+mn-ea"/>
+              </a:rPr>
+              <a:t>测试</a:t>
+            </a:r>
+            <a:r>
+              <a:rPr lang="en-US" altLang="zh-CN" b="1" dirty="0">
+                <a:solidFill>
+                  <a:schemeClr val="tx1"/>
+                </a:solidFill>
+                <a:latin typeface="微软雅黑" charset="-122"/>
+                <a:ea typeface="微软雅黑" charset="-122"/>
+                <a:sym typeface="+mn-ea"/>
+              </a:rPr>
+              <a:t>——</a:t>
+            </a:r>
+            <a:r>
+              <a:rPr lang="zh-CN" altLang="en-US" b="1" dirty="0">
+                <a:solidFill>
+                  <a:schemeClr val="tx1"/>
+                </a:solidFill>
+                <a:latin typeface="微软雅黑" charset="-122"/>
+                <a:ea typeface="微软雅黑" charset="-122"/>
+                <a:sym typeface="+mn-ea"/>
+              </a:rPr>
+              <a:t>重建多波束环境，提供可靠输入与验证依据</a:t>
+            </a:r>
+            <a:r>
+              <a:rPr lang="en-US" altLang="zh-CN" b="1" baseline="30000" dirty="0">
+                <a:solidFill>
+                  <a:srgbClr val="000000"/>
+                </a:solidFill>
+                <a:latin typeface="微软雅黑" charset="-122"/>
+                <a:ea typeface="微软雅黑" charset="-122"/>
+                <a:cs typeface="+mn-ea"/>
+                <a:sym typeface="+mn-ea"/>
+              </a:rPr>
+              <a:t>[</a:t>
+            </a:r>
+            <a:r>
+              <a:rPr lang="en-US" altLang="zh-CN" b="1" baseline="30000" dirty="0">
+                <a:solidFill>
+                  <a:srgbClr val="000000"/>
+                </a:solidFill>
+                <a:latin typeface="微软雅黑" charset="0"/>
+                <a:ea typeface="微软雅黑" charset="0"/>
+                <a:cs typeface="+mn-ea"/>
+                <a:sym typeface="+mn-ea"/>
+              </a:rPr>
+              <a:t>7</a:t>
+            </a:r>
+            <a:r>
+              <a:rPr lang="en-US" altLang="zh-CN" b="1" baseline="30000" dirty="0">
+                <a:solidFill>
+                  <a:srgbClr val="000000"/>
+                </a:solidFill>
+                <a:latin typeface="微软雅黑" charset="-122"/>
+                <a:ea typeface="微软雅黑" charset="-122"/>
+                <a:cs typeface="+mn-ea"/>
+                <a:sym typeface="+mn-ea"/>
+              </a:rPr>
+              <a:t>]</a:t>
+            </a:r>
+            <a:endParaRPr lang="zh-CN" altLang="en-US" b="1" dirty="0">
+              <a:solidFill>
+                <a:schemeClr val="tx1"/>
+              </a:solidFill>
+              <a:latin typeface="微软雅黑" charset="-122"/>
+              <a:ea typeface="微软雅黑" charset="-122"/>
+              <a:sym typeface="+mn-ea"/>
+            </a:endParaRPr>
+          </a:p>
+          <a:p>
+            <a:pPr indent="0">
+              <a:lnSpc>
+                <a:spcPct val="130000"/>
+              </a:lnSpc>
+              <a:buFont typeface="Arial" panose="020B0604020202020204" pitchFamily="34" charset="0"/>
+              <a:buNone/>
+            </a:pPr>
+            <a:r>
+              <a:rPr lang="zh-CN" altLang="en-US" sz="1400" b="1" dirty="0">
+                <a:solidFill>
+                  <a:srgbClr val="FF0000"/>
+                </a:solidFill>
+                <a:latin typeface="微软雅黑" charset="-122"/>
+                <a:ea typeface="微软雅黑" charset="-122"/>
+                <a:sym typeface="+mn-ea"/>
+              </a:rPr>
+              <a:t>创新与价值：</a:t>
+            </a:r>
+            <a:r>
+              <a:rPr lang="en-US" altLang="zh-CN" sz="1400" dirty="0">
+                <a:solidFill>
+                  <a:schemeClr val="tx1"/>
+                </a:solidFill>
+                <a:latin typeface="微软雅黑" charset="-122"/>
+                <a:ea typeface="微软雅黑" charset="-122"/>
+                <a:sym typeface="+mn-ea"/>
+              </a:rPr>
+              <a:t>AI </a:t>
+            </a:r>
+            <a:r>
+              <a:rPr lang="zh-CN" altLang="en-US" sz="1400" dirty="0">
+                <a:solidFill>
+                  <a:schemeClr val="tx1"/>
+                </a:solidFill>
+                <a:latin typeface="微软雅黑" charset="-122"/>
+                <a:ea typeface="微软雅黑" charset="-122"/>
+                <a:sym typeface="+mn-ea"/>
+              </a:rPr>
+              <a:t>波束预测依靠部分测量推断其他候选，测试系统必须同时保证输入测量与验证依据的可靠性。该方法在多探头暗室中考虑</a:t>
+            </a:r>
+            <a:r>
+              <a:rPr lang="zh-CN" altLang="en-US" sz="1400" b="1" dirty="0">
+                <a:solidFill>
+                  <a:schemeClr val="tx1"/>
+                </a:solidFill>
+                <a:latin typeface="微软雅黑" charset="-122"/>
+                <a:ea typeface="微软雅黑" charset="-122"/>
+                <a:sym typeface="+mn-ea"/>
+              </a:rPr>
+              <a:t>不同基站发射波束对传播路径的影响</a:t>
+            </a:r>
+            <a:r>
+              <a:rPr lang="zh-CN" altLang="en-US" sz="1400" dirty="0">
+                <a:solidFill>
+                  <a:schemeClr val="tx1"/>
+                </a:solidFill>
+                <a:latin typeface="微软雅黑" charset="-122"/>
+                <a:ea typeface="微软雅黑" charset="-122"/>
+                <a:sym typeface="+mn-ea"/>
+              </a:rPr>
+              <a:t>，利用固定探头布置重建多个波束对应的信道。其价值在于为终端波束预测提供更可信的无线测试条件，并根据测试范围选择完整覆盖或针对性重建，兼顾环境保真度与设备复杂度。</a:t>
+            </a:r>
+            <a:endParaRPr lang="zh-CN" altLang="en-US" sz="1400" dirty="0">
+              <a:solidFill>
+                <a:schemeClr val="tx1"/>
+              </a:solidFill>
+              <a:latin typeface="微软雅黑" charset="-122"/>
+              <a:ea typeface="微软雅黑" charset="-122"/>
+              <a:sym typeface="+mn-ea"/>
+            </a:endParaRPr>
+          </a:p>
+          <a:p>
+            <a:pPr indent="0">
+              <a:lnSpc>
+                <a:spcPct val="130000"/>
+              </a:lnSpc>
+              <a:buFont typeface="Arial" panose="020B0604020202020204" pitchFamily="34" charset="0"/>
+              <a:buNone/>
+            </a:pPr>
+            <a:r>
+              <a:rPr lang="zh-CN" altLang="en-US" sz="1400" b="1" dirty="0">
+                <a:solidFill>
+                  <a:srgbClr val="FF0000"/>
+                </a:solidFill>
+                <a:latin typeface="微软雅黑" charset="-122"/>
+                <a:ea typeface="微软雅黑" charset="-122"/>
+                <a:sym typeface="+mn-ea"/>
+              </a:rPr>
+              <a:t>技术概述：</a:t>
+            </a:r>
+            <a:r>
+              <a:rPr lang="zh-CN" altLang="en-US" sz="1400" dirty="0">
+                <a:solidFill>
+                  <a:schemeClr val="tx1"/>
+                </a:solidFill>
+                <a:latin typeface="微软雅黑" charset="-122"/>
+                <a:ea typeface="微软雅黑" charset="-122"/>
+                <a:sym typeface="+mn-ea"/>
+              </a:rPr>
+              <a:t>同一传播环境经过不同发射波束作用后，终端接收到的路径功率分布可能不同。仅重建最佳波束对应的信道，难以保证</a:t>
+            </a:r>
+            <a:r>
+              <a:rPr lang="en-US" altLang="zh-CN" sz="1400" dirty="0">
+                <a:solidFill>
+                  <a:schemeClr val="tx1"/>
+                </a:solidFill>
+                <a:latin typeface="微软雅黑" charset="-122"/>
+                <a:ea typeface="微软雅黑" charset="-122"/>
+                <a:sym typeface="+mn-ea"/>
+              </a:rPr>
+              <a:t> AI </a:t>
+            </a:r>
+            <a:r>
+              <a:rPr lang="zh-CN" altLang="en-US" sz="1400" dirty="0">
+                <a:solidFill>
+                  <a:schemeClr val="tx1"/>
+                </a:solidFill>
+                <a:latin typeface="微软雅黑" charset="-122"/>
+                <a:ea typeface="微软雅黑" charset="-122"/>
+                <a:sym typeface="+mn-ea"/>
+              </a:rPr>
+              <a:t>输入波束与目标预测波束都得到准确呈现。论文提出按发射波束评价和优化信道重建，再用暗室测量数据验证终端侧波束预测模型。</a:t>
+            </a:r>
+            <a:endParaRPr lang="zh-CN" altLang="en-US" sz="1400" dirty="0">
+              <a:solidFill>
+                <a:schemeClr val="tx1"/>
+              </a:solidFill>
+              <a:latin typeface="微软雅黑" charset="-122"/>
+              <a:ea typeface="微软雅黑" charset="-122"/>
+              <a:sym typeface="+mn-ea"/>
+            </a:endParaRPr>
+          </a:p>
+          <a:p>
+            <a:pPr indent="0">
+              <a:lnSpc>
+                <a:spcPct val="130000"/>
+              </a:lnSpc>
+              <a:buFont typeface="Arial" panose="020B0604020202020204" pitchFamily="34" charset="0"/>
+              <a:buNone/>
+            </a:pPr>
+            <a:r>
+              <a:rPr lang="zh-CN" altLang="en-US" sz="1400" b="1" dirty="0">
+                <a:solidFill>
+                  <a:schemeClr val="tx1"/>
+                </a:solidFill>
+                <a:latin typeface="微软雅黑" charset="-122"/>
+                <a:ea typeface="微软雅黑" charset="-122"/>
+                <a:sym typeface="+mn-ea"/>
+              </a:rPr>
+              <a:t>测试系统输入</a:t>
+            </a:r>
+            <a:r>
+              <a:rPr lang="zh-CN" altLang="en-US" sz="1400" dirty="0">
+                <a:solidFill>
+                  <a:schemeClr val="tx1"/>
+                </a:solidFill>
+                <a:latin typeface="微软雅黑" charset="-122"/>
+                <a:ea typeface="微软雅黑" charset="-122"/>
+                <a:sym typeface="+mn-ea"/>
+              </a:rPr>
+              <a:t>包括信道模型、发射波束配置、目标验证范围和重建门限；</a:t>
+            </a:r>
+            <a:r>
+              <a:rPr lang="zh-CN" altLang="en-US" sz="1400" b="1" dirty="0">
+                <a:solidFill>
+                  <a:schemeClr val="tx1"/>
+                </a:solidFill>
+                <a:latin typeface="微软雅黑" charset="-122"/>
+                <a:ea typeface="微软雅黑" charset="-122"/>
+                <a:sym typeface="+mn-ea"/>
+              </a:rPr>
+              <a:t>输出</a:t>
+            </a:r>
+            <a:r>
+              <a:rPr lang="zh-CN" altLang="en-US" sz="1400" dirty="0">
+                <a:solidFill>
+                  <a:schemeClr val="tx1"/>
+                </a:solidFill>
+                <a:latin typeface="微软雅黑" charset="-122"/>
+                <a:ea typeface="微软雅黑" charset="-122"/>
+                <a:sym typeface="+mn-ea"/>
+              </a:rPr>
+              <a:t>包括探头位置、信号权重及重建环境的测量结果。示例</a:t>
+            </a:r>
+            <a:r>
+              <a:rPr lang="en-US" altLang="zh-CN" sz="1400" dirty="0">
+                <a:solidFill>
+                  <a:schemeClr val="tx1"/>
+                </a:solidFill>
+                <a:latin typeface="微软雅黑" charset="-122"/>
+                <a:ea typeface="微软雅黑" charset="-122"/>
+                <a:sym typeface="+mn-ea"/>
+              </a:rPr>
+              <a:t> AI </a:t>
+            </a:r>
+            <a:r>
+              <a:rPr lang="zh-CN" altLang="en-US" sz="1400" dirty="0">
+                <a:solidFill>
+                  <a:schemeClr val="tx1"/>
+                </a:solidFill>
+                <a:latin typeface="微软雅黑" charset="-122"/>
+                <a:ea typeface="微软雅黑" charset="-122"/>
+                <a:sym typeface="+mn-ea"/>
+              </a:rPr>
+              <a:t>模型以</a:t>
+            </a:r>
+            <a:r>
+              <a:rPr lang="en-US" altLang="zh-CN" sz="1400" dirty="0">
+                <a:solidFill>
+                  <a:schemeClr val="tx1"/>
+                </a:solidFill>
+                <a:latin typeface="微软雅黑" charset="-122"/>
+                <a:ea typeface="微软雅黑" charset="-122"/>
+                <a:sym typeface="+mn-ea"/>
+              </a:rPr>
+              <a:t> </a:t>
+            </a:r>
+            <a:r>
+              <a:rPr lang="en-US" altLang="zh-CN" sz="1400" b="1" dirty="0">
+                <a:solidFill>
+                  <a:schemeClr val="tx1"/>
+                </a:solidFill>
+                <a:latin typeface="微软雅黑" charset="-122"/>
+                <a:ea typeface="微软雅黑" charset="-122"/>
+                <a:sym typeface="+mn-ea"/>
+              </a:rPr>
+              <a:t>8 </a:t>
+            </a:r>
+            <a:r>
+              <a:rPr lang="zh-CN" altLang="en-US" sz="1400" b="1" dirty="0">
+                <a:solidFill>
+                  <a:schemeClr val="tx1"/>
+                </a:solidFill>
+                <a:latin typeface="微软雅黑" charset="-122"/>
+                <a:ea typeface="微软雅黑" charset="-122"/>
+                <a:sym typeface="+mn-ea"/>
+              </a:rPr>
+              <a:t>个输入波束经功率排名预处理后的特征</a:t>
+            </a:r>
+            <a:r>
+              <a:rPr lang="zh-CN" altLang="en-US" sz="1400" dirty="0">
+                <a:solidFill>
+                  <a:schemeClr val="tx1"/>
+                </a:solidFill>
+                <a:latin typeface="微软雅黑" charset="-122"/>
+                <a:ea typeface="微软雅黑" charset="-122"/>
+                <a:sym typeface="+mn-ea"/>
+              </a:rPr>
+              <a:t>为输入，输出</a:t>
+            </a:r>
+            <a:r>
+              <a:rPr lang="en-US" altLang="zh-CN" sz="1400" dirty="0">
+                <a:solidFill>
+                  <a:schemeClr val="tx1"/>
+                </a:solidFill>
+                <a:latin typeface="微软雅黑" charset="-122"/>
+                <a:ea typeface="微软雅黑" charset="-122"/>
+                <a:sym typeface="+mn-ea"/>
+              </a:rPr>
+              <a:t> 32 </a:t>
+            </a:r>
+            <a:r>
+              <a:rPr lang="zh-CN" altLang="en-US" sz="1400" dirty="0">
+                <a:solidFill>
+                  <a:schemeClr val="tx1"/>
+                </a:solidFill>
+                <a:latin typeface="微软雅黑" charset="-122"/>
+                <a:ea typeface="微软雅黑" charset="-122"/>
+                <a:sym typeface="+mn-ea"/>
+              </a:rPr>
+              <a:t>个候选波束对应的预测结果，再选择</a:t>
+            </a:r>
+            <a:r>
+              <a:rPr lang="en-US" altLang="zh-CN" sz="1400" dirty="0">
+                <a:solidFill>
+                  <a:schemeClr val="tx1"/>
+                </a:solidFill>
+                <a:latin typeface="微软雅黑" charset="-122"/>
+                <a:ea typeface="微软雅黑" charset="-122"/>
+                <a:sym typeface="+mn-ea"/>
+              </a:rPr>
+              <a:t> Top-1</a:t>
+            </a:r>
+            <a:r>
+              <a:rPr lang="zh-CN" altLang="en-US" sz="1400" dirty="0">
+                <a:solidFill>
+                  <a:schemeClr val="tx1"/>
+                </a:solidFill>
+                <a:latin typeface="微软雅黑" charset="-122"/>
+                <a:ea typeface="微软雅黑" charset="-122"/>
+                <a:sym typeface="+mn-ea"/>
+              </a:rPr>
+              <a:t>。</a:t>
+            </a:r>
+            <a:endParaRPr lang="zh-CN" altLang="en-US" sz="1400" dirty="0">
+              <a:solidFill>
+                <a:schemeClr val="tx1"/>
+              </a:solidFill>
+              <a:latin typeface="微软雅黑" charset="-122"/>
+              <a:ea typeface="微软雅黑" charset="-122"/>
+              <a:sym typeface="+mn-ea"/>
+            </a:endParaRPr>
+          </a:p>
+          <a:p>
+            <a:pPr indent="0">
+              <a:lnSpc>
+                <a:spcPct val="130000"/>
+              </a:lnSpc>
+              <a:buFont typeface="Arial" panose="020B0604020202020204" pitchFamily="34" charset="0"/>
+              <a:buNone/>
+            </a:pPr>
+            <a:r>
+              <a:rPr lang="zh-CN" altLang="en-US" sz="1400" b="1" dirty="0">
+                <a:solidFill>
+                  <a:srgbClr val="FF0000"/>
+                </a:solidFill>
+                <a:latin typeface="微软雅黑" charset="-122"/>
+                <a:ea typeface="微软雅黑" charset="-122"/>
+                <a:sym typeface="+mn-ea"/>
+              </a:rPr>
+              <a:t>研究方法：</a:t>
+            </a:r>
+            <a:endParaRPr lang="zh-CN" altLang="en-US" sz="1400" b="1" dirty="0">
+              <a:solidFill>
+                <a:srgbClr val="FF0000"/>
+              </a:solidFill>
+              <a:latin typeface="微软雅黑" charset="-122"/>
+              <a:ea typeface="微软雅黑" charset="-122"/>
+              <a:sym typeface="+mn-ea"/>
+            </a:endParaRPr>
+          </a:p>
+          <a:p>
+            <a:pPr indent="0">
+              <a:lnSpc>
+                <a:spcPct val="120000"/>
+              </a:lnSpc>
+              <a:buFont typeface="Arial" panose="020B0604020202020204" pitchFamily="34" charset="0"/>
+              <a:buNone/>
+            </a:pPr>
+            <a:r>
+              <a:rPr lang="en-US" sz="1400" b="1" dirty="0">
+                <a:solidFill>
+                  <a:schemeClr val="tx1"/>
+                </a:solidFill>
+                <a:latin typeface="微软雅黑" charset="-122"/>
+                <a:ea typeface="微软雅黑" charset="-122"/>
+                <a:sym typeface="+mn-ea"/>
+              </a:rPr>
+              <a:t>a. </a:t>
+            </a:r>
+            <a:r>
+              <a:rPr lang="zh-CN" altLang="en-US" sz="1400" b="1" dirty="0">
+                <a:solidFill>
+                  <a:schemeClr val="tx1"/>
+                </a:solidFill>
+                <a:latin typeface="微软雅黑" charset="-122"/>
+                <a:ea typeface="微软雅黑" charset="-122"/>
+                <a:sym typeface="+mn-ea"/>
+              </a:rPr>
+              <a:t>生成考虑基站波束作用的目标信道。</a:t>
+            </a:r>
+            <a:r>
+              <a:rPr lang="zh-CN" altLang="en-US" sz="1400" dirty="0">
+                <a:solidFill>
+                  <a:schemeClr val="tx1"/>
+                </a:solidFill>
+                <a:latin typeface="微软雅黑" charset="-122"/>
+                <a:ea typeface="微软雅黑" charset="-122"/>
+                <a:sym typeface="+mn-ea"/>
+              </a:rPr>
+              <a:t>不同发射波束对传播路径施加不同增益，终端看到的功率分布随之变化。作者将波束增益加入</a:t>
+            </a:r>
+            <a:r>
+              <a:rPr lang="en-US" altLang="zh-CN" sz="1400" dirty="0">
+                <a:solidFill>
+                  <a:schemeClr val="tx1"/>
+                </a:solidFill>
+                <a:latin typeface="微软雅黑" charset="-122"/>
+                <a:ea typeface="微软雅黑" charset="-122"/>
+                <a:sym typeface="+mn-ea"/>
+              </a:rPr>
+              <a:t> CDL </a:t>
+            </a:r>
+            <a:r>
+              <a:rPr lang="zh-CN" altLang="en-US" sz="1400" dirty="0">
+                <a:solidFill>
+                  <a:schemeClr val="tx1"/>
+                </a:solidFill>
+                <a:latin typeface="微软雅黑" charset="-122"/>
+                <a:ea typeface="微软雅黑" charset="-122"/>
+                <a:sym typeface="+mn-ea"/>
+              </a:rPr>
+              <a:t>路径，并保留主导簇降低复杂度；测试前旋转目标信道分布，提高探头面板对重要路径的覆盖。</a:t>
+            </a:r>
+            <a:endParaRPr lang="zh-CN" altLang="en-US" sz="1400" dirty="0">
+              <a:solidFill>
+                <a:schemeClr val="tx1"/>
+              </a:solidFill>
+              <a:latin typeface="微软雅黑" charset="-122"/>
+              <a:ea typeface="微软雅黑" charset="-122"/>
+              <a:sym typeface="+mn-ea"/>
+            </a:endParaRPr>
+          </a:p>
+          <a:p>
+            <a:pPr indent="0">
+              <a:lnSpc>
+                <a:spcPct val="120000"/>
+              </a:lnSpc>
+              <a:buFont typeface="Arial" panose="020B0604020202020204" pitchFamily="34" charset="0"/>
+              <a:buNone/>
+            </a:pPr>
+            <a:r>
+              <a:rPr lang="en-US" altLang="zh-CN" sz="1400" b="1" dirty="0">
+                <a:solidFill>
+                  <a:schemeClr val="tx1"/>
+                </a:solidFill>
+                <a:latin typeface="微软雅黑" charset="-122"/>
+                <a:ea typeface="微软雅黑" charset="-122"/>
+                <a:sym typeface="+mn-ea"/>
+              </a:rPr>
+              <a:t>b. </a:t>
+            </a:r>
+            <a:r>
+              <a:rPr lang="zh-CN" altLang="en-US" sz="1400" b="1" dirty="0">
+                <a:solidFill>
+                  <a:schemeClr val="tx1"/>
+                </a:solidFill>
+                <a:latin typeface="微软雅黑" charset="-122"/>
+                <a:ea typeface="微软雅黑" charset="-122"/>
+                <a:sym typeface="+mn-ea"/>
+              </a:rPr>
+              <a:t>根据输入集合是否已知，确定重建范围。</a:t>
+            </a:r>
+            <a:r>
+              <a:rPr lang="zh-CN" altLang="en-US" sz="1400" dirty="0">
+                <a:solidFill>
+                  <a:schemeClr val="tx1"/>
+                </a:solidFill>
+                <a:latin typeface="微软雅黑" charset="-122"/>
+                <a:ea typeface="微软雅黑" charset="-122"/>
+                <a:sym typeface="+mn-ea"/>
+              </a:rPr>
+              <a:t>方法</a:t>
+            </a:r>
+            <a:r>
+              <a:rPr lang="en-US" altLang="zh-CN" sz="1400" dirty="0">
+                <a:solidFill>
+                  <a:schemeClr val="tx1"/>
+                </a:solidFill>
+                <a:latin typeface="微软雅黑" charset="-122"/>
+                <a:ea typeface="微软雅黑" charset="-122"/>
+                <a:sym typeface="+mn-ea"/>
+              </a:rPr>
+              <a:t> A </a:t>
+            </a:r>
+            <a:r>
+              <a:rPr lang="zh-CN" altLang="en-US" sz="1400" dirty="0">
+                <a:solidFill>
+                  <a:schemeClr val="tx1"/>
+                </a:solidFill>
+                <a:latin typeface="微软雅黑" charset="-122"/>
+                <a:ea typeface="微软雅黑" charset="-122"/>
+                <a:sym typeface="+mn-ea"/>
+              </a:rPr>
+              <a:t>支持全部候选波束，适合输入集合未知的情况。方法</a:t>
+            </a:r>
+            <a:r>
+              <a:rPr lang="en-US" altLang="zh-CN" sz="1400" dirty="0">
+                <a:solidFill>
+                  <a:schemeClr val="tx1"/>
+                </a:solidFill>
+                <a:latin typeface="微软雅黑" charset="-122"/>
+                <a:ea typeface="微软雅黑" charset="-122"/>
+                <a:sym typeface="+mn-ea"/>
+              </a:rPr>
+              <a:t> B </a:t>
+            </a:r>
+            <a:r>
+              <a:rPr lang="zh-CN" altLang="en-US" sz="1400" dirty="0">
+                <a:solidFill>
+                  <a:schemeClr val="tx1"/>
+                </a:solidFill>
+                <a:latin typeface="微软雅黑" charset="-122"/>
+                <a:ea typeface="微软雅黑" charset="-122"/>
+                <a:sym typeface="+mn-ea"/>
+              </a:rPr>
+              <a:t>针对已知输入集合及</a:t>
+            </a:r>
+            <a:r>
+              <a:rPr lang="en-US" altLang="zh-CN" sz="1400" dirty="0">
+                <a:solidFill>
+                  <a:schemeClr val="tx1"/>
+                </a:solidFill>
+                <a:latin typeface="微软雅黑" charset="-122"/>
+                <a:ea typeface="微软雅黑" charset="-122"/>
+                <a:sym typeface="+mn-ea"/>
+              </a:rPr>
+              <a:t> Top-K </a:t>
+            </a:r>
+            <a:r>
+              <a:rPr lang="zh-CN" altLang="en-US" sz="1400" dirty="0">
+                <a:solidFill>
+                  <a:schemeClr val="tx1"/>
+                </a:solidFill>
+                <a:latin typeface="微软雅黑" charset="-122"/>
+                <a:ea typeface="微软雅黑" charset="-122"/>
+                <a:sym typeface="+mn-ea"/>
+              </a:rPr>
+              <a:t>参考目标构建环境，可以缩小重建范围、减少探头需求。两者体现测试配置灵活性与实现资源之间的取舍。</a:t>
+            </a:r>
+            <a:endParaRPr lang="zh-CN" altLang="en-US" sz="1400" dirty="0">
+              <a:solidFill>
+                <a:schemeClr val="tx1"/>
+              </a:solidFill>
+              <a:latin typeface="微软雅黑" charset="-122"/>
+              <a:ea typeface="微软雅黑" charset="-122"/>
+              <a:sym typeface="+mn-ea"/>
+            </a:endParaRPr>
+          </a:p>
+          <a:p>
+            <a:pPr indent="0">
+              <a:lnSpc>
+                <a:spcPct val="120000"/>
+              </a:lnSpc>
+              <a:buFont typeface="Arial" panose="020B0604020202020204" pitchFamily="34" charset="0"/>
+              <a:buNone/>
+            </a:pPr>
+            <a:r>
+              <a:rPr lang="en-US" altLang="zh-CN" sz="1400" b="1" dirty="0">
+                <a:solidFill>
+                  <a:schemeClr val="tx1"/>
+                </a:solidFill>
+                <a:latin typeface="微软雅黑" charset="-122"/>
+                <a:ea typeface="微软雅黑" charset="-122"/>
+                <a:sym typeface="+mn-ea"/>
+              </a:rPr>
+              <a:t>c. </a:t>
+            </a:r>
+            <a:r>
+              <a:rPr lang="zh-CN" altLang="en-US" sz="1400" b="1" dirty="0">
+                <a:solidFill>
+                  <a:schemeClr val="tx1"/>
+                </a:solidFill>
+                <a:latin typeface="微软雅黑" charset="-122"/>
+                <a:ea typeface="微软雅黑" charset="-122"/>
+                <a:sym typeface="+mn-ea"/>
+              </a:rPr>
+              <a:t>逐波束检查环境，并优先改善薄弱情况。</a:t>
+            </a:r>
+            <a:r>
+              <a:rPr lang="en-US" altLang="zh-CN" sz="1400" dirty="0">
+                <a:solidFill>
+                  <a:schemeClr val="tx1"/>
+                </a:solidFill>
+                <a:latin typeface="微软雅黑" charset="-122"/>
+                <a:ea typeface="微软雅黑" charset="-122"/>
+                <a:sym typeface="+mn-ea"/>
+              </a:rPr>
+              <a:t>BPSP </a:t>
+            </a:r>
+            <a:r>
+              <a:rPr lang="zh-CN" altLang="en-US" sz="1400" dirty="0">
+                <a:solidFill>
+                  <a:schemeClr val="tx1"/>
+                </a:solidFill>
+                <a:latin typeface="微软雅黑" charset="-122"/>
+                <a:ea typeface="微软雅黑" charset="-122"/>
+                <a:sym typeface="+mn-ea"/>
+              </a:rPr>
+              <a:t>比较目标与重建功率角谱，保留各波束的重建质量。算法针对最低相似度的情况补充探头、优化权重，直到达到门限。</a:t>
+            </a:r>
+            <a:r>
+              <a:rPr lang="en-US" altLang="zh-CN" sz="1400" dirty="0">
+                <a:solidFill>
+                  <a:schemeClr val="tx1"/>
+                </a:solidFill>
+                <a:latin typeface="微软雅黑" charset="-122"/>
+                <a:ea typeface="微软雅黑" charset="-122"/>
+                <a:sym typeface="+mn-ea"/>
+              </a:rPr>
+              <a:t>BPSP </a:t>
+            </a:r>
+            <a:r>
+              <a:rPr lang="zh-CN" altLang="en-US" sz="1400" dirty="0">
+                <a:solidFill>
+                  <a:schemeClr val="tx1"/>
+                </a:solidFill>
+                <a:latin typeface="微软雅黑" charset="-122"/>
+                <a:ea typeface="微软雅黑" charset="-122"/>
+                <a:sym typeface="+mn-ea"/>
+              </a:rPr>
+              <a:t>评价环境重建，模型准确率评价预测，两项结果需要分别报告。</a:t>
+            </a:r>
+            <a:endParaRPr lang="zh-CN" altLang="en-US" sz="1400" dirty="0">
+              <a:solidFill>
+                <a:schemeClr val="tx1"/>
+              </a:solidFill>
+              <a:latin typeface="微软雅黑" charset="-122"/>
+              <a:ea typeface="微软雅黑" charset="-122"/>
+              <a:sym typeface="+mn-ea"/>
+            </a:endParaRPr>
+          </a:p>
+          <a:p>
+            <a:pPr indent="0">
+              <a:lnSpc>
+                <a:spcPct val="120000"/>
+              </a:lnSpc>
+              <a:buFont typeface="Arial" panose="020B0604020202020204" pitchFamily="34" charset="0"/>
+              <a:buNone/>
+            </a:pPr>
+            <a:r>
+              <a:rPr lang="en-US" altLang="zh-CN" sz="1400" b="1" dirty="0">
+                <a:solidFill>
+                  <a:schemeClr val="tx1"/>
+                </a:solidFill>
+                <a:latin typeface="微软雅黑" charset="-122"/>
+                <a:ea typeface="微软雅黑" charset="-122"/>
+                <a:sym typeface="+mn-ea"/>
+              </a:rPr>
+              <a:t>d. </a:t>
+            </a:r>
+            <a:r>
+              <a:rPr lang="zh-CN" altLang="en-US" sz="1400" b="1" dirty="0">
+                <a:solidFill>
+                  <a:schemeClr val="tx1"/>
+                </a:solidFill>
+                <a:latin typeface="微软雅黑" charset="-122"/>
+                <a:ea typeface="微软雅黑" charset="-122"/>
+                <a:sym typeface="+mn-ea"/>
+              </a:rPr>
+              <a:t>通过真实装置和实测数据验证方法。</a:t>
+            </a:r>
+            <a:r>
+              <a:rPr lang="en-US" altLang="zh-CN" sz="1400" dirty="0">
+                <a:solidFill>
+                  <a:schemeClr val="tx1"/>
+                </a:solidFill>
+                <a:latin typeface="微软雅黑" charset="-122"/>
+                <a:ea typeface="微软雅黑" charset="-122"/>
+                <a:sym typeface="+mn-ea"/>
+              </a:rPr>
+              <a:t>CDL-A </a:t>
+            </a:r>
+            <a:r>
+              <a:rPr lang="zh-CN" altLang="en-US" sz="1400" dirty="0">
+                <a:solidFill>
+                  <a:schemeClr val="tx1"/>
+                </a:solidFill>
+                <a:latin typeface="微软雅黑" charset="-122"/>
+                <a:ea typeface="微软雅黑" charset="-122"/>
+                <a:sym typeface="+mn-ea"/>
+              </a:rPr>
+              <a:t>实验采用</a:t>
+            </a:r>
+            <a:r>
+              <a:rPr lang="en-US" altLang="zh-CN" sz="1400" dirty="0">
+                <a:solidFill>
+                  <a:schemeClr val="tx1"/>
+                </a:solidFill>
+                <a:latin typeface="微软雅黑" charset="-122"/>
+                <a:ea typeface="微软雅黑" charset="-122"/>
+                <a:sym typeface="+mn-ea"/>
+              </a:rPr>
+              <a:t> 1.5 m </a:t>
+            </a:r>
+            <a:r>
+              <a:rPr lang="zh-CN" altLang="en-US" sz="1400" dirty="0">
+                <a:solidFill>
+                  <a:schemeClr val="tx1"/>
+                </a:solidFill>
+                <a:latin typeface="微软雅黑" charset="-122"/>
+                <a:ea typeface="微软雅黑" charset="-122"/>
+                <a:sym typeface="+mn-ea"/>
+              </a:rPr>
+              <a:t>测量距离，方法</a:t>
+            </a:r>
+            <a:r>
+              <a:rPr lang="en-US" altLang="zh-CN" sz="1400" dirty="0">
+                <a:solidFill>
+                  <a:schemeClr val="tx1"/>
+                </a:solidFill>
+                <a:latin typeface="微软雅黑" charset="-122"/>
+                <a:ea typeface="微软雅黑" charset="-122"/>
+                <a:sym typeface="+mn-ea"/>
+              </a:rPr>
+              <a:t> A</a:t>
+            </a:r>
+            <a:r>
+              <a:rPr lang="zh-CN" altLang="en-US" sz="1400" dirty="0">
+                <a:solidFill>
+                  <a:schemeClr val="tx1"/>
+                </a:solidFill>
+                <a:latin typeface="微软雅黑" charset="-122"/>
+                <a:ea typeface="微软雅黑" charset="-122"/>
+                <a:sym typeface="+mn-ea"/>
+              </a:rPr>
+              <a:t>、</a:t>
+            </a:r>
+            <a:r>
+              <a:rPr lang="en-US" altLang="zh-CN" sz="1400" dirty="0">
+                <a:solidFill>
+                  <a:schemeClr val="tx1"/>
+                </a:solidFill>
+                <a:latin typeface="微软雅黑" charset="-122"/>
+                <a:ea typeface="微软雅黑" charset="-122"/>
+                <a:sym typeface="+mn-ea"/>
+              </a:rPr>
+              <a:t>B </a:t>
+            </a:r>
+            <a:r>
+              <a:rPr lang="zh-CN" altLang="en-US" sz="1400" dirty="0">
+                <a:solidFill>
+                  <a:schemeClr val="tx1"/>
+                </a:solidFill>
+                <a:latin typeface="微软雅黑" charset="-122"/>
+                <a:ea typeface="微软雅黑" charset="-122"/>
+                <a:sym typeface="+mn-ea"/>
+              </a:rPr>
+              <a:t>分别使用</a:t>
+            </a:r>
+            <a:r>
+              <a:rPr lang="en-US" altLang="zh-CN" sz="1400" dirty="0">
+                <a:solidFill>
+                  <a:schemeClr val="tx1"/>
+                </a:solidFill>
+                <a:latin typeface="微软雅黑" charset="-122"/>
+                <a:ea typeface="微软雅黑" charset="-122"/>
+                <a:sym typeface="+mn-ea"/>
+              </a:rPr>
+              <a:t> 8</a:t>
+            </a:r>
+            <a:r>
+              <a:rPr lang="zh-CN" altLang="en-US" sz="1400" dirty="0">
+                <a:solidFill>
+                  <a:schemeClr val="tx1"/>
+                </a:solidFill>
+                <a:latin typeface="微软雅黑" charset="-122"/>
+                <a:ea typeface="微软雅黑" charset="-122"/>
+                <a:sym typeface="+mn-ea"/>
+              </a:rPr>
+              <a:t>、</a:t>
+            </a:r>
+            <a:r>
+              <a:rPr lang="en-US" altLang="zh-CN" sz="1400" dirty="0">
+                <a:solidFill>
+                  <a:schemeClr val="tx1"/>
+                </a:solidFill>
+                <a:latin typeface="微软雅黑" charset="-122"/>
+                <a:ea typeface="微软雅黑" charset="-122"/>
+                <a:sym typeface="+mn-ea"/>
+              </a:rPr>
+              <a:t>7 </a:t>
+            </a:r>
+            <a:r>
+              <a:rPr lang="zh-CN" altLang="en-US" sz="1400" dirty="0">
+                <a:solidFill>
+                  <a:schemeClr val="tx1"/>
+                </a:solidFill>
+                <a:latin typeface="微软雅黑" charset="-122"/>
+                <a:ea typeface="微软雅黑" charset="-122"/>
+                <a:sym typeface="+mn-ea"/>
+              </a:rPr>
+              <a:t>个探头。作者扫描实测功率角谱检查环境，再形成</a:t>
+            </a:r>
+            <a:r>
+              <a:rPr lang="en-US" altLang="zh-CN" sz="1400" dirty="0">
+                <a:solidFill>
+                  <a:schemeClr val="tx1"/>
+                </a:solidFill>
+                <a:latin typeface="微软雅黑" charset="-122"/>
+                <a:ea typeface="微软雅黑" charset="-122"/>
+                <a:sym typeface="+mn-ea"/>
+              </a:rPr>
+              <a:t> 1000 </a:t>
+            </a:r>
+            <a:r>
+              <a:rPr lang="zh-CN" altLang="en-US" sz="1400" dirty="0">
+                <a:solidFill>
+                  <a:schemeClr val="tx1"/>
+                </a:solidFill>
+                <a:latin typeface="微软雅黑" charset="-122"/>
+                <a:ea typeface="微软雅黑" charset="-122"/>
+                <a:sym typeface="+mn-ea"/>
+              </a:rPr>
+              <a:t>个模型验证样本。</a:t>
+            </a:r>
+            <a:r>
+              <a:rPr lang="en-US" altLang="zh-CN" sz="1400" dirty="0">
+                <a:solidFill>
+                  <a:schemeClr val="tx1"/>
+                </a:solidFill>
+                <a:latin typeface="微软雅黑" charset="-122"/>
+                <a:ea typeface="微软雅黑" charset="-122"/>
+                <a:sym typeface="+mn-ea"/>
+              </a:rPr>
+              <a:t>Top-1 </a:t>
+            </a:r>
+            <a:r>
+              <a:rPr lang="zh-CN" altLang="en-US" sz="1400" dirty="0">
+                <a:solidFill>
+                  <a:schemeClr val="tx1"/>
+                </a:solidFill>
+                <a:latin typeface="微软雅黑" charset="-122"/>
+                <a:ea typeface="微软雅黑" charset="-122"/>
+                <a:sym typeface="+mn-ea"/>
+              </a:rPr>
+              <a:t>预测准确率为：仿真基准</a:t>
+            </a:r>
+            <a:r>
+              <a:rPr lang="en-US" altLang="zh-CN" sz="1400" dirty="0">
+                <a:solidFill>
+                  <a:schemeClr val="tx1"/>
+                </a:solidFill>
+                <a:latin typeface="微软雅黑" charset="-122"/>
+                <a:ea typeface="微软雅黑" charset="-122"/>
+                <a:sym typeface="+mn-ea"/>
+              </a:rPr>
+              <a:t> 97.7%</a:t>
+            </a:r>
+            <a:r>
+              <a:rPr lang="zh-CN" altLang="en-US" sz="1400" dirty="0">
+                <a:solidFill>
+                  <a:schemeClr val="tx1"/>
+                </a:solidFill>
+                <a:latin typeface="微软雅黑" charset="-122"/>
+                <a:ea typeface="微软雅黑" charset="-122"/>
+                <a:sym typeface="+mn-ea"/>
+              </a:rPr>
+              <a:t>，方法</a:t>
+            </a:r>
+            <a:r>
+              <a:rPr lang="en-US" altLang="zh-CN" sz="1400" dirty="0">
+                <a:solidFill>
+                  <a:schemeClr val="tx1"/>
+                </a:solidFill>
+                <a:latin typeface="微软雅黑" charset="-122"/>
+                <a:ea typeface="微软雅黑" charset="-122"/>
+                <a:sym typeface="+mn-ea"/>
+              </a:rPr>
+              <a:t> A </a:t>
+            </a:r>
+            <a:r>
+              <a:rPr lang="zh-CN" altLang="en-US" sz="1400" dirty="0">
+                <a:solidFill>
+                  <a:schemeClr val="tx1"/>
+                </a:solidFill>
+                <a:latin typeface="微软雅黑" charset="-122"/>
+                <a:ea typeface="微软雅黑" charset="-122"/>
+                <a:sym typeface="+mn-ea"/>
+              </a:rPr>
+              <a:t>实测数据</a:t>
+            </a:r>
+            <a:r>
+              <a:rPr lang="en-US" altLang="zh-CN" sz="1400" dirty="0">
+                <a:solidFill>
+                  <a:schemeClr val="tx1"/>
+                </a:solidFill>
+                <a:latin typeface="微软雅黑" charset="-122"/>
+                <a:ea typeface="微软雅黑" charset="-122"/>
+                <a:sym typeface="+mn-ea"/>
+              </a:rPr>
+              <a:t> 73.1%</a:t>
+            </a:r>
+            <a:r>
+              <a:rPr lang="zh-CN" altLang="en-US" sz="1400" dirty="0">
+                <a:solidFill>
+                  <a:schemeClr val="tx1"/>
+                </a:solidFill>
+                <a:latin typeface="微软雅黑" charset="-122"/>
+                <a:ea typeface="微软雅黑" charset="-122"/>
+                <a:sym typeface="+mn-ea"/>
+              </a:rPr>
+              <a:t>，方法</a:t>
+            </a:r>
+            <a:r>
+              <a:rPr lang="en-US" altLang="zh-CN" sz="1400" dirty="0">
+                <a:solidFill>
+                  <a:schemeClr val="tx1"/>
+                </a:solidFill>
+                <a:latin typeface="微软雅黑" charset="-122"/>
+                <a:ea typeface="微软雅黑" charset="-122"/>
+                <a:sym typeface="+mn-ea"/>
+              </a:rPr>
+              <a:t> B </a:t>
+            </a:r>
+            <a:r>
+              <a:rPr lang="zh-CN" altLang="en-US" sz="1400" dirty="0">
+                <a:solidFill>
+                  <a:schemeClr val="tx1"/>
+                </a:solidFill>
+                <a:latin typeface="微软雅黑" charset="-122"/>
+                <a:ea typeface="微软雅黑" charset="-122"/>
+                <a:sym typeface="+mn-ea"/>
+              </a:rPr>
+              <a:t>实测数据</a:t>
+            </a:r>
+            <a:r>
+              <a:rPr lang="en-US" altLang="zh-CN" sz="1400" dirty="0">
+                <a:solidFill>
+                  <a:schemeClr val="tx1"/>
+                </a:solidFill>
+                <a:latin typeface="微软雅黑" charset="-122"/>
+                <a:ea typeface="微软雅黑" charset="-122"/>
+                <a:sym typeface="+mn-ea"/>
+              </a:rPr>
+              <a:t> 93.5%</a:t>
+            </a:r>
+            <a:r>
+              <a:rPr lang="zh-CN" altLang="en-US" sz="1400" dirty="0">
+                <a:solidFill>
+                  <a:schemeClr val="tx1"/>
+                </a:solidFill>
+                <a:latin typeface="微软雅黑" charset="-122"/>
+                <a:ea typeface="微软雅黑" charset="-122"/>
+                <a:sym typeface="+mn-ea"/>
+              </a:rPr>
+              <a:t>。方法</a:t>
+            </a:r>
+            <a:r>
+              <a:rPr lang="en-US" altLang="zh-CN" sz="1400" dirty="0">
+                <a:solidFill>
+                  <a:schemeClr val="tx1"/>
+                </a:solidFill>
+                <a:latin typeface="微软雅黑" charset="-122"/>
+                <a:ea typeface="微软雅黑" charset="-122"/>
+                <a:sym typeface="+mn-ea"/>
+              </a:rPr>
+              <a:t> B </a:t>
+            </a:r>
+            <a:r>
+              <a:rPr lang="zh-CN" altLang="en-US" sz="1400" dirty="0">
+                <a:solidFill>
+                  <a:schemeClr val="tx1"/>
+                </a:solidFill>
+                <a:latin typeface="微软雅黑" charset="-122"/>
+                <a:ea typeface="微软雅黑" charset="-122"/>
+                <a:sym typeface="+mn-ea"/>
+              </a:rPr>
+              <a:t>更接近基准，说明测试环境会影响同一模型的评估结果。</a:t>
+            </a:r>
+            <a:endParaRPr lang="zh-CN" altLang="en-US" sz="1400" dirty="0">
+              <a:solidFill>
+                <a:schemeClr val="tx1"/>
+              </a:solidFill>
+              <a:latin typeface="微软雅黑" charset="-122"/>
+              <a:ea typeface="微软雅黑" charset="-122"/>
+              <a:sym typeface="+mn-ea"/>
+            </a:endParaRPr>
+          </a:p>
+          <a:p>
+            <a:pPr indent="0">
+              <a:lnSpc>
+                <a:spcPct val="130000"/>
+              </a:lnSpc>
+              <a:buFont typeface="Arial" panose="020B0604020202020204" pitchFamily="34" charset="0"/>
+              <a:buNone/>
+            </a:pPr>
+            <a:r>
+              <a:rPr lang="zh-CN" altLang="en-US" sz="1400" b="1" dirty="0">
+                <a:solidFill>
+                  <a:srgbClr val="FF0000"/>
+                </a:solidFill>
+                <a:latin typeface="微软雅黑" charset="-122"/>
+                <a:ea typeface="微软雅黑" charset="-122"/>
+                <a:sym typeface="+mn-ea"/>
+              </a:rPr>
+              <a:t>研究成熟度与启示：</a:t>
+            </a:r>
+            <a:r>
+              <a:rPr lang="zh-CN" altLang="en-US" sz="1400" dirty="0">
+                <a:solidFill>
+                  <a:schemeClr val="tx1"/>
+                </a:solidFill>
+                <a:latin typeface="微软雅黑" charset="-122"/>
+                <a:ea typeface="微软雅黑" charset="-122"/>
+                <a:sym typeface="+mn-ea"/>
+              </a:rPr>
+              <a:t>已有仿真、暗室实测及模型验证，全文未提供代码和模型权重下载入口。</a:t>
+            </a:r>
+            <a:r>
+              <a:rPr lang="zh-CN" altLang="en-US" sz="1400" b="1" dirty="0">
+                <a:solidFill>
+                  <a:schemeClr val="tx1"/>
+                </a:solidFill>
+                <a:latin typeface="微软雅黑" charset="-122"/>
+                <a:ea typeface="微软雅黑" charset="-122"/>
+                <a:sym typeface="+mn-ea"/>
+              </a:rPr>
+              <a:t>应用时应分别验收测试环境与</a:t>
+            </a:r>
+            <a:r>
+              <a:rPr lang="en-US" altLang="zh-CN" sz="1400" b="1" dirty="0">
+                <a:solidFill>
+                  <a:schemeClr val="tx1"/>
+                </a:solidFill>
+                <a:latin typeface="微软雅黑" charset="-122"/>
+                <a:ea typeface="微软雅黑" charset="-122"/>
+                <a:sym typeface="+mn-ea"/>
+              </a:rPr>
+              <a:t> AI </a:t>
+            </a:r>
+            <a:r>
+              <a:rPr lang="zh-CN" altLang="en-US" sz="1400" b="1" dirty="0">
+                <a:solidFill>
+                  <a:schemeClr val="tx1"/>
+                </a:solidFill>
+                <a:latin typeface="微软雅黑" charset="-122"/>
+                <a:ea typeface="微软雅黑" charset="-122"/>
+                <a:sym typeface="+mn-ea"/>
+              </a:rPr>
+              <a:t>功能，避免把重建误差归因于模型。</a:t>
+            </a:r>
+            <a:endParaRPr lang="zh-CN" altLang="en-US" sz="1400" b="1" dirty="0">
+              <a:solidFill>
+                <a:schemeClr val="tx1"/>
+              </a:solidFill>
+              <a:latin typeface="微软雅黑" charset="-122"/>
+              <a:ea typeface="微软雅黑" charset="-122"/>
+              <a:sym typeface="+mn-ea"/>
+            </a:endParaRPr>
+          </a:p>
+        </p:txBody>
+      </p:sp>
+      <p:sp>
+        <p:nvSpPr>
+          <p:cNvPr id="3" name="文本框 2"/>
+          <p:cNvSpPr txBox="1"/>
+          <p:nvPr userDrawn="1"/>
+        </p:nvSpPr>
+        <p:spPr>
+          <a:xfrm>
+            <a:off x="6318584" y="162490"/>
+            <a:ext cx="4655541" cy="803879"/>
+          </a:xfrm>
+          <a:prstGeom prst="rect">
+            <a:avLst/>
+          </a:prstGeom>
+        </p:spPr>
+        <p:txBody>
+          <a:bodyPr wrap="square" rtlCol="0">
+            <a:noAutofit/>
+          </a:bodyPr>
+          <a:p>
+            <a:r>
+              <a:rPr lang="en-US" altLang="zh-CN" sz="1200">
+                <a:latin typeface="Times New Roman" panose="02020603050405020304" charset="0"/>
+                <a:ea typeface="Times New Roman" panose="02020603050405020304" charset="0"/>
+                <a:cs typeface="Times New Roman" panose="02020603050405020304" charset="0"/>
+              </a:rPr>
+              <a:t>[7] WANG Z, YAN M, ZHAO W, et al. Over-the-air testing on artificial intelligence-based beam management evaluation of millimeter-wave devices[J]. IEEE Transactions on Antennas and Propagation, 2026, 74(3): 2770-2781. DOI: 10.1109/TAP.2025.3637525.</a:t>
+            </a:r>
+            <a:endParaRPr lang="en-US" altLang="zh-CN" sz="1200">
+              <a:latin typeface="Times New Roman" panose="02020603050405020304" charset="0"/>
+              <a:ea typeface="Times New Roman" panose="02020603050405020304" charset="0"/>
+              <a:cs typeface="Times New Roman" panose="02020603050405020304" charset="0"/>
+            </a:endParaRPr>
+          </a:p>
+        </p:txBody>
+      </p:sp>
+    </p:spTree>
+  </p:cSld>
+  <p:clrMapOvr>
+    <a:masterClrMapping/>
+  </p:clrMapOvr>
+</p:sld>
+</file>
+
+<file path=ppt/slides/slide12.xml><?xml version="1.0" encoding="utf-8"?>
+<p:sld xmlns:a="http://schemas.openxmlformats.org/drawingml/2006/main" xmlns:r="http://schemas.openxmlformats.org/officeDocument/2006/relationships" xmlns:p="http://schemas.openxmlformats.org/presentationml/2006/main">
+  <p:cSld>
+    <p:spTree>
+      <p:nvGrpSpPr>
         <p:cNvPr id="1" name=""/>
         <p:cNvGrpSpPr/>
         <p:nvPr/>
@@ -11599,18 +14042,7 @@
                 <a:ea typeface="微软雅黑" charset="-122"/>
                 <a:sym typeface="+mn-ea"/>
               </a:rPr>
-              <a:t>不同业务对吞吐量和时延的要求不同，同一种业务在网络条件变化后，也可能需要调整其使用的无线承载。该方法将</a:t>
-            </a:r>
-            <a:r>
-              <a:rPr lang="en-US" altLang="zh-CN" sz="1400" dirty="0">
-                <a:solidFill>
-                  <a:schemeClr val="tx1"/>
-                </a:solidFill>
-                <a:latin typeface="微软雅黑" charset="-122"/>
-                <a:ea typeface="微软雅黑" charset="-122"/>
-                <a:sym typeface="+mn-ea"/>
-              </a:rPr>
-              <a:t> </a:t>
+              <a:t>该方法将</a:t>
             </a:r>
             <a:r>
               <a:rPr lang="en-US" altLang="zh-CN" sz="1400" b="1" dirty="0">
@@ -11621,7 +14053,7 @@
                 <a:ea typeface="微软雅黑" charset="-122"/>
                 <a:sym typeface="+mn-ea"/>
               </a:rPr>
-              <a:t>QoS </a:t>
+              <a:t> QoS </a:t>
             </a:r>
             <a:r>
               <a:rPr lang="zh-CN" altLang="en-US" sz="1400" b="1" dirty="0">
@@ -11748,7 +14180,7 @@
                 <a:ea typeface="微软雅黑" charset="-122"/>
                 <a:sym typeface="+mn-ea"/>
               </a:rPr>
-              <a:t>通过</a:t>
+              <a:t>将数据组织为具有不同服务质量要求的</a:t>
             </a:r>
             <a:r>
               <a:rPr lang="en-US" altLang="zh-CN" sz="1400" dirty="0">
@@ -11770,7 +14202,7 @@
                 <a:ea typeface="微软雅黑" charset="-122"/>
                 <a:sym typeface="+mn-ea"/>
               </a:rPr>
-              <a:t>流表达服务质量要求，再将数据映射到无线承载</a:t>
+              <a:t>流，再由服务数据适配协议（</a:t>
             </a:r>
             <a:r>
               <a:rPr lang="en-US" altLang="zh-CN" sz="1400" dirty="0">
@@ -11781,7 +14213,7 @@
                 <a:ea typeface="微软雅黑" charset="-122"/>
                 <a:sym typeface="+mn-ea"/>
               </a:rPr>
-              <a:t> DRB</a:t>
+              <a:t>SDAP</a:t>
             </a:r>
             <a:r>
               <a:rPr lang="zh-CN" altLang="en-US" sz="1400" dirty="0">
@@ -11792,7 +14224,7 @@
                 <a:ea typeface="微软雅黑" charset="-122"/>
                 <a:sym typeface="+mn-ea"/>
               </a:rPr>
-              <a:t>。多个</a:t>
+              <a:t>）映射到数据无线承载（</a:t>
             </a:r>
             <a:r>
               <a:rPr lang="en-US" altLang="zh-CN" sz="1400" dirty="0">
@@ -11803,7 +14235,7 @@
                 <a:ea typeface="微软雅黑" charset="-122"/>
                 <a:sym typeface="+mn-ea"/>
               </a:rPr>
-              <a:t> QoS </a:t>
+              <a:t>DRB</a:t>
             </a:r>
             <a:r>
               <a:rPr lang="zh-CN" altLang="en-US" sz="1400" dirty="0">
@@ -11814,73 +14246,7 @@
                 <a:ea typeface="微软雅黑" charset="-122"/>
                 <a:sym typeface="+mn-ea"/>
               </a:rPr>
-              <a:t>流可以共用一个</a:t>
-            </a:r>
-            <a:r>
-              <a:rPr lang="en-US" altLang="zh-CN" sz="1400" dirty="0">
-                <a:solidFill>
-                  <a:schemeClr val="tx1"/>
-                </a:solidFill>
-                <a:latin typeface="微软雅黑" charset="-122"/>
-                <a:ea typeface="微软雅黑" charset="-122"/>
-                <a:sym typeface="+mn-ea"/>
-              </a:rPr>
-              <a:t> DRB</a:t>
-            </a:r>
-            <a:r>
-              <a:rPr lang="zh-CN" altLang="en-US" sz="1400" dirty="0">
-                <a:solidFill>
-                  <a:schemeClr val="tx1"/>
-                </a:solidFill>
-                <a:latin typeface="微软雅黑" charset="-122"/>
-                <a:ea typeface="微软雅黑" charset="-122"/>
-                <a:sym typeface="+mn-ea"/>
-              </a:rPr>
-              <a:t>，也可以使用不同</a:t>
-            </a:r>
-            <a:r>
-              <a:rPr lang="en-US" altLang="zh-CN" sz="1400" dirty="0">
-                <a:solidFill>
-                  <a:schemeClr val="tx1"/>
-                </a:solidFill>
-                <a:latin typeface="微软雅黑" charset="-122"/>
-                <a:ea typeface="微软雅黑" charset="-122"/>
-                <a:sym typeface="+mn-ea"/>
-              </a:rPr>
-              <a:t> DRB</a:t>
-            </a:r>
-            <a:r>
-              <a:rPr lang="zh-CN" altLang="en-US" sz="1400" dirty="0">
-                <a:solidFill>
-                  <a:schemeClr val="tx1"/>
-                </a:solidFill>
-                <a:latin typeface="微软雅黑" charset="-122"/>
-                <a:ea typeface="微软雅黑" charset="-122"/>
-                <a:sym typeface="+mn-ea"/>
-              </a:rPr>
-              <a:t>，由</a:t>
-            </a:r>
-            <a:r>
-              <a:rPr lang="en-US" altLang="zh-CN" sz="1400" dirty="0">
-                <a:solidFill>
-                  <a:schemeClr val="tx1"/>
-                </a:solidFill>
-                <a:latin typeface="微软雅黑" charset="-122"/>
-                <a:ea typeface="微软雅黑" charset="-122"/>
-                <a:sym typeface="+mn-ea"/>
-              </a:rPr>
-              <a:t> SDAP </a:t>
-            </a:r>
-            <a:r>
-              <a:rPr lang="zh-CN" altLang="en-US" sz="1400" dirty="0">
-                <a:solidFill>
-                  <a:schemeClr val="tx1"/>
-                </a:solidFill>
-                <a:latin typeface="微软雅黑" charset="-122"/>
-                <a:ea typeface="微软雅黑" charset="-122"/>
-                <a:sym typeface="+mn-ea"/>
-              </a:rPr>
-              <a:t>协议执行映射。现有标准支持配置和更新映射规则。</a:t>
+              <a:t>），多个流可以共用一个承载。现有标准支持配置和更新映射规则。</a:t>
             </a:r>
             <a:r>
               <a:rPr lang="zh-CN" altLang="en-US" sz="1400" b="1" dirty="0">
@@ -12018,18 +14384,18 @@
                 <a:ea typeface="微软雅黑" charset="-122"/>
                 <a:sym typeface="+mn-ea"/>
               </a:rPr>
-              <a:t>流与可用</a:t>
-            </a:r>
-            <a:r>
-              <a:rPr lang="en-US" altLang="zh-CN" sz="1400" b="1" dirty="0">
-                <a:solidFill>
-                  <a:schemeClr val="tx1"/>
-                </a:solidFill>
-                <a:latin typeface="微软雅黑" charset="-122"/>
-                <a:ea typeface="微软雅黑" charset="-122"/>
-                <a:sym typeface="+mn-ea"/>
-              </a:rPr>
-              <a:t> DRB </a:t>
+              <a:t>流与可用数据</a:t>
+            </a:r>
+            <a:r>
+              <a:rPr lang="zh-CN" altLang="en-US" sz="1400" b="1" dirty="0">
+                <a:solidFill>
+                  <a:schemeClr val="tx1"/>
+                </a:solidFill>
+                <a:latin typeface="微软雅黑" charset="0"/>
+                <a:ea typeface="微软雅黑" charset="0"/>
+                <a:sym typeface="+mn-ea"/>
+              </a:rPr>
+              <a:t>无线承载</a:t>
             </a:r>
             <a:r>
               <a:rPr lang="zh-CN" altLang="en-US" sz="1400" b="1" dirty="0">
@@ -12098,7 +14464,7 @@
           <a:p>
             <a:pPr indent="0">
               <a:lnSpc>
-                <a:spcPct val="120000"/>
+                <a:spcPct val="130000"/>
               </a:lnSpc>
               <a:buFont typeface="Arial" panose="020B0604020202020204" pitchFamily="34" charset="0"/>
               <a:buNone/>
@@ -12126,7 +14492,7 @@
           <a:p>
             <a:pPr indent="0">
               <a:lnSpc>
-                <a:spcPct val="120000"/>
+                <a:spcPct val="130000"/>
               </a:lnSpc>
               <a:buFont typeface="Arial" panose="020B0604020202020204" pitchFamily="34" charset="0"/>
               <a:buNone/>
@@ -12352,7 +14718,7 @@
           <a:p>
             <a:pPr indent="0">
               <a:lnSpc>
-                <a:spcPct val="120000"/>
+                <a:spcPct val="130000"/>
               </a:lnSpc>
               <a:buFont typeface="Arial" panose="020B0604020202020204" pitchFamily="34" charset="0"/>
               <a:buNone/>
@@ -12366,7 +14732,7 @@
                 <a:ea typeface="微软雅黑" charset="-122"/>
                 <a:sym typeface="+mn-ea"/>
               </a:rPr>
-              <a:t>b. DQN </a:t>
+              <a:t>b. </a:t>
             </a:r>
             <a:r>
               <a:rPr lang="zh-CN" altLang="en-US" sz="1400" b="1" dirty="0">
@@ -12377,7 +14743,29 @@
                 <a:ea typeface="微软雅黑" charset="-122"/>
                 <a:sym typeface="+mn-ea"/>
               </a:rPr>
-              <a:t>评估候选连接，形成映射方案。</a:t>
+              <a:t>深度</a:t>
+            </a:r>
+            <a:r>
+              <a:rPr lang="en-US" altLang="zh-CN" sz="1400" b="1" dirty="0">
+                <a:solidFill>
+                  <a:schemeClr val="tx1"/>
+                </a:solidFill>
+                <a:latin typeface="微软雅黑" charset="-122"/>
+                <a:ea typeface="微软雅黑" charset="-122"/>
+                <a:sym typeface="+mn-ea"/>
+              </a:rPr>
+              <a:t> Q </a:t>
+            </a:r>
+            <a:r>
+              <a:rPr lang="zh-CN" altLang="en-US" sz="1400" b="1" dirty="0">
+                <a:solidFill>
+                  <a:schemeClr val="tx1"/>
+                </a:solidFill>
+                <a:latin typeface="微软雅黑" charset="-122"/>
+                <a:ea typeface="微软雅黑" charset="-122"/>
+                <a:sym typeface="+mn-ea"/>
+              </a:rPr>
+              <a:t>网络评估候选连接，形成映射方案。</a:t>
             </a:r>
             <a:r>
               <a:rPr lang="zh-CN" altLang="en-US" sz="1400" dirty="0">
@@ -12479,7 +14867,7 @@
           <a:p>
             <a:pPr indent="0">
               <a:lnSpc>
-                <a:spcPct val="120000"/>
+                <a:spcPct val="130000"/>
               </a:lnSpc>
               <a:buFont typeface="Arial" panose="020B0604020202020204" pitchFamily="34" charset="0"/>
               <a:buNone/>
@@ -12584,7 +14972,7 @@
           <a:p>
             <a:pPr indent="0">
               <a:lnSpc>
-                <a:spcPct val="120000"/>
+                <a:spcPct val="130000"/>
               </a:lnSpc>
               <a:buFont typeface="Arial" panose="020B0604020202020204" pitchFamily="34" charset="0"/>
               <a:buNone/>
@@ -12754,779 +15142,52 @@
   <p:cSld>
     <p:spTree>
       <p:nvGrpSpPr>
-        <p:cNvPr id="87" name=""/>
+        <p:cNvPr id="1" name=""/>
         <p:cNvGrpSpPr/>
         <p:nvPr/>
       </p:nvGrpSpPr>
-      <p:grpSpPr>
-        <a:xfrm>
-          <a:off x="0" y="0"/>
-          <a:ext cx="0" cy="0"/>
-          <a:chOff x="0" y="0"/>
-          <a:chExt cx="0" cy="0"/>
-        </a:xfrm>
-      </p:grpSpPr>
-      <p:sp>
-        <p:nvSpPr>
-          <p:cNvPr id="88" name="标题 1"/>
-          <p:cNvSpPr/>
-          <p:nvPr>
-            <p:ph type="title"/>
-          </p:nvPr>
-        </p:nvSpPr>
+      <p:grpSpPr/>
+      <p:pic>
+        <p:nvPicPr>
+          <p:cNvPr id="3" name="图片 2" descr="post_object_image_2450561790"/>
+          <p:cNvPicPr>
+            <a:picLocks noChangeAspect="1"/>
+          </p:cNvPicPr>
+          <p:nvPr/>
+        </p:nvPicPr>
+        <p:blipFill>
+          <a:blip r:embed="rId1"/>
+          <a:stretch>
+            <a:fillRect/>
+          </a:stretch>
+        </p:blipFill>
         <p:spPr>
-          <a:xfrm>
-            <a:off x="565150" y="339090"/>
-            <a:ext cx="5206718" cy="612775"/>
-          </a:xfrm>
-        </p:spPr>
-        <p:txBody>
-          <a:bodyPr>
-            <a:noAutofit/>
-          </a:bodyPr>
-          <a:lstStyle/>
-          <a:p>
-            <a:r>
-              <a:rPr lang="zh-CN" altLang="en-US" sz="2800" b="1" dirty="0">
-                <a:latin typeface="微软雅黑" charset="-122"/>
-                <a:ea typeface="微软雅黑" charset="-122"/>
-                <a:sym typeface="+mn-ea"/>
-              </a:rPr>
-              <a:t>方向一：通过</a:t>
-            </a:r>
-            <a:r>
-              <a:rPr lang="en-US" altLang="zh-CN" sz="2800" b="1" dirty="0">
-                <a:latin typeface="微软雅黑" charset="-122"/>
-                <a:ea typeface="微软雅黑" charset="-122"/>
-                <a:sym typeface="+mn-ea"/>
-              </a:rPr>
-              <a:t> AI </a:t>
-            </a:r>
-            <a:r>
-              <a:rPr lang="zh-CN" altLang="en-US" sz="2800" b="1" dirty="0">
-                <a:latin typeface="微软雅黑" charset="-122"/>
-                <a:ea typeface="微软雅黑" charset="-122"/>
-                <a:sym typeface="+mn-ea"/>
-              </a:rPr>
-              <a:t>优化通信体验</a:t>
-            </a:r>
-            <a:endParaRPr lang="zh-CN" altLang="en-US" sz="2800" b="1" dirty="0">
-              <a:latin typeface="微软雅黑" charset="-122"/>
-              <a:ea typeface="微软雅黑" charset="-122"/>
-              <a:sym typeface="+mn-ea"/>
-            </a:endParaRPr>
-          </a:p>
-        </p:txBody>
-      </p:sp>
-      <p:sp>
-        <p:nvSpPr>
-          <p:cNvPr id="2" name="文本框 5"/>
-          <p:cNvSpPr txBox="1"/>
-          <p:nvPr/>
-        </p:nvSpPr>
-        <p:spPr>
-          <a:xfrm>
-            <a:off x="258445" y="951865"/>
-            <a:ext cx="11734165" cy="5455365"/>
+          <a:xfrm rot="5400000">
+            <a:off x="1489640" y="783462"/>
+            <a:ext cx="3684805" cy="5291002"/>
           </a:xfrm>
           <a:prstGeom prst="rect">
             <a:avLst/>
           </a:prstGeom>
-          <a:noFill/>
           <a:ln>
-            <a:noFill/>
+            <a:solidFill>
+              <a:srgbClr val="000000">
+                <a:alpha val="100000"/>
+              </a:srgbClr>
+            </a:solidFill>
           </a:ln>
         </p:spPr>
-        <p:txBody>
-          <a:bodyPr wrap="square" rtlCol="0" anchor="t">
-            <a:noAutofit/>
-          </a:bodyPr>
-          <a:p>
-            <a:pPr indent="0">
-              <a:lnSpc>
-                <a:spcPct val="160000"/>
-              </a:lnSpc>
-              <a:buFont typeface="Arial" panose="020B0604020202020204" pitchFamily="34" charset="0"/>
-              <a:buNone/>
-            </a:pPr>
-            <a:r>
-              <a:rPr lang="en-US" altLang="zh-CN" b="1" dirty="0">
-                <a:solidFill>
-                  <a:schemeClr val="tx1"/>
-                </a:solidFill>
-                <a:latin typeface="微软雅黑" charset="-122"/>
-                <a:ea typeface="微软雅黑" charset="-122"/>
-                <a:sym typeface="+mn-ea"/>
-              </a:rPr>
-              <a:t>3. </a:t>
-            </a:r>
-            <a:r>
-              <a:rPr lang="zh-CN" altLang="en-US" b="1" dirty="0">
-                <a:solidFill>
-                  <a:schemeClr val="tx1"/>
-                </a:solidFill>
-                <a:latin typeface="微软雅黑" charset="-122"/>
-                <a:ea typeface="微软雅黑" charset="-122"/>
-                <a:sym typeface="+mn-ea"/>
-              </a:rPr>
-              <a:t>苹果专利：预测辅助移动性管理</a:t>
-            </a:r>
-            <a:r>
-              <a:rPr lang="zh-CN" altLang="en-US" b="1" dirty="0">
-                <a:solidFill>
-                  <a:schemeClr val="tx1"/>
-                </a:solidFill>
-                <a:latin typeface="微软雅黑" charset="0"/>
-                <a:ea typeface="微软雅黑" charset="0"/>
-                <a:sym typeface="+mn-ea"/>
-              </a:rPr>
-              <a:t>——</a:t>
-            </a:r>
-            <a:r>
-              <a:rPr lang="zh-CN" altLang="en-US" b="1" dirty="0">
-                <a:solidFill>
-                  <a:schemeClr val="tx1"/>
-                </a:solidFill>
-                <a:latin typeface="微软雅黑" charset="-122"/>
-                <a:ea typeface="微软雅黑" charset="-122"/>
-                <a:sym typeface="+mn-ea"/>
-              </a:rPr>
-              <a:t>连接无线状态预测、切换条件与实测监测</a:t>
-            </a:r>
-            <a:r>
-              <a:rPr lang="en-US" altLang="zh-CN" b="1" baseline="30000" dirty="0">
-                <a:solidFill>
-                  <a:srgbClr val="000000"/>
-                </a:solidFill>
-                <a:latin typeface="微软雅黑" charset="-122"/>
-                <a:ea typeface="微软雅黑" charset="-122"/>
-                <a:cs typeface="+mn-ea"/>
-                <a:sym typeface="+mn-ea"/>
-              </a:rPr>
-              <a:t>[</a:t>
-            </a:r>
-            <a:r>
-              <a:rPr lang="en-US" altLang="zh-CN" b="1" baseline="30000" dirty="0">
-                <a:solidFill>
-                  <a:srgbClr val="000000"/>
-                </a:solidFill>
-                <a:latin typeface="微软雅黑" charset="0"/>
-                <a:ea typeface="微软雅黑" charset="0"/>
-                <a:cs typeface="+mn-ea"/>
-                <a:sym typeface="+mn-ea"/>
-              </a:rPr>
-              <a:t>3</a:t>
-            </a:r>
-            <a:r>
-              <a:rPr lang="en-US" altLang="zh-CN" b="1" baseline="30000" dirty="0">
-                <a:solidFill>
-                  <a:srgbClr val="000000"/>
-                </a:solidFill>
-                <a:latin typeface="微软雅黑" charset="-122"/>
-                <a:ea typeface="微软雅黑" charset="-122"/>
-                <a:cs typeface="+mn-ea"/>
-                <a:sym typeface="+mn-ea"/>
-              </a:rPr>
-              <a:t>]</a:t>
-            </a:r>
-            <a:endParaRPr lang="zh-CN" altLang="en-US" b="1" dirty="0">
-              <a:solidFill>
-                <a:schemeClr val="tx1"/>
-              </a:solidFill>
-              <a:latin typeface="微软雅黑" charset="-122"/>
-              <a:ea typeface="微软雅黑" charset="-122"/>
-              <a:sym typeface="+mn-ea"/>
-            </a:endParaRPr>
-          </a:p>
-          <a:p>
-            <a:pPr indent="0">
-              <a:lnSpc>
-                <a:spcPct val="130000"/>
-              </a:lnSpc>
-              <a:buFont typeface="Arial" panose="020B0604020202020204" pitchFamily="34" charset="0"/>
-              <a:buNone/>
-            </a:pPr>
-            <a:r>
-              <a:rPr lang="zh-CN" altLang="en-US" sz="1400" b="1" dirty="0">
-                <a:solidFill>
-                  <a:schemeClr val="tx1"/>
-                </a:solidFill>
-                <a:latin typeface="微软雅黑" charset="-122"/>
-                <a:ea typeface="微软雅黑" charset="-122"/>
-                <a:sym typeface="+mn-ea"/>
-              </a:rPr>
-              <a:t>技术概述：</a:t>
-            </a:r>
-            <a:endParaRPr lang="zh-CN" altLang="en-US" sz="1400" b="1" dirty="0">
-              <a:solidFill>
-                <a:schemeClr val="tx1"/>
-              </a:solidFill>
-              <a:latin typeface="微软雅黑" charset="-122"/>
-              <a:ea typeface="微软雅黑" charset="-122"/>
-              <a:sym typeface="+mn-ea"/>
-            </a:endParaRPr>
-          </a:p>
-          <a:p>
-            <a:pPr indent="0">
-              <a:lnSpc>
-                <a:spcPct val="130000"/>
-              </a:lnSpc>
-              <a:buFont typeface="Arial" panose="020B0604020202020204" pitchFamily="34" charset="0"/>
-              <a:buNone/>
-            </a:pPr>
-            <a:r>
-              <a:rPr lang="zh-CN" altLang="en-US" sz="1400" dirty="0">
-                <a:solidFill>
-                  <a:schemeClr val="tx1"/>
-                </a:solidFill>
-                <a:latin typeface="微软雅黑" charset="-122"/>
-                <a:ea typeface="微软雅黑" charset="-122"/>
-                <a:sym typeface="+mn-ea"/>
-              </a:rPr>
-              <a:t>终端移动时，无线状态可能在测量、上报、判断和执行之间发生变化。依据已有观测作出的选择，到实际切换时可能已经不再合适。</a:t>
-            </a:r>
-            <a:r>
-              <a:rPr lang="zh-CN" altLang="en-US" sz="1400" b="1" dirty="0">
-                <a:solidFill>
-                  <a:schemeClr val="tx1"/>
-                </a:solidFill>
-                <a:latin typeface="微软雅黑" charset="-122"/>
-                <a:ea typeface="微软雅黑" charset="-122"/>
-                <a:sym typeface="+mn-ea"/>
-              </a:rPr>
-              <a:t>苹果提出利用测量预测辅助移动性管理，并通过实际观测检查模型可靠性。</a:t>
-            </a:r>
-            <a:endParaRPr lang="zh-CN" altLang="en-US" sz="1400" b="1" dirty="0">
-              <a:solidFill>
-                <a:schemeClr val="tx1"/>
-              </a:solidFill>
-              <a:latin typeface="微软雅黑" charset="-122"/>
-              <a:ea typeface="微软雅黑" charset="-122"/>
-              <a:sym typeface="+mn-ea"/>
-            </a:endParaRPr>
-          </a:p>
-          <a:p>
-            <a:pPr indent="0">
-              <a:lnSpc>
-                <a:spcPct val="130000"/>
-              </a:lnSpc>
-              <a:buFont typeface="Arial" panose="020B0604020202020204" pitchFamily="34" charset="0"/>
-              <a:buNone/>
-            </a:pPr>
-            <a:r>
-              <a:rPr lang="zh-CN" altLang="en-US" sz="1400" dirty="0">
-                <a:solidFill>
-                  <a:schemeClr val="tx1"/>
-                </a:solidFill>
-                <a:latin typeface="微软雅黑" charset="-122"/>
-                <a:ea typeface="微软雅黑" charset="-122"/>
-                <a:sym typeface="+mn-ea"/>
-              </a:rPr>
-              <a:t>已有小区或波束测量为模型提供依据，涉及物理层</a:t>
-            </a:r>
-            <a:r>
-              <a:rPr lang="en-US" altLang="zh-CN" sz="1400" dirty="0">
-                <a:solidFill>
-                  <a:schemeClr val="tx1"/>
-                </a:solidFill>
-                <a:latin typeface="微软雅黑" charset="-122"/>
-                <a:ea typeface="微软雅黑" charset="-122"/>
-                <a:sym typeface="+mn-ea"/>
-              </a:rPr>
-              <a:t> L1 </a:t>
-            </a:r>
-            <a:r>
-              <a:rPr lang="zh-CN" altLang="en-US" sz="1400" dirty="0">
-                <a:solidFill>
-                  <a:schemeClr val="tx1"/>
-                </a:solidFill>
-                <a:latin typeface="微软雅黑" charset="-122"/>
-                <a:ea typeface="微软雅黑" charset="-122"/>
-                <a:sym typeface="+mn-ea"/>
-              </a:rPr>
-              <a:t>测量及经处理的</a:t>
-            </a:r>
-            <a:r>
-              <a:rPr lang="en-US" altLang="zh-CN" sz="1400" dirty="0">
-                <a:solidFill>
-                  <a:schemeClr val="tx1"/>
-                </a:solidFill>
-                <a:latin typeface="微软雅黑" charset="-122"/>
-                <a:ea typeface="微软雅黑" charset="-122"/>
-                <a:sym typeface="+mn-ea"/>
-              </a:rPr>
-              <a:t> L3 </a:t>
-            </a:r>
-            <a:r>
-              <a:rPr lang="zh-CN" altLang="en-US" sz="1400" dirty="0">
-                <a:solidFill>
-                  <a:schemeClr val="tx1"/>
-                </a:solidFill>
-                <a:latin typeface="微软雅黑" charset="-122"/>
-                <a:ea typeface="微软雅黑" charset="-122"/>
-                <a:sym typeface="+mn-ea"/>
-              </a:rPr>
-              <a:t>测量。</a:t>
-            </a:r>
-            <a:r>
-              <a:rPr lang="zh-CN" altLang="en-US" sz="1400" b="1" dirty="0">
-                <a:solidFill>
-                  <a:schemeClr val="tx1"/>
-                </a:solidFill>
-                <a:latin typeface="微软雅黑" charset="-122"/>
-                <a:ea typeface="微软雅黑" charset="-122"/>
-                <a:sym typeface="+mn-ea"/>
-              </a:rPr>
-              <a:t>时间预测估计后续时刻，空间预测利用邻近波束信息推断另一波束的测量。</a:t>
-            </a:r>
-            <a:r>
-              <a:rPr lang="zh-CN" altLang="en-US" sz="1400" dirty="0">
-                <a:solidFill>
-                  <a:schemeClr val="tx1"/>
-                </a:solidFill>
-                <a:latin typeface="微软雅黑" charset="-122"/>
-                <a:ea typeface="微软雅黑" charset="-122"/>
-                <a:sym typeface="+mn-ea"/>
-              </a:rPr>
-              <a:t>两类预测需要不同的实测对应关系。</a:t>
-            </a:r>
-            <a:endParaRPr lang="zh-CN" altLang="en-US" sz="1400" dirty="0">
-              <a:solidFill>
-                <a:schemeClr val="tx1"/>
-              </a:solidFill>
-              <a:latin typeface="微软雅黑" charset="-122"/>
-              <a:ea typeface="微软雅黑" charset="-122"/>
-              <a:sym typeface="+mn-ea"/>
-            </a:endParaRPr>
-          </a:p>
-          <a:p>
-            <a:pPr indent="0">
-              <a:lnSpc>
-                <a:spcPct val="130000"/>
-              </a:lnSpc>
-              <a:buFont typeface="Arial" panose="020B0604020202020204" pitchFamily="34" charset="0"/>
-              <a:buNone/>
-            </a:pPr>
-            <a:r>
-              <a:rPr lang="zh-CN" altLang="en-US" sz="1400" b="1" dirty="0">
-                <a:solidFill>
-                  <a:schemeClr val="tx1"/>
-                </a:solidFill>
-                <a:latin typeface="微软雅黑" charset="-122"/>
-                <a:ea typeface="微软雅黑" charset="-122"/>
-                <a:sym typeface="+mn-ea"/>
-              </a:rPr>
-              <a:t>研究方法：</a:t>
-            </a:r>
-            <a:endParaRPr lang="zh-CN" altLang="en-US" sz="1400" b="1" dirty="0">
-              <a:solidFill>
-                <a:schemeClr val="tx1"/>
-              </a:solidFill>
-              <a:latin typeface="微软雅黑" charset="-122"/>
-              <a:ea typeface="微软雅黑" charset="-122"/>
-              <a:sym typeface="+mn-ea"/>
-            </a:endParaRPr>
-          </a:p>
-          <a:p>
-            <a:pPr indent="0">
-              <a:lnSpc>
-                <a:spcPct val="140000"/>
-              </a:lnSpc>
-              <a:buFont typeface="Arial" panose="020B0604020202020204" pitchFamily="34" charset="0"/>
-              <a:buNone/>
-            </a:pPr>
-            <a:r>
-              <a:rPr lang="en-US" sz="1400" b="1" dirty="0">
-                <a:solidFill>
-                  <a:schemeClr val="tx1"/>
-                </a:solidFill>
-                <a:latin typeface="微软雅黑" charset="-122"/>
-                <a:ea typeface="微软雅黑" charset="-122"/>
-                <a:sym typeface="+mn-ea"/>
-              </a:rPr>
-              <a:t>a. </a:t>
-            </a:r>
-            <a:r>
-              <a:rPr lang="zh-CN" altLang="en-US" sz="1400" b="1" dirty="0">
-                <a:solidFill>
-                  <a:schemeClr val="tx1"/>
-                </a:solidFill>
-                <a:latin typeface="微软雅黑" charset="-122"/>
-                <a:ea typeface="微软雅黑" charset="-122"/>
-                <a:sym typeface="+mn-ea"/>
-              </a:rPr>
-              <a:t>区分时间预测与空间预测。</a:t>
-            </a:r>
-            <a:r>
-              <a:rPr lang="zh-CN" altLang="en-US" sz="1400" dirty="0">
-                <a:solidFill>
-                  <a:schemeClr val="tx1"/>
-                </a:solidFill>
-                <a:latin typeface="微软雅黑" charset="-122"/>
-                <a:ea typeface="微软雅黑" charset="-122"/>
-                <a:sym typeface="+mn-ea"/>
-              </a:rPr>
-              <a:t>时间预测利用已有测量估计后续时刻，空间预测利用邻近波束信息推断另一波束的测量，涉及</a:t>
-            </a:r>
-            <a:r>
-              <a:rPr lang="en-US" altLang="zh-CN" sz="1400" dirty="0">
-                <a:solidFill>
-                  <a:schemeClr val="tx1"/>
-                </a:solidFill>
-                <a:latin typeface="微软雅黑" charset="-122"/>
-                <a:ea typeface="微软雅黑" charset="-122"/>
-                <a:sym typeface="+mn-ea"/>
-              </a:rPr>
-              <a:t> L1</a:t>
-            </a:r>
-            <a:r>
-              <a:rPr lang="zh-CN" altLang="en-US" sz="1400" dirty="0">
-                <a:solidFill>
-                  <a:schemeClr val="tx1"/>
-                </a:solidFill>
-                <a:latin typeface="微软雅黑" charset="-122"/>
-                <a:ea typeface="微软雅黑" charset="-122"/>
-                <a:sym typeface="+mn-ea"/>
-              </a:rPr>
-              <a:t>、</a:t>
-            </a:r>
-            <a:r>
-              <a:rPr lang="en-US" altLang="zh-CN" sz="1400" dirty="0">
-                <a:solidFill>
-                  <a:schemeClr val="tx1"/>
-                </a:solidFill>
-                <a:latin typeface="微软雅黑" charset="-122"/>
-                <a:ea typeface="微软雅黑" charset="-122"/>
-                <a:sym typeface="+mn-ea"/>
-              </a:rPr>
-              <a:t>L3 </a:t>
-            </a:r>
-            <a:r>
-              <a:rPr lang="zh-CN" altLang="en-US" sz="1400" dirty="0">
-                <a:solidFill>
-                  <a:schemeClr val="tx1"/>
-                </a:solidFill>
-                <a:latin typeface="微软雅黑" charset="-122"/>
-                <a:ea typeface="微软雅黑" charset="-122"/>
-                <a:sym typeface="+mn-ea"/>
-              </a:rPr>
-              <a:t>测量。前者关注变化趋势，后者补充对象信息，测试时需要分别建立对应实测。</a:t>
-            </a:r>
-            <a:endParaRPr lang="zh-CN" altLang="en-US" sz="1400" dirty="0">
-              <a:solidFill>
-                <a:schemeClr val="tx1"/>
-              </a:solidFill>
-              <a:latin typeface="微软雅黑" charset="-122"/>
-              <a:ea typeface="微软雅黑" charset="-122"/>
-              <a:sym typeface="+mn-ea"/>
-            </a:endParaRPr>
-          </a:p>
-          <a:p>
-            <a:pPr indent="0">
-              <a:lnSpc>
-                <a:spcPct val="140000"/>
-              </a:lnSpc>
-              <a:buFont typeface="Arial" panose="020B0604020202020204" pitchFamily="34" charset="0"/>
-              <a:buNone/>
-            </a:pPr>
-            <a:r>
-              <a:rPr lang="en-US" altLang="zh-CN" sz="1400" b="1" dirty="0">
-                <a:solidFill>
-                  <a:schemeClr val="tx1"/>
-                </a:solidFill>
-                <a:latin typeface="微软雅黑" charset="-122"/>
-                <a:ea typeface="微软雅黑" charset="-122"/>
-                <a:sym typeface="+mn-ea"/>
-              </a:rPr>
-              <a:t>b. </a:t>
-            </a:r>
-            <a:r>
-              <a:rPr lang="zh-CN" altLang="en-US" sz="1400" b="1" dirty="0">
-                <a:solidFill>
-                  <a:schemeClr val="tx1"/>
-                </a:solidFill>
-                <a:latin typeface="微软雅黑" charset="-122"/>
-                <a:ea typeface="微软雅黑" charset="-122"/>
-                <a:sym typeface="+mn-ea"/>
-              </a:rPr>
-              <a:t>将预测接入切换准备和条件判断。</a:t>
-            </a:r>
-            <a:r>
-              <a:rPr lang="zh-CN" altLang="en-US" sz="1400" dirty="0">
-                <a:solidFill>
-                  <a:schemeClr val="tx1"/>
-                </a:solidFill>
-                <a:latin typeface="微软雅黑" charset="-122"/>
-                <a:ea typeface="微软雅黑" charset="-122"/>
-                <a:sym typeface="+mn-ea"/>
-              </a:rPr>
-              <a:t>条件切换</a:t>
-            </a:r>
-            <a:r>
-              <a:rPr lang="en-US" altLang="zh-CN" sz="1400" dirty="0">
-                <a:solidFill>
-                  <a:schemeClr val="tx1"/>
-                </a:solidFill>
-                <a:latin typeface="微软雅黑" charset="-122"/>
-                <a:ea typeface="微软雅黑" charset="-122"/>
-                <a:sym typeface="+mn-ea"/>
-              </a:rPr>
-              <a:t> CHO </a:t>
-            </a:r>
-            <a:r>
-              <a:rPr lang="zh-CN" altLang="en-US" sz="1400" dirty="0">
-                <a:solidFill>
-                  <a:schemeClr val="tx1"/>
-                </a:solidFill>
-                <a:latin typeface="微软雅黑" charset="-122"/>
-                <a:ea typeface="微软雅黑" charset="-122"/>
-                <a:sym typeface="+mn-ea"/>
-              </a:rPr>
-              <a:t>由网络配置候选小区及执行条件，终端在条件满足后执行。专利进一步提出允许可靠预测参与判断，也可要求预测与实测共同满足条件。</a:t>
-            </a:r>
-            <a:r>
-              <a:rPr lang="zh-CN" altLang="en-US" sz="1400" b="1" dirty="0">
-                <a:solidFill>
-                  <a:schemeClr val="tx1"/>
-                </a:solidFill>
-                <a:latin typeface="微软雅黑" charset="-122"/>
-                <a:ea typeface="微软雅黑" charset="-122"/>
-                <a:sym typeface="+mn-ea"/>
-              </a:rPr>
-              <a:t>预测如何影响切换，取决于网络配置的采纳规则。</a:t>
-            </a:r>
-            <a:endParaRPr lang="zh-CN" altLang="en-US" sz="1400" b="1" dirty="0">
-              <a:solidFill>
-                <a:schemeClr val="tx1"/>
-              </a:solidFill>
-              <a:latin typeface="微软雅黑" charset="-122"/>
-              <a:ea typeface="微软雅黑" charset="-122"/>
-              <a:sym typeface="+mn-ea"/>
-            </a:endParaRPr>
-          </a:p>
-          <a:p>
-            <a:pPr indent="0">
-              <a:lnSpc>
-                <a:spcPct val="140000"/>
-              </a:lnSpc>
-              <a:buFont typeface="Arial" panose="020B0604020202020204" pitchFamily="34" charset="0"/>
-              <a:buNone/>
-            </a:pPr>
-            <a:r>
-              <a:rPr lang="en-US" altLang="zh-CN" sz="1400" b="1" dirty="0">
-                <a:solidFill>
-                  <a:schemeClr val="tx1"/>
-                </a:solidFill>
-                <a:latin typeface="微软雅黑" charset="-122"/>
-                <a:ea typeface="微软雅黑" charset="-122"/>
-                <a:sym typeface="+mn-ea"/>
-              </a:rPr>
-              <a:t>c. </a:t>
-            </a:r>
-            <a:r>
-              <a:rPr lang="zh-CN" altLang="en-US" sz="1400" b="1" dirty="0">
-                <a:solidFill>
-                  <a:schemeClr val="tx1"/>
-                </a:solidFill>
-                <a:latin typeface="微软雅黑" charset="-122"/>
-                <a:ea typeface="微软雅黑" charset="-122"/>
-                <a:sym typeface="+mn-ea"/>
-              </a:rPr>
-              <a:t>用对应实测监测预测误差。</a:t>
-            </a:r>
-            <a:r>
-              <a:rPr lang="zh-CN" altLang="en-US" sz="1400" dirty="0">
-                <a:solidFill>
-                  <a:schemeClr val="tx1"/>
-                </a:solidFill>
-                <a:latin typeface="微软雅黑" charset="-122"/>
-                <a:ea typeface="微软雅黑" charset="-122"/>
-                <a:sym typeface="+mn-ea"/>
-              </a:rPr>
-              <a:t>专利提出以均方误差</a:t>
-            </a:r>
-            <a:r>
-              <a:rPr lang="en-US" altLang="zh-CN" sz="1400" dirty="0">
-                <a:solidFill>
-                  <a:schemeClr val="tx1"/>
-                </a:solidFill>
-                <a:latin typeface="微软雅黑" charset="-122"/>
-                <a:ea typeface="微软雅黑" charset="-122"/>
-                <a:sym typeface="+mn-ea"/>
-              </a:rPr>
-              <a:t> MSE </a:t>
-            </a:r>
-            <a:r>
-              <a:rPr lang="zh-CN" altLang="en-US" sz="1400" dirty="0">
-                <a:solidFill>
-                  <a:schemeClr val="tx1"/>
-                </a:solidFill>
-                <a:latin typeface="微软雅黑" charset="-122"/>
-                <a:ea typeface="微软雅黑" charset="-122"/>
-                <a:sym typeface="+mn-ea"/>
-              </a:rPr>
-              <a:t>等指标检查预测，并将监测结果用于模型管理。验证必须对齐小区或波束，以及预测对应的时间。</a:t>
-            </a:r>
-            <a:r>
-              <a:rPr lang="en-US" altLang="zh-CN" sz="1400" dirty="0">
-                <a:solidFill>
-                  <a:schemeClr val="tx1"/>
-                </a:solidFill>
-                <a:latin typeface="微软雅黑" charset="-122"/>
-                <a:ea typeface="微软雅黑" charset="-122"/>
-                <a:sym typeface="+mn-ea"/>
-              </a:rPr>
-              <a:t>MSE </a:t>
-            </a:r>
-            <a:r>
-              <a:rPr lang="zh-CN" altLang="en-US" sz="1400" dirty="0">
-                <a:solidFill>
-                  <a:schemeClr val="tx1"/>
-                </a:solidFill>
-                <a:latin typeface="微软雅黑" charset="-122"/>
-                <a:ea typeface="微软雅黑" charset="-122"/>
-                <a:sym typeface="+mn-ea"/>
-              </a:rPr>
-              <a:t>描述误差，不能直接解释为预测正确的概率。</a:t>
-            </a:r>
-            <a:endParaRPr lang="zh-CN" altLang="en-US" sz="1400" dirty="0">
-              <a:solidFill>
-                <a:schemeClr val="tx1"/>
-              </a:solidFill>
-              <a:latin typeface="微软雅黑" charset="-122"/>
-              <a:ea typeface="微软雅黑" charset="-122"/>
-              <a:sym typeface="+mn-ea"/>
-            </a:endParaRPr>
-          </a:p>
-          <a:p>
-            <a:pPr indent="0">
-              <a:lnSpc>
-                <a:spcPct val="140000"/>
-              </a:lnSpc>
-              <a:buFont typeface="Arial" panose="020B0604020202020204" pitchFamily="34" charset="0"/>
-              <a:buNone/>
-            </a:pPr>
-            <a:r>
-              <a:rPr lang="en-US" altLang="zh-CN" sz="1400" b="1" dirty="0">
-                <a:solidFill>
-                  <a:schemeClr val="tx1"/>
-                </a:solidFill>
-                <a:latin typeface="微软雅黑" charset="-122"/>
-                <a:ea typeface="微软雅黑" charset="-122"/>
-                <a:sym typeface="+mn-ea"/>
-              </a:rPr>
-              <a:t>d. </a:t>
-            </a:r>
-            <a:r>
-              <a:rPr lang="zh-CN" altLang="en-US" sz="1400" b="1" dirty="0">
-                <a:solidFill>
-                  <a:schemeClr val="tx1"/>
-                </a:solidFill>
-                <a:latin typeface="微软雅黑" charset="-122"/>
-                <a:ea typeface="微软雅黑" charset="-122"/>
-                <a:sym typeface="+mn-ea"/>
-              </a:rPr>
-              <a:t>失准后停止或切换模型，恢复实际测量。</a:t>
-            </a:r>
-            <a:r>
-              <a:rPr lang="zh-CN" altLang="en-US" sz="1400" dirty="0">
-                <a:solidFill>
-                  <a:schemeClr val="tx1"/>
-                </a:solidFill>
-                <a:latin typeface="微软雅黑" charset="-122"/>
-                <a:ea typeface="微软雅黑" charset="-122"/>
-                <a:sym typeface="+mn-ea"/>
-              </a:rPr>
-              <a:t>监测结果可触发模型停用或切换，并回到实际测量方式。需要检查停止预测后能否及时获得有效观测，使正常移动性处理继续运行。</a:t>
-            </a:r>
-            <a:endParaRPr lang="zh-CN" altLang="en-US" sz="1400" dirty="0">
-              <a:solidFill>
-                <a:schemeClr val="tx1"/>
-              </a:solidFill>
-              <a:latin typeface="微软雅黑" charset="-122"/>
-              <a:ea typeface="微软雅黑" charset="-122"/>
-              <a:sym typeface="+mn-ea"/>
-            </a:endParaRPr>
-          </a:p>
-          <a:p>
-            <a:pPr indent="0">
-              <a:lnSpc>
-                <a:spcPct val="140000"/>
-              </a:lnSpc>
-              <a:buFont typeface="Arial" panose="020B0604020202020204" pitchFamily="34" charset="0"/>
-              <a:buNone/>
-            </a:pPr>
-            <a:r>
-              <a:rPr lang="zh-CN" altLang="en-US" sz="1400" b="1" dirty="0">
-                <a:solidFill>
-                  <a:schemeClr val="tx1"/>
-                </a:solidFill>
-                <a:latin typeface="微软雅黑" charset="-122"/>
-                <a:ea typeface="微软雅黑" charset="-122"/>
-                <a:sym typeface="+mn-ea"/>
-              </a:rPr>
-              <a:t>研究成熟度与启示：</a:t>
-            </a:r>
-            <a:endParaRPr lang="zh-CN" altLang="en-US" sz="1400" b="1" dirty="0">
-              <a:solidFill>
-                <a:schemeClr val="tx1"/>
-              </a:solidFill>
-              <a:latin typeface="微软雅黑" charset="-122"/>
-              <a:ea typeface="微软雅黑" charset="-122"/>
-              <a:sym typeface="+mn-ea"/>
-            </a:endParaRPr>
-          </a:p>
-          <a:p>
-            <a:pPr indent="0">
-              <a:lnSpc>
-                <a:spcPct val="140000"/>
-              </a:lnSpc>
-              <a:buFont typeface="Arial" panose="020B0604020202020204" pitchFamily="34" charset="0"/>
-              <a:buNone/>
-            </a:pPr>
-            <a:r>
-              <a:rPr lang="zh-CN" altLang="en-US" sz="1400" dirty="0">
-                <a:solidFill>
-                  <a:schemeClr val="tx1"/>
-                </a:solidFill>
-                <a:latin typeface="微软雅黑" charset="-122"/>
-                <a:ea typeface="微软雅黑" charset="-122"/>
-                <a:sym typeface="+mn-ea"/>
-              </a:rPr>
-              <a:t>公开文本未提供可复现代码及定量对照实验。建议在相同移动轨迹下比较实际测量与预测辅助方案，关联记录预测生成时间、目标时间、实测值、触发和执行结果，重点检查</a:t>
-            </a:r>
-            <a:r>
-              <a:rPr lang="zh-CN" altLang="en-US" sz="1400" b="1" dirty="0">
-                <a:solidFill>
-                  <a:schemeClr val="tx1"/>
-                </a:solidFill>
-                <a:latin typeface="微软雅黑" charset="-122"/>
-                <a:ea typeface="微软雅黑" charset="-122"/>
-                <a:sym typeface="+mn-ea"/>
-              </a:rPr>
-              <a:t>门限附近误判、切换失败、业务中断、往返切换及测量开销。</a:t>
-            </a:r>
-            <a:endParaRPr lang="zh-CN" altLang="en-US" sz="1400" b="1" dirty="0">
-              <a:solidFill>
-                <a:schemeClr val="tx1"/>
-              </a:solidFill>
-              <a:latin typeface="微软雅黑" charset="-122"/>
-              <a:ea typeface="微软雅黑" charset="-122"/>
-              <a:sym typeface="+mn-ea"/>
-            </a:endParaRPr>
-          </a:p>
-        </p:txBody>
-      </p:sp>
+      </p:pic>
       <p:sp>
         <p:nvSpPr>
-          <p:cNvPr id="3" name="文本框 2"/>
+          <p:cNvPr id="4" name="文本框 3"/>
           <p:cNvSpPr txBox="1"/>
           <p:nvPr userDrawn="1"/>
         </p:nvSpPr>
         <p:spPr>
           <a:xfrm>
-            <a:off x="6696846" y="324566"/>
-            <a:ext cx="4145593" cy="641803"/>
+            <a:off x="617366" y="442595"/>
+            <a:ext cx="9289410" cy="405627"/>
           </a:xfrm>
           <a:prstGeom prst="rect">
             <a:avLst/>
@@ -13537,18 +15198,573 @@
             <a:noAutofit/>
           </a:bodyPr>
           <a:p>
-            <a:r>
-              <a:rPr lang="en-US" altLang="zh-CN" sz="1200">
-                <a:latin typeface="Times New Roman" panose="02020603050405020304" charset="0"/>
-                <a:ea typeface="Times New Roman" panose="02020603050405020304" charset="0"/>
-                <a:cs typeface="Times New Roman" panose="02020603050405020304" charset="0"/>
-              </a:rPr>
-              <a:t>[3] APPLE INC. Systems and methods for predictive measurements for artificial intelligence/machine learning based mobility enhancement: WO2025043703A1[P]. 2025-03-06.</a:t>
-            </a:r>
-            <a:endParaRPr lang="en-US" altLang="zh-CN" sz="1200">
-              <a:latin typeface="Times New Roman" panose="02020603050405020304" charset="0"/>
-              <a:ea typeface="Times New Roman" panose="02020603050405020304" charset="0"/>
-              <a:cs typeface="Times New Roman" panose="02020603050405020304" charset="0"/>
+            <a:pPr algn="l"/>
+            <a:r>
+              <a:rPr lang="en-US" altLang="zh-CN" sz="2000" b="1">
+                <a:latin typeface="微软雅黑" charset="0"/>
+                <a:ea typeface="微软雅黑" charset="0"/>
+                <a:cs typeface="微软雅黑" charset="0"/>
+              </a:rPr>
+              <a:t>2. </a:t>
+            </a:r>
+            <a:r>
+              <a:rPr lang="zh-CN" altLang="en-US" sz="2000" b="1">
+                <a:latin typeface="微软雅黑" charset="0"/>
+                <a:ea typeface="微软雅黑" charset="0"/>
+                <a:cs typeface="微软雅黑" charset="0"/>
+              </a:rPr>
+              <a:t>苹果专利：承载映射策略的强化学习训练</a:t>
+            </a:r>
+            <a:r>
+              <a:rPr lang="en-US" altLang="zh-CN" sz="2000" b="1">
+                <a:latin typeface="微软雅黑" charset="0"/>
+                <a:ea typeface="微软雅黑" charset="0"/>
+                <a:cs typeface="微软雅黑" charset="0"/>
+              </a:rPr>
+              <a:t>——</a:t>
+            </a:r>
+            <a:r>
+              <a:rPr lang="zh-CN" altLang="en-US" sz="2000" b="1">
+                <a:latin typeface="微软雅黑" charset="0"/>
+                <a:ea typeface="微软雅黑" charset="0"/>
+                <a:cs typeface="微软雅黑" charset="0"/>
+              </a:rPr>
+              <a:t>终端调整，网络反馈</a:t>
+            </a:r>
+            <a:endParaRPr lang="zh-CN" altLang="en-US" sz="2000" b="1">
+              <a:latin typeface="微软雅黑" charset="0"/>
+              <a:ea typeface="微软雅黑" charset="0"/>
+              <a:cs typeface="微软雅黑" charset="0"/>
+            </a:endParaRPr>
+          </a:p>
+        </p:txBody>
+      </p:sp>
+      <p:sp>
+        <p:nvSpPr>
+          <p:cNvPr id="5" name="文本框 4"/>
+          <p:cNvSpPr txBox="1"/>
+          <p:nvPr userDrawn="1"/>
+        </p:nvSpPr>
+        <p:spPr>
+          <a:xfrm>
+            <a:off x="6912951" y="1334090"/>
+            <a:ext cx="4426703" cy="4189746"/>
+          </a:xfrm>
+          <a:prstGeom prst="rect">
+            <a:avLst/>
+          </a:prstGeom>
+        </p:spPr>
+        <p:txBody>
+          <a:bodyPr wrap="square" rtlCol="0">
+            <a:noAutofit/>
+          </a:bodyPr>
+          <a:p>
+            <a:pPr marL="285750" indent="-285750">
+              <a:lnSpc>
+                <a:spcPct val="110000"/>
+              </a:lnSpc>
+              <a:buFont typeface="Arial" panose="020B0604020202020204" pitchFamily="34" charset="0"/>
+              <a:buChar char="•"/>
+            </a:pPr>
+            <a:r>
+              <a:rPr lang="zh-CN" altLang="en-US" sz="1600" b="1">
+                <a:latin typeface="微软雅黑" charset="0"/>
+                <a:ea typeface="微软雅黑" charset="0"/>
+                <a:cs typeface="微软雅黑" charset="0"/>
+              </a:rPr>
+              <a:t>启动训练，探索映射动作</a:t>
+            </a:r>
+            <a:endParaRPr lang="zh-CN" altLang="en-US" sz="1600" b="1">
+              <a:latin typeface="微软雅黑" charset="0"/>
+              <a:ea typeface="微软雅黑" charset="0"/>
+              <a:cs typeface="微软雅黑" charset="0"/>
+            </a:endParaRPr>
+          </a:p>
+          <a:p>
+            <a:pPr>
+              <a:lnSpc>
+                <a:spcPct val="110000"/>
+              </a:lnSpc>
+            </a:pPr>
+            <a:r>
+              <a:rPr lang="zh-CN" altLang="en-US" sz="1600">
+                <a:latin typeface="微软雅黑" charset="0"/>
+                <a:ea typeface="微软雅黑" charset="0"/>
+                <a:cs typeface="微软雅黑" charset="0"/>
+              </a:rPr>
+              <a:t>终端启动强化学习训练，根据当前状态选择映射调整动作，例如将某个</a:t>
+            </a:r>
+            <a:r>
+              <a:rPr lang="en-US" altLang="zh-CN" sz="1600">
+                <a:latin typeface="微软雅黑" charset="0"/>
+                <a:ea typeface="微软雅黑" charset="0"/>
+                <a:cs typeface="微软雅黑" charset="0"/>
+              </a:rPr>
+              <a:t> QoS </a:t>
+            </a:r>
+            <a:r>
+              <a:rPr lang="zh-CN" altLang="en-US" sz="1600">
+                <a:latin typeface="微软雅黑" charset="0"/>
+                <a:ea typeface="微软雅黑" charset="0"/>
+                <a:cs typeface="微软雅黑" charset="0"/>
+              </a:rPr>
+              <a:t>流从一个</a:t>
+            </a:r>
+            <a:r>
+              <a:rPr lang="en-US" altLang="zh-CN" sz="1600">
+                <a:latin typeface="微软雅黑" charset="0"/>
+                <a:ea typeface="微软雅黑" charset="0"/>
+                <a:cs typeface="微软雅黑" charset="0"/>
+              </a:rPr>
+              <a:t> DRB </a:t>
+            </a:r>
+            <a:r>
+              <a:rPr lang="zh-CN" altLang="en-US" sz="1600">
+                <a:latin typeface="微软雅黑" charset="0"/>
+                <a:ea typeface="微软雅黑" charset="0"/>
+                <a:cs typeface="微软雅黑" charset="0"/>
+              </a:rPr>
+              <a:t>改映射到另一个</a:t>
+            </a:r>
+            <a:r>
+              <a:rPr lang="en-US" altLang="zh-CN" sz="1600">
+                <a:latin typeface="微软雅黑" charset="0"/>
+                <a:ea typeface="微软雅黑" charset="0"/>
+                <a:cs typeface="微软雅黑" charset="0"/>
+              </a:rPr>
+              <a:t> DRB</a:t>
+            </a:r>
+            <a:r>
+              <a:rPr lang="zh-CN" altLang="en-US" sz="1600">
+                <a:latin typeface="微软雅黑" charset="0"/>
+                <a:ea typeface="微软雅黑" charset="0"/>
+                <a:cs typeface="微软雅黑" charset="0"/>
+              </a:rPr>
+              <a:t>。</a:t>
+            </a:r>
+            <a:endParaRPr lang="zh-CN" altLang="en-US" sz="1600">
+              <a:latin typeface="微软雅黑" charset="0"/>
+              <a:ea typeface="微软雅黑" charset="0"/>
+              <a:cs typeface="微软雅黑" charset="0"/>
+            </a:endParaRPr>
+          </a:p>
+          <a:p>
+            <a:pPr marL="285750" indent="-285750">
+              <a:lnSpc>
+                <a:spcPct val="110000"/>
+              </a:lnSpc>
+              <a:buFont typeface="Arial" panose="020B0604020202020204" pitchFamily="34" charset="0"/>
+              <a:buChar char="•"/>
+            </a:pPr>
+            <a:r>
+              <a:rPr lang="zh-CN" altLang="en-US" sz="1600" b="1">
+                <a:latin typeface="微软雅黑" charset="0"/>
+                <a:ea typeface="微软雅黑" charset="0"/>
+                <a:cs typeface="微软雅黑" charset="0"/>
+              </a:rPr>
+              <a:t>网络识别变化，返回奖励</a:t>
+            </a:r>
+            <a:endParaRPr lang="zh-CN" altLang="en-US" sz="1600" b="1">
+              <a:latin typeface="微软雅黑" charset="0"/>
+              <a:ea typeface="微软雅黑" charset="0"/>
+              <a:cs typeface="微软雅黑" charset="0"/>
+            </a:endParaRPr>
+          </a:p>
+          <a:p>
+            <a:pPr>
+              <a:lnSpc>
+                <a:spcPct val="110000"/>
+              </a:lnSpc>
+            </a:pPr>
+            <a:r>
+              <a:rPr lang="zh-CN" altLang="en-US" sz="1600">
+                <a:latin typeface="微软雅黑" charset="0"/>
+                <a:ea typeface="微软雅黑" charset="0"/>
+                <a:cs typeface="微软雅黑" charset="0"/>
+              </a:rPr>
+              <a:t>基站检测映射变化，并返回奖励值 </a:t>
+            </a:r>
+            <a:r>
+              <a:rPr lang="en-US" altLang="zh-CN" sz="1600">
+                <a:latin typeface="微软雅黑" charset="0"/>
+                <a:ea typeface="微软雅黑" charset="0"/>
+                <a:cs typeface="微软雅黑" charset="0"/>
+              </a:rPr>
+              <a:t>r</a:t>
+            </a:r>
+            <a:r>
+              <a:rPr lang="zh-CN" altLang="en-US" sz="1600">
+                <a:latin typeface="微软雅黑" charset="0"/>
+                <a:ea typeface="微软雅黑" charset="0"/>
+                <a:cs typeface="微软雅黑" charset="0"/>
+              </a:rPr>
+              <a:t>。奖励结合吞吐量、时延等</a:t>
+            </a:r>
+            <a:r>
+              <a:rPr lang="en-US" altLang="zh-CN" sz="1600">
+                <a:latin typeface="微软雅黑" charset="0"/>
+                <a:ea typeface="微软雅黑" charset="0"/>
+                <a:cs typeface="微软雅黑" charset="0"/>
+              </a:rPr>
+              <a:t> QoS </a:t>
+            </a:r>
+            <a:r>
+              <a:rPr lang="zh-CN" altLang="en-US" sz="1600">
+                <a:latin typeface="微软雅黑" charset="0"/>
+                <a:ea typeface="微软雅黑" charset="0"/>
+                <a:cs typeface="微软雅黑" charset="0"/>
+              </a:rPr>
+              <a:t>表现，评价动作带来的效果。</a:t>
+            </a:r>
+            <a:endParaRPr lang="zh-CN" altLang="en-US" sz="1600">
+              <a:latin typeface="微软雅黑" charset="0"/>
+              <a:ea typeface="微软雅黑" charset="0"/>
+              <a:cs typeface="微软雅黑" charset="0"/>
+            </a:endParaRPr>
+          </a:p>
+          <a:p>
+            <a:pPr marL="285750" indent="-285750">
+              <a:lnSpc>
+                <a:spcPct val="110000"/>
+              </a:lnSpc>
+              <a:buFont typeface="Arial" panose="020B0604020202020204" pitchFamily="34" charset="0"/>
+              <a:buChar char="•"/>
+            </a:pPr>
+            <a:r>
+              <a:rPr lang="zh-CN" altLang="en-US" sz="1600" b="1">
+                <a:latin typeface="微软雅黑" charset="0"/>
+                <a:ea typeface="微软雅黑" charset="0"/>
+                <a:cs typeface="微软雅黑" charset="0"/>
+              </a:rPr>
+              <a:t>根据反馈更新模型</a:t>
+            </a:r>
+            <a:endParaRPr lang="zh-CN" altLang="en-US" sz="1600" b="1">
+              <a:latin typeface="微软雅黑" charset="0"/>
+              <a:ea typeface="微软雅黑" charset="0"/>
+              <a:cs typeface="微软雅黑" charset="0"/>
+            </a:endParaRPr>
+          </a:p>
+          <a:p>
+            <a:pPr>
+              <a:lnSpc>
+                <a:spcPct val="110000"/>
+              </a:lnSpc>
+            </a:pPr>
+            <a:r>
+              <a:rPr lang="zh-CN" altLang="en-US" sz="1600">
+                <a:latin typeface="微软雅黑" charset="0"/>
+                <a:ea typeface="微软雅黑" charset="0"/>
+                <a:cs typeface="微软雅黑" charset="0"/>
+              </a:rPr>
+              <a:t>终端利用奖励反馈训练深度</a:t>
+            </a:r>
+            <a:r>
+              <a:rPr lang="en-US" altLang="zh-CN" sz="1600">
+                <a:latin typeface="微软雅黑" charset="0"/>
+                <a:ea typeface="微软雅黑" charset="0"/>
+                <a:cs typeface="微软雅黑" charset="0"/>
+              </a:rPr>
+              <a:t> Q </a:t>
+            </a:r>
+            <a:r>
+              <a:rPr lang="zh-CN" altLang="en-US" sz="1600">
+                <a:latin typeface="微软雅黑" charset="0"/>
+                <a:ea typeface="微软雅黑" charset="0"/>
+                <a:cs typeface="微软雅黑" charset="0"/>
+              </a:rPr>
+              <a:t>网络，使模型逐步学会评价不同映射动作的价值。</a:t>
+            </a:r>
+            <a:endParaRPr lang="zh-CN" altLang="en-US" sz="1600">
+              <a:latin typeface="微软雅黑" charset="0"/>
+              <a:ea typeface="微软雅黑" charset="0"/>
+              <a:cs typeface="微软雅黑" charset="0"/>
+            </a:endParaRPr>
+          </a:p>
+          <a:p>
+            <a:pPr marL="285750" indent="-285750">
+              <a:lnSpc>
+                <a:spcPct val="110000"/>
+              </a:lnSpc>
+              <a:buFont typeface="Arial" panose="020B0604020202020204" pitchFamily="34" charset="0"/>
+              <a:buChar char="•"/>
+            </a:pPr>
+            <a:r>
+              <a:rPr lang="zh-CN" altLang="en-US" sz="1600" b="1">
+                <a:latin typeface="微软雅黑" charset="0"/>
+                <a:ea typeface="微软雅黑" charset="0"/>
+                <a:cs typeface="微软雅黑" charset="0"/>
+              </a:rPr>
+              <a:t>多次交互，改进选择策略</a:t>
+            </a:r>
+            <a:endParaRPr lang="zh-CN" altLang="en-US" sz="1600" b="1">
+              <a:latin typeface="微软雅黑" charset="0"/>
+              <a:ea typeface="微软雅黑" charset="0"/>
+              <a:cs typeface="微软雅黑" charset="0"/>
+            </a:endParaRPr>
+          </a:p>
+          <a:p>
+            <a:pPr>
+              <a:lnSpc>
+                <a:spcPct val="110000"/>
+              </a:lnSpc>
+            </a:pPr>
+            <a:r>
+              <a:rPr lang="zh-CN" altLang="en-US" sz="1600">
+                <a:latin typeface="微软雅黑" charset="0"/>
+                <a:ea typeface="微软雅黑" charset="0"/>
+                <a:cs typeface="微软雅黑" charset="0"/>
+              </a:rPr>
+              <a:t>重复</a:t>
+            </a:r>
+            <a:r>
+              <a:rPr lang="en-US" altLang="zh-CN" sz="1600">
+                <a:latin typeface="微软雅黑" charset="0"/>
+                <a:ea typeface="微软雅黑" charset="0"/>
+                <a:cs typeface="微软雅黑" charset="0"/>
+              </a:rPr>
+              <a:t>“</a:t>
+            </a:r>
+            <a:r>
+              <a:rPr lang="zh-CN" altLang="en-US" sz="1600">
+                <a:latin typeface="微软雅黑" charset="0"/>
+                <a:ea typeface="微软雅黑" charset="0"/>
+                <a:cs typeface="微软雅黑" charset="0"/>
+              </a:rPr>
+              <a:t>选择动作</a:t>
+            </a:r>
+            <a:r>
+              <a:rPr lang="en-US" altLang="zh-CN" sz="1600">
+                <a:latin typeface="微软雅黑" charset="0"/>
+                <a:ea typeface="微软雅黑" charset="0"/>
+                <a:cs typeface="微软雅黑" charset="0"/>
+              </a:rPr>
+              <a:t>—</a:t>
+            </a:r>
+            <a:r>
+              <a:rPr lang="zh-CN" altLang="en-US" sz="1600">
+                <a:latin typeface="微软雅黑" charset="0"/>
+                <a:ea typeface="微软雅黑" charset="0"/>
+                <a:cs typeface="微软雅黑" charset="0"/>
+              </a:rPr>
+              <a:t>调整映射</a:t>
+            </a:r>
+            <a:r>
+              <a:rPr lang="en-US" altLang="zh-CN" sz="1600">
+                <a:latin typeface="微软雅黑" charset="0"/>
+                <a:ea typeface="微软雅黑" charset="0"/>
+                <a:cs typeface="微软雅黑" charset="0"/>
+              </a:rPr>
+              <a:t>—</a:t>
+            </a:r>
+            <a:r>
+              <a:rPr lang="zh-CN" altLang="en-US" sz="1600">
+                <a:latin typeface="微软雅黑" charset="0"/>
+                <a:ea typeface="微软雅黑" charset="0"/>
+                <a:cs typeface="微软雅黑" charset="0"/>
+              </a:rPr>
+              <a:t>获取反馈</a:t>
+            </a:r>
+            <a:r>
+              <a:rPr lang="en-US" altLang="zh-CN" sz="1600">
+                <a:latin typeface="微软雅黑" charset="0"/>
+                <a:ea typeface="微软雅黑" charset="0"/>
+                <a:cs typeface="微软雅黑" charset="0"/>
+              </a:rPr>
+              <a:t>—</a:t>
+            </a:r>
+            <a:r>
+              <a:rPr lang="zh-CN" altLang="en-US" sz="1600">
+                <a:latin typeface="微软雅黑" charset="0"/>
+                <a:ea typeface="微软雅黑" charset="0"/>
+                <a:cs typeface="微软雅黑" charset="0"/>
+              </a:rPr>
+              <a:t>更新模型</a:t>
+            </a:r>
+            <a:r>
+              <a:rPr lang="en-US" altLang="zh-CN" sz="1600">
+                <a:latin typeface="微软雅黑" charset="0"/>
+                <a:ea typeface="微软雅黑" charset="0"/>
+                <a:cs typeface="微软雅黑" charset="0"/>
+              </a:rPr>
+              <a:t>”</a:t>
+            </a:r>
+            <a:r>
+              <a:rPr lang="zh-CN" altLang="en-US" sz="1600">
+                <a:latin typeface="微软雅黑" charset="0"/>
+                <a:ea typeface="微软雅黑" charset="0"/>
+                <a:cs typeface="微软雅黑" charset="0"/>
+              </a:rPr>
+              <a:t>，学习适应业务需求和运行状态的映射策略。图中展示的是训练交互流程。</a:t>
+            </a:r>
+            <a:endParaRPr lang="zh-CN" altLang="en-US" sz="1600">
+              <a:latin typeface="微软雅黑" charset="0"/>
+              <a:ea typeface="微软雅黑" charset="0"/>
+              <a:cs typeface="微软雅黑" charset="0"/>
+            </a:endParaRPr>
+          </a:p>
+        </p:txBody>
+      </p:sp>
+      <p:sp>
+        <p:nvSpPr>
+          <p:cNvPr id="6" name="文本框 5"/>
+          <p:cNvSpPr txBox="1"/>
+          <p:nvPr userDrawn="1"/>
+        </p:nvSpPr>
+        <p:spPr>
+          <a:xfrm>
+            <a:off x="654050" y="5611495"/>
+            <a:ext cx="5381559" cy="748022"/>
+          </a:xfrm>
+          <a:prstGeom prst="rect">
+            <a:avLst/>
+          </a:prstGeom>
+        </p:spPr>
+        <p:txBody>
+          <a:bodyPr wrap="square" rtlCol="0">
+            <a:noAutofit/>
+          </a:bodyPr>
+          <a:p>
+            <a:pPr algn="l"/>
+            <a:r>
+              <a:rPr lang="zh-CN" altLang="en-US" sz="1400" b="1">
+                <a:latin typeface="微软雅黑" charset="0"/>
+                <a:ea typeface="微软雅黑" charset="0"/>
+                <a:cs typeface="微软雅黑" charset="0"/>
+              </a:rPr>
+              <a:t>图中符号：</a:t>
+            </a:r>
+            <a:r>
+              <a:rPr lang="en-US" altLang="zh-CN" sz="1400" b="1">
+                <a:latin typeface="微软雅黑" charset="0"/>
+                <a:ea typeface="微软雅黑" charset="0"/>
+                <a:cs typeface="微软雅黑" charset="0"/>
+              </a:rPr>
+              <a:t>UE</a:t>
+            </a:r>
+            <a:r>
+              <a:rPr lang="zh-CN" altLang="en-US" sz="1400">
+                <a:latin typeface="微软雅黑" charset="0"/>
+                <a:ea typeface="微软雅黑" charset="0"/>
+                <a:cs typeface="微软雅黑" charset="0"/>
+              </a:rPr>
+              <a:t>：终端；</a:t>
+            </a:r>
+            <a:r>
+              <a:rPr lang="en-US" altLang="zh-CN" sz="1400" b="1">
+                <a:latin typeface="微软雅黑" charset="0"/>
+                <a:ea typeface="微软雅黑" charset="0"/>
+                <a:cs typeface="微软雅黑" charset="0"/>
+              </a:rPr>
+              <a:t>QFI</a:t>
+            </a:r>
+            <a:r>
+              <a:rPr lang="zh-CN" altLang="en-US" sz="1400">
+                <a:latin typeface="微软雅黑" charset="0"/>
+                <a:ea typeface="微软雅黑" charset="0"/>
+                <a:cs typeface="微软雅黑" charset="0"/>
+              </a:rPr>
+              <a:t>：</a:t>
+            </a:r>
+            <a:r>
+              <a:rPr lang="en-US" altLang="zh-CN" sz="1400">
+                <a:latin typeface="微软雅黑" charset="0"/>
+                <a:ea typeface="微软雅黑" charset="0"/>
+                <a:cs typeface="微软雅黑" charset="0"/>
+              </a:rPr>
+              <a:t>QoS </a:t>
+            </a:r>
+            <a:r>
+              <a:rPr lang="zh-CN" altLang="en-US" sz="1400">
+                <a:latin typeface="微软雅黑" charset="0"/>
+                <a:ea typeface="微软雅黑" charset="0"/>
+                <a:cs typeface="微软雅黑" charset="0"/>
+              </a:rPr>
+              <a:t>流标识；</a:t>
+            </a:r>
+            <a:r>
+              <a:rPr lang="en-US" altLang="zh-CN" sz="1400" b="1">
+                <a:latin typeface="微软雅黑" charset="0"/>
+                <a:ea typeface="微软雅黑" charset="0"/>
+                <a:cs typeface="微软雅黑" charset="0"/>
+              </a:rPr>
+              <a:t>DRB</a:t>
+            </a:r>
+            <a:r>
+              <a:rPr lang="zh-CN" altLang="en-US" sz="1400">
+                <a:latin typeface="微软雅黑" charset="0"/>
+                <a:ea typeface="微软雅黑" charset="0"/>
+                <a:cs typeface="微软雅黑" charset="0"/>
+              </a:rPr>
+              <a:t>：数据无线承载；</a:t>
+            </a:r>
+            <a:r>
+              <a:rPr lang="en-US" altLang="zh-CN" sz="1400" b="1">
+                <a:latin typeface="微软雅黑" charset="0"/>
+                <a:ea typeface="微软雅黑" charset="0"/>
+                <a:cs typeface="微软雅黑" charset="0"/>
+              </a:rPr>
+              <a:t>s</a:t>
+            </a:r>
+            <a:r>
+              <a:rPr lang="zh-CN" altLang="en-US" sz="1400">
+                <a:latin typeface="微软雅黑" charset="0"/>
+                <a:ea typeface="微软雅黑" charset="0"/>
+                <a:cs typeface="微软雅黑" charset="0"/>
+              </a:rPr>
+              <a:t>：状态；</a:t>
+            </a:r>
+            <a:r>
+              <a:rPr lang="en-US" altLang="zh-CN" sz="1400" b="1">
+                <a:latin typeface="微软雅黑" charset="0"/>
+                <a:ea typeface="微软雅黑" charset="0"/>
+                <a:cs typeface="微软雅黑" charset="0"/>
+              </a:rPr>
+              <a:t>a</a:t>
+            </a:r>
+            <a:r>
+              <a:rPr lang="zh-CN" altLang="en-US" sz="1400">
+                <a:latin typeface="微软雅黑" charset="0"/>
+                <a:ea typeface="微软雅黑" charset="0"/>
+                <a:cs typeface="微软雅黑" charset="0"/>
+              </a:rPr>
+              <a:t>：动作；</a:t>
+            </a:r>
+            <a:r>
+              <a:rPr lang="en-US" altLang="zh-CN" sz="1400" b="1">
+                <a:latin typeface="微软雅黑" charset="0"/>
+                <a:ea typeface="微软雅黑" charset="0"/>
+                <a:cs typeface="微软雅黑" charset="0"/>
+              </a:rPr>
+              <a:t>r</a:t>
+            </a:r>
+            <a:r>
+              <a:rPr lang="zh-CN" altLang="en-US" sz="1400">
+                <a:latin typeface="微软雅黑" charset="0"/>
+                <a:ea typeface="微软雅黑" charset="0"/>
+                <a:cs typeface="微软雅黑" charset="0"/>
+              </a:rPr>
+              <a:t>：奖励；</a:t>
+            </a:r>
+            <a:r>
+              <a:rPr lang="en-US" altLang="zh-CN" sz="1400" b="1">
+                <a:latin typeface="微软雅黑" charset="0"/>
+                <a:ea typeface="微软雅黑" charset="0"/>
+                <a:cs typeface="微软雅黑" charset="0"/>
+              </a:rPr>
+              <a:t>Q(s,a)</a:t>
+            </a:r>
+            <a:r>
+              <a:rPr lang="zh-CN" altLang="en-US" sz="1400">
+                <a:latin typeface="微软雅黑" charset="0"/>
+                <a:ea typeface="微软雅黑" charset="0"/>
+                <a:cs typeface="微软雅黑" charset="0"/>
+              </a:rPr>
+              <a:t>：当前状态下某个动作的预期累计奖励。</a:t>
+            </a:r>
+            <a:endParaRPr lang="zh-CN" altLang="en-US" sz="1400">
+              <a:latin typeface="微软雅黑" charset="0"/>
+              <a:ea typeface="微软雅黑" charset="0"/>
+              <a:cs typeface="微软雅黑" charset="0"/>
             </a:endParaRPr>
           </a:p>
         </p:txBody>
@@ -13589,7 +15805,7 @@
         <p:spPr>
           <a:xfrm>
             <a:off x="565150" y="339090"/>
-            <a:ext cx="5491781" cy="612775"/>
+            <a:ext cx="5206718" cy="612775"/>
           </a:xfrm>
         </p:spPr>
         <p:txBody>
@@ -13604,7 +15820,7 @@
                 <a:ea typeface="微软雅黑" charset="-122"/>
                 <a:sym typeface="+mn-ea"/>
               </a:rPr>
-              <a:t>方向二：通信</a:t>
+              <a:t>方向一：通过</a:t>
             </a:r>
             <a:r>
               <a:rPr lang="en-US" altLang="zh-CN" sz="2800" b="1" dirty="0">
@@ -13620,7 +15836,7 @@
                 <a:ea typeface="微软雅黑" charset="-122"/>
                 <a:sym typeface="+mn-ea"/>
               </a:rPr>
-              <a:t>算法的测试验收</a:t>
+              <a:t>优化通信体验</a:t>
             </a:r>
             <a:endParaRPr lang="zh-CN" altLang="en-US" sz="2800" b="1" dirty="0">
               <a:latin typeface="微软雅黑" charset="-122"/>
@@ -13638,8 +15854,8 @@
         </p:nvSpPr>
         <p:spPr>
           <a:xfrm>
-            <a:off x="258445" y="1025948"/>
-            <a:ext cx="11734165" cy="5381282"/>
+            <a:off x="258445" y="951865"/>
+            <a:ext cx="11734165" cy="5617064"/>
           </a:xfrm>
           <a:prstGeom prst="rect">
             <a:avLst/>
@@ -13656,7 +15872,7 @@
           <a:p>
             <a:pPr indent="0">
               <a:lnSpc>
-                <a:spcPct val="120000"/>
+                <a:spcPct val="160000"/>
               </a:lnSpc>
               <a:buFont typeface="Arial" panose="020B0604020202020204" pitchFamily="34" charset="0"/>
               <a:buNone/>
@@ -13666,22 +15882,33 @@
                 <a:solidFill>
                   <a:schemeClr val="tx1"/>
                 </a:solidFill>
+                <a:latin typeface="微软雅黑" charset="-122"/>
+                <a:ea typeface="微软雅黑" charset="-122"/>
+                <a:sym typeface="+mn-ea"/>
+              </a:rPr>
+              <a:t>3. </a:t>
+            </a:r>
+            <a:r>
+              <a:rPr lang="zh-CN" altLang="en-US" b="1" dirty="0">
+                <a:solidFill>
+                  <a:schemeClr val="tx1"/>
+                </a:solidFill>
+                <a:latin typeface="微软雅黑" charset="-122"/>
+                <a:ea typeface="微软雅黑" charset="-122"/>
+                <a:sym typeface="+mn-ea"/>
+              </a:rPr>
+              <a:t>苹果专利：预测辅助移动性管理</a:t>
+            </a:r>
+            <a:r>
+              <a:rPr lang="zh-CN" altLang="en-US" b="1" dirty="0">
+                <a:solidFill>
+                  <a:schemeClr val="tx1"/>
+                </a:solidFill>
                 <a:latin typeface="微软雅黑" charset="0"/>
                 <a:ea typeface="微软雅黑" charset="0"/>
                 <a:sym typeface="+mn-ea"/>
               </a:rPr>
-              <a:t>1</a:t>
-            </a:r>
-            <a:r>
-              <a:rPr lang="en-US" altLang="zh-CN" b="1" dirty="0">
-                <a:solidFill>
-                  <a:schemeClr val="tx1"/>
-                </a:solidFill>
-                <a:latin typeface="微软雅黑" charset="-122"/>
-                <a:ea typeface="微软雅黑" charset="-122"/>
-                <a:sym typeface="+mn-ea"/>
-              </a:rPr>
-              <a:t>. </a:t>
+              <a:t>——</a:t>
             </a:r>
             <a:r>
               <a:rPr lang="zh-CN" altLang="en-US" b="1" dirty="0">
@@ -13692,29 +15919,7 @@
                 <a:ea typeface="微软雅黑" charset="-122"/>
                 <a:sym typeface="+mn-ea"/>
               </a:rPr>
-              <a:t>苹果专利：部署后验证</a:t>
-            </a:r>
-            <a:r>
-              <a:rPr lang="zh-CN" altLang="en-US" b="1" dirty="0">
-                <a:solidFill>
-                  <a:schemeClr val="tx1"/>
-                </a:solidFill>
-                <a:latin typeface="微软雅黑" charset="0"/>
-                <a:ea typeface="微软雅黑" charset="0"/>
-                <a:sym typeface="+mn-ea"/>
-              </a:rPr>
-              <a:t>——</a:t>
-            </a:r>
-            <a:r>
-              <a:rPr lang="zh-CN" altLang="en-US" b="1" dirty="0">
-                <a:solidFill>
-                  <a:schemeClr val="tx1"/>
-                </a:solidFill>
-                <a:latin typeface="微软雅黑" charset="-122"/>
-                <a:ea typeface="微软雅黑" charset="-122"/>
-                <a:sym typeface="+mn-ea"/>
-              </a:rPr>
-              <a:t>检查模型适用性与预测表现，动态管理使用状态</a:t>
+              <a:t>连接无线状态预测、切换条件与实测监测</a:t>
             </a:r>
             <a:r>
               <a:rPr lang="en-US" altLang="zh-CN" b="1" baseline="30000" dirty="0">
@@ -13738,7 +15943,7 @@
                 <a:cs typeface="+mn-ea"/>
                 <a:sym typeface="+mn-ea"/>
               </a:rPr>
-              <a:t>4</a:t>
+              <a:t>3</a:t>
             </a:r>
             <a:r>
               <a:rPr lang="en-US" altLang="zh-CN" b="1" baseline="30000" dirty="0">
@@ -13764,6 +15969,244 @@
           <a:p>
             <a:pPr indent="0">
               <a:lnSpc>
+                <a:spcPct val="130000"/>
+              </a:lnSpc>
+              <a:buFont typeface="Arial" panose="020B0604020202020204" pitchFamily="34" charset="0"/>
+              <a:buNone/>
+            </a:pPr>
+            <a:r>
+              <a:rPr lang="zh-CN" altLang="en-US" sz="1400" b="1" dirty="0">
+                <a:solidFill>
+                  <a:srgbClr val="FF0000"/>
+                </a:solidFill>
+                <a:latin typeface="微软雅黑" charset="-122"/>
+                <a:ea typeface="微软雅黑" charset="-122"/>
+                <a:sym typeface="+mn-ea"/>
+              </a:rPr>
+              <a:t>创新与价值：</a:t>
+            </a:r>
+            <a:r>
+              <a:rPr lang="zh-CN" altLang="en-US" sz="1400" dirty="0">
+                <a:solidFill>
+                  <a:schemeClr val="tx1"/>
+                </a:solidFill>
+                <a:latin typeface="微软雅黑" charset="-122"/>
+                <a:ea typeface="微软雅黑" charset="-122"/>
+                <a:sym typeface="+mn-ea"/>
+              </a:rPr>
+              <a:t>该方法利用已有无线测量预测未来的小区或波束测量，也允许根据部分波束推断其他波束的测量，为移动性管理提供更早或更完整的无线状态信息。其价值在于</a:t>
+            </a:r>
+            <a:r>
+              <a:rPr lang="zh-CN" altLang="en-US" sz="1400" b="1" dirty="0">
+                <a:solidFill>
+                  <a:schemeClr val="tx1"/>
+                </a:solidFill>
+                <a:latin typeface="微软雅黑" charset="-122"/>
+                <a:ea typeface="微软雅黑" charset="-122"/>
+                <a:sym typeface="+mn-ea"/>
+              </a:rPr>
+              <a:t>支持网络提前判断链路变化和切换条件</a:t>
+            </a:r>
+            <a:r>
+              <a:rPr lang="zh-CN" altLang="en-US" sz="1400" dirty="0">
+                <a:solidFill>
+                  <a:schemeClr val="tx1"/>
+                </a:solidFill>
+                <a:latin typeface="微软雅黑" charset="-122"/>
+                <a:ea typeface="微软雅黑" charset="-122"/>
+                <a:sym typeface="+mn-ea"/>
+              </a:rPr>
+              <a:t>，并通过部分预测替代部分实际测量，探索降低终端测量负担。方案同时保留实际测量监控与模型停用机制，</a:t>
+            </a:r>
+            <a:r>
+              <a:rPr lang="zh-CN" altLang="en-US" sz="1400" b="1" dirty="0">
+                <a:solidFill>
+                  <a:schemeClr val="tx1"/>
+                </a:solidFill>
+                <a:latin typeface="微软雅黑" charset="-122"/>
+                <a:ea typeface="微软雅黑" charset="-122"/>
+                <a:sym typeface="+mn-ea"/>
+              </a:rPr>
+              <a:t>兼顾预测收益和通信可靠性</a:t>
+            </a:r>
+            <a:r>
+              <a:rPr lang="zh-CN" altLang="en-US" sz="1400" dirty="0">
+                <a:solidFill>
+                  <a:schemeClr val="tx1"/>
+                </a:solidFill>
+                <a:latin typeface="微软雅黑" charset="-122"/>
+                <a:ea typeface="微软雅黑" charset="-122"/>
+                <a:sym typeface="+mn-ea"/>
+              </a:rPr>
+              <a:t>。</a:t>
+            </a:r>
+            <a:endParaRPr lang="zh-CN" altLang="en-US" sz="1400" dirty="0">
+              <a:solidFill>
+                <a:schemeClr val="tx1"/>
+              </a:solidFill>
+              <a:latin typeface="微软雅黑" charset="-122"/>
+              <a:ea typeface="微软雅黑" charset="-122"/>
+              <a:sym typeface="+mn-ea"/>
+            </a:endParaRPr>
+          </a:p>
+          <a:p>
+            <a:pPr indent="0">
+              <a:lnSpc>
+                <a:spcPct val="130000"/>
+              </a:lnSpc>
+              <a:buFont typeface="Arial" panose="020B0604020202020204" pitchFamily="34" charset="0"/>
+              <a:buNone/>
+            </a:pPr>
+            <a:r>
+              <a:rPr lang="zh-CN" altLang="en-US" sz="1400" b="1" dirty="0">
+                <a:solidFill>
+                  <a:srgbClr val="FF0000"/>
+                </a:solidFill>
+                <a:latin typeface="微软雅黑" charset="-122"/>
+                <a:ea typeface="微软雅黑" charset="-122"/>
+                <a:sym typeface="+mn-ea"/>
+              </a:rPr>
+              <a:t>技术概述：</a:t>
+            </a:r>
+            <a:r>
+              <a:rPr lang="zh-CN" altLang="en-US" sz="1400" dirty="0">
+                <a:solidFill>
+                  <a:schemeClr val="tx1"/>
+                </a:solidFill>
+                <a:latin typeface="微软雅黑" charset="-122"/>
+                <a:ea typeface="微软雅黑" charset="-122"/>
+                <a:sym typeface="+mn-ea"/>
+              </a:rPr>
+              <a:t>终端移动时，小区和波束的信号状态持续变化，已有测量可能无法充分反映后续切换时的情况。苹果提出将测量预测接入移动性管理：</a:t>
+            </a:r>
+            <a:r>
+              <a:rPr lang="zh-CN" altLang="en-US" sz="1400" b="1" dirty="0">
+                <a:solidFill>
+                  <a:schemeClr val="tx1"/>
+                </a:solidFill>
+                <a:latin typeface="微软雅黑" charset="-122"/>
+                <a:ea typeface="微软雅黑" charset="-122"/>
+                <a:sym typeface="+mn-ea"/>
+              </a:rPr>
+              <a:t>网络配置预测结果的使用规则，终端据此上报预测信息或评价切换条件，并利用对应实测监测预测误差。</a:t>
+            </a:r>
+            <a:r>
+              <a:rPr lang="zh-CN" altLang="en-US" sz="1400" dirty="0">
+                <a:solidFill>
+                  <a:schemeClr val="tx1"/>
+                </a:solidFill>
+                <a:latin typeface="微软雅黑" charset="-122"/>
+                <a:ea typeface="微软雅黑" charset="-122"/>
+                <a:sym typeface="+mn-ea"/>
+              </a:rPr>
+              <a:t>预测失准时，可停止或切换模型，恢复实际测量。</a:t>
+            </a:r>
+            <a:endParaRPr lang="zh-CN" altLang="en-US" sz="1400" dirty="0">
+              <a:solidFill>
+                <a:schemeClr val="tx1"/>
+              </a:solidFill>
+              <a:latin typeface="微软雅黑" charset="-122"/>
+              <a:ea typeface="微软雅黑" charset="-122"/>
+              <a:sym typeface="+mn-ea"/>
+            </a:endParaRPr>
+          </a:p>
+          <a:p>
+            <a:pPr indent="0">
+              <a:lnSpc>
+                <a:spcPct val="130000"/>
+              </a:lnSpc>
+              <a:buFont typeface="Arial" panose="020B0604020202020204" pitchFamily="34" charset="0"/>
+              <a:buNone/>
+            </a:pPr>
+            <a:r>
+              <a:rPr lang="zh-CN" altLang="en-US" sz="1400" dirty="0">
+                <a:solidFill>
+                  <a:schemeClr val="tx1"/>
+                </a:solidFill>
+                <a:latin typeface="微软雅黑" charset="-122"/>
+                <a:ea typeface="微软雅黑" charset="-122"/>
+                <a:sym typeface="+mn-ea"/>
+              </a:rPr>
+              <a:t>已有小区或波束测量为模型提供依据，涉及物理层</a:t>
+            </a:r>
+            <a:r>
+              <a:rPr lang="en-US" altLang="zh-CN" sz="1400" dirty="0">
+                <a:solidFill>
+                  <a:schemeClr val="tx1"/>
+                </a:solidFill>
+                <a:latin typeface="微软雅黑" charset="-122"/>
+                <a:ea typeface="微软雅黑" charset="-122"/>
+                <a:sym typeface="+mn-ea"/>
+              </a:rPr>
+              <a:t> L1 </a:t>
+            </a:r>
+            <a:r>
+              <a:rPr lang="zh-CN" altLang="en-US" sz="1400" dirty="0">
+                <a:solidFill>
+                  <a:schemeClr val="tx1"/>
+                </a:solidFill>
+                <a:latin typeface="微软雅黑" charset="-122"/>
+                <a:ea typeface="微软雅黑" charset="-122"/>
+                <a:sym typeface="+mn-ea"/>
+              </a:rPr>
+              <a:t>测量及经处理的</a:t>
+            </a:r>
+            <a:r>
+              <a:rPr lang="en-US" altLang="zh-CN" sz="1400" dirty="0">
+                <a:solidFill>
+                  <a:schemeClr val="tx1"/>
+                </a:solidFill>
+                <a:latin typeface="微软雅黑" charset="-122"/>
+                <a:ea typeface="微软雅黑" charset="-122"/>
+                <a:sym typeface="+mn-ea"/>
+              </a:rPr>
+              <a:t> L3 </a:t>
+            </a:r>
+            <a:r>
+              <a:rPr lang="zh-CN" altLang="en-US" sz="1400" dirty="0">
+                <a:solidFill>
+                  <a:schemeClr val="tx1"/>
+                </a:solidFill>
+                <a:latin typeface="微软雅黑" charset="-122"/>
+                <a:ea typeface="微软雅黑" charset="-122"/>
+                <a:sym typeface="+mn-ea"/>
+              </a:rPr>
+              <a:t>测量。</a:t>
+            </a:r>
+            <a:r>
+              <a:rPr lang="zh-CN" altLang="en-US" sz="1400" b="1" dirty="0">
+                <a:solidFill>
+                  <a:schemeClr val="tx1"/>
+                </a:solidFill>
+                <a:latin typeface="微软雅黑" charset="-122"/>
+                <a:ea typeface="微软雅黑" charset="-122"/>
+                <a:sym typeface="+mn-ea"/>
+              </a:rPr>
+              <a:t>时间预测估计后续时刻，空间预测利用邻近波束信息推断另一波束的测量。</a:t>
+            </a:r>
+            <a:r>
+              <a:rPr lang="zh-CN" altLang="en-US" sz="1400" dirty="0">
+                <a:solidFill>
+                  <a:schemeClr val="tx1"/>
+                </a:solidFill>
+                <a:latin typeface="微软雅黑" charset="-122"/>
+                <a:ea typeface="微软雅黑" charset="-122"/>
+                <a:sym typeface="+mn-ea"/>
+              </a:rPr>
+              <a:t>两类预测需要不同的实测对应关系。</a:t>
+            </a:r>
+            <a:endParaRPr lang="zh-CN" altLang="en-US" sz="1400" dirty="0">
+              <a:solidFill>
+                <a:schemeClr val="tx1"/>
+              </a:solidFill>
+              <a:latin typeface="微软雅黑" charset="-122"/>
+              <a:ea typeface="微软雅黑" charset="-122"/>
+              <a:sym typeface="+mn-ea"/>
+            </a:endParaRPr>
+          </a:p>
+          <a:p>
+            <a:pPr indent="0">
+              <a:lnSpc>
                 <a:spcPct val="120000"/>
               </a:lnSpc>
               <a:buFont typeface="Arial" panose="020B0604020202020204" pitchFamily="34" charset="0"/>
@@ -13772,13 +16215,190 @@
             <a:r>
               <a:rPr lang="zh-CN" altLang="en-US" sz="1400" b="1" dirty="0">
                 <a:solidFill>
-                  <a:schemeClr val="tx1"/>
-                </a:solidFill>
-                <a:latin typeface="微软雅黑" charset="-122"/>
-                <a:ea typeface="微软雅黑" charset="-122"/>
-                <a:sym typeface="+mn-ea"/>
-              </a:rPr>
-              <a:t>技术概述：</a:t>
+                  <a:srgbClr val="FF0000"/>
+                </a:solidFill>
+                <a:latin typeface="微软雅黑" charset="-122"/>
+                <a:ea typeface="微软雅黑" charset="-122"/>
+                <a:sym typeface="+mn-ea"/>
+              </a:rPr>
+              <a:t>研究方法：</a:t>
+            </a:r>
+            <a:endParaRPr lang="zh-CN" altLang="en-US" sz="1400" b="1" dirty="0">
+              <a:solidFill>
+                <a:srgbClr val="FF0000"/>
+              </a:solidFill>
+              <a:latin typeface="微软雅黑" charset="-122"/>
+              <a:ea typeface="微软雅黑" charset="-122"/>
+              <a:sym typeface="+mn-ea"/>
+            </a:endParaRPr>
+          </a:p>
+          <a:p>
+            <a:pPr indent="0">
+              <a:lnSpc>
+                <a:spcPct val="120000"/>
+              </a:lnSpc>
+              <a:buFont typeface="Arial" panose="020B0604020202020204" pitchFamily="34" charset="0"/>
+              <a:buNone/>
+            </a:pPr>
+            <a:r>
+              <a:rPr lang="en-US" sz="1400" b="1" dirty="0">
+                <a:solidFill>
+                  <a:schemeClr val="tx1"/>
+                </a:solidFill>
+                <a:latin typeface="微软雅黑" charset="-122"/>
+                <a:ea typeface="微软雅黑" charset="-122"/>
+                <a:sym typeface="+mn-ea"/>
+              </a:rPr>
+              <a:t>a. </a:t>
+            </a:r>
+            <a:r>
+              <a:rPr lang="zh-CN" altLang="en-US" sz="1400" b="1" dirty="0">
+                <a:solidFill>
+                  <a:schemeClr val="tx1"/>
+                </a:solidFill>
+                <a:latin typeface="微软雅黑" charset="-122"/>
+                <a:ea typeface="微软雅黑" charset="-122"/>
+                <a:sym typeface="+mn-ea"/>
+              </a:rPr>
+              <a:t>区分时间预测与空间预测。</a:t>
+            </a:r>
+            <a:r>
+              <a:rPr lang="zh-CN" altLang="en-US" sz="1400" dirty="0">
+                <a:solidFill>
+                  <a:schemeClr val="tx1"/>
+                </a:solidFill>
+                <a:latin typeface="微软雅黑" charset="-122"/>
+                <a:ea typeface="微软雅黑" charset="-122"/>
+                <a:sym typeface="+mn-ea"/>
+              </a:rPr>
+              <a:t>时间预测利用已有测量估计后续时刻，空间预测利用邻近波束信息推断另一波束的测量，涉及</a:t>
+            </a:r>
+            <a:r>
+              <a:rPr lang="en-US" altLang="zh-CN" sz="1400" dirty="0">
+                <a:solidFill>
+                  <a:schemeClr val="tx1"/>
+                </a:solidFill>
+                <a:latin typeface="微软雅黑" charset="-122"/>
+                <a:ea typeface="微软雅黑" charset="-122"/>
+                <a:sym typeface="+mn-ea"/>
+              </a:rPr>
+              <a:t> L1</a:t>
+            </a:r>
+            <a:r>
+              <a:rPr lang="zh-CN" altLang="en-US" sz="1400" dirty="0">
+                <a:solidFill>
+                  <a:schemeClr val="tx1"/>
+                </a:solidFill>
+                <a:latin typeface="微软雅黑" charset="-122"/>
+                <a:ea typeface="微软雅黑" charset="-122"/>
+                <a:sym typeface="+mn-ea"/>
+              </a:rPr>
+              <a:t>、</a:t>
+            </a:r>
+            <a:r>
+              <a:rPr lang="en-US" altLang="zh-CN" sz="1400" dirty="0">
+                <a:solidFill>
+                  <a:schemeClr val="tx1"/>
+                </a:solidFill>
+                <a:latin typeface="微软雅黑" charset="-122"/>
+                <a:ea typeface="微软雅黑" charset="-122"/>
+                <a:sym typeface="+mn-ea"/>
+              </a:rPr>
+              <a:t>L3 </a:t>
+            </a:r>
+            <a:r>
+              <a:rPr lang="zh-CN" altLang="en-US" sz="1400" dirty="0">
+                <a:solidFill>
+                  <a:schemeClr val="tx1"/>
+                </a:solidFill>
+                <a:latin typeface="微软雅黑" charset="-122"/>
+                <a:ea typeface="微软雅黑" charset="-122"/>
+                <a:sym typeface="+mn-ea"/>
+              </a:rPr>
+              <a:t>测量。前者关注变化趋势，后者补充对象信息，测试时需要分别建立对应实测。</a:t>
+            </a:r>
+            <a:endParaRPr lang="zh-CN" altLang="en-US" sz="1400" dirty="0">
+              <a:solidFill>
+                <a:schemeClr val="tx1"/>
+              </a:solidFill>
+              <a:latin typeface="微软雅黑" charset="-122"/>
+              <a:ea typeface="微软雅黑" charset="-122"/>
+              <a:sym typeface="+mn-ea"/>
+            </a:endParaRPr>
+          </a:p>
+          <a:p>
+            <a:pPr indent="0">
+              <a:lnSpc>
+                <a:spcPct val="120000"/>
+              </a:lnSpc>
+              <a:buFont typeface="Arial" panose="020B0604020202020204" pitchFamily="34" charset="0"/>
+              <a:buNone/>
+            </a:pPr>
+            <a:r>
+              <a:rPr lang="en-US" altLang="zh-CN" sz="1400" b="1" dirty="0">
+                <a:solidFill>
+                  <a:schemeClr val="tx1"/>
+                </a:solidFill>
+                <a:latin typeface="微软雅黑" charset="-122"/>
+                <a:ea typeface="微软雅黑" charset="-122"/>
+                <a:sym typeface="+mn-ea"/>
+              </a:rPr>
+              <a:t>b. </a:t>
+            </a:r>
+            <a:r>
+              <a:rPr lang="zh-CN" altLang="en-US" sz="1400" b="1" dirty="0">
+                <a:solidFill>
+                  <a:schemeClr val="tx1"/>
+                </a:solidFill>
+                <a:latin typeface="微软雅黑" charset="-122"/>
+                <a:ea typeface="微软雅黑" charset="-122"/>
+                <a:sym typeface="+mn-ea"/>
+              </a:rPr>
+              <a:t>将预测接入切换准备和条件判断。</a:t>
+            </a:r>
+            <a:r>
+              <a:rPr lang="zh-CN" altLang="en-US" sz="1400" dirty="0">
+                <a:solidFill>
+                  <a:schemeClr val="tx1"/>
+                </a:solidFill>
+                <a:latin typeface="微软雅黑" charset="-122"/>
+                <a:ea typeface="微软雅黑" charset="-122"/>
+                <a:sym typeface="+mn-ea"/>
+              </a:rPr>
+              <a:t>条件切换</a:t>
+            </a:r>
+            <a:r>
+              <a:rPr lang="en-US" altLang="zh-CN" sz="1400" dirty="0">
+                <a:solidFill>
+                  <a:schemeClr val="tx1"/>
+                </a:solidFill>
+                <a:latin typeface="微软雅黑" charset="-122"/>
+                <a:ea typeface="微软雅黑" charset="-122"/>
+                <a:sym typeface="+mn-ea"/>
+              </a:rPr>
+              <a:t> CHO </a:t>
+            </a:r>
+            <a:r>
+              <a:rPr lang="zh-CN" altLang="en-US" sz="1400" dirty="0">
+                <a:solidFill>
+                  <a:schemeClr val="tx1"/>
+                </a:solidFill>
+                <a:latin typeface="微软雅黑" charset="-122"/>
+                <a:ea typeface="微软雅黑" charset="-122"/>
+                <a:sym typeface="+mn-ea"/>
+              </a:rPr>
+              <a:t>由网络配置候选小区及执行条件，终端在条件满足后执行。专利进一步提出允许可靠预测参与判断，也可要求预测与实测共同满足条件。</a:t>
+            </a:r>
+            <a:r>
+              <a:rPr lang="zh-CN" altLang="en-US" sz="1400" b="1" dirty="0">
+                <a:solidFill>
+                  <a:schemeClr val="tx1"/>
+                </a:solidFill>
+                <a:latin typeface="微软雅黑" charset="-122"/>
+                <a:ea typeface="微软雅黑" charset="-122"/>
+                <a:sym typeface="+mn-ea"/>
+              </a:rPr>
+              <a:t>预测如何影响切换，取决于网络配置的采纳规则。</a:t>
             </a:r>
             <a:endParaRPr lang="zh-CN" altLang="en-US" sz="1400" b="1" dirty="0">
               <a:solidFill>
@@ -13798,6 +16418,28 @@
               <a:buNone/>
             </a:pPr>
             <a:r>
+              <a:rPr lang="en-US" altLang="zh-CN" sz="1400" b="1" dirty="0">
+                <a:solidFill>
+                  <a:schemeClr val="tx1"/>
+                </a:solidFill>
+                <a:latin typeface="微软雅黑" charset="-122"/>
+                <a:ea typeface="微软雅黑" charset="-122"/>
+                <a:sym typeface="+mn-ea"/>
+              </a:rPr>
+              <a:t>c. </a:t>
+            </a:r>
+            <a:r>
+              <a:rPr lang="zh-CN" altLang="en-US" sz="1400" b="1" dirty="0">
+                <a:solidFill>
+                  <a:schemeClr val="tx1"/>
+                </a:solidFill>
+                <a:latin typeface="微软雅黑" charset="-122"/>
+                <a:ea typeface="微软雅黑" charset="-122"/>
+                <a:sym typeface="+mn-ea"/>
+              </a:rPr>
+              <a:t>用对应实测监测预测误差。</a:t>
+            </a:r>
+            <a:r>
               <a:rPr lang="zh-CN" altLang="en-US" sz="1400" dirty="0">
                 <a:solidFill>
                   <a:schemeClr val="tx1"/>
@@ -13806,7 +16448,7 @@
                 <a:ea typeface="微软雅黑" charset="-122"/>
                 <a:sym typeface="+mn-ea"/>
               </a:rPr>
-              <a:t>终端可以利用部分波束测量预测更多候选波束的信息，减少测量和参考信号开销。但模型进入不同无线环境，或者接收的测量与训练条件存在差异时，原先的性能结论可能不再适用。苹果提出在</a:t>
+              <a:t>专利提出以均方误差</a:t>
             </a:r>
             <a:r>
               <a:rPr lang="en-US" altLang="zh-CN" sz="1400" dirty="0">
@@ -13817,7 +16459,7 @@
                 <a:ea typeface="微软雅黑" charset="-122"/>
                 <a:sym typeface="+mn-ea"/>
               </a:rPr>
-              <a:t> UE </a:t>
+              <a:t> MSE </a:t>
             </a:r>
             <a:r>
               <a:rPr lang="zh-CN" altLang="en-US" sz="1400" dirty="0">
@@ -13828,106 +16470,18 @@
                 <a:ea typeface="微软雅黑" charset="-122"/>
                 <a:sym typeface="+mn-ea"/>
               </a:rPr>
-              <a:t>侧持续检查模型的适用条件、输出分布和预测准确性，并将评价结果用于模型管理。</a:t>
-            </a:r>
-            <a:r>
-              <a:rPr lang="zh-CN" altLang="en-US" sz="1400" b="1" dirty="0">
-                <a:solidFill>
-                  <a:schemeClr val="tx1"/>
-                </a:solidFill>
-                <a:latin typeface="微软雅黑" charset="-122"/>
-                <a:ea typeface="微软雅黑" charset="-122"/>
-                <a:sym typeface="+mn-ea"/>
-              </a:rPr>
-              <a:t>方案将</a:t>
-            </a:r>
-            <a:r>
-              <a:rPr lang="en-US" altLang="zh-CN" sz="1400" b="1" dirty="0">
-                <a:solidFill>
-                  <a:schemeClr val="tx1"/>
-                </a:solidFill>
-                <a:latin typeface="微软雅黑" charset="-122"/>
-                <a:ea typeface="微软雅黑" charset="-122"/>
-                <a:sym typeface="+mn-ea"/>
-              </a:rPr>
-              <a:t>“</a:t>
-            </a:r>
-            <a:r>
-              <a:rPr lang="zh-CN" altLang="en-US" sz="1400" b="1" dirty="0">
-                <a:solidFill>
-                  <a:schemeClr val="tx1"/>
-                </a:solidFill>
-                <a:latin typeface="微软雅黑" charset="-122"/>
-                <a:ea typeface="微软雅黑" charset="-122"/>
-                <a:sym typeface="+mn-ea"/>
-              </a:rPr>
-              <a:t>当前条件是否适合模型</a:t>
-            </a:r>
-            <a:r>
-              <a:rPr lang="en-US" altLang="zh-CN" sz="1400" b="1" dirty="0">
-                <a:solidFill>
-                  <a:schemeClr val="tx1"/>
-                </a:solidFill>
-                <a:latin typeface="微软雅黑" charset="-122"/>
-                <a:ea typeface="微软雅黑" charset="-122"/>
-                <a:sym typeface="+mn-ea"/>
-              </a:rPr>
-              <a:t>”</a:t>
-            </a:r>
-            <a:r>
-              <a:rPr lang="zh-CN" altLang="en-US" sz="1400" b="1" dirty="0">
-                <a:solidFill>
-                  <a:schemeClr val="tx1"/>
-                </a:solidFill>
-                <a:latin typeface="微软雅黑" charset="-122"/>
-                <a:ea typeface="微软雅黑" charset="-122"/>
-                <a:sym typeface="+mn-ea"/>
-              </a:rPr>
-              <a:t>与</a:t>
-            </a:r>
-            <a:r>
-              <a:rPr lang="en-US" altLang="zh-CN" sz="1400" b="1" dirty="0">
-                <a:solidFill>
-                  <a:schemeClr val="tx1"/>
-                </a:solidFill>
-                <a:latin typeface="微软雅黑" charset="-122"/>
-                <a:ea typeface="微软雅黑" charset="-122"/>
-                <a:sym typeface="+mn-ea"/>
-              </a:rPr>
-              <a:t>“</a:t>
-            </a:r>
-            <a:r>
-              <a:rPr lang="zh-CN" altLang="en-US" sz="1400" b="1" dirty="0">
-                <a:solidFill>
-                  <a:schemeClr val="tx1"/>
-                </a:solidFill>
-                <a:latin typeface="微软雅黑" charset="-122"/>
-                <a:ea typeface="微软雅黑" charset="-122"/>
-                <a:sym typeface="+mn-ea"/>
-              </a:rPr>
-              <a:t>模型预测是否准确</a:t>
-            </a:r>
-            <a:r>
-              <a:rPr lang="en-US" altLang="zh-CN" sz="1400" b="1" dirty="0">
-                <a:solidFill>
-                  <a:schemeClr val="tx1"/>
-                </a:solidFill>
-                <a:latin typeface="微软雅黑" charset="-122"/>
-                <a:ea typeface="微软雅黑" charset="-122"/>
-                <a:sym typeface="+mn-ea"/>
-              </a:rPr>
-              <a:t>”</a:t>
-            </a:r>
-            <a:r>
-              <a:rPr lang="zh-CN" altLang="en-US" sz="1400" b="1" dirty="0">
-                <a:solidFill>
-                  <a:schemeClr val="tx1"/>
-                </a:solidFill>
-                <a:latin typeface="微软雅黑" charset="-122"/>
-                <a:ea typeface="微软雅黑" charset="-122"/>
-                <a:sym typeface="+mn-ea"/>
-              </a:rPr>
-              <a:t>分开判断，同时分别记录启用状态和验证状态。</a:t>
+              <a:t>等指标检查预测，并将监测结果用于模型管理。验证必须对齐小区或波束，以及预测对应的时间。</a:t>
+            </a:r>
+            <a:r>
+              <a:rPr lang="en-US" altLang="zh-CN" sz="1400" dirty="0">
+                <a:solidFill>
+                  <a:schemeClr val="tx1"/>
+                </a:solidFill>
+                <a:latin typeface="微软雅黑" charset="-122"/>
+                <a:ea typeface="微软雅黑" charset="-122"/>
+                <a:sym typeface="+mn-ea"/>
+              </a:rPr>
+              <a:t>MSE </a:t>
             </a:r>
             <a:r>
               <a:rPr lang="zh-CN" altLang="en-US" sz="1400" dirty="0">
@@ -13938,7 +16492,7 @@
                 <a:ea typeface="微软雅黑" charset="-122"/>
                 <a:sym typeface="+mn-ea"/>
               </a:rPr>
-              <a:t>启用模型的结果参与通信，未启用模型也可以生成供评估的预测，为后续使用积累依据。</a:t>
+              <a:t>描述误差，不能直接解释为预测正确的概率。</a:t>
             </a:r>
             <a:endParaRPr lang="zh-CN" altLang="en-US" sz="1400" dirty="0">
               <a:solidFill>
@@ -13958,6 +16512,28 @@
               <a:buNone/>
             </a:pPr>
             <a:r>
+              <a:rPr lang="en-US" altLang="zh-CN" sz="1400" b="1" dirty="0">
+                <a:solidFill>
+                  <a:schemeClr val="tx1"/>
+                </a:solidFill>
+                <a:latin typeface="微软雅黑" charset="-122"/>
+                <a:ea typeface="微软雅黑" charset="-122"/>
+                <a:sym typeface="+mn-ea"/>
+              </a:rPr>
+              <a:t>d. </a:t>
+            </a:r>
+            <a:r>
+              <a:rPr lang="zh-CN" altLang="en-US" sz="1400" b="1" dirty="0">
+                <a:solidFill>
+                  <a:schemeClr val="tx1"/>
+                </a:solidFill>
+                <a:latin typeface="微软雅黑" charset="-122"/>
+                <a:ea typeface="微软雅黑" charset="-122"/>
+                <a:sym typeface="+mn-ea"/>
+              </a:rPr>
+              <a:t>失准后停止或切换模型，恢复实际测量。</a:t>
+            </a:r>
+            <a:r>
               <a:rPr lang="zh-CN" altLang="en-US" sz="1400" dirty="0">
                 <a:solidFill>
                   <a:schemeClr val="tx1"/>
@@ -13966,95 +16542,7 @@
                 <a:ea typeface="微软雅黑" charset="-122"/>
                 <a:sym typeface="+mn-ea"/>
               </a:rPr>
-              <a:t>输入包括波束对测量、运行条件、模型配置和预测结果。</a:t>
-            </a:r>
-            <a:r>
-              <a:rPr lang="zh-CN" altLang="en-US" sz="1400" b="1" dirty="0">
-                <a:solidFill>
-                  <a:schemeClr val="tx1"/>
-                </a:solidFill>
-                <a:latin typeface="微软雅黑" charset="-122"/>
-                <a:ea typeface="微软雅黑" charset="-122"/>
-                <a:sym typeface="+mn-ea"/>
-              </a:rPr>
-              <a:t>模型输出预测</a:t>
-            </a:r>
-            <a:r>
-              <a:rPr lang="en-US" altLang="zh-CN" sz="1400" b="1" dirty="0">
-                <a:solidFill>
-                  <a:schemeClr val="tx1"/>
-                </a:solidFill>
-                <a:latin typeface="微软雅黑" charset="-122"/>
-                <a:ea typeface="微软雅黑" charset="-122"/>
-                <a:sym typeface="+mn-ea"/>
-              </a:rPr>
-              <a:t> RSRP </a:t>
-            </a:r>
-            <a:r>
-              <a:rPr lang="zh-CN" altLang="en-US" sz="1400" b="1" dirty="0">
-                <a:solidFill>
-                  <a:schemeClr val="tx1"/>
-                </a:solidFill>
-                <a:latin typeface="微软雅黑" charset="-122"/>
-                <a:ea typeface="微软雅黑" charset="-122"/>
-                <a:sym typeface="+mn-ea"/>
-              </a:rPr>
-              <a:t>与</a:t>
-            </a:r>
-            <a:r>
-              <a:rPr lang="en-US" altLang="zh-CN" sz="1400" b="1" dirty="0">
-                <a:solidFill>
-                  <a:schemeClr val="tx1"/>
-                </a:solidFill>
-                <a:latin typeface="微软雅黑" charset="-122"/>
-                <a:ea typeface="微软雅黑" charset="-122"/>
-                <a:sym typeface="+mn-ea"/>
-              </a:rPr>
-              <a:t> Top-K </a:t>
-            </a:r>
-            <a:r>
-              <a:rPr lang="zh-CN" altLang="en-US" sz="1400" b="1" dirty="0">
-                <a:solidFill>
-                  <a:schemeClr val="tx1"/>
-                </a:solidFill>
-                <a:latin typeface="微软雅黑" charset="-122"/>
-                <a:ea typeface="微软雅黑" charset="-122"/>
-                <a:sym typeface="+mn-ea"/>
-              </a:rPr>
-              <a:t>波束对，验证模块输出性能评分和有效性状态</a:t>
-            </a:r>
-            <a:r>
-              <a:rPr lang="zh-CN" altLang="en-US" sz="1400" dirty="0">
-                <a:solidFill>
-                  <a:schemeClr val="tx1"/>
-                </a:solidFill>
-                <a:latin typeface="微软雅黑" charset="-122"/>
-                <a:ea typeface="微软雅黑" charset="-122"/>
-                <a:sym typeface="+mn-ea"/>
-              </a:rPr>
-              <a:t>，</a:t>
-            </a:r>
-            <a:r>
-              <a:rPr lang="en-US" altLang="zh-CN" sz="1400" dirty="0">
-                <a:solidFill>
-                  <a:schemeClr val="tx1"/>
-                </a:solidFill>
-                <a:latin typeface="微软雅黑" charset="-122"/>
-                <a:ea typeface="微软雅黑" charset="-122"/>
-                <a:sym typeface="+mn-ea"/>
-              </a:rPr>
-              <a:t>UE </a:t>
-            </a:r>
-            <a:r>
-              <a:rPr lang="zh-CN" altLang="en-US" sz="1400" dirty="0">
-                <a:solidFill>
-                  <a:schemeClr val="tx1"/>
-                </a:solidFill>
-                <a:latin typeface="微软雅黑" charset="-122"/>
-                <a:ea typeface="微软雅黑" charset="-122"/>
-                <a:sym typeface="+mn-ea"/>
-              </a:rPr>
-              <a:t>据此管理模型使用，并向服务器反馈。</a:t>
+              <a:t>监测结果可触发模型停用或切换，并回到实际测量方式。需要检查停止预测后能否及时获得有效观测，使正常移动性处理继续运行。</a:t>
             </a:r>
             <a:endParaRPr lang="zh-CN" altLang="en-US" sz="1400" dirty="0">
               <a:solidFill>
@@ -14068,7 +16556,7 @@
           <a:p>
             <a:pPr indent="0">
               <a:lnSpc>
-                <a:spcPct val="120000"/>
+                <a:spcPct val="130000"/>
               </a:lnSpc>
               <a:buFont typeface="Arial" panose="020B0604020202020204" pitchFamily="34" charset="0"/>
               <a:buNone/>
@@ -14076,557 +16564,37 @@
             <a:r>
               <a:rPr lang="zh-CN" altLang="en-US" sz="1400" b="1" dirty="0">
                 <a:solidFill>
-                  <a:schemeClr val="tx1"/>
-                </a:solidFill>
-                <a:latin typeface="微软雅黑" charset="-122"/>
-                <a:ea typeface="微软雅黑" charset="-122"/>
-                <a:sym typeface="+mn-ea"/>
-              </a:rPr>
-              <a:t>研究方法：</a:t>
+                  <a:srgbClr val="FF0000"/>
+                </a:solidFill>
+                <a:latin typeface="微软雅黑" charset="-122"/>
+                <a:ea typeface="微软雅黑" charset="-122"/>
+                <a:sym typeface="+mn-ea"/>
+              </a:rPr>
+              <a:t>研究成熟度与启示：</a:t>
+            </a:r>
+            <a:r>
+              <a:rPr lang="zh-CN" altLang="en-US" sz="1400" dirty="0">
+                <a:solidFill>
+                  <a:schemeClr val="tx1"/>
+                </a:solidFill>
+                <a:latin typeface="微软雅黑" charset="-122"/>
+                <a:ea typeface="微软雅黑" charset="-122"/>
+                <a:sym typeface="+mn-ea"/>
+              </a:rPr>
+              <a:t>公开文本给出预测、报告和模型监控机制，未提供切换性能或节能对照结果。验证应关联</a:t>
+            </a:r>
+            <a:r>
+              <a:rPr lang="zh-CN" altLang="en-US" sz="1400" b="1" dirty="0">
+                <a:solidFill>
+                  <a:schemeClr val="tx1"/>
+                </a:solidFill>
+                <a:latin typeface="微软雅黑" charset="-122"/>
+                <a:ea typeface="微软雅黑" charset="-122"/>
+                <a:sym typeface="+mn-ea"/>
+              </a:rPr>
+              <a:t>预测误差、切换成功率、通信中断和测量开销。</a:t>
             </a:r>
             <a:endParaRPr lang="zh-CN" altLang="en-US" sz="1400" b="1" dirty="0">
-              <a:solidFill>
-                <a:schemeClr val="tx1"/>
-              </a:solidFill>
-              <a:latin typeface="微软雅黑" charset="-122"/>
-              <a:ea typeface="微软雅黑" charset="-122"/>
-              <a:sym typeface="+mn-ea"/>
-            </a:endParaRPr>
-          </a:p>
-          <a:p>
-            <a:pPr indent="0">
-              <a:lnSpc>
-                <a:spcPct val="120000"/>
-              </a:lnSpc>
-              <a:buFont typeface="Arial" panose="020B0604020202020204" pitchFamily="34" charset="0"/>
-              <a:buNone/>
-            </a:pPr>
-            <a:r>
-              <a:rPr lang="en-US" sz="1400" b="1" dirty="0">
-                <a:solidFill>
-                  <a:schemeClr val="tx1"/>
-                </a:solidFill>
-                <a:latin typeface="微软雅黑" charset="-122"/>
-                <a:ea typeface="微软雅黑" charset="-122"/>
-                <a:sym typeface="+mn-ea"/>
-              </a:rPr>
-              <a:t>a. </a:t>
-            </a:r>
-            <a:r>
-              <a:rPr lang="zh-CN" altLang="en-US" sz="1400" b="1" dirty="0">
-                <a:solidFill>
-                  <a:schemeClr val="tx1"/>
-                </a:solidFill>
-                <a:latin typeface="微软雅黑" charset="-122"/>
-                <a:ea typeface="微软雅黑" charset="-122"/>
-                <a:sym typeface="+mn-ea"/>
-              </a:rPr>
-              <a:t>检查环境与输入是否符合模型适用范围。</a:t>
-            </a:r>
-            <a:r>
-              <a:rPr lang="en-US" altLang="zh-CN" sz="1400" dirty="0">
-                <a:solidFill>
-                  <a:schemeClr val="tx1"/>
-                </a:solidFill>
-                <a:latin typeface="微软雅黑" charset="-122"/>
-                <a:ea typeface="微软雅黑" charset="-122"/>
-                <a:sym typeface="+mn-ea"/>
-              </a:rPr>
-              <a:t>KPI-3 </a:t>
-            </a:r>
-            <a:r>
-              <a:rPr lang="zh-CN" altLang="en-US" sz="1400" dirty="0">
-                <a:solidFill>
-                  <a:schemeClr val="tx1"/>
-                </a:solidFill>
-                <a:latin typeface="微软雅黑" charset="-122"/>
-                <a:ea typeface="微软雅黑" charset="-122"/>
-                <a:sym typeface="+mn-ea"/>
-              </a:rPr>
-              <a:t>检查信噪比、多普勒、时延扩展等运行条件，以及输入数据是否符合模型预期。对于不适用或异常输入，</a:t>
-            </a:r>
-            <a:r>
-              <a:rPr lang="en-US" altLang="zh-CN" sz="1400" dirty="0">
-                <a:solidFill>
-                  <a:schemeClr val="tx1"/>
-                </a:solidFill>
-                <a:latin typeface="微软雅黑" charset="-122"/>
-                <a:ea typeface="微软雅黑" charset="-122"/>
-                <a:sym typeface="+mn-ea"/>
-              </a:rPr>
-              <a:t>UE </a:t>
-            </a:r>
-            <a:r>
-              <a:rPr lang="zh-CN" altLang="en-US" sz="1400" dirty="0">
-                <a:solidFill>
-                  <a:schemeClr val="tx1"/>
-                </a:solidFill>
-                <a:latin typeface="微软雅黑" charset="-122"/>
-                <a:ea typeface="微软雅黑" charset="-122"/>
-                <a:sym typeface="+mn-ea"/>
-              </a:rPr>
-              <a:t>可以暂不进行推理和有效性判断。这样，测试能够保留</a:t>
-            </a:r>
-            <a:r>
-              <a:rPr lang="en-US" altLang="zh-CN" sz="1400" dirty="0">
-                <a:solidFill>
-                  <a:schemeClr val="tx1"/>
-                </a:solidFill>
-                <a:latin typeface="微软雅黑" charset="-122"/>
-                <a:ea typeface="微软雅黑" charset="-122"/>
-                <a:sym typeface="+mn-ea"/>
-              </a:rPr>
-              <a:t>“</a:t>
-            </a:r>
-            <a:r>
-              <a:rPr lang="zh-CN" altLang="en-US" sz="1400" dirty="0">
-                <a:solidFill>
-                  <a:schemeClr val="tx1"/>
-                </a:solidFill>
-                <a:latin typeface="微软雅黑" charset="-122"/>
-                <a:ea typeface="微软雅黑" charset="-122"/>
-                <a:sym typeface="+mn-ea"/>
-              </a:rPr>
-              <a:t>当前样本不适合评价</a:t>
-            </a:r>
-            <a:r>
-              <a:rPr lang="en-US" altLang="zh-CN" sz="1400" dirty="0">
-                <a:solidFill>
-                  <a:schemeClr val="tx1"/>
-                </a:solidFill>
-                <a:latin typeface="微软雅黑" charset="-122"/>
-                <a:ea typeface="微软雅黑" charset="-122"/>
-                <a:sym typeface="+mn-ea"/>
-              </a:rPr>
-              <a:t>”</a:t>
-            </a:r>
-            <a:r>
-              <a:rPr lang="zh-CN" altLang="en-US" sz="1400" dirty="0">
-                <a:solidFill>
-                  <a:schemeClr val="tx1"/>
-                </a:solidFill>
-                <a:latin typeface="微软雅黑" charset="-122"/>
-                <a:ea typeface="微软雅黑" charset="-122"/>
-                <a:sym typeface="+mn-ea"/>
-              </a:rPr>
-              <a:t>的情况，避免将输入问题直接归为模型失效。</a:t>
-            </a:r>
-            <a:endParaRPr lang="zh-CN" altLang="en-US" sz="1400" dirty="0">
-              <a:solidFill>
-                <a:schemeClr val="tx1"/>
-              </a:solidFill>
-              <a:latin typeface="微软雅黑" charset="-122"/>
-              <a:ea typeface="微软雅黑" charset="-122"/>
-              <a:sym typeface="+mn-ea"/>
-            </a:endParaRPr>
-          </a:p>
-          <a:p>
-            <a:pPr indent="0">
-              <a:lnSpc>
-                <a:spcPct val="120000"/>
-              </a:lnSpc>
-              <a:buFont typeface="Arial" panose="020B0604020202020204" pitchFamily="34" charset="0"/>
-              <a:buNone/>
-            </a:pPr>
-            <a:r>
-              <a:rPr lang="en-US" altLang="zh-CN" sz="1400" b="1" dirty="0">
-                <a:solidFill>
-                  <a:schemeClr val="tx1"/>
-                </a:solidFill>
-                <a:latin typeface="微软雅黑" charset="-122"/>
-                <a:ea typeface="微软雅黑" charset="-122"/>
-                <a:sym typeface="+mn-ea"/>
-              </a:rPr>
-              <a:t>b. </a:t>
-            </a:r>
-            <a:r>
-              <a:rPr lang="zh-CN" altLang="en-US" sz="1400" b="1" dirty="0">
-                <a:solidFill>
-                  <a:schemeClr val="tx1"/>
-                </a:solidFill>
-                <a:latin typeface="微软雅黑" charset="-122"/>
-                <a:ea typeface="微软雅黑" charset="-122"/>
-                <a:sym typeface="+mn-ea"/>
-              </a:rPr>
-              <a:t>检查预测输出是否具有异常特征。</a:t>
-            </a:r>
-            <a:r>
-              <a:rPr lang="zh-CN" altLang="en-US" sz="1400" dirty="0">
-                <a:solidFill>
-                  <a:schemeClr val="tx1"/>
-                </a:solidFill>
-                <a:latin typeface="微软雅黑" charset="-122"/>
-                <a:ea typeface="微软雅黑" charset="-122"/>
-                <a:sym typeface="+mn-ea"/>
-              </a:rPr>
-              <a:t>模型产生预测后，</a:t>
-            </a:r>
-            <a:r>
-              <a:rPr lang="en-US" altLang="zh-CN" sz="1400" dirty="0">
-                <a:solidFill>
-                  <a:schemeClr val="tx1"/>
-                </a:solidFill>
-                <a:latin typeface="微软雅黑" charset="-122"/>
-                <a:ea typeface="微软雅黑" charset="-122"/>
-                <a:sym typeface="+mn-ea"/>
-              </a:rPr>
-              <a:t>KPI-2 </a:t>
-            </a:r>
-            <a:r>
-              <a:rPr lang="zh-CN" altLang="en-US" sz="1400" dirty="0">
-                <a:solidFill>
-                  <a:schemeClr val="tx1"/>
-                </a:solidFill>
-                <a:latin typeface="微软雅黑" charset="-122"/>
-                <a:ea typeface="微软雅黑" charset="-122"/>
-                <a:sym typeface="+mn-ea"/>
-              </a:rPr>
-              <a:t>检查输出分布是否符合正常特征，原文列举单类支持向量机等异常检测工具。输出异常时，可以暂不进入准确性评价。这一步提供异常筛查，后续仍需要实测结果确认预测表现。</a:t>
-            </a:r>
-            <a:endParaRPr lang="zh-CN" altLang="en-US" sz="1400" dirty="0">
-              <a:solidFill>
-                <a:schemeClr val="tx1"/>
-              </a:solidFill>
-              <a:latin typeface="微软雅黑" charset="-122"/>
-              <a:ea typeface="微软雅黑" charset="-122"/>
-              <a:sym typeface="+mn-ea"/>
-            </a:endParaRPr>
-          </a:p>
-          <a:p>
-            <a:pPr indent="0">
-              <a:lnSpc>
-                <a:spcPct val="120000"/>
-              </a:lnSpc>
-              <a:buFont typeface="Arial" panose="020B0604020202020204" pitchFamily="34" charset="0"/>
-              <a:buNone/>
-            </a:pPr>
-            <a:r>
-              <a:rPr lang="en-US" altLang="zh-CN" sz="1400" b="1" dirty="0">
-                <a:solidFill>
-                  <a:schemeClr val="tx1"/>
-                </a:solidFill>
-                <a:latin typeface="微软雅黑" charset="-122"/>
-                <a:ea typeface="微软雅黑" charset="-122"/>
-                <a:sym typeface="+mn-ea"/>
-              </a:rPr>
-              <a:t>c. </a:t>
-            </a:r>
-            <a:r>
-              <a:rPr lang="zh-CN" altLang="en-US" sz="1400" b="1" dirty="0">
-                <a:solidFill>
-                  <a:schemeClr val="tx1"/>
-                </a:solidFill>
-                <a:latin typeface="微软雅黑" charset="-122"/>
-                <a:ea typeface="微软雅黑" charset="-122"/>
-                <a:sym typeface="+mn-ea"/>
-              </a:rPr>
-              <a:t>取得对应实测结果，形成模型有效性评价。</a:t>
-            </a:r>
-            <a:r>
-              <a:rPr lang="en-US" altLang="zh-CN" sz="1400" dirty="0">
-                <a:solidFill>
-                  <a:schemeClr val="tx1"/>
-                </a:solidFill>
-                <a:latin typeface="微软雅黑" charset="-122"/>
-                <a:ea typeface="微软雅黑" charset="-122"/>
-                <a:sym typeface="+mn-ea"/>
-              </a:rPr>
-              <a:t>UE </a:t>
-            </a:r>
-            <a:r>
-              <a:rPr lang="zh-CN" altLang="en-US" sz="1400" dirty="0">
-                <a:solidFill>
-                  <a:schemeClr val="tx1"/>
-                </a:solidFill>
-                <a:latin typeface="微软雅黑" charset="-122"/>
-                <a:ea typeface="微软雅黑" charset="-122"/>
-                <a:sym typeface="+mn-ea"/>
-              </a:rPr>
-              <a:t>上报预测</a:t>
-            </a:r>
-            <a:r>
-              <a:rPr lang="en-US" altLang="zh-CN" sz="1400" dirty="0">
-                <a:solidFill>
-                  <a:schemeClr val="tx1"/>
-                </a:solidFill>
-                <a:latin typeface="微软雅黑" charset="-122"/>
-                <a:ea typeface="微软雅黑" charset="-122"/>
-                <a:sym typeface="+mn-ea"/>
-              </a:rPr>
-              <a:t> Top-K </a:t>
-            </a:r>
-            <a:r>
-              <a:rPr lang="zh-CN" altLang="en-US" sz="1400" dirty="0">
-                <a:solidFill>
-                  <a:schemeClr val="tx1"/>
-                </a:solidFill>
-                <a:latin typeface="微软雅黑" charset="-122"/>
-                <a:ea typeface="微软雅黑" charset="-122"/>
-                <a:sym typeface="+mn-ea"/>
-              </a:rPr>
-              <a:t>波束对，基站发送相应信号，</a:t>
-            </a:r>
-            <a:r>
-              <a:rPr lang="en-US" altLang="zh-CN" sz="1400" dirty="0">
-                <a:solidFill>
-                  <a:schemeClr val="tx1"/>
-                </a:solidFill>
-                <a:latin typeface="微软雅黑" charset="-122"/>
-                <a:ea typeface="微软雅黑" charset="-122"/>
-                <a:sym typeface="+mn-ea"/>
-              </a:rPr>
-              <a:t>UE </a:t>
-            </a:r>
-            <a:r>
-              <a:rPr lang="zh-CN" altLang="en-US" sz="1400" dirty="0">
-                <a:solidFill>
-                  <a:schemeClr val="tx1"/>
-                </a:solidFill>
-                <a:latin typeface="微软雅黑" charset="-122"/>
-                <a:ea typeface="微软雅黑" charset="-122"/>
-                <a:sym typeface="+mn-ea"/>
-              </a:rPr>
-              <a:t>再进行测量。验证模块比较同一波束对的预测</a:t>
-            </a:r>
-            <a:r>
-              <a:rPr lang="en-US" altLang="zh-CN" sz="1400" dirty="0">
-                <a:solidFill>
-                  <a:schemeClr val="tx1"/>
-                </a:solidFill>
-                <a:latin typeface="微软雅黑" charset="-122"/>
-                <a:ea typeface="微软雅黑" charset="-122"/>
-                <a:sym typeface="+mn-ea"/>
-              </a:rPr>
-              <a:t> RSRP </a:t>
-            </a:r>
-            <a:r>
-              <a:rPr lang="zh-CN" altLang="en-US" sz="1400" dirty="0">
-                <a:solidFill>
-                  <a:schemeClr val="tx1"/>
-                </a:solidFill>
-                <a:latin typeface="微软雅黑" charset="-122"/>
-                <a:ea typeface="微软雅黑" charset="-122"/>
-                <a:sym typeface="+mn-ea"/>
-              </a:rPr>
-              <a:t>与实测</a:t>
-            </a:r>
-            <a:r>
-              <a:rPr lang="en-US" altLang="zh-CN" sz="1400" dirty="0">
-                <a:solidFill>
-                  <a:schemeClr val="tx1"/>
-                </a:solidFill>
-                <a:latin typeface="微软雅黑" charset="-122"/>
-                <a:ea typeface="微软雅黑" charset="-122"/>
-                <a:sym typeface="+mn-ea"/>
-              </a:rPr>
-              <a:t> RSRP</a:t>
-            </a:r>
-            <a:r>
-              <a:rPr lang="zh-CN" altLang="en-US" sz="1400" dirty="0">
-                <a:solidFill>
-                  <a:schemeClr val="tx1"/>
-                </a:solidFill>
-                <a:latin typeface="微软雅黑" charset="-122"/>
-                <a:ea typeface="微软雅黑" charset="-122"/>
-                <a:sym typeface="+mn-ea"/>
-              </a:rPr>
-              <a:t>，并对有效性指标进行平滑，形成</a:t>
-            </a:r>
-            <a:r>
-              <a:rPr lang="en-US" altLang="zh-CN" sz="1400" dirty="0">
-                <a:solidFill>
-                  <a:schemeClr val="tx1"/>
-                </a:solidFill>
-                <a:latin typeface="微软雅黑" charset="-122"/>
-                <a:ea typeface="微软雅黑" charset="-122"/>
-                <a:sym typeface="+mn-ea"/>
-              </a:rPr>
-              <a:t> KPI-1</a:t>
-            </a:r>
-            <a:r>
-              <a:rPr lang="zh-CN" altLang="en-US" sz="1400" dirty="0">
-                <a:solidFill>
-                  <a:schemeClr val="tx1"/>
-                </a:solidFill>
-                <a:latin typeface="微软雅黑" charset="-122"/>
-                <a:ea typeface="微软雅黑" charset="-122"/>
-                <a:sym typeface="+mn-ea"/>
-              </a:rPr>
-              <a:t>，使评价建立在可对应的预测和观测上。</a:t>
-            </a:r>
-            <a:endParaRPr lang="zh-CN" altLang="en-US" sz="1400" dirty="0">
-              <a:solidFill>
-                <a:schemeClr val="tx1"/>
-              </a:solidFill>
-              <a:latin typeface="微软雅黑" charset="-122"/>
-              <a:ea typeface="微软雅黑" charset="-122"/>
-              <a:sym typeface="+mn-ea"/>
-            </a:endParaRPr>
-          </a:p>
-          <a:p>
-            <a:pPr indent="0">
-              <a:lnSpc>
-                <a:spcPct val="120000"/>
-              </a:lnSpc>
-              <a:buFont typeface="Arial" panose="020B0604020202020204" pitchFamily="34" charset="0"/>
-              <a:buNone/>
-            </a:pPr>
-            <a:r>
-              <a:rPr lang="en-US" altLang="zh-CN" sz="1400" b="1" dirty="0">
-                <a:solidFill>
-                  <a:schemeClr val="tx1"/>
-                </a:solidFill>
-                <a:latin typeface="微软雅黑" charset="-122"/>
-                <a:ea typeface="微软雅黑" charset="-122"/>
-                <a:sym typeface="+mn-ea"/>
-              </a:rPr>
-              <a:t>d. </a:t>
-            </a:r>
-            <a:r>
-              <a:rPr lang="zh-CN" altLang="en-US" sz="1400" b="1" dirty="0">
-                <a:solidFill>
-                  <a:schemeClr val="tx1"/>
-                </a:solidFill>
-                <a:latin typeface="微软雅黑" charset="-122"/>
-                <a:ea typeface="微软雅黑" charset="-122"/>
-                <a:sym typeface="+mn-ea"/>
-              </a:rPr>
-              <a:t>管理状态，并将验证结果反馈给服务器。</a:t>
-            </a:r>
-            <a:r>
-              <a:rPr lang="zh-CN" altLang="en-US" sz="1400" dirty="0">
-                <a:solidFill>
-                  <a:schemeClr val="tx1"/>
-                </a:solidFill>
-                <a:latin typeface="微软雅黑" charset="-122"/>
-                <a:ea typeface="微软雅黑" charset="-122"/>
-                <a:sym typeface="+mn-ea"/>
-              </a:rPr>
-              <a:t>未启用模型可以接受评估，模型失效时，</a:t>
-            </a:r>
-            <a:r>
-              <a:rPr lang="en-US" altLang="zh-CN" sz="1400" dirty="0">
-                <a:solidFill>
-                  <a:schemeClr val="tx1"/>
-                </a:solidFill>
-                <a:latin typeface="微软雅黑" charset="-122"/>
-                <a:ea typeface="微软雅黑" charset="-122"/>
-                <a:sym typeface="+mn-ea"/>
-              </a:rPr>
-              <a:t>UE </a:t>
-            </a:r>
-            <a:r>
-              <a:rPr lang="zh-CN" altLang="en-US" sz="1400" dirty="0">
-                <a:solidFill>
-                  <a:schemeClr val="tx1"/>
-                </a:solidFill>
-                <a:latin typeface="微软雅黑" charset="-122"/>
-                <a:ea typeface="微软雅黑" charset="-122"/>
-                <a:sym typeface="+mn-ea"/>
-              </a:rPr>
-              <a:t>可退回依据实测</a:t>
-            </a:r>
-            <a:r>
-              <a:rPr lang="en-US" altLang="zh-CN" sz="1400" dirty="0">
-                <a:solidFill>
-                  <a:schemeClr val="tx1"/>
-                </a:solidFill>
-                <a:latin typeface="微软雅黑" charset="-122"/>
-                <a:ea typeface="微软雅黑" charset="-122"/>
-                <a:sym typeface="+mn-ea"/>
-              </a:rPr>
-              <a:t> RSRP </a:t>
-            </a:r>
-            <a:r>
-              <a:rPr lang="zh-CN" altLang="en-US" sz="1400" dirty="0">
-                <a:solidFill>
-                  <a:schemeClr val="tx1"/>
-                </a:solidFill>
-                <a:latin typeface="微软雅黑" charset="-122"/>
-                <a:ea typeface="微软雅黑" charset="-122"/>
-                <a:sym typeface="+mn-ea"/>
-              </a:rPr>
-              <a:t>选择波束。性能评分和模型标识上报服务器，为更新或重新训练提供依据。测试记录需要关联模型版本、运行条件和状态变化，才能追溯一次评分对应的实际配置。</a:t>
-            </a:r>
-            <a:endParaRPr lang="zh-CN" altLang="en-US" sz="1400" dirty="0">
-              <a:solidFill>
-                <a:schemeClr val="tx1"/>
-              </a:solidFill>
-              <a:latin typeface="微软雅黑" charset="-122"/>
-              <a:ea typeface="微软雅黑" charset="-122"/>
-              <a:sym typeface="+mn-ea"/>
-            </a:endParaRPr>
-          </a:p>
-          <a:p>
-            <a:pPr indent="0">
-              <a:lnSpc>
-                <a:spcPct val="120000"/>
-              </a:lnSpc>
-              <a:buFont typeface="Arial" panose="020B0604020202020204" pitchFamily="34" charset="0"/>
-              <a:buNone/>
-            </a:pPr>
-            <a:r>
-              <a:rPr lang="zh-CN" altLang="en-US" sz="1400" b="1" dirty="0">
-                <a:solidFill>
-                  <a:schemeClr val="tx1"/>
-                </a:solidFill>
-                <a:latin typeface="微软雅黑" charset="-122"/>
-                <a:ea typeface="微软雅黑" charset="-122"/>
-                <a:sym typeface="+mn-ea"/>
-              </a:rPr>
-              <a:t>研究成熟度与启示：</a:t>
-            </a:r>
-            <a:endParaRPr lang="zh-CN" altLang="en-US" sz="1400" b="1" dirty="0">
-              <a:solidFill>
-                <a:schemeClr val="tx1"/>
-              </a:solidFill>
-              <a:latin typeface="微软雅黑" charset="-122"/>
-              <a:ea typeface="微软雅黑" charset="-122"/>
-              <a:sym typeface="+mn-ea"/>
-            </a:endParaRPr>
-          </a:p>
-          <a:p>
-            <a:pPr indent="0">
-              <a:lnSpc>
-                <a:spcPct val="120000"/>
-              </a:lnSpc>
-              <a:buFont typeface="Arial" panose="020B0604020202020204" pitchFamily="34" charset="0"/>
-              <a:buNone/>
-            </a:pPr>
-            <a:r>
-              <a:rPr lang="zh-CN" altLang="en-US" sz="1400" dirty="0">
-                <a:solidFill>
-                  <a:schemeClr val="tx1"/>
-                </a:solidFill>
-                <a:latin typeface="微软雅黑" charset="-122"/>
-                <a:ea typeface="微软雅黑" charset="-122"/>
-                <a:sym typeface="+mn-ea"/>
-              </a:rPr>
-              <a:t>公开文本给出流程和可选评价工具，未提供可复现代码及定量实验。</a:t>
-            </a:r>
-            <a:r>
-              <a:rPr lang="zh-CN" altLang="en-US" sz="1400" b="1" dirty="0">
-                <a:solidFill>
-                  <a:schemeClr val="tx1"/>
-                </a:solidFill>
-                <a:latin typeface="微软雅黑" charset="-122"/>
-                <a:ea typeface="微软雅黑" charset="-122"/>
-                <a:sym typeface="+mn-ea"/>
-              </a:rPr>
-              <a:t>终端测试应分别记录输入适用性、输出异常和预测误差，并检查失效后的回退结果。</a:t>
-            </a:r>
-            <a:r>
-              <a:rPr lang="zh-CN" altLang="en-US" sz="1400" dirty="0">
-                <a:solidFill>
-                  <a:schemeClr val="tx1"/>
-                </a:solidFill>
-                <a:latin typeface="微软雅黑" charset="-122"/>
-                <a:ea typeface="微软雅黑" charset="-122"/>
-                <a:sym typeface="+mn-ea"/>
-              </a:rPr>
-              <a:t>监控周期、判定门限和补充测量范围需要结合实验目标设计。持续验证也会增加测量开销，应同时观察其对通信过程的影响。</a:t>
-            </a:r>
-            <a:endParaRPr lang="zh-CN" altLang="en-US" sz="1400" dirty="0">
               <a:solidFill>
                 <a:schemeClr val="tx1"/>
               </a:solidFill>
@@ -14645,8 +16613,8 @@
         </p:nvSpPr>
         <p:spPr>
           <a:xfrm>
-            <a:off x="6874657" y="324566"/>
-            <a:ext cx="3967782" cy="641803"/>
+            <a:off x="6696846" y="324566"/>
+            <a:ext cx="4145593" cy="641803"/>
           </a:xfrm>
           <a:prstGeom prst="rect">
             <a:avLst/>
@@ -14663,7 +16631,7 @@
                 <a:ea typeface="Times New Roman" panose="02020603050405020304" charset="0"/>
                 <a:cs typeface="Times New Roman" panose="02020603050405020304" charset="0"/>
               </a:rPr>
-              <a:t>[4] APPLE INC. Dynamic model management and post-deployment verification for beam management spatial prediction: US20260039366A1[P]. 2026-02-05.</a:t>
+              <a:t>[3] APPLE INC. Systems and methods for predictive measurements for artificial intelligence/machine learning based mobility enhancement: WO2025043703A1[P]. 2025-03-06.</a:t>
             </a:r>
             <a:endParaRPr lang="en-US" altLang="zh-CN" sz="1200">
               <a:latin typeface="Times New Roman" panose="02020603050405020304" charset="0"/>
@@ -14686,801 +16654,21 @@
   <p:cSld>
     <p:spTree>
       <p:nvGrpSpPr>
-        <p:cNvPr id="87" name=""/>
+        <p:cNvPr id="1" name=""/>
         <p:cNvGrpSpPr/>
         <p:nvPr/>
       </p:nvGrpSpPr>
-      <p:grpSpPr>
-        <a:xfrm>
-          <a:off x="0" y="0"/>
-          <a:ext cx="0" cy="0"/>
-          <a:chOff x="0" y="0"/>
-          <a:chExt cx="0" cy="0"/>
-        </a:xfrm>
-      </p:grpSpPr>
+      <p:grpSpPr/>
       <p:sp>
         <p:nvSpPr>
-          <p:cNvPr id="88" name="标题 1"/>
-          <p:cNvSpPr/>
-          <p:nvPr>
-            <p:ph type="title"/>
-          </p:nvPr>
-        </p:nvSpPr>
-        <p:spPr>
-          <a:xfrm>
-            <a:off x="565150" y="339090"/>
-            <a:ext cx="5507725" cy="612775"/>
-          </a:xfrm>
-        </p:spPr>
-        <p:txBody>
-          <a:bodyPr>
-            <a:noAutofit/>
-          </a:bodyPr>
-          <a:lstStyle/>
-          <a:p>
-            <a:r>
-              <a:rPr lang="zh-CN" altLang="en-US" sz="2800" b="1" dirty="0">
-                <a:latin typeface="微软雅黑" charset="-122"/>
-                <a:ea typeface="微软雅黑" charset="-122"/>
-                <a:sym typeface="+mn-ea"/>
-              </a:rPr>
-              <a:t>方向二：通信</a:t>
-            </a:r>
-            <a:r>
-              <a:rPr lang="en-US" altLang="zh-CN" sz="2800" b="1" dirty="0">
-                <a:latin typeface="微软雅黑" charset="-122"/>
-                <a:ea typeface="微软雅黑" charset="-122"/>
-                <a:sym typeface="+mn-ea"/>
-              </a:rPr>
-              <a:t> AI </a:t>
-            </a:r>
-            <a:r>
-              <a:rPr lang="zh-CN" altLang="en-US" sz="2800" b="1" dirty="0">
-                <a:latin typeface="微软雅黑" charset="-122"/>
-                <a:ea typeface="微软雅黑" charset="-122"/>
-                <a:sym typeface="+mn-ea"/>
-              </a:rPr>
-              <a:t>算法的测试验收</a:t>
-            </a:r>
-            <a:endParaRPr lang="zh-CN" altLang="en-US" sz="2800" b="1" dirty="0">
-              <a:latin typeface="微软雅黑" charset="-122"/>
-              <a:ea typeface="微软雅黑" charset="-122"/>
-              <a:sym typeface="+mn-ea"/>
-            </a:endParaRPr>
-          </a:p>
-        </p:txBody>
-      </p:sp>
-      <p:sp>
-        <p:nvSpPr>
-          <p:cNvPr id="2" name="文本框 5"/>
-          <p:cNvSpPr txBox="1"/>
-          <p:nvPr/>
-        </p:nvSpPr>
-        <p:spPr>
-          <a:xfrm>
-            <a:off x="258445" y="1025948"/>
-            <a:ext cx="11734165" cy="5381282"/>
-          </a:xfrm>
-          <a:prstGeom prst="rect">
-            <a:avLst/>
-          </a:prstGeom>
-          <a:noFill/>
-          <a:ln>
-            <a:noFill/>
-          </a:ln>
-        </p:spPr>
-        <p:txBody>
-          <a:bodyPr wrap="square" rtlCol="0" anchor="t">
-            <a:noAutofit/>
-          </a:bodyPr>
-          <a:p>
-            <a:pPr indent="0">
-              <a:lnSpc>
-                <a:spcPct val="130000"/>
-              </a:lnSpc>
-              <a:buFont typeface="Arial" panose="020B0604020202020204" pitchFamily="34" charset="0"/>
-              <a:buNone/>
-            </a:pPr>
-            <a:r>
-              <a:rPr lang="en-US" altLang="zh-CN" b="1" dirty="0">
-                <a:solidFill>
-                  <a:schemeClr val="tx1"/>
-                </a:solidFill>
-                <a:latin typeface="微软雅黑" charset="-122"/>
-                <a:ea typeface="微软雅黑" charset="-122"/>
-                <a:sym typeface="+mn-ea"/>
-              </a:rPr>
-              <a:t>2. </a:t>
-            </a:r>
-            <a:r>
-              <a:rPr lang="zh-CN" altLang="en-US" b="1" dirty="0">
-                <a:solidFill>
-                  <a:schemeClr val="tx1"/>
-                </a:solidFill>
-                <a:latin typeface="微软雅黑" charset="-122"/>
-                <a:ea typeface="微软雅黑" charset="-122"/>
-                <a:sym typeface="+mn-ea"/>
-              </a:rPr>
-              <a:t>苹果专利：联合测试判据</a:t>
-            </a:r>
-            <a:r>
-              <a:rPr lang="zh-CN" altLang="en-US" b="1" dirty="0">
-                <a:solidFill>
-                  <a:schemeClr val="tx1"/>
-                </a:solidFill>
-                <a:latin typeface="微软雅黑" charset="0"/>
-                <a:ea typeface="微软雅黑" charset="0"/>
-                <a:sym typeface="+mn-ea"/>
-              </a:rPr>
-              <a:t>——</a:t>
-            </a:r>
-            <a:r>
-              <a:rPr lang="zh-CN" altLang="en-US" b="1" dirty="0">
-                <a:solidFill>
-                  <a:schemeClr val="tx1"/>
-                </a:solidFill>
-                <a:latin typeface="微软雅黑" charset="-122"/>
-                <a:ea typeface="微软雅黑" charset="-122"/>
-                <a:sym typeface="+mn-ea"/>
-              </a:rPr>
-              <a:t>同时检查波束身份与</a:t>
-            </a:r>
-            <a:r>
-              <a:rPr lang="en-US" altLang="zh-CN" b="1" dirty="0">
-                <a:solidFill>
-                  <a:schemeClr val="tx1"/>
-                </a:solidFill>
-                <a:latin typeface="微软雅黑" charset="-122"/>
-                <a:ea typeface="微软雅黑" charset="-122"/>
-                <a:sym typeface="+mn-ea"/>
-              </a:rPr>
-              <a:t> RSRP </a:t>
-            </a:r>
-            <a:r>
-              <a:rPr lang="zh-CN" altLang="en-US" b="1" dirty="0">
-                <a:solidFill>
-                  <a:schemeClr val="tx1"/>
-                </a:solidFill>
-                <a:latin typeface="微软雅黑" charset="-122"/>
-                <a:ea typeface="微软雅黑" charset="-122"/>
-                <a:sym typeface="+mn-ea"/>
-              </a:rPr>
-              <a:t>预测</a:t>
-            </a:r>
-            <a:r>
-              <a:rPr lang="en-US" altLang="zh-CN" b="1" baseline="30000" dirty="0">
-                <a:solidFill>
-                  <a:srgbClr val="000000"/>
-                </a:solidFill>
-                <a:latin typeface="微软雅黑" charset="-122"/>
-                <a:ea typeface="微软雅黑" charset="-122"/>
-                <a:cs typeface="+mn-ea"/>
-                <a:sym typeface="+mn-ea"/>
-              </a:rPr>
-              <a:t>[</a:t>
-            </a:r>
-            <a:r>
-              <a:rPr lang="en-US" altLang="zh-CN" b="1" baseline="30000" dirty="0">
-                <a:solidFill>
-                  <a:srgbClr val="000000"/>
-                </a:solidFill>
-                <a:latin typeface="微软雅黑" charset="0"/>
-                <a:ea typeface="微软雅黑" charset="0"/>
-                <a:cs typeface="+mn-ea"/>
-                <a:sym typeface="+mn-ea"/>
-              </a:rPr>
-              <a:t>5</a:t>
-            </a:r>
-            <a:r>
-              <a:rPr lang="en-US" altLang="zh-CN" b="1" baseline="30000" dirty="0">
-                <a:solidFill>
-                  <a:srgbClr val="000000"/>
-                </a:solidFill>
-                <a:latin typeface="微软雅黑" charset="-122"/>
-                <a:ea typeface="微软雅黑" charset="-122"/>
-                <a:cs typeface="+mn-ea"/>
-                <a:sym typeface="+mn-ea"/>
-              </a:rPr>
-              <a:t>]</a:t>
-            </a:r>
-            <a:endParaRPr lang="zh-CN" altLang="en-US" b="1" dirty="0">
-              <a:solidFill>
-                <a:schemeClr val="tx1"/>
-              </a:solidFill>
-              <a:latin typeface="微软雅黑" charset="-122"/>
-              <a:ea typeface="微软雅黑" charset="-122"/>
-              <a:sym typeface="+mn-ea"/>
-            </a:endParaRPr>
-          </a:p>
-          <a:p>
-            <a:pPr indent="0">
-              <a:lnSpc>
-                <a:spcPct val="130000"/>
-              </a:lnSpc>
-              <a:buFont typeface="Arial" panose="020B0604020202020204" pitchFamily="34" charset="0"/>
-              <a:buNone/>
-            </a:pPr>
-            <a:r>
-              <a:rPr lang="zh-CN" altLang="en-US" sz="1400" b="1" dirty="0">
-                <a:solidFill>
-                  <a:schemeClr val="tx1"/>
-                </a:solidFill>
-                <a:latin typeface="微软雅黑" charset="-122"/>
-                <a:ea typeface="微软雅黑" charset="-122"/>
-                <a:sym typeface="+mn-ea"/>
-              </a:rPr>
-              <a:t>技术概述：</a:t>
-            </a:r>
-            <a:endParaRPr lang="zh-CN" altLang="en-US" sz="1400" b="1" dirty="0">
-              <a:solidFill>
-                <a:schemeClr val="tx1"/>
-              </a:solidFill>
-              <a:latin typeface="微软雅黑" charset="-122"/>
-              <a:ea typeface="微软雅黑" charset="-122"/>
-              <a:sym typeface="+mn-ea"/>
-            </a:endParaRPr>
-          </a:p>
-          <a:p>
-            <a:pPr indent="0">
-              <a:lnSpc>
-                <a:spcPct val="130000"/>
-              </a:lnSpc>
-              <a:buFont typeface="Arial" panose="020B0604020202020204" pitchFamily="34" charset="0"/>
-              <a:buNone/>
-            </a:pPr>
-            <a:r>
-              <a:rPr lang="zh-CN" altLang="en-US" sz="1400" dirty="0">
-                <a:solidFill>
-                  <a:schemeClr val="tx1"/>
-                </a:solidFill>
-                <a:latin typeface="微软雅黑" charset="-122"/>
-                <a:ea typeface="微软雅黑" charset="-122"/>
-                <a:sym typeface="+mn-ea"/>
-              </a:rPr>
-              <a:t>波束预测可能同时提供候选波束身份和对应</a:t>
-            </a:r>
-            <a:r>
-              <a:rPr lang="en-US" altLang="zh-CN" sz="1400" dirty="0">
-                <a:solidFill>
-                  <a:schemeClr val="tx1"/>
-                </a:solidFill>
-                <a:latin typeface="微软雅黑" charset="-122"/>
-                <a:ea typeface="微软雅黑" charset="-122"/>
-                <a:sym typeface="+mn-ea"/>
-              </a:rPr>
-              <a:t> RSRP</a:t>
-            </a:r>
-            <a:r>
-              <a:rPr lang="zh-CN" altLang="en-US" sz="1400" dirty="0">
-                <a:solidFill>
-                  <a:schemeClr val="tx1"/>
-                </a:solidFill>
-                <a:latin typeface="微软雅黑" charset="-122"/>
-                <a:ea typeface="微软雅黑" charset="-122"/>
-                <a:sym typeface="+mn-ea"/>
-              </a:rPr>
-              <a:t>，但这两个结果反映不同能力。模型选中了正确波束，仍可能明显高估或低估它的功率；功率数值接近参考，也需要确认对应波束是否正确。如果只使用单项指标，测试结论可能遗漏另一类误差。苹果提出将波束身份与</a:t>
-            </a:r>
-            <a:r>
-              <a:rPr lang="en-US" altLang="zh-CN" sz="1400" dirty="0">
-                <a:solidFill>
-                  <a:schemeClr val="tx1"/>
-                </a:solidFill>
-                <a:latin typeface="微软雅黑" charset="-122"/>
-                <a:ea typeface="微软雅黑" charset="-122"/>
-                <a:sym typeface="+mn-ea"/>
-              </a:rPr>
-              <a:t> RSRP </a:t>
-            </a:r>
-            <a:r>
-              <a:rPr lang="zh-CN" altLang="en-US" sz="1400" dirty="0">
-                <a:solidFill>
-                  <a:schemeClr val="tx1"/>
-                </a:solidFill>
-                <a:latin typeface="微软雅黑" charset="-122"/>
-                <a:ea typeface="微软雅黑" charset="-122"/>
-                <a:sym typeface="+mn-ea"/>
-              </a:rPr>
-              <a:t>放在两个维度上，设置可配置的容差范围，形成</a:t>
-            </a:r>
-            <a:r>
-              <a:rPr lang="zh-CN" altLang="en-US" sz="1400" b="1" dirty="0">
-                <a:solidFill>
-                  <a:schemeClr val="tx1"/>
-                </a:solidFill>
-                <a:latin typeface="微软雅黑" charset="-122"/>
-                <a:ea typeface="微软雅黑" charset="-122"/>
-                <a:sym typeface="+mn-ea"/>
-              </a:rPr>
-              <a:t>二维容差框</a:t>
-            </a:r>
-            <a:r>
-              <a:rPr lang="zh-CN" altLang="en-US" sz="1400" dirty="0">
-                <a:solidFill>
-                  <a:schemeClr val="tx1"/>
-                </a:solidFill>
-                <a:latin typeface="微软雅黑" charset="-122"/>
-                <a:ea typeface="微软雅黑" charset="-122"/>
-                <a:sym typeface="+mn-ea"/>
-              </a:rPr>
-              <a:t>。测试时将预测与参考配对，检查两者是否满足联合要求，并允许针对不同候选设置不同条件。</a:t>
-            </a:r>
-            <a:endParaRPr lang="zh-CN" altLang="en-US" sz="1400" dirty="0">
-              <a:solidFill>
-                <a:schemeClr val="tx1"/>
-              </a:solidFill>
-              <a:latin typeface="微软雅黑" charset="-122"/>
-              <a:ea typeface="微软雅黑" charset="-122"/>
-              <a:sym typeface="+mn-ea"/>
-            </a:endParaRPr>
-          </a:p>
-          <a:p>
-            <a:pPr indent="0">
-              <a:lnSpc>
-                <a:spcPct val="130000"/>
-              </a:lnSpc>
-              <a:buFont typeface="Arial" panose="020B0604020202020204" pitchFamily="34" charset="0"/>
-              <a:buNone/>
-            </a:pPr>
-            <a:r>
-              <a:rPr lang="zh-CN" altLang="en-US" sz="1400" dirty="0">
-                <a:solidFill>
-                  <a:schemeClr val="tx1"/>
-                </a:solidFill>
-                <a:latin typeface="微软雅黑" charset="-122"/>
-                <a:ea typeface="微软雅黑" charset="-122"/>
-                <a:sym typeface="+mn-ea"/>
-              </a:rPr>
-              <a:t>输入包括部分波束的测量与身份、模型预测结果、参考测量及容差参数。</a:t>
-            </a:r>
-            <a:r>
-              <a:rPr lang="zh-CN" altLang="en-US" sz="1400" b="1" dirty="0">
-                <a:solidFill>
-                  <a:schemeClr val="tx1"/>
-                </a:solidFill>
-                <a:latin typeface="微软雅黑" charset="-122"/>
-                <a:ea typeface="微软雅黑" charset="-122"/>
-                <a:sym typeface="+mn-ea"/>
-              </a:rPr>
-              <a:t>模型输出候选波束身份和预测</a:t>
-            </a:r>
-            <a:r>
-              <a:rPr lang="en-US" altLang="zh-CN" sz="1400" b="1" dirty="0">
-                <a:solidFill>
-                  <a:schemeClr val="tx1"/>
-                </a:solidFill>
-                <a:latin typeface="微软雅黑" charset="-122"/>
-                <a:ea typeface="微软雅黑" charset="-122"/>
-                <a:sym typeface="+mn-ea"/>
-              </a:rPr>
-              <a:t> RSRP</a:t>
-            </a:r>
-            <a:r>
-              <a:rPr lang="zh-CN" altLang="en-US" sz="1400" b="1" dirty="0">
-                <a:solidFill>
-                  <a:schemeClr val="tx1"/>
-                </a:solidFill>
-                <a:latin typeface="微软雅黑" charset="-122"/>
-                <a:ea typeface="微软雅黑" charset="-122"/>
-                <a:sym typeface="+mn-ea"/>
-              </a:rPr>
-              <a:t>，测试模块输出匹配及通过结果。联合结论用于判定，两项误差仍应分别保存，以便解释失败原因。</a:t>
-            </a:r>
-            <a:endParaRPr lang="zh-CN" altLang="en-US" sz="1400" b="1" dirty="0">
-              <a:solidFill>
-                <a:schemeClr val="tx1"/>
-              </a:solidFill>
-              <a:latin typeface="微软雅黑" charset="-122"/>
-              <a:ea typeface="微软雅黑" charset="-122"/>
-              <a:sym typeface="+mn-ea"/>
-            </a:endParaRPr>
-          </a:p>
-          <a:p>
-            <a:pPr indent="0">
-              <a:lnSpc>
-                <a:spcPct val="130000"/>
-              </a:lnSpc>
-              <a:buFont typeface="Arial" panose="020B0604020202020204" pitchFamily="34" charset="0"/>
-              <a:buNone/>
-            </a:pPr>
-            <a:r>
-              <a:rPr lang="zh-CN" altLang="en-US" sz="1400" b="1" dirty="0">
-                <a:solidFill>
-                  <a:schemeClr val="tx1"/>
-                </a:solidFill>
-                <a:latin typeface="微软雅黑" charset="-122"/>
-                <a:ea typeface="微软雅黑" charset="-122"/>
-                <a:sym typeface="+mn-ea"/>
-              </a:rPr>
-              <a:t>研究方法：</a:t>
-            </a:r>
-            <a:endParaRPr lang="zh-CN" altLang="en-US" sz="1400" b="1" dirty="0">
-              <a:solidFill>
-                <a:schemeClr val="tx1"/>
-              </a:solidFill>
-              <a:latin typeface="微软雅黑" charset="-122"/>
-              <a:ea typeface="微软雅黑" charset="-122"/>
-              <a:sym typeface="+mn-ea"/>
-            </a:endParaRPr>
-          </a:p>
-          <a:p>
-            <a:pPr indent="0">
-              <a:lnSpc>
-                <a:spcPct val="130000"/>
-              </a:lnSpc>
-              <a:buFont typeface="Arial" panose="020B0604020202020204" pitchFamily="34" charset="0"/>
-              <a:buNone/>
-            </a:pPr>
-            <a:r>
-              <a:rPr lang="en-US" sz="1400" b="1" dirty="0">
-                <a:solidFill>
-                  <a:schemeClr val="tx1"/>
-                </a:solidFill>
-                <a:latin typeface="微软雅黑" charset="-122"/>
-                <a:ea typeface="微软雅黑" charset="-122"/>
-                <a:sym typeface="+mn-ea"/>
-              </a:rPr>
-              <a:t>a. </a:t>
-            </a:r>
-            <a:r>
-              <a:rPr lang="zh-CN" altLang="en-US" sz="1400" b="1" dirty="0">
-                <a:solidFill>
-                  <a:schemeClr val="tx1"/>
-                </a:solidFill>
-                <a:latin typeface="微软雅黑" charset="-122"/>
-                <a:ea typeface="微软雅黑" charset="-122"/>
-                <a:sym typeface="+mn-ea"/>
-              </a:rPr>
-              <a:t>建立包含波束身份和功率的测量参考。</a:t>
-            </a:r>
-            <a:r>
-              <a:rPr lang="zh-CN" altLang="en-US" sz="1400" dirty="0">
-                <a:solidFill>
-                  <a:schemeClr val="tx1"/>
-                </a:solidFill>
-                <a:latin typeface="微软雅黑" charset="-122"/>
-                <a:ea typeface="微软雅黑" charset="-122"/>
-                <a:sym typeface="+mn-ea"/>
-              </a:rPr>
-              <a:t>通过参考测量识别较强波束，保存其身份及</a:t>
-            </a:r>
-            <a:r>
-              <a:rPr lang="en-US" altLang="zh-CN" sz="1400" dirty="0">
-                <a:solidFill>
-                  <a:schemeClr val="tx1"/>
-                </a:solidFill>
-                <a:latin typeface="微软雅黑" charset="-122"/>
-                <a:ea typeface="微软雅黑" charset="-122"/>
-                <a:sym typeface="+mn-ea"/>
-              </a:rPr>
-              <a:t> RSRP</a:t>
-            </a:r>
-            <a:r>
-              <a:rPr lang="zh-CN" altLang="en-US" sz="1400" dirty="0">
-                <a:solidFill>
-                  <a:schemeClr val="tx1"/>
-                </a:solidFill>
-                <a:latin typeface="微软雅黑" charset="-122"/>
-                <a:ea typeface="微软雅黑" charset="-122"/>
-                <a:sym typeface="+mn-ea"/>
-              </a:rPr>
-              <a:t>，再从模型输出中选取较强候选进行比较。测试需要明确参考范围、接收配置和数据对应关系，使身份评价与功率评价使用一致的依据。</a:t>
-            </a:r>
-            <a:endParaRPr lang="zh-CN" altLang="en-US" sz="1400" dirty="0">
-              <a:solidFill>
-                <a:schemeClr val="tx1"/>
-              </a:solidFill>
-              <a:latin typeface="微软雅黑" charset="-122"/>
-              <a:ea typeface="微软雅黑" charset="-122"/>
-              <a:sym typeface="+mn-ea"/>
-            </a:endParaRPr>
-          </a:p>
-          <a:p>
-            <a:pPr indent="0">
-              <a:lnSpc>
-                <a:spcPct val="130000"/>
-              </a:lnSpc>
-              <a:buFont typeface="Arial" panose="020B0604020202020204" pitchFamily="34" charset="0"/>
-              <a:buNone/>
-            </a:pPr>
-            <a:r>
-              <a:rPr lang="en-US" altLang="zh-CN" sz="1400" b="1" dirty="0">
-                <a:solidFill>
-                  <a:schemeClr val="tx1"/>
-                </a:solidFill>
-                <a:latin typeface="微软雅黑" charset="-122"/>
-                <a:ea typeface="微软雅黑" charset="-122"/>
-                <a:sym typeface="+mn-ea"/>
-              </a:rPr>
-              <a:t>b. </a:t>
-            </a:r>
-            <a:r>
-              <a:rPr lang="zh-CN" altLang="en-US" sz="1400" b="1" dirty="0">
-                <a:solidFill>
-                  <a:schemeClr val="tx1"/>
-                </a:solidFill>
-                <a:latin typeface="微软雅黑" charset="-122"/>
-                <a:ea typeface="微软雅黑" charset="-122"/>
-                <a:sym typeface="+mn-ea"/>
-              </a:rPr>
-              <a:t>设置两个维度的容差，联合检查预测与参考。</a:t>
-            </a:r>
-            <a:r>
-              <a:rPr lang="zh-CN" altLang="en-US" sz="1400" dirty="0">
-                <a:solidFill>
-                  <a:schemeClr val="tx1"/>
-                </a:solidFill>
-                <a:latin typeface="微软雅黑" charset="-122"/>
-                <a:ea typeface="微软雅黑" charset="-122"/>
-                <a:sym typeface="+mn-ea"/>
-              </a:rPr>
-              <a:t>分别规定允许的</a:t>
-            </a:r>
-            <a:r>
-              <a:rPr lang="en-US" altLang="zh-CN" sz="1400" dirty="0">
-                <a:solidFill>
-                  <a:schemeClr val="tx1"/>
-                </a:solidFill>
-                <a:latin typeface="微软雅黑" charset="-122"/>
-                <a:ea typeface="微软雅黑" charset="-122"/>
-                <a:sym typeface="+mn-ea"/>
-              </a:rPr>
-              <a:t> RSRP </a:t>
-            </a:r>
-            <a:r>
-              <a:rPr lang="zh-CN" altLang="en-US" sz="1400" dirty="0">
-                <a:solidFill>
-                  <a:schemeClr val="tx1"/>
-                </a:solidFill>
-                <a:latin typeface="微软雅黑" charset="-122"/>
-                <a:ea typeface="微软雅黑" charset="-122"/>
-                <a:sym typeface="+mn-ea"/>
-              </a:rPr>
-              <a:t>偏差和波束身份偏差，形成容差框。配对后的预测和参考落入同一框时，可以按相应规则通过。这样，测试能够同时约束身份与功率，减少单项指标带来的遗漏。</a:t>
-            </a:r>
-            <a:endParaRPr lang="zh-CN" altLang="en-US" sz="1400" dirty="0">
-              <a:solidFill>
-                <a:schemeClr val="tx1"/>
-              </a:solidFill>
-              <a:latin typeface="微软雅黑" charset="-122"/>
-              <a:ea typeface="微软雅黑" charset="-122"/>
-              <a:sym typeface="+mn-ea"/>
-            </a:endParaRPr>
-          </a:p>
-          <a:p>
-            <a:pPr indent="0">
-              <a:lnSpc>
-                <a:spcPct val="130000"/>
-              </a:lnSpc>
-              <a:buFont typeface="Arial" panose="020B0604020202020204" pitchFamily="34" charset="0"/>
-              <a:buNone/>
-            </a:pPr>
-            <a:r>
-              <a:rPr lang="en-US" altLang="zh-CN" sz="1400" b="1" dirty="0">
-                <a:solidFill>
-                  <a:schemeClr val="tx1"/>
-                </a:solidFill>
-                <a:latin typeface="微软雅黑" charset="-122"/>
-                <a:ea typeface="微软雅黑" charset="-122"/>
-                <a:sym typeface="+mn-ea"/>
-              </a:rPr>
-              <a:t>c. </a:t>
-            </a:r>
-            <a:r>
-              <a:rPr lang="zh-CN" altLang="en-US" sz="1400" b="1" dirty="0">
-                <a:solidFill>
-                  <a:schemeClr val="tx1"/>
-                </a:solidFill>
-                <a:latin typeface="微软雅黑" charset="-122"/>
-                <a:ea typeface="微软雅黑" charset="-122"/>
-                <a:sym typeface="+mn-ea"/>
-              </a:rPr>
-              <a:t>根据候选优先级配置判定条件。</a:t>
-            </a:r>
-            <a:r>
-              <a:rPr lang="zh-CN" altLang="en-US" sz="1400" dirty="0">
-                <a:solidFill>
-                  <a:schemeClr val="tx1"/>
-                </a:solidFill>
-                <a:latin typeface="微软雅黑" charset="-122"/>
-                <a:ea typeface="微软雅黑" charset="-122"/>
-                <a:sym typeface="+mn-ea"/>
-              </a:rPr>
-              <a:t>原文允许为</a:t>
-            </a:r>
-            <a:r>
-              <a:rPr lang="en-US" altLang="zh-CN" sz="1400" dirty="0">
-                <a:solidFill>
-                  <a:schemeClr val="tx1"/>
-                </a:solidFill>
-                <a:latin typeface="微软雅黑" charset="-122"/>
-                <a:ea typeface="微软雅黑" charset="-122"/>
-                <a:sym typeface="+mn-ea"/>
-              </a:rPr>
-              <a:t> Top-K </a:t>
-            </a:r>
-            <a:r>
-              <a:rPr lang="zh-CN" altLang="en-US" sz="1400" dirty="0">
-                <a:solidFill>
-                  <a:schemeClr val="tx1"/>
-                </a:solidFill>
-                <a:latin typeface="微软雅黑" charset="-122"/>
-                <a:ea typeface="微软雅黑" charset="-122"/>
-                <a:sym typeface="+mn-ea"/>
-              </a:rPr>
-              <a:t>波束设置多个容差框，最佳波束采用较严条件，后续候选可以放宽。具体比较哪些配对、采用多大的容差，需要写入测试配置，使不同模型版本接受相同规则。</a:t>
-            </a:r>
-            <a:endParaRPr lang="zh-CN" altLang="en-US" sz="1400" dirty="0">
-              <a:solidFill>
-                <a:schemeClr val="tx1"/>
-              </a:solidFill>
-              <a:latin typeface="微软雅黑" charset="-122"/>
-              <a:ea typeface="微软雅黑" charset="-122"/>
-              <a:sym typeface="+mn-ea"/>
-            </a:endParaRPr>
-          </a:p>
-          <a:p>
-            <a:pPr indent="0">
-              <a:lnSpc>
-                <a:spcPct val="130000"/>
-              </a:lnSpc>
-              <a:buFont typeface="Arial" panose="020B0604020202020204" pitchFamily="34" charset="0"/>
-              <a:buNone/>
-            </a:pPr>
-            <a:r>
-              <a:rPr lang="en-US" altLang="zh-CN" sz="1400" b="1" dirty="0">
-                <a:solidFill>
-                  <a:schemeClr val="tx1"/>
-                </a:solidFill>
-                <a:latin typeface="微软雅黑" charset="-122"/>
-                <a:ea typeface="微软雅黑" charset="-122"/>
-                <a:sym typeface="+mn-ea"/>
-              </a:rPr>
-              <a:t>d. </a:t>
-            </a:r>
-            <a:r>
-              <a:rPr lang="zh-CN" altLang="en-US" sz="1400" b="1" dirty="0">
-                <a:solidFill>
-                  <a:schemeClr val="tx1"/>
-                </a:solidFill>
-                <a:latin typeface="微软雅黑" charset="-122"/>
-                <a:ea typeface="微软雅黑" charset="-122"/>
-                <a:sym typeface="+mn-ea"/>
-              </a:rPr>
-              <a:t>通过复测处理短时间内的功率变化。</a:t>
-            </a:r>
-            <a:r>
-              <a:rPr lang="zh-CN" altLang="en-US" sz="1400" dirty="0">
-                <a:solidFill>
-                  <a:schemeClr val="tx1"/>
-                </a:solidFill>
-                <a:latin typeface="微软雅黑" charset="-122"/>
-                <a:ea typeface="微软雅黑" charset="-122"/>
-                <a:sym typeface="+mn-ea"/>
-              </a:rPr>
-              <a:t>部分实施例允许两次检查中波束身份均达标，而</a:t>
-            </a:r>
-            <a:r>
-              <a:rPr lang="en-US" altLang="zh-CN" sz="1400" dirty="0">
-                <a:solidFill>
-                  <a:schemeClr val="tx1"/>
-                </a:solidFill>
-                <a:latin typeface="微软雅黑" charset="-122"/>
-                <a:ea typeface="微软雅黑" charset="-122"/>
-                <a:sym typeface="+mn-ea"/>
-              </a:rPr>
-              <a:t> RSRP </a:t>
-            </a:r>
-            <a:r>
-              <a:rPr lang="zh-CN" altLang="en-US" sz="1400" dirty="0">
-                <a:solidFill>
-                  <a:schemeClr val="tx1"/>
-                </a:solidFill>
-                <a:latin typeface="微软雅黑" charset="-122"/>
-                <a:ea typeface="微软雅黑" charset="-122"/>
-                <a:sym typeface="+mn-ea"/>
-              </a:rPr>
-              <a:t>至少一次达标，为短时波动提供容忍方式。复测条件应提前确定，并保存每次测量结果，避免仅保留最终通过结论而丢失变化过程。</a:t>
-            </a:r>
-            <a:endParaRPr lang="zh-CN" altLang="en-US" sz="1400" dirty="0">
-              <a:solidFill>
-                <a:schemeClr val="tx1"/>
-              </a:solidFill>
-              <a:latin typeface="微软雅黑" charset="-122"/>
-              <a:ea typeface="微软雅黑" charset="-122"/>
-              <a:sym typeface="+mn-ea"/>
-            </a:endParaRPr>
-          </a:p>
-          <a:p>
-            <a:pPr indent="0">
-              <a:lnSpc>
-                <a:spcPct val="130000"/>
-              </a:lnSpc>
-              <a:buFont typeface="Arial" panose="020B0604020202020204" pitchFamily="34" charset="0"/>
-              <a:buNone/>
-            </a:pPr>
-            <a:r>
-              <a:rPr lang="zh-CN" altLang="en-US" sz="1400" b="1" dirty="0">
-                <a:solidFill>
-                  <a:schemeClr val="tx1"/>
-                </a:solidFill>
-                <a:latin typeface="微软雅黑" charset="-122"/>
-                <a:ea typeface="微软雅黑" charset="-122"/>
-                <a:sym typeface="+mn-ea"/>
-              </a:rPr>
-              <a:t>研究成熟度与启示：</a:t>
-            </a:r>
-            <a:endParaRPr lang="zh-CN" altLang="en-US" sz="1400" b="1" dirty="0">
-              <a:solidFill>
-                <a:schemeClr val="tx1"/>
-              </a:solidFill>
-              <a:latin typeface="微软雅黑" charset="-122"/>
-              <a:ea typeface="微软雅黑" charset="-122"/>
-              <a:sym typeface="+mn-ea"/>
-            </a:endParaRPr>
-          </a:p>
-          <a:p>
-            <a:pPr indent="0">
-              <a:lnSpc>
-                <a:spcPct val="130000"/>
-              </a:lnSpc>
-              <a:buFont typeface="Arial" panose="020B0604020202020204" pitchFamily="34" charset="0"/>
-              <a:buNone/>
-            </a:pPr>
-            <a:r>
-              <a:rPr lang="zh-CN" altLang="en-US" sz="1400" dirty="0">
-                <a:solidFill>
-                  <a:schemeClr val="tx1"/>
-                </a:solidFill>
-                <a:latin typeface="微软雅黑" charset="-122"/>
-                <a:ea typeface="微软雅黑" charset="-122"/>
-                <a:sym typeface="+mn-ea"/>
-              </a:rPr>
-              <a:t>专利给出判据和示意案例，未提供定量对照实验或通用门限。</a:t>
-            </a:r>
-            <a:r>
-              <a:rPr lang="zh-CN" altLang="en-US" sz="1400" b="1" dirty="0">
-                <a:solidFill>
-                  <a:schemeClr val="tx1"/>
-                </a:solidFill>
-                <a:latin typeface="微软雅黑" charset="-122"/>
-                <a:ea typeface="微软雅黑" charset="-122"/>
-                <a:sym typeface="+mn-ea"/>
-              </a:rPr>
-              <a:t>应用重点是明确参考、配对、容差和复测规则，并保留两个维度的结果。</a:t>
-            </a:r>
-            <a:r>
-              <a:rPr lang="zh-CN" altLang="en-US" sz="1400" dirty="0">
-                <a:solidFill>
-                  <a:schemeClr val="tx1"/>
-                </a:solidFill>
-                <a:latin typeface="微软雅黑" charset="-122"/>
-                <a:ea typeface="微软雅黑" charset="-122"/>
-                <a:sym typeface="+mn-ea"/>
-              </a:rPr>
-              <a:t>波束身份容差需要结合码本含义，不能直接把编号差解释为方向角差。专利提出的判据与具体标准要求仍需分别核对。</a:t>
-            </a:r>
-            <a:endParaRPr lang="zh-CN" altLang="en-US" sz="1400" dirty="0">
-              <a:solidFill>
-                <a:schemeClr val="tx1"/>
-              </a:solidFill>
-              <a:latin typeface="微软雅黑" charset="-122"/>
-              <a:ea typeface="微软雅黑" charset="-122"/>
-              <a:sym typeface="+mn-ea"/>
-            </a:endParaRPr>
-          </a:p>
-        </p:txBody>
-      </p:sp>
-      <p:sp>
-        <p:nvSpPr>
-          <p:cNvPr id="3" name="文本框 2"/>
+          <p:cNvPr id="4" name="文本框 3"/>
           <p:cNvSpPr txBox="1"/>
           <p:nvPr userDrawn="1"/>
         </p:nvSpPr>
         <p:spPr>
           <a:xfrm>
-            <a:off x="6632607" y="324566"/>
-            <a:ext cx="4331389" cy="641803"/>
+            <a:off x="617366" y="442595"/>
+            <a:ext cx="9289410" cy="405627"/>
           </a:xfrm>
           <a:prstGeom prst="rect">
             <a:avLst/>
@@ -15491,18 +16679,389 @@
             <a:noAutofit/>
           </a:bodyPr>
           <a:p>
-            <a:r>
-              <a:rPr lang="en-US" altLang="zh-CN" sz="1200">
-                <a:latin typeface="Times New Roman" panose="02020603050405020304" charset="0"/>
-                <a:ea typeface="Times New Roman" panose="02020603050405020304" charset="0"/>
-                <a:cs typeface="Times New Roman" panose="02020603050405020304" charset="0"/>
-              </a:rPr>
-              <a:t>[5] APPLE INC. Beam measurement accuracy test metric for artificial intelligence / machine language (AI/ML) based beam management: WO2025212462A1[P]. 2025-10-09.</a:t>
-            </a:r>
-            <a:endParaRPr lang="en-US" altLang="zh-CN" sz="1200">
-              <a:latin typeface="Times New Roman" panose="02020603050405020304" charset="0"/>
-              <a:ea typeface="Times New Roman" panose="02020603050405020304" charset="0"/>
-              <a:cs typeface="Times New Roman" panose="02020603050405020304" charset="0"/>
+            <a:pPr algn="l"/>
+            <a:r>
+              <a:rPr lang="en-US" altLang="zh-CN" sz="2000" b="1">
+                <a:latin typeface="微软雅黑" charset="0"/>
+                <a:ea typeface="微软雅黑" charset="0"/>
+                <a:cs typeface="微软雅黑" charset="0"/>
+              </a:rPr>
+              <a:t>3. </a:t>
+            </a:r>
+            <a:r>
+              <a:rPr lang="zh-CN" altLang="en-US" sz="2000" b="1">
+                <a:latin typeface="微软雅黑" charset="0"/>
+                <a:ea typeface="微软雅黑" charset="0"/>
+                <a:cs typeface="微软雅黑" charset="0"/>
+              </a:rPr>
+              <a:t>苹果专利：终端测量预测的运行流程</a:t>
+            </a:r>
+            <a:r>
+              <a:rPr lang="en-US" altLang="zh-CN" sz="2000" b="1">
+                <a:latin typeface="微软雅黑" charset="0"/>
+                <a:ea typeface="微软雅黑" charset="0"/>
+                <a:cs typeface="微软雅黑" charset="0"/>
+              </a:rPr>
+              <a:t>——</a:t>
+            </a:r>
+            <a:r>
+              <a:rPr lang="zh-CN" altLang="en-US" sz="2000" b="1">
+                <a:latin typeface="微软雅黑" charset="0"/>
+                <a:ea typeface="微软雅黑" charset="0"/>
+                <a:cs typeface="微软雅黑" charset="0"/>
+              </a:rPr>
+              <a:t>配置、启用、报告与监控</a:t>
+            </a:r>
+            <a:endParaRPr lang="zh-CN" altLang="en-US" sz="2000" b="1">
+              <a:latin typeface="微软雅黑" charset="0"/>
+              <a:ea typeface="微软雅黑" charset="0"/>
+              <a:cs typeface="微软雅黑" charset="0"/>
+            </a:endParaRPr>
+          </a:p>
+        </p:txBody>
+      </p:sp>
+      <p:pic>
+        <p:nvPicPr>
+          <p:cNvPr id="2" name="图片 1" descr="post_object_image_1335030491"/>
+          <p:cNvPicPr>
+            <a:picLocks noChangeAspect="1"/>
+          </p:cNvPicPr>
+          <p:nvPr/>
+        </p:nvPicPr>
+        <p:blipFill>
+          <a:blip r:embed="rId1"/>
+          <a:stretch>
+            <a:fillRect/>
+          </a:stretch>
+        </p:blipFill>
+        <p:spPr>
+          <a:xfrm>
+            <a:off x="1279294" y="1111775"/>
+            <a:ext cx="2793578" cy="5195436"/>
+          </a:xfrm>
+          <a:prstGeom prst="rect">
+            <a:avLst/>
+          </a:prstGeom>
+          <a:ln>
+            <a:solidFill>
+              <a:srgbClr val="000000">
+                <a:alpha val="100000"/>
+              </a:srgbClr>
+            </a:solidFill>
+          </a:ln>
+        </p:spPr>
+      </p:pic>
+      <p:sp>
+        <p:nvSpPr>
+          <p:cNvPr id="5" name="文本框 4"/>
+          <p:cNvSpPr txBox="1"/>
+          <p:nvPr/>
+        </p:nvSpPr>
+        <p:spPr>
+          <a:xfrm>
+            <a:off x="5279872" y="1910723"/>
+            <a:ext cx="5782929" cy="3415317"/>
+          </a:xfrm>
+          <a:prstGeom prst="rect">
+            <a:avLst/>
+          </a:prstGeom>
+          <a:noFill/>
+        </p:spPr>
+        <p:txBody>
+          <a:bodyPr wrap="square" rtlCol="0" anchor="t">
+            <a:noAutofit/>
+          </a:bodyPr>
+          <a:p>
+            <a:pPr marL="285750" indent="-285750">
+              <a:lnSpc>
+                <a:spcPct val="110000"/>
+              </a:lnSpc>
+              <a:buFont typeface="Arial" panose="020B0604020202020204" pitchFamily="34" charset="0"/>
+              <a:buChar char="•"/>
+            </a:pPr>
+            <a:r>
+              <a:rPr lang="zh-CN" altLang="en-US" sz="1600" b="1">
+                <a:latin typeface="微软雅黑" charset="0"/>
+                <a:ea typeface="微软雅黑" charset="0"/>
+                <a:cs typeface="微软雅黑" charset="0"/>
+              </a:rPr>
+              <a:t>上报能力，配置并训练模型</a:t>
+            </a:r>
+            <a:endParaRPr lang="zh-CN" altLang="en-US" sz="1600" b="1">
+              <a:latin typeface="微软雅黑" charset="0"/>
+              <a:ea typeface="微软雅黑" charset="0"/>
+              <a:cs typeface="微软雅黑" charset="0"/>
+            </a:endParaRPr>
+          </a:p>
+          <a:p>
+            <a:pPr>
+              <a:lnSpc>
+                <a:spcPct val="110000"/>
+              </a:lnSpc>
+            </a:pPr>
+            <a:r>
+              <a:rPr lang="zh-CN" altLang="en-US" sz="1600">
+                <a:latin typeface="微软雅黑" charset="0"/>
+                <a:ea typeface="微软雅黑" charset="0"/>
+                <a:cs typeface="微软雅黑" charset="0"/>
+              </a:rPr>
+              <a:t>终端向网络报告支持的预测能力，网络下发训练配置。终端采集数据，图示方案由终端侧服务器离线训练并返回模型。</a:t>
+            </a:r>
+            <a:endParaRPr lang="zh-CN" altLang="en-US" sz="1600">
+              <a:latin typeface="微软雅黑" charset="0"/>
+              <a:ea typeface="微软雅黑" charset="0"/>
+              <a:cs typeface="微软雅黑" charset="0"/>
+            </a:endParaRPr>
+          </a:p>
+          <a:p>
+            <a:pPr marL="285750" indent="-285750">
+              <a:lnSpc>
+                <a:spcPct val="110000"/>
+              </a:lnSpc>
+              <a:buFont typeface="Arial" panose="020B0604020202020204" pitchFamily="34" charset="0"/>
+              <a:buChar char="•"/>
+            </a:pPr>
+            <a:r>
+              <a:rPr lang="zh-CN" altLang="en-US" sz="1600" b="1">
+                <a:latin typeface="微软雅黑" charset="0"/>
+                <a:ea typeface="微软雅黑" charset="0"/>
+                <a:cs typeface="微软雅黑" charset="0"/>
+              </a:rPr>
+              <a:t>通知可用模型，按配置启用</a:t>
+            </a:r>
+            <a:endParaRPr lang="zh-CN" altLang="en-US" sz="1600" b="1">
+              <a:latin typeface="微软雅黑" charset="0"/>
+              <a:ea typeface="微软雅黑" charset="0"/>
+              <a:cs typeface="微软雅黑" charset="0"/>
+            </a:endParaRPr>
+          </a:p>
+          <a:p>
+            <a:pPr>
+              <a:lnSpc>
+                <a:spcPct val="110000"/>
+              </a:lnSpc>
+            </a:pPr>
+            <a:r>
+              <a:rPr lang="zh-CN" altLang="en-US" sz="1600">
+                <a:latin typeface="微软雅黑" charset="0"/>
+                <a:ea typeface="微软雅黑" charset="0"/>
+                <a:cs typeface="微软雅黑" charset="0"/>
+              </a:rPr>
+              <a:t>终端报告可用模型及适用条件，网络选择模型并发送激活消息，明确终端使用哪个模型。</a:t>
+            </a:r>
+            <a:endParaRPr lang="zh-CN" altLang="en-US" sz="1600">
+              <a:latin typeface="微软雅黑" charset="0"/>
+              <a:ea typeface="微软雅黑" charset="0"/>
+              <a:cs typeface="微软雅黑" charset="0"/>
+            </a:endParaRPr>
+          </a:p>
+          <a:p>
+            <a:pPr marL="285750" indent="-285750">
+              <a:lnSpc>
+                <a:spcPct val="110000"/>
+              </a:lnSpc>
+              <a:buFont typeface="Arial" panose="020B0604020202020204" pitchFamily="34" charset="0"/>
+              <a:buChar char="•"/>
+            </a:pPr>
+            <a:r>
+              <a:rPr lang="zh-CN" altLang="en-US" sz="1600" b="1">
+                <a:latin typeface="微软雅黑" charset="0"/>
+                <a:ea typeface="微软雅黑" charset="0"/>
+                <a:cs typeface="微软雅黑" charset="0"/>
+              </a:rPr>
+              <a:t>终端生成预测，上报测量结果</a:t>
+            </a:r>
+            <a:endParaRPr lang="zh-CN" altLang="en-US" sz="1600" b="1">
+              <a:latin typeface="微软雅黑" charset="0"/>
+              <a:ea typeface="微软雅黑" charset="0"/>
+              <a:cs typeface="微软雅黑" charset="0"/>
+            </a:endParaRPr>
+          </a:p>
+          <a:p>
+            <a:pPr>
+              <a:lnSpc>
+                <a:spcPct val="110000"/>
+              </a:lnSpc>
+            </a:pPr>
+            <a:r>
+              <a:rPr lang="zh-CN" altLang="en-US" sz="1600">
+                <a:latin typeface="微软雅黑" charset="0"/>
+                <a:ea typeface="微软雅黑" charset="0"/>
+                <a:cs typeface="微软雅黑" charset="0"/>
+              </a:rPr>
+              <a:t>模型在终端预测小区或波束的</a:t>
+            </a:r>
+            <a:r>
+              <a:rPr lang="en-US" altLang="zh-CN" sz="1600">
+                <a:latin typeface="微软雅黑" charset="0"/>
+                <a:ea typeface="微软雅黑" charset="0"/>
+                <a:cs typeface="微软雅黑" charset="0"/>
+              </a:rPr>
+              <a:t> L3 </a:t>
+            </a:r>
+            <a:r>
+              <a:rPr lang="zh-CN" altLang="en-US" sz="1600">
+                <a:latin typeface="微软雅黑" charset="0"/>
+                <a:ea typeface="微软雅黑" charset="0"/>
+                <a:cs typeface="微软雅黑" charset="0"/>
+              </a:rPr>
+              <a:t>测量。测量报告可包含实测、预测或两者，供网络使用。</a:t>
+            </a:r>
+            <a:endParaRPr lang="zh-CN" altLang="en-US" sz="1600">
+              <a:latin typeface="微软雅黑" charset="0"/>
+              <a:ea typeface="微软雅黑" charset="0"/>
+              <a:cs typeface="微软雅黑" charset="0"/>
+            </a:endParaRPr>
+          </a:p>
+          <a:p>
+            <a:pPr marL="285750" indent="-285750">
+              <a:lnSpc>
+                <a:spcPct val="110000"/>
+              </a:lnSpc>
+              <a:buFont typeface="Arial" panose="020B0604020202020204" pitchFamily="34" charset="0"/>
+              <a:buChar char="•"/>
+            </a:pPr>
+            <a:r>
+              <a:rPr lang="zh-CN" altLang="en-US" sz="1600" b="1">
+                <a:latin typeface="微软雅黑" charset="0"/>
+                <a:ea typeface="微软雅黑" charset="0"/>
+                <a:cs typeface="微软雅黑" charset="0"/>
+              </a:rPr>
+              <a:t>对照实测监控，管理模型状态</a:t>
+            </a:r>
+            <a:endParaRPr lang="zh-CN" altLang="en-US" sz="1600" b="1">
+              <a:latin typeface="微软雅黑" charset="0"/>
+              <a:ea typeface="微软雅黑" charset="0"/>
+              <a:cs typeface="微软雅黑" charset="0"/>
+            </a:endParaRPr>
+          </a:p>
+          <a:p>
+            <a:pPr>
+              <a:lnSpc>
+                <a:spcPct val="110000"/>
+              </a:lnSpc>
+            </a:pPr>
+            <a:r>
+              <a:rPr lang="zh-CN" altLang="en-US" sz="1600">
+                <a:latin typeface="微软雅黑" charset="0"/>
+                <a:ea typeface="微软雅黑" charset="0"/>
+                <a:cs typeface="微软雅黑" charset="0"/>
+              </a:rPr>
+              <a:t>终端或网络比较预测与对应实测。根据监控结果，通过模型管理信令切换或停用模型，停用后可恢复传统测量报告。</a:t>
+            </a:r>
+            <a:endParaRPr lang="zh-CN" altLang="en-US" sz="1600">
+              <a:latin typeface="微软雅黑" charset="0"/>
+              <a:ea typeface="微软雅黑" charset="0"/>
+              <a:cs typeface="微软雅黑" charset="0"/>
+            </a:endParaRPr>
+          </a:p>
+        </p:txBody>
+      </p:sp>
+      <p:sp>
+        <p:nvSpPr>
+          <p:cNvPr id="6" name="文本框 5"/>
+          <p:cNvSpPr txBox="1"/>
+          <p:nvPr userDrawn="1"/>
+        </p:nvSpPr>
+        <p:spPr>
+          <a:xfrm>
+            <a:off x="5279872" y="5575023"/>
+            <a:ext cx="4765361" cy="576296"/>
+          </a:xfrm>
+          <a:prstGeom prst="rect">
+            <a:avLst/>
+          </a:prstGeom>
+        </p:spPr>
+        <p:txBody>
+          <a:bodyPr wrap="square" rtlCol="0">
+            <a:noAutofit/>
+          </a:bodyPr>
+          <a:p>
+            <a:pPr algn="l"/>
+            <a:r>
+              <a:rPr lang="en-US" altLang="zh-CN" sz="1400" b="1">
+                <a:latin typeface="微软雅黑" charset="0"/>
+                <a:ea typeface="微软雅黑" charset="0"/>
+                <a:cs typeface="微软雅黑" charset="0"/>
+              </a:rPr>
+              <a:t>MR</a:t>
+            </a:r>
+            <a:r>
+              <a:rPr lang="zh-CN" altLang="en-US" sz="1400">
+                <a:latin typeface="微软雅黑" charset="0"/>
+                <a:ea typeface="微软雅黑" charset="0"/>
+                <a:cs typeface="微软雅黑" charset="0"/>
+              </a:rPr>
+              <a:t>：测量报告；</a:t>
+            </a:r>
+            <a:r>
+              <a:rPr lang="en-US" altLang="zh-CN" sz="1400" b="1">
+                <a:latin typeface="微软雅黑" charset="0"/>
+                <a:ea typeface="微软雅黑" charset="0"/>
+                <a:cs typeface="微软雅黑" charset="0"/>
+              </a:rPr>
+              <a:t>LCM</a:t>
+            </a:r>
+            <a:r>
+              <a:rPr lang="zh-CN" altLang="en-US" sz="1400">
+                <a:latin typeface="微软雅黑" charset="0"/>
+                <a:ea typeface="微软雅黑" charset="0"/>
+                <a:cs typeface="微软雅黑" charset="0"/>
+              </a:rPr>
+              <a:t>：模型生命周期管理；</a:t>
+            </a:r>
+            <a:r>
+              <a:rPr lang="en-US" altLang="zh-CN" sz="1400" b="1">
+                <a:latin typeface="微软雅黑" charset="0"/>
+                <a:ea typeface="微软雅黑" charset="0"/>
+                <a:cs typeface="微软雅黑" charset="0"/>
+              </a:rPr>
+              <a:t>Activation</a:t>
+            </a:r>
+            <a:r>
+              <a:rPr lang="zh-CN" altLang="en-US" sz="1400" b="1">
+                <a:latin typeface="微软雅黑" charset="0"/>
+                <a:ea typeface="微软雅黑" charset="0"/>
+                <a:cs typeface="微软雅黑" charset="0"/>
+              </a:rPr>
+              <a:t>／</a:t>
+            </a:r>
+            <a:r>
+              <a:rPr lang="en-US" altLang="zh-CN" sz="1400" b="1">
+                <a:latin typeface="微软雅黑" charset="0"/>
+                <a:ea typeface="微软雅黑" charset="0"/>
+                <a:cs typeface="微软雅黑" charset="0"/>
+              </a:rPr>
+              <a:t>Deactivation</a:t>
+            </a:r>
+            <a:r>
+              <a:rPr lang="zh-CN" altLang="en-US" sz="1400" b="1">
+                <a:latin typeface="微软雅黑" charset="0"/>
+                <a:ea typeface="微软雅黑" charset="0"/>
+                <a:cs typeface="微软雅黑" charset="0"/>
+              </a:rPr>
+              <a:t>／</a:t>
+            </a:r>
+            <a:r>
+              <a:rPr lang="en-US" altLang="zh-CN" sz="1400" b="1">
+                <a:latin typeface="微软雅黑" charset="0"/>
+                <a:ea typeface="微软雅黑" charset="0"/>
+                <a:cs typeface="微软雅黑" charset="0"/>
+              </a:rPr>
+              <a:t>Switch</a:t>
+            </a:r>
+            <a:r>
+              <a:rPr lang="zh-CN" altLang="en-US" sz="1400">
+                <a:latin typeface="微软雅黑" charset="0"/>
+                <a:ea typeface="微软雅黑" charset="0"/>
+                <a:cs typeface="微软雅黑" charset="0"/>
+              </a:rPr>
+              <a:t>：启用／停用／切换。</a:t>
+            </a:r>
+            <a:endParaRPr lang="zh-CN" altLang="en-US" sz="1400">
+              <a:latin typeface="微软雅黑" charset="0"/>
+              <a:ea typeface="微软雅黑" charset="0"/>
+              <a:cs typeface="微软雅黑" charset="0"/>
             </a:endParaRPr>
           </a:p>
         </p:txBody>
@@ -15543,7 +17102,7 @@
         <p:spPr>
           <a:xfrm>
             <a:off x="565150" y="339090"/>
-            <a:ext cx="5539926" cy="612775"/>
+            <a:ext cx="5491781" cy="612775"/>
           </a:xfrm>
         </p:spPr>
         <p:txBody>
@@ -15593,7 +17152,7 @@
         <p:spPr>
           <a:xfrm>
             <a:off x="258445" y="1025948"/>
-            <a:ext cx="11734165" cy="5381282"/>
+            <a:ext cx="11734165" cy="5489208"/>
           </a:xfrm>
           <a:prstGeom prst="rect">
             <a:avLst/>
@@ -15610,7 +17169,7 @@
           <a:p>
             <a:pPr indent="0">
               <a:lnSpc>
-                <a:spcPct val="130000"/>
+                <a:spcPct val="120000"/>
               </a:lnSpc>
               <a:buFont typeface="Arial" panose="020B0604020202020204" pitchFamily="34" charset="0"/>
               <a:buNone/>
@@ -15620,11 +17179,22 @@
                 <a:solidFill>
                   <a:schemeClr val="tx1"/>
                 </a:solidFill>
-                <a:latin typeface="微软雅黑" charset="-122"/>
-                <a:ea typeface="微软雅黑" charset="-122"/>
-                <a:sym typeface="+mn-ea"/>
-              </a:rPr>
-              <a:t>3. OAIC-T</a:t>
+                <a:latin typeface="微软雅黑" charset="0"/>
+                <a:ea typeface="微软雅黑" charset="0"/>
+                <a:sym typeface="+mn-ea"/>
+              </a:rPr>
+              <a:t>1</a:t>
+            </a:r>
+            <a:r>
+              <a:rPr lang="en-US" altLang="zh-CN" b="1" dirty="0">
+                <a:solidFill>
+                  <a:schemeClr val="tx1"/>
+                </a:solidFill>
+                <a:latin typeface="微软雅黑" charset="-122"/>
+                <a:ea typeface="微软雅黑" charset="-122"/>
+                <a:sym typeface="+mn-ea"/>
+              </a:rPr>
+              <a:t>. </a:t>
             </a:r>
             <a:r>
               <a:rPr lang="zh-CN" altLang="en-US" b="1" dirty="0">
@@ -15635,29 +17205,29 @@
                 <a:ea typeface="微软雅黑" charset="-122"/>
                 <a:sym typeface="+mn-ea"/>
               </a:rPr>
-              <a:t>：用脚本、服务器和执行节点组织通信</a:t>
-            </a:r>
-            <a:r>
-              <a:rPr lang="en-US" altLang="zh-CN" b="1" dirty="0">
-                <a:solidFill>
-                  <a:schemeClr val="tx1"/>
-                </a:solidFill>
-                <a:latin typeface="微软雅黑" charset="-122"/>
-                <a:ea typeface="微软雅黑" charset="-122"/>
-                <a:sym typeface="+mn-ea"/>
-              </a:rPr>
-              <a:t> AI </a:t>
+              <a:t>苹果专利：部署后验证</a:t>
             </a:r>
             <a:r>
               <a:rPr lang="zh-CN" altLang="en-US" b="1" dirty="0">
                 <a:solidFill>
                   <a:schemeClr val="tx1"/>
                 </a:solidFill>
-                <a:latin typeface="微软雅黑" charset="-122"/>
-                <a:ea typeface="微软雅黑" charset="-122"/>
-                <a:sym typeface="+mn-ea"/>
-              </a:rPr>
-              <a:t>测试</a:t>
+                <a:latin typeface="微软雅黑" charset="0"/>
+                <a:ea typeface="微软雅黑" charset="0"/>
+                <a:sym typeface="+mn-ea"/>
+              </a:rPr>
+              <a:t>——</a:t>
+            </a:r>
+            <a:r>
+              <a:rPr lang="zh-CN" altLang="en-US" b="1" dirty="0">
+                <a:solidFill>
+                  <a:schemeClr val="tx1"/>
+                </a:solidFill>
+                <a:latin typeface="微软雅黑" charset="-122"/>
+                <a:ea typeface="微软雅黑" charset="-122"/>
+                <a:sym typeface="+mn-ea"/>
+              </a:rPr>
+              <a:t>检查模型适用性与预测表现，动态管理使用状态</a:t>
             </a:r>
             <a:r>
               <a:rPr lang="en-US" altLang="zh-CN" b="1" baseline="30000" dirty="0">
@@ -15681,7 +17251,7 @@
                 <a:cs typeface="+mn-ea"/>
                 <a:sym typeface="+mn-ea"/>
               </a:rPr>
-              <a:t>6</a:t>
+              <a:t>4</a:t>
             </a:r>
             <a:r>
               <a:rPr lang="en-US" altLang="zh-CN" b="1" baseline="30000" dirty="0">
@@ -15715,31 +17285,25 @@
             <a:r>
               <a:rPr lang="zh-CN" altLang="en-US" sz="1400" b="1" dirty="0">
                 <a:solidFill>
-                  <a:schemeClr val="tx1"/>
-                </a:solidFill>
-                <a:latin typeface="微软雅黑" charset="-122"/>
-                <a:ea typeface="微软雅黑" charset="-122"/>
-                <a:sym typeface="+mn-ea"/>
-              </a:rPr>
-              <a:t>技术概述：</a:t>
-            </a:r>
-            <a:endParaRPr lang="zh-CN" altLang="en-US" sz="1400" b="1" dirty="0">
-              <a:solidFill>
-                <a:schemeClr val="tx1"/>
-              </a:solidFill>
-              <a:latin typeface="微软雅黑" charset="-122"/>
-              <a:ea typeface="微软雅黑" charset="-122"/>
-              <a:sym typeface="+mn-ea"/>
-            </a:endParaRPr>
-          </a:p>
-          <a:p>
-            <a:pPr indent="0">
-              <a:lnSpc>
-                <a:spcPct val="130000"/>
-              </a:lnSpc>
-              <a:buFont typeface="Arial" panose="020B0604020202020204" pitchFamily="34" charset="0"/>
-              <a:buNone/>
-            </a:pPr>
+                  <a:srgbClr val="FF0000"/>
+                </a:solidFill>
+                <a:latin typeface="微软雅黑" charset="-122"/>
+                <a:ea typeface="微软雅黑" charset="-122"/>
+                <a:sym typeface="+mn-ea"/>
+              </a:rPr>
+              <a:t>创新与价值：</a:t>
+            </a:r>
+            <a:r>
+              <a:rPr lang="en-US" altLang="zh-CN" sz="1400" dirty="0">
+                <a:solidFill>
+                  <a:schemeClr val="tx1"/>
+                </a:solidFill>
+                <a:latin typeface="微软雅黑" charset="-122"/>
+                <a:ea typeface="微软雅黑" charset="-122"/>
+                <a:sym typeface="+mn-ea"/>
+              </a:rPr>
+              <a:t>AI </a:t>
+            </a:r>
             <a:r>
               <a:rPr lang="zh-CN" altLang="en-US" sz="1400" dirty="0">
                 <a:solidFill>
@@ -15749,18 +17313,18 @@
                 <a:ea typeface="微软雅黑" charset="-122"/>
                 <a:sym typeface="+mn-ea"/>
               </a:rPr>
-              <a:t>通信</a:t>
-            </a:r>
-            <a:r>
-              <a:rPr lang="en-US" altLang="zh-CN" sz="1400" dirty="0">
-                <a:solidFill>
-                  <a:schemeClr val="tx1"/>
-                </a:solidFill>
-                <a:latin typeface="微软雅黑" charset="-122"/>
-                <a:ea typeface="微软雅黑" charset="-122"/>
-                <a:sym typeface="+mn-ea"/>
-              </a:rPr>
-              <a:t> AI </a:t>
+              <a:t>波束预测利用部分无线测量辅助选择候选波束，但模型在环境变化后可能失准。该方法将</a:t>
+            </a:r>
+            <a:r>
+              <a:rPr lang="zh-CN" altLang="en-US" sz="1400" b="1" dirty="0">
+                <a:solidFill>
+                  <a:schemeClr val="tx1"/>
+                </a:solidFill>
+                <a:latin typeface="微软雅黑" charset="-122"/>
+                <a:ea typeface="微软雅黑" charset="-122"/>
+                <a:sym typeface="+mn-ea"/>
+              </a:rPr>
+              <a:t>运行中的可靠性检查与模型使用状态关联起来</a:t>
             </a:r>
             <a:r>
               <a:rPr lang="zh-CN" altLang="en-US" sz="1400" dirty="0">
@@ -15771,139 +17335,7 @@
                 <a:ea typeface="微软雅黑" charset="-122"/>
                 <a:sym typeface="+mn-ea"/>
               </a:rPr>
-              <a:t>的表现取决于输入和运行条件，少量固定测试难以充分观察其行为。同时，不同场景需要配置环境、产生请求、记录响应和整理结果，人工执行容易造成条件不一致，也不便复现失败。</a:t>
-            </a:r>
-            <a:r>
-              <a:rPr lang="en-US" altLang="zh-CN" sz="1400" dirty="0">
-                <a:solidFill>
-                  <a:schemeClr val="tx1"/>
-                </a:solidFill>
-                <a:latin typeface="微软雅黑" charset="-122"/>
-                <a:ea typeface="微软雅黑" charset="-122"/>
-                <a:sym typeface="+mn-ea"/>
-              </a:rPr>
-              <a:t>OAIC-T </a:t>
-            </a:r>
-            <a:r>
-              <a:rPr lang="zh-CN" altLang="en-US" sz="1400" dirty="0">
-                <a:solidFill>
-                  <a:schemeClr val="tx1"/>
-                </a:solidFill>
-                <a:latin typeface="微软雅黑" charset="-122"/>
-                <a:ea typeface="微软雅黑" charset="-122"/>
-                <a:sym typeface="+mn-ea"/>
-              </a:rPr>
-              <a:t>将这些工作组织为</a:t>
-            </a:r>
-            <a:r>
-              <a:rPr lang="zh-CN" altLang="en-US" sz="1400" b="1" dirty="0">
-                <a:solidFill>
-                  <a:schemeClr val="tx1"/>
-                </a:solidFill>
-                <a:latin typeface="微软雅黑" charset="-122"/>
-                <a:ea typeface="微软雅黑" charset="-122"/>
-                <a:sym typeface="+mn-ea"/>
-              </a:rPr>
-              <a:t>测试配置与脚本、服务器、</a:t>
-            </a:r>
-            <a:r>
-              <a:rPr lang="en-US" altLang="zh-CN" sz="1400" b="1" dirty="0">
-                <a:solidFill>
-                  <a:schemeClr val="tx1"/>
-                </a:solidFill>
-                <a:latin typeface="微软雅黑" charset="-122"/>
-                <a:ea typeface="微软雅黑" charset="-122"/>
-                <a:sym typeface="+mn-ea"/>
-              </a:rPr>
-              <a:t>Actor </a:t>
-            </a:r>
-            <a:r>
-              <a:rPr lang="zh-CN" altLang="en-US" sz="1400" b="1" dirty="0">
-                <a:solidFill>
-                  <a:schemeClr val="tx1"/>
-                </a:solidFill>
-                <a:latin typeface="微软雅黑" charset="-122"/>
-                <a:ea typeface="微软雅黑" charset="-122"/>
-                <a:sym typeface="+mn-ea"/>
-              </a:rPr>
-              <a:t>执行节点</a:t>
-            </a:r>
-            <a:r>
-              <a:rPr lang="zh-CN" altLang="en-US" sz="1400" dirty="0">
-                <a:solidFill>
-                  <a:schemeClr val="tx1"/>
-                </a:solidFill>
-                <a:latin typeface="微软雅黑" charset="-122"/>
-                <a:ea typeface="微软雅黑" charset="-122"/>
-                <a:sym typeface="+mn-ea"/>
-              </a:rPr>
-              <a:t>。服务器协调任务，执行节点与被测系统交互，再保存过程和结果。其主要对象是网络侧</a:t>
-            </a:r>
-            <a:r>
-              <a:rPr lang="en-US" altLang="zh-CN" sz="1400" dirty="0">
-                <a:solidFill>
-                  <a:schemeClr val="tx1"/>
-                </a:solidFill>
-                <a:latin typeface="微软雅黑" charset="-122"/>
-                <a:ea typeface="微软雅黑" charset="-122"/>
-                <a:sym typeface="+mn-ea"/>
-              </a:rPr>
-              <a:t> O-RAN </a:t>
-            </a:r>
-            <a:r>
-              <a:rPr lang="zh-CN" altLang="en-US" sz="1400" dirty="0">
-                <a:solidFill>
-                  <a:schemeClr val="tx1"/>
-                </a:solidFill>
-                <a:latin typeface="微软雅黑" charset="-122"/>
-                <a:ea typeface="微软雅黑" charset="-122"/>
-                <a:sym typeface="+mn-ea"/>
-              </a:rPr>
-              <a:t>控制应用，</a:t>
-            </a:r>
-            <a:r>
-              <a:rPr lang="en-US" altLang="zh-CN" sz="1400" dirty="0">
-                <a:solidFill>
-                  <a:schemeClr val="tx1"/>
-                </a:solidFill>
-                <a:latin typeface="微软雅黑" charset="-122"/>
-                <a:ea typeface="微软雅黑" charset="-122"/>
-                <a:sym typeface="+mn-ea"/>
-              </a:rPr>
-              <a:t>UE </a:t>
-            </a:r>
-            <a:r>
-              <a:rPr lang="zh-CN" altLang="en-US" sz="1400" dirty="0">
-                <a:solidFill>
-                  <a:schemeClr val="tx1"/>
-                </a:solidFill>
-                <a:latin typeface="微软雅黑" charset="-122"/>
-                <a:ea typeface="微软雅黑" charset="-122"/>
-                <a:sym typeface="+mn-ea"/>
-              </a:rPr>
-              <a:t>或模拟</a:t>
-            </a:r>
-            <a:r>
-              <a:rPr lang="en-US" altLang="zh-CN" sz="1400" dirty="0">
-                <a:solidFill>
-                  <a:schemeClr val="tx1"/>
-                </a:solidFill>
-                <a:latin typeface="微软雅黑" charset="-122"/>
-                <a:ea typeface="微软雅黑" charset="-122"/>
-                <a:sym typeface="+mn-ea"/>
-              </a:rPr>
-              <a:t> UE </a:t>
-            </a:r>
-            <a:r>
-              <a:rPr lang="zh-CN" altLang="en-US" sz="1400" dirty="0">
-                <a:solidFill>
-                  <a:schemeClr val="tx1"/>
-                </a:solidFill>
-                <a:latin typeface="微软雅黑" charset="-122"/>
-                <a:ea typeface="微软雅黑" charset="-122"/>
-                <a:sym typeface="+mn-ea"/>
-              </a:rPr>
-              <a:t>可以承担业务和测试信号产生。</a:t>
+              <a:t>，支持评估现用模型及候选模型，避免仅凭开发阶段的测试结果长期采用预测。其价值在于为波束预测的持续使用和模型替换提供判断依据，降低不适用模型影响通信的风险。</a:t>
             </a:r>
             <a:endParaRPr lang="zh-CN" altLang="en-US" sz="1400" dirty="0">
               <a:solidFill>
@@ -15923,6 +17355,17 @@
               <a:buNone/>
             </a:pPr>
             <a:r>
+              <a:rPr lang="zh-CN" altLang="en-US" sz="1400" b="1" dirty="0">
+                <a:solidFill>
+                  <a:srgbClr val="FF0000"/>
+                </a:solidFill>
+                <a:latin typeface="微软雅黑" charset="-122"/>
+                <a:ea typeface="微软雅黑" charset="-122"/>
+                <a:sym typeface="+mn-ea"/>
+              </a:rPr>
+              <a:t>技术概述：</a:t>
+            </a:r>
+            <a:r>
               <a:rPr lang="zh-CN" altLang="en-US" sz="1400" dirty="0">
                 <a:solidFill>
                   <a:schemeClr val="tx1"/>
@@ -15931,7 +17374,29 @@
                 <a:ea typeface="微软雅黑" charset="-122"/>
                 <a:sym typeface="+mn-ea"/>
               </a:rPr>
-              <a:t>输入包括环境配置、测试脚本、动作参数和测试数据，输出包括执行结果、响应日志及性能报告。</a:t>
+              <a:t>波束预测模型部署到终端后，仍需判断当前环境是否符合其适用条件，以及预测是否得到实测支持。苹果提出在</a:t>
+            </a:r>
+            <a:r>
+              <a:rPr lang="en-US" altLang="zh-CN" sz="1400" dirty="0">
+                <a:solidFill>
+                  <a:schemeClr val="tx1"/>
+                </a:solidFill>
+                <a:latin typeface="微软雅黑" charset="-122"/>
+                <a:ea typeface="微软雅黑" charset="-122"/>
+                <a:sym typeface="+mn-ea"/>
+              </a:rPr>
+              <a:t> UE </a:t>
+            </a:r>
+            <a:r>
+              <a:rPr lang="zh-CN" altLang="en-US" sz="1400" dirty="0">
+                <a:solidFill>
+                  <a:schemeClr val="tx1"/>
+                </a:solidFill>
+                <a:latin typeface="微软雅黑" charset="-122"/>
+                <a:ea typeface="微软雅黑" charset="-122"/>
+                <a:sym typeface="+mn-ea"/>
+              </a:rPr>
+              <a:t>侧持续检查模型的适用条件、输出分布和预测准确性，并将评价结果用于模型管理。</a:t>
             </a:r>
             <a:r>
               <a:rPr lang="zh-CN" altLang="en-US" sz="1400" b="1" dirty="0">
@@ -15942,25 +17407,19 @@
                 <a:ea typeface="微软雅黑" charset="-122"/>
                 <a:sym typeface="+mn-ea"/>
               </a:rPr>
-              <a:t>对终端测试的价值主要在任务组织和自动化机制，终端模型及仪表接口需要另外适配。</a:t>
-            </a:r>
-            <a:endParaRPr lang="zh-CN" altLang="en-US" sz="1400" b="1" dirty="0">
-              <a:solidFill>
-                <a:schemeClr val="tx1"/>
-              </a:solidFill>
-              <a:latin typeface="微软雅黑" charset="-122"/>
-              <a:ea typeface="微软雅黑" charset="-122"/>
-              <a:sym typeface="+mn-ea"/>
-            </a:endParaRPr>
-          </a:p>
-          <a:p>
-            <a:pPr indent="0">
-              <a:lnSpc>
-                <a:spcPct val="130000"/>
-              </a:lnSpc>
-              <a:buFont typeface="Arial" panose="020B0604020202020204" pitchFamily="34" charset="0"/>
-              <a:buNone/>
-            </a:pPr>
+              <a:t>方案将</a:t>
+            </a:r>
+            <a:r>
+              <a:rPr lang="en-US" altLang="zh-CN" sz="1400" b="1" dirty="0">
+                <a:solidFill>
+                  <a:schemeClr val="tx1"/>
+                </a:solidFill>
+                <a:latin typeface="微软雅黑" charset="-122"/>
+                <a:ea typeface="微软雅黑" charset="-122"/>
+                <a:sym typeface="+mn-ea"/>
+              </a:rPr>
+              <a:t>“</a:t>
+            </a:r>
             <a:r>
               <a:rPr lang="zh-CN" altLang="en-US" sz="1400" b="1" dirty="0">
                 <a:solidFill>
@@ -15970,35 +17429,18 @@
                 <a:ea typeface="微软雅黑" charset="-122"/>
                 <a:sym typeface="+mn-ea"/>
               </a:rPr>
-              <a:t>研究方法：</a:t>
-            </a:r>
-            <a:endParaRPr lang="zh-CN" altLang="en-US" sz="1400" b="1" dirty="0">
-              <a:solidFill>
-                <a:schemeClr val="tx1"/>
-              </a:solidFill>
-              <a:latin typeface="微软雅黑" charset="-122"/>
-              <a:ea typeface="微软雅黑" charset="-122"/>
-              <a:sym typeface="+mn-ea"/>
-            </a:endParaRPr>
-          </a:p>
-          <a:p>
-            <a:pPr indent="0">
-              <a:lnSpc>
-                <a:spcPct val="130000"/>
-              </a:lnSpc>
-              <a:buFont typeface="Arial" panose="020B0604020202020204" pitchFamily="34" charset="0"/>
-              <a:buNone/>
-            </a:pPr>
-            <a:r>
-              <a:rPr lang="en-US" sz="1400" b="1" dirty="0">
-                <a:solidFill>
-                  <a:schemeClr val="tx1"/>
-                </a:solidFill>
-                <a:latin typeface="微软雅黑" charset="-122"/>
-                <a:ea typeface="微软雅黑" charset="-122"/>
-                <a:sym typeface="+mn-ea"/>
-              </a:rPr>
-              <a:t>a. </a:t>
+              <a:t>当前条件是否适合模型</a:t>
+            </a:r>
+            <a:r>
+              <a:rPr lang="en-US" altLang="zh-CN" sz="1400" b="1" dirty="0">
+                <a:solidFill>
+                  <a:schemeClr val="tx1"/>
+                </a:solidFill>
+                <a:latin typeface="微软雅黑" charset="-122"/>
+                <a:ea typeface="微软雅黑" charset="-122"/>
+                <a:sym typeface="+mn-ea"/>
+              </a:rPr>
+              <a:t>”</a:t>
             </a:r>
             <a:r>
               <a:rPr lang="zh-CN" altLang="en-US" sz="1400" b="1" dirty="0">
@@ -16009,7 +17451,51 @@
                 <a:ea typeface="微软雅黑" charset="-122"/>
                 <a:sym typeface="+mn-ea"/>
               </a:rPr>
-              <a:t>用配置文件和脚本固定测试条件与步骤。</a:t>
+              <a:t>与</a:t>
+            </a:r>
+            <a:r>
+              <a:rPr lang="en-US" altLang="zh-CN" sz="1400" b="1" dirty="0">
+                <a:solidFill>
+                  <a:schemeClr val="tx1"/>
+                </a:solidFill>
+                <a:latin typeface="微软雅黑" charset="-122"/>
+                <a:ea typeface="微软雅黑" charset="-122"/>
+                <a:sym typeface="+mn-ea"/>
+              </a:rPr>
+              <a:t>“</a:t>
+            </a:r>
+            <a:r>
+              <a:rPr lang="zh-CN" altLang="en-US" sz="1400" b="1" dirty="0">
+                <a:solidFill>
+                  <a:schemeClr val="tx1"/>
+                </a:solidFill>
+                <a:latin typeface="微软雅黑" charset="-122"/>
+                <a:ea typeface="微软雅黑" charset="-122"/>
+                <a:sym typeface="+mn-ea"/>
+              </a:rPr>
+              <a:t>模型预测是否准确</a:t>
+            </a:r>
+            <a:r>
+              <a:rPr lang="en-US" altLang="zh-CN" sz="1400" b="1" dirty="0">
+                <a:solidFill>
+                  <a:schemeClr val="tx1"/>
+                </a:solidFill>
+                <a:latin typeface="微软雅黑" charset="-122"/>
+                <a:ea typeface="微软雅黑" charset="-122"/>
+                <a:sym typeface="+mn-ea"/>
+              </a:rPr>
+              <a:t>”</a:t>
+            </a:r>
+            <a:r>
+              <a:rPr lang="zh-CN" altLang="en-US" sz="1400" b="1" dirty="0">
+                <a:solidFill>
+                  <a:schemeClr val="tx1"/>
+                </a:solidFill>
+                <a:latin typeface="微软雅黑" charset="-122"/>
+                <a:ea typeface="微软雅黑" charset="-122"/>
+                <a:sym typeface="+mn-ea"/>
+              </a:rPr>
+              <a:t>分开判断，同时分别记录启用状态和验证状态。</a:t>
             </a:r>
             <a:r>
               <a:rPr lang="zh-CN" altLang="en-US" sz="1400" dirty="0">
@@ -16020,7 +17506,7 @@
                 <a:ea typeface="微软雅黑" charset="-122"/>
                 <a:sym typeface="+mn-ea"/>
               </a:rPr>
-              <a:t>配置描述节点和环境，脚本描述动作顺序及参数。将测试过程保存下来，便于在相同条件下重新执行，也使模型或控制程序更新后的对照具有一致基础。</a:t>
+              <a:t>启用模型的结果参与通信，未启用模型也可以生成供评估的预测，为后续使用积累依据。</a:t>
             </a:r>
             <a:endParaRPr lang="zh-CN" altLang="en-US" sz="1400" dirty="0">
               <a:solidFill>
@@ -16040,6 +17526,28 @@
               <a:buNone/>
             </a:pPr>
             <a:r>
+              <a:rPr lang="zh-CN" altLang="en-US" sz="1400" dirty="0">
+                <a:solidFill>
+                  <a:schemeClr val="tx1"/>
+                </a:solidFill>
+                <a:latin typeface="微软雅黑" charset="-122"/>
+                <a:ea typeface="微软雅黑" charset="-122"/>
+                <a:sym typeface="+mn-ea"/>
+              </a:rPr>
+              <a:t>输入包括波束对测量、运行条件、模型配置和预测结果。</a:t>
+            </a:r>
+            <a:r>
+              <a:rPr lang="zh-CN" altLang="en-US" sz="1400" b="1" dirty="0">
+                <a:solidFill>
+                  <a:schemeClr val="tx1"/>
+                </a:solidFill>
+                <a:latin typeface="微软雅黑" charset="-122"/>
+                <a:ea typeface="微软雅黑" charset="-122"/>
+                <a:sym typeface="+mn-ea"/>
+              </a:rPr>
+              <a:t>模型输出预测</a:t>
+            </a:r>
+            <a:r>
               <a:rPr lang="en-US" altLang="zh-CN" sz="1400" b="1" dirty="0">
                 <a:solidFill>
                   <a:schemeClr val="tx1"/>
@@ -16048,7 +17556,7 @@
                 <a:ea typeface="微软雅黑" charset="-122"/>
                 <a:sym typeface="+mn-ea"/>
               </a:rPr>
-              <a:t>b. </a:t>
+              <a:t> RSRP </a:t>
             </a:r>
             <a:r>
               <a:rPr lang="zh-CN" altLang="en-US" sz="1400" b="1" dirty="0">
@@ -16059,7 +17567,7 @@
                 <a:ea typeface="微软雅黑" charset="-122"/>
                 <a:sym typeface="+mn-ea"/>
               </a:rPr>
-              <a:t>由服务器协调任务，</a:t>
+              <a:t>与</a:t>
             </a:r>
             <a:r>
               <a:rPr lang="en-US" altLang="zh-CN" sz="1400" b="1" dirty="0">
@@ -16070,7 +17578,7 @@
                 <a:ea typeface="微软雅黑" charset="-122"/>
                 <a:sym typeface="+mn-ea"/>
               </a:rPr>
-              <a:t>Actor </a:t>
+              <a:t> Top-K </a:t>
             </a:r>
             <a:r>
               <a:rPr lang="zh-CN" altLang="en-US" sz="1400" b="1" dirty="0">
@@ -16081,7 +17589,7 @@
                 <a:ea typeface="微软雅黑" charset="-122"/>
                 <a:sym typeface="+mn-ea"/>
               </a:rPr>
-              <a:t>完成具体交互。</a:t>
+              <a:t>波束对，验证模块输出性能评分和有效性状态</a:t>
             </a:r>
             <a:r>
               <a:rPr lang="zh-CN" altLang="en-US" sz="1400" dirty="0">
@@ -16092,7 +17600,7 @@
                 <a:ea typeface="微软雅黑" charset="-122"/>
                 <a:sym typeface="+mn-ea"/>
               </a:rPr>
-              <a:t>服务器检查脚本、分配动作并监控状态，</a:t>
+              <a:t>，</a:t>
             </a:r>
             <a:r>
               <a:rPr lang="en-US" altLang="zh-CN" sz="1400" dirty="0">
@@ -16103,7 +17611,7 @@
                 <a:ea typeface="微软雅黑" charset="-122"/>
                 <a:sym typeface="+mn-ea"/>
               </a:rPr>
-              <a:t>Actor </a:t>
+              <a:t>UE </a:t>
             </a:r>
             <a:r>
               <a:rPr lang="zh-CN" altLang="en-US" sz="1400" dirty="0">
@@ -16114,7 +17622,7 @@
                 <a:ea typeface="微软雅黑" charset="-122"/>
                 <a:sym typeface="+mn-ea"/>
               </a:rPr>
-              <a:t>通过适配器与被测系统交互。任务组织与系统接口分开后，可以保留执行框架，逐步替换或增加被测对象。</a:t>
+              <a:t>据此管理模型使用，并向服务器反馈。</a:t>
             </a:r>
             <a:endParaRPr lang="zh-CN" altLang="en-US" sz="1400" dirty="0">
               <a:solidFill>
@@ -16128,32 +17636,71 @@
           <a:p>
             <a:pPr indent="0">
               <a:lnSpc>
-                <a:spcPct val="130000"/>
+                <a:spcPct val="120000"/>
               </a:lnSpc>
               <a:buFont typeface="Arial" panose="020B0604020202020204" pitchFamily="34" charset="0"/>
               <a:buNone/>
             </a:pPr>
             <a:r>
-              <a:rPr lang="en-US" altLang="zh-CN" sz="1400" b="1" dirty="0">
-                <a:solidFill>
-                  <a:schemeClr val="tx1"/>
-                </a:solidFill>
-                <a:latin typeface="微软雅黑" charset="-122"/>
-                <a:ea typeface="微软雅黑" charset="-122"/>
-                <a:sym typeface="+mn-ea"/>
-              </a:rPr>
-              <a:t>c. </a:t>
-            </a:r>
-            <a:r>
               <a:rPr lang="zh-CN" altLang="en-US" sz="1400" b="1" dirty="0">
                 <a:solidFill>
-                  <a:schemeClr val="tx1"/>
-                </a:solidFill>
-                <a:latin typeface="微软雅黑" charset="-122"/>
-                <a:ea typeface="微软雅黑" charset="-122"/>
-                <a:sym typeface="+mn-ea"/>
-              </a:rPr>
-              <a:t>探索容易触发异常的输入组合。</a:t>
+                  <a:srgbClr val="FF0000"/>
+                </a:solidFill>
+                <a:latin typeface="微软雅黑" charset="-122"/>
+                <a:ea typeface="微软雅黑" charset="-122"/>
+                <a:sym typeface="+mn-ea"/>
+              </a:rPr>
+              <a:t>研究方法：</a:t>
+            </a:r>
+            <a:endParaRPr lang="zh-CN" altLang="en-US" sz="1400" b="1" dirty="0">
+              <a:solidFill>
+                <a:srgbClr val="FF0000"/>
+              </a:solidFill>
+              <a:latin typeface="微软雅黑" charset="-122"/>
+              <a:ea typeface="微软雅黑" charset="-122"/>
+              <a:sym typeface="+mn-ea"/>
+            </a:endParaRPr>
+          </a:p>
+          <a:p>
+            <a:pPr indent="0">
+              <a:lnSpc>
+                <a:spcPct val="120000"/>
+              </a:lnSpc>
+              <a:buFont typeface="Arial" panose="020B0604020202020204" pitchFamily="34" charset="0"/>
+              <a:buNone/>
+            </a:pPr>
+            <a:r>
+              <a:rPr lang="en-US" sz="1400" b="1" dirty="0">
+                <a:solidFill>
+                  <a:schemeClr val="tx1"/>
+                </a:solidFill>
+                <a:latin typeface="微软雅黑" charset="-122"/>
+                <a:ea typeface="微软雅黑" charset="-122"/>
+                <a:sym typeface="+mn-ea"/>
+              </a:rPr>
+              <a:t>a. </a:t>
+            </a:r>
+            <a:r>
+              <a:rPr lang="zh-CN" altLang="en-US" sz="1400" b="1" dirty="0">
+                <a:solidFill>
+                  <a:schemeClr val="tx1"/>
+                </a:solidFill>
+                <a:latin typeface="微软雅黑" charset="-122"/>
+                <a:ea typeface="微软雅黑" charset="-122"/>
+                <a:sym typeface="+mn-ea"/>
+              </a:rPr>
+              <a:t>检查环境与输入是否符合模型适用范围。</a:t>
+            </a:r>
+            <a:r>
+              <a:rPr lang="en-US" altLang="zh-CN" sz="1400" dirty="0">
+                <a:solidFill>
+                  <a:schemeClr val="tx1"/>
+                </a:solidFill>
+                <a:latin typeface="微软雅黑" charset="-122"/>
+                <a:ea typeface="微软雅黑" charset="-122"/>
+                <a:sym typeface="+mn-ea"/>
+              </a:rPr>
+              <a:t>KPI-3 </a:t>
             </a:r>
             <a:r>
               <a:rPr lang="zh-CN" altLang="en-US" sz="1400" dirty="0">
@@ -16164,7 +17711,7 @@
                 <a:ea typeface="微软雅黑" charset="-122"/>
                 <a:sym typeface="+mn-ea"/>
               </a:rPr>
-              <a:t>论文讨论敏感性分析、</a:t>
+              <a:t>检查信噪比、多普勒、时延扩展等运行条件，以及输入数据是否符合模型预期。对于不适用或异常输入，</a:t>
             </a:r>
             <a:r>
               <a:rPr lang="en-US" altLang="zh-CN" sz="1400" dirty="0">
@@ -16175,7 +17722,7 @@
                 <a:ea typeface="微软雅黑" charset="-122"/>
                 <a:sym typeface="+mn-ea"/>
               </a:rPr>
-              <a:t>AI </a:t>
+              <a:t>UE </a:t>
             </a:r>
             <a:r>
               <a:rPr lang="zh-CN" altLang="en-US" sz="1400" dirty="0">
@@ -16186,7 +17733,7 @@
                 <a:ea typeface="微软雅黑" charset="-122"/>
                 <a:sym typeface="+mn-ea"/>
               </a:rPr>
-              <a:t>模糊测试和强化学习等方法，帮助探索较大的输入空间。项目官方</a:t>
+              <a:t>可以暂不进行推理和有效性判断。这样，测试能够保留</a:t>
             </a:r>
             <a:r>
               <a:rPr lang="en-US" altLang="zh-CN" sz="1400" dirty="0">
@@ -16197,7 +17744,7 @@
                 <a:ea typeface="微软雅黑" charset="-122"/>
                 <a:sym typeface="+mn-ea"/>
               </a:rPr>
-              <a:t> v2.0 </a:t>
+              <a:t>“</a:t>
             </a:r>
             <a:r>
               <a:rPr lang="zh-CN" altLang="en-US" sz="1400" dirty="0">
@@ -16208,7 +17755,7 @@
                 <a:ea typeface="微软雅黑" charset="-122"/>
                 <a:sym typeface="+mn-ea"/>
               </a:rPr>
-              <a:t>公告明确列出，使用遗传算法生成不同</a:t>
+              <a:t>当前样本不适合评价</a:t>
             </a:r>
             <a:r>
               <a:rPr lang="en-US" altLang="zh-CN" sz="1400" dirty="0">
@@ -16219,7 +17766,7 @@
                 <a:ea typeface="微软雅黑" charset="-122"/>
                 <a:sym typeface="+mn-ea"/>
               </a:rPr>
-              <a:t> UE </a:t>
+              <a:t>”</a:t>
             </a:r>
             <a:r>
               <a:rPr lang="zh-CN" altLang="en-US" sz="1400" dirty="0">
@@ -16230,7 +17777,7 @@
                 <a:ea typeface="微软雅黑" charset="-122"/>
                 <a:sym typeface="+mn-ea"/>
               </a:rPr>
-              <a:t>流量，测试流量平衡方法。论文提出的研究范围与各版本已实现能力需要分别核查。</a:t>
+              <a:t>的情况，避免将输入问题直接归为模型失效。</a:t>
             </a:r>
             <a:endParaRPr lang="zh-CN" altLang="en-US" sz="1400" dirty="0">
               <a:solidFill>
@@ -16244,7 +17791,7 @@
           <a:p>
             <a:pPr indent="0">
               <a:lnSpc>
-                <a:spcPct val="130000"/>
+                <a:spcPct val="120000"/>
               </a:lnSpc>
               <a:buFont typeface="Arial" panose="020B0604020202020204" pitchFamily="34" charset="0"/>
               <a:buNone/>
@@ -16258,7 +17805,7 @@
                 <a:ea typeface="微软雅黑" charset="-122"/>
                 <a:sym typeface="+mn-ea"/>
               </a:rPr>
-              <a:t>d. </a:t>
+              <a:t>b. </a:t>
             </a:r>
             <a:r>
               <a:rPr lang="zh-CN" altLang="en-US" sz="1400" b="1" dirty="0">
@@ -16269,7 +17816,7 @@
                 <a:ea typeface="微软雅黑" charset="-122"/>
                 <a:sym typeface="+mn-ea"/>
               </a:rPr>
-              <a:t>保存过程与结果，支持失败复现和回归测试。</a:t>
+              <a:t>检查预测输出是否具有异常特征。</a:t>
             </a:r>
             <a:r>
               <a:rPr lang="zh-CN" altLang="en-US" sz="1400" dirty="0">
@@ -16280,7 +17827,29 @@
                 <a:ea typeface="微软雅黑" charset="-122"/>
                 <a:sym typeface="+mn-ea"/>
               </a:rPr>
-              <a:t>记录配置、动作及系统响应，并汇总吞吐量、时延或丢包等性能指标。发现异常后，可以定位到对应条件；修正模型或程序后，再运行相同测试，观察问题是否仍然存在。</a:t>
+              <a:t>模型产生预测后，</a:t>
+            </a:r>
+            <a:r>
+              <a:rPr lang="en-US" altLang="zh-CN" sz="1400" dirty="0">
+                <a:solidFill>
+                  <a:schemeClr val="tx1"/>
+                </a:solidFill>
+                <a:latin typeface="微软雅黑" charset="-122"/>
+                <a:ea typeface="微软雅黑" charset="-122"/>
+                <a:sym typeface="+mn-ea"/>
+              </a:rPr>
+              <a:t>KPI-2 </a:t>
+            </a:r>
+            <a:r>
+              <a:rPr lang="zh-CN" altLang="en-US" sz="1400" dirty="0">
+                <a:solidFill>
+                  <a:schemeClr val="tx1"/>
+                </a:solidFill>
+                <a:latin typeface="微软雅黑" charset="-122"/>
+                <a:ea typeface="微软雅黑" charset="-122"/>
+                <a:sym typeface="+mn-ea"/>
+              </a:rPr>
+              <a:t>检查输出分布是否符合正常特征，原文列举单类支持向量机等异常检测工具。输出异常时，可以暂不进入准确性评价。这一步提供异常筛查，后续仍需要实测结果确认预测表现。</a:t>
             </a:r>
             <a:endParaRPr lang="zh-CN" altLang="en-US" sz="1400" dirty="0">
               <a:solidFill>
@@ -16294,12 +17863,23 @@
           <a:p>
             <a:pPr indent="0">
               <a:lnSpc>
-                <a:spcPct val="130000"/>
+                <a:spcPct val="120000"/>
               </a:lnSpc>
               <a:buFont typeface="Arial" panose="020B0604020202020204" pitchFamily="34" charset="0"/>
               <a:buNone/>
             </a:pPr>
             <a:r>
+              <a:rPr lang="en-US" altLang="zh-CN" sz="1400" b="1" dirty="0">
+                <a:solidFill>
+                  <a:schemeClr val="tx1"/>
+                </a:solidFill>
+                <a:latin typeface="微软雅黑" charset="-122"/>
+                <a:ea typeface="微软雅黑" charset="-122"/>
+                <a:sym typeface="+mn-ea"/>
+              </a:rPr>
+              <a:t>c. </a:t>
+            </a:r>
+            <a:r>
               <a:rPr lang="zh-CN" altLang="en-US" sz="1400" b="1" dirty="0">
                 <a:solidFill>
                   <a:schemeClr val="tx1"/>
@@ -16308,9 +17888,141 @@
                 <a:ea typeface="微软雅黑" charset="-122"/>
                 <a:sym typeface="+mn-ea"/>
               </a:rPr>
-              <a:t>研究成熟度与启示：</a:t>
-            </a:r>
-            <a:endParaRPr lang="zh-CN" altLang="en-US" sz="1400" b="1" dirty="0">
+              <a:t>取得对应实测结果，形成模型有效性评价。</a:t>
+            </a:r>
+            <a:r>
+              <a:rPr lang="en-US" altLang="zh-CN" sz="1400" dirty="0">
+                <a:solidFill>
+                  <a:schemeClr val="tx1"/>
+                </a:solidFill>
+                <a:latin typeface="微软雅黑" charset="-122"/>
+                <a:ea typeface="微软雅黑" charset="-122"/>
+                <a:sym typeface="+mn-ea"/>
+              </a:rPr>
+              <a:t>UE </a:t>
+            </a:r>
+            <a:r>
+              <a:rPr lang="zh-CN" altLang="en-US" sz="1400" dirty="0">
+                <a:solidFill>
+                  <a:schemeClr val="tx1"/>
+                </a:solidFill>
+                <a:latin typeface="微软雅黑" charset="-122"/>
+                <a:ea typeface="微软雅黑" charset="-122"/>
+                <a:sym typeface="+mn-ea"/>
+              </a:rPr>
+              <a:t>上报预测</a:t>
+            </a:r>
+            <a:r>
+              <a:rPr lang="en-US" altLang="zh-CN" sz="1400" dirty="0">
+                <a:solidFill>
+                  <a:schemeClr val="tx1"/>
+                </a:solidFill>
+                <a:latin typeface="微软雅黑" charset="-122"/>
+                <a:ea typeface="微软雅黑" charset="-122"/>
+                <a:sym typeface="+mn-ea"/>
+              </a:rPr>
+              <a:t> Top-K </a:t>
+            </a:r>
+            <a:r>
+              <a:rPr lang="zh-CN" altLang="en-US" sz="1400" dirty="0">
+                <a:solidFill>
+                  <a:schemeClr val="tx1"/>
+                </a:solidFill>
+                <a:latin typeface="微软雅黑" charset="-122"/>
+                <a:ea typeface="微软雅黑" charset="-122"/>
+                <a:sym typeface="+mn-ea"/>
+              </a:rPr>
+              <a:t>波束对，基站发送相应信号，</a:t>
+            </a:r>
+            <a:r>
+              <a:rPr lang="en-US" altLang="zh-CN" sz="1400" dirty="0">
+                <a:solidFill>
+                  <a:schemeClr val="tx1"/>
+                </a:solidFill>
+                <a:latin typeface="微软雅黑" charset="-122"/>
+                <a:ea typeface="微软雅黑" charset="-122"/>
+                <a:sym typeface="+mn-ea"/>
+              </a:rPr>
+              <a:t>UE </a:t>
+            </a:r>
+            <a:r>
+              <a:rPr lang="zh-CN" altLang="en-US" sz="1400" dirty="0">
+                <a:solidFill>
+                  <a:schemeClr val="tx1"/>
+                </a:solidFill>
+                <a:latin typeface="微软雅黑" charset="-122"/>
+                <a:ea typeface="微软雅黑" charset="-122"/>
+                <a:sym typeface="+mn-ea"/>
+              </a:rPr>
+              <a:t>再进行测量。验证模块比较同一波束对的预测</a:t>
+            </a:r>
+            <a:r>
+              <a:rPr lang="en-US" altLang="zh-CN" sz="1400" dirty="0">
+                <a:solidFill>
+                  <a:schemeClr val="tx1"/>
+                </a:solidFill>
+                <a:latin typeface="微软雅黑" charset="-122"/>
+                <a:ea typeface="微软雅黑" charset="-122"/>
+                <a:sym typeface="+mn-ea"/>
+              </a:rPr>
+              <a:t> RSRP </a:t>
+            </a:r>
+            <a:r>
+              <a:rPr lang="zh-CN" altLang="en-US" sz="1400" dirty="0">
+                <a:solidFill>
+                  <a:schemeClr val="tx1"/>
+                </a:solidFill>
+                <a:latin typeface="微软雅黑" charset="-122"/>
+                <a:ea typeface="微软雅黑" charset="-122"/>
+                <a:sym typeface="+mn-ea"/>
+              </a:rPr>
+              <a:t>与实测</a:t>
+            </a:r>
+            <a:r>
+              <a:rPr lang="en-US" altLang="zh-CN" sz="1400" dirty="0">
+                <a:solidFill>
+                  <a:schemeClr val="tx1"/>
+                </a:solidFill>
+                <a:latin typeface="微软雅黑" charset="-122"/>
+                <a:ea typeface="微软雅黑" charset="-122"/>
+                <a:sym typeface="+mn-ea"/>
+              </a:rPr>
+              <a:t> RSRP</a:t>
+            </a:r>
+            <a:r>
+              <a:rPr lang="zh-CN" altLang="en-US" sz="1400" dirty="0">
+                <a:solidFill>
+                  <a:schemeClr val="tx1"/>
+                </a:solidFill>
+                <a:latin typeface="微软雅黑" charset="-122"/>
+                <a:ea typeface="微软雅黑" charset="-122"/>
+                <a:sym typeface="+mn-ea"/>
+              </a:rPr>
+              <a:t>，并对有效性指标进行平滑，形成</a:t>
+            </a:r>
+            <a:r>
+              <a:rPr lang="en-US" altLang="zh-CN" sz="1400" dirty="0">
+                <a:solidFill>
+                  <a:schemeClr val="tx1"/>
+                </a:solidFill>
+                <a:latin typeface="微软雅黑" charset="-122"/>
+                <a:ea typeface="微软雅黑" charset="-122"/>
+                <a:sym typeface="+mn-ea"/>
+              </a:rPr>
+              <a:t> KPI-1</a:t>
+            </a:r>
+            <a:r>
+              <a:rPr lang="zh-CN" altLang="en-US" sz="1400" dirty="0">
+                <a:solidFill>
+                  <a:schemeClr val="tx1"/>
+                </a:solidFill>
+                <a:latin typeface="微软雅黑" charset="-122"/>
+                <a:ea typeface="微软雅黑" charset="-122"/>
+                <a:sym typeface="+mn-ea"/>
+              </a:rPr>
+              <a:t>，使评价建立在可对应的预测和观测上。</a:t>
+            </a:r>
+            <a:endParaRPr lang="zh-CN" altLang="en-US" sz="1400" dirty="0">
               <a:solidFill>
                 <a:schemeClr val="tx1"/>
               </a:solidFill>
@@ -16322,12 +18034,34 @@
           <a:p>
             <a:pPr indent="0">
               <a:lnSpc>
-                <a:spcPct val="130000"/>
+                <a:spcPct val="120000"/>
               </a:lnSpc>
               <a:buFont typeface="Arial" panose="020B0604020202020204" pitchFamily="34" charset="0"/>
               <a:buNone/>
             </a:pPr>
             <a:r>
+              <a:rPr lang="en-US" altLang="zh-CN" sz="1400" b="1" dirty="0">
+                <a:solidFill>
+                  <a:schemeClr val="tx1"/>
+                </a:solidFill>
+                <a:latin typeface="微软雅黑" charset="-122"/>
+                <a:ea typeface="微软雅黑" charset="-122"/>
+                <a:sym typeface="+mn-ea"/>
+              </a:rPr>
+              <a:t>d. </a:t>
+            </a:r>
+            <a:r>
+              <a:rPr lang="zh-CN" altLang="en-US" sz="1400" b="1" dirty="0">
+                <a:solidFill>
+                  <a:schemeClr val="tx1"/>
+                </a:solidFill>
+                <a:latin typeface="微软雅黑" charset="-122"/>
+                <a:ea typeface="微软雅黑" charset="-122"/>
+                <a:sym typeface="+mn-ea"/>
+              </a:rPr>
+              <a:t>管理状态，并将验证结果反馈给服务器。</a:t>
+            </a:r>
+            <a:r>
               <a:rPr lang="zh-CN" altLang="en-US" sz="1400" dirty="0">
                 <a:solidFill>
                   <a:schemeClr val="tx1"/>
@@ -16336,7 +18070,7 @@
                 <a:ea typeface="微软雅黑" charset="-122"/>
                 <a:sym typeface="+mn-ea"/>
               </a:rPr>
-              <a:t>项目已有公开代码和运行文档，可从文档给出的</a:t>
+              <a:t>未启用模型可以接受评估，模型失效时，</a:t>
             </a:r>
             <a:r>
               <a:rPr lang="en-US" altLang="zh-CN" sz="1400" dirty="0">
@@ -16347,7 +18081,7 @@
                 <a:ea typeface="微软雅黑" charset="-122"/>
                 <a:sym typeface="+mn-ea"/>
               </a:rPr>
-              <a:t> ZeroMQ </a:t>
+              <a:t>UE </a:t>
             </a:r>
             <a:r>
               <a:rPr lang="zh-CN" altLang="en-US" sz="1400" dirty="0">
@@ -16358,18 +18092,57 @@
                 <a:ea typeface="微软雅黑" charset="-122"/>
                 <a:sym typeface="+mn-ea"/>
               </a:rPr>
-              <a:t>虚拟无线模式开始复现。</a:t>
-            </a:r>
+              <a:t>可退回依据实测</a:t>
+            </a:r>
+            <a:r>
+              <a:rPr lang="en-US" altLang="zh-CN" sz="1400" dirty="0">
+                <a:solidFill>
+                  <a:schemeClr val="tx1"/>
+                </a:solidFill>
+                <a:latin typeface="微软雅黑" charset="-122"/>
+                <a:ea typeface="微软雅黑" charset="-122"/>
+                <a:sym typeface="+mn-ea"/>
+              </a:rPr>
+              <a:t> RSRP </a:t>
+            </a:r>
+            <a:r>
+              <a:rPr lang="zh-CN" altLang="en-US" sz="1400" dirty="0">
+                <a:solidFill>
+                  <a:schemeClr val="tx1"/>
+                </a:solidFill>
+                <a:latin typeface="微软雅黑" charset="-122"/>
+                <a:ea typeface="微软雅黑" charset="-122"/>
+                <a:sym typeface="+mn-ea"/>
+              </a:rPr>
+              <a:t>选择波束。性能评分和模型标识上报服务器，为更新或重新训练提供依据。测试记录需要关联模型版本、运行条件和状态变化，才能追溯一次评分对应的实际配置。</a:t>
+            </a:r>
+            <a:endParaRPr lang="zh-CN" altLang="en-US" sz="1400" dirty="0">
+              <a:solidFill>
+                <a:schemeClr val="tx1"/>
+              </a:solidFill>
+              <a:latin typeface="微软雅黑" charset="-122"/>
+              <a:ea typeface="微软雅黑" charset="-122"/>
+              <a:sym typeface="+mn-ea"/>
+            </a:endParaRPr>
+          </a:p>
+          <a:p>
+            <a:pPr indent="0">
+              <a:lnSpc>
+                <a:spcPct val="120000"/>
+              </a:lnSpc>
+              <a:buFont typeface="Arial" panose="020B0604020202020204" pitchFamily="34" charset="0"/>
+              <a:buNone/>
+            </a:pPr>
             <a:r>
               <a:rPr lang="zh-CN" altLang="en-US" sz="1400" b="1" dirty="0">
                 <a:solidFill>
-                  <a:schemeClr val="tx1"/>
-                </a:solidFill>
-                <a:latin typeface="微软雅黑" charset="-122"/>
-                <a:ea typeface="微软雅黑" charset="-122"/>
-                <a:sym typeface="+mn-ea"/>
-              </a:rPr>
-              <a:t>迁移到终端时，可以将读取测量、获取预测、取得参考和计算误差写成测试动作，再由脚本统一组织。</a:t>
+                  <a:srgbClr val="FF0000"/>
+                </a:solidFill>
+                <a:latin typeface="微软雅黑" charset="-122"/>
+                <a:ea typeface="微软雅黑" charset="-122"/>
+                <a:sym typeface="+mn-ea"/>
+              </a:rPr>
+              <a:t>研究成熟度与启示：</a:t>
             </a:r>
             <a:r>
               <a:rPr lang="zh-CN" altLang="en-US" sz="1400" dirty="0">
@@ -16380,7 +18153,29 @@
                 <a:ea typeface="微软雅黑" charset="-122"/>
                 <a:sym typeface="+mn-ea"/>
               </a:rPr>
-              <a:t>实际工作仍需补齐终端与仪表适配器，以及对应判据。基础自动化与主动场景搜索可以分阶段建设。</a:t>
+              <a:t>公开文本给出流程和可选评价工具，未提供可复现代码及定量实验。</a:t>
+            </a:r>
+            <a:r>
+              <a:rPr lang="zh-CN" altLang="en-US" sz="1400" b="1" dirty="0">
+                <a:solidFill>
+                  <a:schemeClr val="tx1"/>
+                </a:solidFill>
+                <a:latin typeface="微软雅黑" charset="-122"/>
+                <a:ea typeface="微软雅黑" charset="-122"/>
+                <a:sym typeface="+mn-ea"/>
+              </a:rPr>
+              <a:t>终端测试应分别记录输入适用性、输出异常和预测误差，并检查失效后的回退结果。</a:t>
+            </a:r>
+            <a:r>
+              <a:rPr lang="zh-CN" altLang="en-US" sz="1400" dirty="0">
+                <a:solidFill>
+                  <a:schemeClr val="tx1"/>
+                </a:solidFill>
+                <a:latin typeface="微软雅黑" charset="-122"/>
+                <a:ea typeface="微软雅黑" charset="-122"/>
+                <a:sym typeface="+mn-ea"/>
+              </a:rPr>
+              <a:t>监控周期、判定门限和补充测量范围需要结合实验目标设计。评价时应同时关注验证可靠性与额外测量开销。</a:t>
             </a:r>
             <a:endParaRPr lang="zh-CN" altLang="en-US" sz="1400" dirty="0">
               <a:solidFill>
@@ -16401,8 +18196,8 @@
         </p:nvSpPr>
         <p:spPr>
           <a:xfrm>
-            <a:off x="6401842" y="178864"/>
-            <a:ext cx="4537731" cy="787505"/>
+            <a:off x="6874657" y="324566"/>
+            <a:ext cx="3967782" cy="641803"/>
           </a:xfrm>
           <a:prstGeom prst="rect">
             <a:avLst/>
@@ -16419,7 +18214,7 @@
                 <a:ea typeface="Times New Roman" panose="02020603050405020304" charset="0"/>
                 <a:cs typeface="Times New Roman" panose="02020603050405020304" charset="0"/>
               </a:rPr>
-              <a:t>[6] TANG B, SHAH V K, MAROJEVIC V, et al. AI testing framework for Next-G O-RAN networks: Requirements, design, and research opportunities[J]. IEEE Wireless Communications, 2023, 30(1): 70-77. DOI: 10.1109/MWC.001.2200213.</a:t>
+              <a:t>[4] APPLE INC. Dynamic model management and post-deployment verification for beam management spatial prediction: US20260039366A1[P]. 2026-02-05.</a:t>
             </a:r>
             <a:endParaRPr lang="en-US" altLang="zh-CN" sz="1200">
               <a:latin typeface="Times New Roman" panose="02020603050405020304" charset="0"/>
@@ -16465,7 +18260,7 @@
         <p:spPr>
           <a:xfrm>
             <a:off x="565150" y="339090"/>
-            <a:ext cx="5538115" cy="612775"/>
+            <a:ext cx="5507725" cy="612775"/>
           </a:xfrm>
         </p:spPr>
         <p:txBody>
@@ -16515,7 +18310,7 @@
         <p:spPr>
           <a:xfrm>
             <a:off x="258445" y="1025948"/>
-            <a:ext cx="11734165" cy="5489822"/>
+            <a:ext cx="11734165" cy="5543358"/>
           </a:xfrm>
           <a:prstGeom prst="rect">
             <a:avLst/>
@@ -16532,7 +18327,7 @@
           <a:p>
             <a:pPr indent="0">
               <a:lnSpc>
-                <a:spcPct val="120000"/>
+                <a:spcPct val="130000"/>
               </a:lnSpc>
               <a:buFont typeface="Arial" panose="020B0604020202020204" pitchFamily="34" charset="0"/>
               <a:buNone/>
@@ -16546,7 +18341,7 @@
                 <a:ea typeface="微软雅黑" charset="-122"/>
                 <a:sym typeface="+mn-ea"/>
               </a:rPr>
-              <a:t>4. AI </a:t>
+              <a:t>2. </a:t>
             </a:r>
             <a:r>
               <a:rPr lang="zh-CN" altLang="en-US" b="1" dirty="0">
@@ -16557,7 +18352,7 @@
                 <a:ea typeface="微软雅黑" charset="-122"/>
                 <a:sym typeface="+mn-ea"/>
               </a:rPr>
-              <a:t>波束管理</a:t>
+              <a:t>苹果专利：波束预测联合验收</a:t>
             </a:r>
             <a:r>
               <a:rPr lang="en-US" altLang="zh-CN" b="1" dirty="0">
@@ -16568,7 +18363,7 @@
                 <a:ea typeface="微软雅黑" charset="-122"/>
                 <a:sym typeface="+mn-ea"/>
               </a:rPr>
-              <a:t> OTA </a:t>
+              <a:t>——</a:t>
             </a:r>
             <a:r>
               <a:rPr lang="zh-CN" altLang="en-US" b="1" dirty="0">
@@ -16579,7 +18374,7 @@
                 <a:ea typeface="微软雅黑" charset="-122"/>
                 <a:sym typeface="+mn-ea"/>
               </a:rPr>
-              <a:t>测试：构建可信的多波束环境，支撑预测评估</a:t>
+              <a:t>同时检查波束选择与功率预测</a:t>
             </a:r>
             <a:r>
               <a:rPr lang="en-US" altLang="zh-CN" b="1" baseline="30000" dirty="0">
@@ -16603,7 +18398,7 @@
                 <a:cs typeface="+mn-ea"/>
                 <a:sym typeface="+mn-ea"/>
               </a:rPr>
-              <a:t>7</a:t>
+              <a:t>5</a:t>
             </a:r>
             <a:r>
               <a:rPr lang="en-US" altLang="zh-CN" b="1" baseline="30000" dirty="0">
@@ -16629,7 +18424,7 @@
           <a:p>
             <a:pPr indent="0">
               <a:lnSpc>
-                <a:spcPct val="120000"/>
+                <a:spcPct val="130000"/>
               </a:lnSpc>
               <a:buFont typeface="Arial" panose="020B0604020202020204" pitchFamily="34" charset="0"/>
               <a:buNone/>
@@ -16637,13 +18432,212 @@
             <a:r>
               <a:rPr lang="zh-CN" altLang="en-US" sz="1400" b="1" dirty="0">
                 <a:solidFill>
-                  <a:schemeClr val="tx1"/>
+                  <a:srgbClr val="FF0000"/>
+                </a:solidFill>
+                <a:latin typeface="微软雅黑" charset="-122"/>
+                <a:ea typeface="微软雅黑" charset="-122"/>
+                <a:sym typeface="+mn-ea"/>
+              </a:rPr>
+              <a:t>创新与价值：</a:t>
+            </a:r>
+            <a:r>
+              <a:rPr lang="zh-CN" altLang="en-US" sz="1400" dirty="0">
+                <a:solidFill>
+                  <a:schemeClr val="tx1"/>
+                </a:solidFill>
+                <a:latin typeface="微软雅黑" charset="-122"/>
+                <a:ea typeface="微软雅黑" charset="-122"/>
+                <a:sym typeface="+mn-ea"/>
+              </a:rPr>
+              <a:t>波束预测既要找到合适的候选，也要提供可信的信号强度估计。仅检查波束标识是否命中，可能忽略功率预测失准；仅检查功率误差，也可能遗漏候选选择问题。该方法将</a:t>
+            </a:r>
+            <a:r>
+              <a:rPr lang="zh-CN" altLang="en-US" sz="1400" b="1" dirty="0">
+                <a:solidFill>
+                  <a:schemeClr val="tx1"/>
+                </a:solidFill>
+                <a:latin typeface="微软雅黑" charset="-122"/>
+                <a:ea typeface="微软雅黑" charset="-122"/>
+                <a:sym typeface="+mn-ea"/>
+              </a:rPr>
+              <a:t>波束标识与</a:t>
+            </a:r>
+            <a:r>
+              <a:rPr lang="en-US" altLang="zh-CN" sz="1400" b="1" dirty="0">
+                <a:solidFill>
+                  <a:schemeClr val="tx1"/>
+                </a:solidFill>
+                <a:latin typeface="微软雅黑" charset="-122"/>
+                <a:ea typeface="微软雅黑" charset="-122"/>
+                <a:sym typeface="+mn-ea"/>
+              </a:rPr>
+              <a:t> RSRP </a:t>
+            </a:r>
+            <a:r>
+              <a:rPr lang="zh-CN" altLang="en-US" sz="1400" b="1" dirty="0">
+                <a:solidFill>
+                  <a:schemeClr val="tx1"/>
+                </a:solidFill>
+                <a:latin typeface="微软雅黑" charset="-122"/>
+                <a:ea typeface="微软雅黑" charset="-122"/>
+                <a:sym typeface="+mn-ea"/>
+              </a:rPr>
+              <a:t>纳入共同的容差判据</a:t>
+            </a:r>
+            <a:r>
+              <a:rPr lang="zh-CN" altLang="en-US" sz="1400" dirty="0">
+                <a:solidFill>
+                  <a:schemeClr val="tx1"/>
+                </a:solidFill>
+                <a:latin typeface="微软雅黑" charset="-122"/>
+                <a:ea typeface="微软雅黑" charset="-122"/>
+                <a:sym typeface="+mn-ea"/>
+              </a:rPr>
+              <a:t>，使测试结论同时反映两类输出的质量。其价值在于完善验收依据，并通过可配置容差适应不同测试要求。</a:t>
+            </a:r>
+            <a:endParaRPr lang="zh-CN" altLang="en-US" sz="1400" dirty="0">
+              <a:solidFill>
+                <a:schemeClr val="tx1"/>
+              </a:solidFill>
+              <a:latin typeface="微软雅黑" charset="-122"/>
+              <a:ea typeface="微软雅黑" charset="-122"/>
+              <a:sym typeface="+mn-ea"/>
+            </a:endParaRPr>
+          </a:p>
+          <a:p>
+            <a:pPr indent="0">
+              <a:lnSpc>
+                <a:spcPct val="130000"/>
+              </a:lnSpc>
+              <a:buFont typeface="Arial" panose="020B0604020202020204" pitchFamily="34" charset="0"/>
+              <a:buNone/>
+            </a:pPr>
+            <a:r>
+              <a:rPr lang="zh-CN" altLang="en-US" sz="1400" b="1" dirty="0">
+                <a:solidFill>
+                  <a:srgbClr val="FF0000"/>
                 </a:solidFill>
                 <a:latin typeface="微软雅黑" charset="-122"/>
                 <a:ea typeface="微软雅黑" charset="-122"/>
                 <a:sym typeface="+mn-ea"/>
               </a:rPr>
               <a:t>技术概述：</a:t>
+            </a:r>
+            <a:r>
+              <a:rPr lang="zh-CN" altLang="en-US" sz="1400" dirty="0">
+                <a:solidFill>
+                  <a:schemeClr val="tx1"/>
+                </a:solidFill>
+                <a:latin typeface="微软雅黑" charset="-122"/>
+                <a:ea typeface="微软雅黑" charset="-122"/>
+                <a:sym typeface="+mn-ea"/>
+              </a:rPr>
+              <a:t>终端利用已有波束测量预测候选波束，并输出相应的接收功率。评价时，需要取得实测参照，检查预测候选与实测候选之间的对应关系。苹果提出将波束身份与</a:t>
+            </a:r>
+            <a:r>
+              <a:rPr lang="en-US" altLang="zh-CN" sz="1400" dirty="0">
+                <a:solidFill>
+                  <a:schemeClr val="tx1"/>
+                </a:solidFill>
+                <a:latin typeface="微软雅黑" charset="-122"/>
+                <a:ea typeface="微软雅黑" charset="-122"/>
+                <a:sym typeface="+mn-ea"/>
+              </a:rPr>
+              <a:t> RSRP </a:t>
+            </a:r>
+            <a:r>
+              <a:rPr lang="zh-CN" altLang="en-US" sz="1400" dirty="0">
+                <a:solidFill>
+                  <a:schemeClr val="tx1"/>
+                </a:solidFill>
+                <a:latin typeface="微软雅黑" charset="-122"/>
+                <a:ea typeface="微软雅黑" charset="-122"/>
+                <a:sym typeface="+mn-ea"/>
+              </a:rPr>
+              <a:t>放在两个维度上，设置可配置的容差范围，形成</a:t>
+            </a:r>
+            <a:r>
+              <a:rPr lang="zh-CN" altLang="en-US" sz="1400" b="1" dirty="0">
+                <a:solidFill>
+                  <a:schemeClr val="tx1"/>
+                </a:solidFill>
+                <a:latin typeface="微软雅黑" charset="-122"/>
+                <a:ea typeface="微软雅黑" charset="-122"/>
+                <a:sym typeface="+mn-ea"/>
+              </a:rPr>
+              <a:t>二维容差框</a:t>
+            </a:r>
+            <a:r>
+              <a:rPr lang="zh-CN" altLang="en-US" sz="1400" dirty="0">
+                <a:solidFill>
+                  <a:schemeClr val="tx1"/>
+                </a:solidFill>
+                <a:latin typeface="微软雅黑" charset="-122"/>
+                <a:ea typeface="微软雅黑" charset="-122"/>
+                <a:sym typeface="+mn-ea"/>
+              </a:rPr>
+              <a:t>。测试时将预测与参考配对，检查两者是否满足联合要求，并允许针对不同候选设置不同条件。</a:t>
+            </a:r>
+            <a:endParaRPr lang="zh-CN" altLang="en-US" sz="1400" dirty="0">
+              <a:solidFill>
+                <a:schemeClr val="tx1"/>
+              </a:solidFill>
+              <a:latin typeface="微软雅黑" charset="-122"/>
+              <a:ea typeface="微软雅黑" charset="-122"/>
+              <a:sym typeface="+mn-ea"/>
+            </a:endParaRPr>
+          </a:p>
+          <a:p>
+            <a:pPr indent="0">
+              <a:lnSpc>
+                <a:spcPct val="130000"/>
+              </a:lnSpc>
+              <a:buFont typeface="Arial" panose="020B0604020202020204" pitchFamily="34" charset="0"/>
+              <a:buNone/>
+            </a:pPr>
+            <a:r>
+              <a:rPr lang="zh-CN" altLang="en-US" sz="1400" dirty="0">
+                <a:solidFill>
+                  <a:schemeClr val="tx1"/>
+                </a:solidFill>
+                <a:latin typeface="微软雅黑" charset="-122"/>
+                <a:ea typeface="微软雅黑" charset="-122"/>
+                <a:sym typeface="+mn-ea"/>
+              </a:rPr>
+              <a:t>输入包括部分波束的测量与身份、模型预测结果、参考测量及容差参数。</a:t>
+            </a:r>
+            <a:r>
+              <a:rPr lang="zh-CN" altLang="en-US" sz="1400" b="1" dirty="0">
+                <a:solidFill>
+                  <a:schemeClr val="tx1"/>
+                </a:solidFill>
+                <a:latin typeface="微软雅黑" charset="-122"/>
+                <a:ea typeface="微软雅黑" charset="-122"/>
+                <a:sym typeface="+mn-ea"/>
+              </a:rPr>
+              <a:t>模型输出候选波束身份和预测</a:t>
+            </a:r>
+            <a:r>
+              <a:rPr lang="en-US" altLang="zh-CN" sz="1400" b="1" dirty="0">
+                <a:solidFill>
+                  <a:schemeClr val="tx1"/>
+                </a:solidFill>
+                <a:latin typeface="微软雅黑" charset="-122"/>
+                <a:ea typeface="微软雅黑" charset="-122"/>
+                <a:sym typeface="+mn-ea"/>
+              </a:rPr>
+              <a:t> RSRP</a:t>
+            </a:r>
+            <a:r>
+              <a:rPr lang="zh-CN" altLang="en-US" sz="1400" b="1" dirty="0">
+                <a:solidFill>
+                  <a:schemeClr val="tx1"/>
+                </a:solidFill>
+                <a:latin typeface="微软雅黑" charset="-122"/>
+                <a:ea typeface="微软雅黑" charset="-122"/>
+                <a:sym typeface="+mn-ea"/>
+              </a:rPr>
+              <a:t>，测试模块输出匹配及通过结果。联合结论用于判定，两项误差仍应分别保存，以便解释失败原因。</a:t>
             </a:r>
             <a:endParaRPr lang="zh-CN" altLang="en-US" sz="1400" b="1" dirty="0">
               <a:solidFill>
@@ -16663,41 +18657,19 @@
               <a:buNone/>
             </a:pPr>
             <a:r>
-              <a:rPr lang="en-US" altLang="zh-CN" sz="1400" dirty="0">
-                <a:solidFill>
-                  <a:schemeClr val="tx1"/>
-                </a:solidFill>
-                <a:latin typeface="微软雅黑" charset="-122"/>
-                <a:ea typeface="微软雅黑" charset="-122"/>
-                <a:sym typeface="+mn-ea"/>
-              </a:rPr>
-              <a:t>AI </a:t>
-            </a:r>
-            <a:r>
-              <a:rPr lang="zh-CN" altLang="en-US" sz="1400" dirty="0">
-                <a:solidFill>
-                  <a:schemeClr val="tx1"/>
-                </a:solidFill>
-                <a:latin typeface="微软雅黑" charset="-122"/>
-                <a:ea typeface="微软雅黑" charset="-122"/>
-                <a:sym typeface="+mn-ea"/>
-              </a:rPr>
-              <a:t>空间域波束预测利用部分波束测量，推断更多候选波束的信息。要评估这一功能，测试系统既需要准确呈现模型输入涉及的波束，也需要提供可信的目标参考。如果环境重建误差较大，模型表现下降时就难以定位原因。论文提出，在多探头暗室中提前选择一套固定探头配置，由信道模拟器处理不同波束对应的信道和权重，支持快速波束扫描所需的环境。</a:t>
-            </a:r>
-            <a:r>
               <a:rPr lang="zh-CN" altLang="en-US" sz="1400" b="1" dirty="0">
                 <a:solidFill>
-                  <a:schemeClr val="tx1"/>
-                </a:solidFill>
-                <a:latin typeface="微软雅黑" charset="-122"/>
-                <a:ea typeface="微软雅黑" charset="-122"/>
-                <a:sym typeface="+mn-ea"/>
-              </a:rPr>
-              <a:t>先检查信道重建质量，再评估预测结果，使环境误差与模型表现分别可观察。</a:t>
+                  <a:srgbClr val="FF0000"/>
+                </a:solidFill>
+                <a:latin typeface="微软雅黑" charset="-122"/>
+                <a:ea typeface="微软雅黑" charset="-122"/>
+                <a:sym typeface="+mn-ea"/>
+              </a:rPr>
+              <a:t>研究方法：</a:t>
             </a:r>
             <a:endParaRPr lang="zh-CN" altLang="en-US" sz="1400" b="1" dirty="0">
               <a:solidFill>
-                <a:schemeClr val="tx1"/>
+                <a:srgbClr val="FF0000"/>
               </a:solidFill>
               <a:latin typeface="微软雅黑" charset="-122"/>
               <a:ea typeface="微软雅黑" charset="-122"/>
@@ -16713,6 +18685,28 @@
               <a:buNone/>
             </a:pPr>
             <a:r>
+              <a:rPr lang="en-US" sz="1400" b="1" dirty="0">
+                <a:solidFill>
+                  <a:schemeClr val="tx1"/>
+                </a:solidFill>
+                <a:latin typeface="微软雅黑" charset="-122"/>
+                <a:ea typeface="微软雅黑" charset="-122"/>
+                <a:sym typeface="+mn-ea"/>
+              </a:rPr>
+              <a:t>a. </a:t>
+            </a:r>
+            <a:r>
+              <a:rPr lang="zh-CN" altLang="en-US" sz="1400" b="1" dirty="0">
+                <a:solidFill>
+                  <a:schemeClr val="tx1"/>
+                </a:solidFill>
+                <a:latin typeface="微软雅黑" charset="-122"/>
+                <a:ea typeface="微软雅黑" charset="-122"/>
+                <a:sym typeface="+mn-ea"/>
+              </a:rPr>
+              <a:t>建立包含波束身份和功率的测量参考。</a:t>
+            </a:r>
+            <a:r>
               <a:rPr lang="zh-CN" altLang="en-US" sz="1400" dirty="0">
                 <a:solidFill>
                   <a:schemeClr val="tx1"/>
@@ -16721,7 +18715,7 @@
                 <a:ea typeface="微软雅黑" charset="-122"/>
                 <a:sym typeface="+mn-ea"/>
               </a:rPr>
-              <a:t>环境构建输入包括</a:t>
+              <a:t>通过参考测量识别较强波束，保存其身份及</a:t>
             </a:r>
             <a:r>
               <a:rPr lang="en-US" altLang="zh-CN" sz="1400" dirty="0">
@@ -16732,7 +18726,7 @@
                 <a:ea typeface="微软雅黑" charset="-122"/>
                 <a:sym typeface="+mn-ea"/>
               </a:rPr>
-              <a:t> CDL </a:t>
+              <a:t> RSRP</a:t>
             </a:r>
             <a:r>
               <a:rPr lang="zh-CN" altLang="en-US" sz="1400" dirty="0">
@@ -16743,51 +18737,7 @@
                 <a:ea typeface="微软雅黑" charset="-122"/>
                 <a:sym typeface="+mn-ea"/>
               </a:rPr>
-              <a:t>信道、基站波束配置和探头资源，输出为所选探头及权重。本文模型接收</a:t>
-            </a:r>
-            <a:r>
-              <a:rPr lang="en-US" altLang="zh-CN" sz="1400" dirty="0">
-                <a:solidFill>
-                  <a:schemeClr val="tx1"/>
-                </a:solidFill>
-                <a:latin typeface="微软雅黑" charset="-122"/>
-                <a:ea typeface="微软雅黑" charset="-122"/>
-                <a:sym typeface="+mn-ea"/>
-              </a:rPr>
-              <a:t> 8 </a:t>
-            </a:r>
-            <a:r>
-              <a:rPr lang="zh-CN" altLang="en-US" sz="1400" dirty="0">
-                <a:solidFill>
-                  <a:schemeClr val="tx1"/>
-                </a:solidFill>
-                <a:latin typeface="微软雅黑" charset="-122"/>
-                <a:ea typeface="微软雅黑" charset="-122"/>
-                <a:sym typeface="+mn-ea"/>
-              </a:rPr>
-              <a:t>个测量波束的排序信息，生成</a:t>
-            </a:r>
-            <a:r>
-              <a:rPr lang="en-US" altLang="zh-CN" sz="1400" dirty="0">
-                <a:solidFill>
-                  <a:schemeClr val="tx1"/>
-                </a:solidFill>
-                <a:latin typeface="微软雅黑" charset="-122"/>
-                <a:ea typeface="微软雅黑" charset="-122"/>
-                <a:sym typeface="+mn-ea"/>
-              </a:rPr>
-              <a:t> 32 </a:t>
-            </a:r>
-            <a:r>
-              <a:rPr lang="zh-CN" altLang="en-US" sz="1400" dirty="0">
-                <a:solidFill>
-                  <a:schemeClr val="tx1"/>
-                </a:solidFill>
-                <a:latin typeface="微软雅黑" charset="-122"/>
-                <a:ea typeface="微软雅黑" charset="-122"/>
-                <a:sym typeface="+mn-ea"/>
-              </a:rPr>
-              <a:t>维预测输出，最终评价最佳基站发射波束编号是否正确。</a:t>
+              <a:t>，再从模型输出中选取较强候选进行比较。测试需要明确参考范围、接收配置和数据对应关系，使身份评价与功率评价使用一致的依据。</a:t>
             </a:r>
             <a:endParaRPr lang="zh-CN" altLang="en-US" sz="1400" dirty="0">
               <a:solidFill>
@@ -16807,6 +18757,17 @@
               <a:buNone/>
             </a:pPr>
             <a:r>
+              <a:rPr lang="en-US" altLang="zh-CN" sz="1400" b="1" dirty="0">
+                <a:solidFill>
+                  <a:schemeClr val="tx1"/>
+                </a:solidFill>
+                <a:latin typeface="微软雅黑" charset="-122"/>
+                <a:ea typeface="微软雅黑" charset="-122"/>
+                <a:sym typeface="+mn-ea"/>
+              </a:rPr>
+              <a:t>b. </a:t>
+            </a:r>
+            <a:r>
               <a:rPr lang="zh-CN" altLang="en-US" sz="1400" b="1" dirty="0">
                 <a:solidFill>
                   <a:schemeClr val="tx1"/>
@@ -16815,46 +18776,7 @@
                 <a:ea typeface="微软雅黑" charset="-122"/>
                 <a:sym typeface="+mn-ea"/>
               </a:rPr>
-              <a:t>研究方法：</a:t>
-            </a:r>
-            <a:endParaRPr lang="zh-CN" altLang="en-US" sz="1400" b="1" dirty="0">
-              <a:solidFill>
-                <a:schemeClr val="tx1"/>
-              </a:solidFill>
-              <a:latin typeface="微软雅黑" charset="-122"/>
-              <a:ea typeface="微软雅黑" charset="-122"/>
-              <a:sym typeface="+mn-ea"/>
-            </a:endParaRPr>
-          </a:p>
-          <a:p>
-            <a:pPr indent="0">
-              <a:lnSpc>
-                <a:spcPct val="120000"/>
-              </a:lnSpc>
-              <a:buFont typeface="Arial" panose="020B0604020202020204" pitchFamily="34" charset="0"/>
-              <a:buNone/>
-            </a:pPr>
-            <a:r>
-              <a:rPr lang="en-US" sz="1400" b="1" dirty="0">
-                <a:solidFill>
-                  <a:schemeClr val="tx1"/>
-                </a:solidFill>
-                <a:latin typeface="微软雅黑" charset="-122"/>
-                <a:ea typeface="微软雅黑" charset="-122"/>
-                <a:sym typeface="+mn-ea"/>
-              </a:rPr>
-              <a:t>a. </a:t>
-            </a:r>
-            <a:r>
-              <a:rPr lang="zh-CN" altLang="en-US" sz="1400" b="1" dirty="0">
-                <a:solidFill>
-                  <a:schemeClr val="tx1"/>
-                </a:solidFill>
-                <a:latin typeface="微软雅黑" charset="-122"/>
-                <a:ea typeface="微软雅黑" charset="-122"/>
-                <a:sym typeface="+mn-ea"/>
-              </a:rPr>
-              <a:t>生成考虑基站波束作用的目标信道。</a:t>
+              <a:t>设置两个维度的容差，联合检查预测与参考。</a:t>
             </a:r>
             <a:r>
               <a:rPr lang="zh-CN" altLang="en-US" sz="1400" dirty="0">
@@ -16865,7 +18787,7 @@
                 <a:ea typeface="微软雅黑" charset="-122"/>
                 <a:sym typeface="+mn-ea"/>
               </a:rPr>
-              <a:t>不同发射波束对传播路径施加不同增益，终端看到的功率分布随之变化。作者将波束增益加入</a:t>
+              <a:t>分别规定允许的</a:t>
             </a:r>
             <a:r>
               <a:rPr lang="en-US" altLang="zh-CN" sz="1400" dirty="0">
@@ -16876,7 +18798,7 @@
                 <a:ea typeface="微软雅黑" charset="-122"/>
                 <a:sym typeface="+mn-ea"/>
               </a:rPr>
-              <a:t> CDL </a:t>
+              <a:t> RSRP </a:t>
             </a:r>
             <a:r>
               <a:rPr lang="zh-CN" altLang="en-US" sz="1400" dirty="0">
@@ -16887,7 +18809,7 @@
                 <a:ea typeface="微软雅黑" charset="-122"/>
                 <a:sym typeface="+mn-ea"/>
               </a:rPr>
-              <a:t>路径，并保留主导簇降低复杂度；测试前旋转目标信道分布，提高探头面板对重要路径的覆盖。</a:t>
+              <a:t>偏差和波束身份偏差，形成容差框。配对后的预测和参考落入同一框时，可以按相应规则通过。这样，测试能够同时约束身份与功率，减少单项指标带来的遗漏。</a:t>
             </a:r>
             <a:endParaRPr lang="zh-CN" altLang="en-US" sz="1400" dirty="0">
               <a:solidFill>
@@ -16915,7 +18837,7 @@
                 <a:ea typeface="微软雅黑" charset="-122"/>
                 <a:sym typeface="+mn-ea"/>
               </a:rPr>
-              <a:t>b. </a:t>
+              <a:t>c. </a:t>
             </a:r>
             <a:r>
               <a:rPr lang="zh-CN" altLang="en-US" sz="1400" b="1" dirty="0">
@@ -16926,7 +18848,7 @@
                 <a:ea typeface="微软雅黑" charset="-122"/>
                 <a:sym typeface="+mn-ea"/>
               </a:rPr>
-              <a:t>根据输入集合是否已知，确定重建范围。</a:t>
+              <a:t>根据候选优先级配置判定条件。</a:t>
             </a:r>
             <a:r>
               <a:rPr lang="zh-CN" altLang="en-US" sz="1400" dirty="0">
@@ -16937,7 +18859,7 @@
                 <a:ea typeface="微软雅黑" charset="-122"/>
                 <a:sym typeface="+mn-ea"/>
               </a:rPr>
-              <a:t>方法</a:t>
+              <a:t>原文允许为</a:t>
             </a:r>
             <a:r>
               <a:rPr lang="en-US" altLang="zh-CN" sz="1400" dirty="0">
@@ -16948,7 +18870,7 @@
                 <a:ea typeface="微软雅黑" charset="-122"/>
                 <a:sym typeface="+mn-ea"/>
               </a:rPr>
-              <a:t> A </a:t>
+              <a:t> Top-K </a:t>
             </a:r>
             <a:r>
               <a:rPr lang="zh-CN" altLang="en-US" sz="1400" dirty="0">
@@ -16959,51 +18881,7 @@
                 <a:ea typeface="微软雅黑" charset="-122"/>
                 <a:sym typeface="+mn-ea"/>
               </a:rPr>
-              <a:t>支持全部候选波束，适合输入集合未知的情况。方法</a:t>
-            </a:r>
-            <a:r>
-              <a:rPr lang="en-US" altLang="zh-CN" sz="1400" dirty="0">
-                <a:solidFill>
-                  <a:schemeClr val="tx1"/>
-                </a:solidFill>
-                <a:latin typeface="微软雅黑" charset="-122"/>
-                <a:ea typeface="微软雅黑" charset="-122"/>
-                <a:sym typeface="+mn-ea"/>
-              </a:rPr>
-              <a:t> B </a:t>
-            </a:r>
-            <a:r>
-              <a:rPr lang="zh-CN" altLang="en-US" sz="1400" dirty="0">
-                <a:solidFill>
-                  <a:schemeClr val="tx1"/>
-                </a:solidFill>
-                <a:latin typeface="微软雅黑" charset="-122"/>
-                <a:ea typeface="微软雅黑" charset="-122"/>
-                <a:sym typeface="+mn-ea"/>
-              </a:rPr>
-              <a:t>针对已知输入集合及</a:t>
-            </a:r>
-            <a:r>
-              <a:rPr lang="en-US" altLang="zh-CN" sz="1400" dirty="0">
-                <a:solidFill>
-                  <a:schemeClr val="tx1"/>
-                </a:solidFill>
-                <a:latin typeface="微软雅黑" charset="-122"/>
-                <a:ea typeface="微软雅黑" charset="-122"/>
-                <a:sym typeface="+mn-ea"/>
-              </a:rPr>
-              <a:t> Top-K </a:t>
-            </a:r>
-            <a:r>
-              <a:rPr lang="zh-CN" altLang="en-US" sz="1400" dirty="0">
-                <a:solidFill>
-                  <a:schemeClr val="tx1"/>
-                </a:solidFill>
-                <a:latin typeface="微软雅黑" charset="-122"/>
-                <a:ea typeface="微软雅黑" charset="-122"/>
-                <a:sym typeface="+mn-ea"/>
-              </a:rPr>
-              <a:t>参考目标构建环境，可以缩小重建范围、减少探头需求。两者体现测试配置灵活性与实现资源之间的取舍。</a:t>
+              <a:t>波束设置多个容差框，最佳波束采用较严条件，后续候选可以放宽。具体比较哪些配对、采用多大的容差，需要写入测试配置，使不同模型版本接受相同规则。</a:t>
             </a:r>
             <a:endParaRPr lang="zh-CN" altLang="en-US" sz="1400" dirty="0">
               <a:solidFill>
@@ -17031,7 +18909,7 @@
                 <a:ea typeface="微软雅黑" charset="-122"/>
                 <a:sym typeface="+mn-ea"/>
               </a:rPr>
-              <a:t>c. </a:t>
+              <a:t>d. </a:t>
             </a:r>
             <a:r>
               <a:rPr lang="zh-CN" altLang="en-US" sz="1400" b="1" dirty="0">
@@ -17042,7 +18920,18 @@
                 <a:ea typeface="微软雅黑" charset="-122"/>
                 <a:sym typeface="+mn-ea"/>
               </a:rPr>
-              <a:t>逐波束检查环境，并优先改善薄弱情况。</a:t>
+              <a:t>通过复测处理短时间内的功率变化。</a:t>
+            </a:r>
+            <a:r>
+              <a:rPr lang="zh-CN" altLang="en-US" sz="1400" dirty="0">
+                <a:solidFill>
+                  <a:schemeClr val="tx1"/>
+                </a:solidFill>
+                <a:latin typeface="微软雅黑" charset="-122"/>
+                <a:ea typeface="微软雅黑" charset="-122"/>
+                <a:sym typeface="+mn-ea"/>
+              </a:rPr>
+              <a:t>部分实施例允许两次检查中波束身份均达标，而</a:t>
             </a:r>
             <a:r>
               <a:rPr lang="en-US" altLang="zh-CN" sz="1400" dirty="0">
@@ -17053,7 +18942,7 @@
                 <a:ea typeface="微软雅黑" charset="-122"/>
                 <a:sym typeface="+mn-ea"/>
               </a:rPr>
-              <a:t>BPSP </a:t>
+              <a:t> RSRP </a:t>
             </a:r>
             <a:r>
               <a:rPr lang="zh-CN" altLang="en-US" sz="1400" dirty="0">
@@ -17064,29 +18953,7 @@
                 <a:ea typeface="微软雅黑" charset="-122"/>
                 <a:sym typeface="+mn-ea"/>
               </a:rPr>
-              <a:t>比较目标与重建功率角谱，保留各波束的重建质量。算法针对最低相似度的情况补充探头、优化权重，直到达到门限。</a:t>
-            </a:r>
-            <a:r>
-              <a:rPr lang="en-US" altLang="zh-CN" sz="1400" dirty="0">
-                <a:solidFill>
-                  <a:schemeClr val="tx1"/>
-                </a:solidFill>
-                <a:latin typeface="微软雅黑" charset="-122"/>
-                <a:ea typeface="微软雅黑" charset="-122"/>
-                <a:sym typeface="+mn-ea"/>
-              </a:rPr>
-              <a:t>BPSP </a:t>
-            </a:r>
-            <a:r>
-              <a:rPr lang="zh-CN" altLang="en-US" sz="1400" dirty="0">
-                <a:solidFill>
-                  <a:schemeClr val="tx1"/>
-                </a:solidFill>
-                <a:latin typeface="微软雅黑" charset="-122"/>
-                <a:ea typeface="微软雅黑" charset="-122"/>
-                <a:sym typeface="+mn-ea"/>
-              </a:rPr>
-              <a:t>评价环境重建，模型准确率评价预测，两项结果需要分别报告。</a:t>
+              <a:t>至少一次达标，为短时波动提供容忍方式。复测条件应提前确定，并保存每次测量结果，避免仅保留最终通过结论而丢失变化过程。</a:t>
             </a:r>
             <a:endParaRPr lang="zh-CN" altLang="en-US" sz="1400" dirty="0">
               <a:solidFill>
@@ -17100,43 +18967,21 @@
           <a:p>
             <a:pPr indent="0">
               <a:lnSpc>
-                <a:spcPct val="120000"/>
+                <a:spcPct val="130000"/>
               </a:lnSpc>
               <a:buFont typeface="Arial" panose="020B0604020202020204" pitchFamily="34" charset="0"/>
               <a:buNone/>
             </a:pPr>
             <a:r>
-              <a:rPr lang="en-US" altLang="zh-CN" sz="1400" b="1" dirty="0">
-                <a:solidFill>
-                  <a:schemeClr val="tx1"/>
-                </a:solidFill>
-                <a:latin typeface="微软雅黑" charset="-122"/>
-                <a:ea typeface="微软雅黑" charset="-122"/>
-                <a:sym typeface="+mn-ea"/>
-              </a:rPr>
-              <a:t>d. </a:t>
-            </a:r>
-            <a:r>
               <a:rPr lang="zh-CN" altLang="en-US" sz="1400" b="1" dirty="0">
                 <a:solidFill>
-                  <a:schemeClr val="tx1"/>
-                </a:solidFill>
-                <a:latin typeface="微软雅黑" charset="-122"/>
-                <a:ea typeface="微软雅黑" charset="-122"/>
-                <a:sym typeface="+mn-ea"/>
-              </a:rPr>
-              <a:t>通过真实装置和实测数据验证方法。</a:t>
-            </a:r>
-            <a:r>
-              <a:rPr lang="en-US" altLang="zh-CN" sz="1400" dirty="0">
-                <a:solidFill>
-                  <a:schemeClr val="tx1"/>
-                </a:solidFill>
-                <a:latin typeface="微软雅黑" charset="-122"/>
-                <a:ea typeface="微软雅黑" charset="-122"/>
-                <a:sym typeface="+mn-ea"/>
-              </a:rPr>
-              <a:t>CDL-A </a:t>
+                  <a:srgbClr val="FF0000"/>
+                </a:solidFill>
+                <a:latin typeface="微软雅黑" charset="-122"/>
+                <a:ea typeface="微软雅黑" charset="-122"/>
+                <a:sym typeface="+mn-ea"/>
+              </a:rPr>
+              <a:t>研究成熟度与启示：</a:t>
             </a:r>
             <a:r>
               <a:rPr lang="zh-CN" altLang="en-US" sz="1400" dirty="0">
@@ -17147,311 +18992,8 @@
                 <a:ea typeface="微软雅黑" charset="-122"/>
                 <a:sym typeface="+mn-ea"/>
               </a:rPr>
-              <a:t>实验采用</a:t>
-            </a:r>
-            <a:r>
-              <a:rPr lang="en-US" altLang="zh-CN" sz="1400" dirty="0">
-                <a:solidFill>
-                  <a:schemeClr val="tx1"/>
-                </a:solidFill>
-                <a:latin typeface="微软雅黑" charset="-122"/>
-                <a:ea typeface="微软雅黑" charset="-122"/>
-                <a:sym typeface="+mn-ea"/>
-              </a:rPr>
-              <a:t> 1.5 m </a:t>
-            </a:r>
-            <a:r>
-              <a:rPr lang="zh-CN" altLang="en-US" sz="1400" dirty="0">
-                <a:solidFill>
-                  <a:schemeClr val="tx1"/>
-                </a:solidFill>
-                <a:latin typeface="微软雅黑" charset="-122"/>
-                <a:ea typeface="微软雅黑" charset="-122"/>
-                <a:sym typeface="+mn-ea"/>
-              </a:rPr>
-              <a:t>测量距离，方法</a:t>
-            </a:r>
-            <a:r>
-              <a:rPr lang="en-US" altLang="zh-CN" sz="1400" dirty="0">
-                <a:solidFill>
-                  <a:schemeClr val="tx1"/>
-                </a:solidFill>
-                <a:latin typeface="微软雅黑" charset="-122"/>
-                <a:ea typeface="微软雅黑" charset="-122"/>
-                <a:sym typeface="+mn-ea"/>
-              </a:rPr>
-              <a:t> A</a:t>
-            </a:r>
-            <a:r>
-              <a:rPr lang="zh-CN" altLang="en-US" sz="1400" dirty="0">
-                <a:solidFill>
-                  <a:schemeClr val="tx1"/>
-                </a:solidFill>
-                <a:latin typeface="微软雅黑" charset="-122"/>
-                <a:ea typeface="微软雅黑" charset="-122"/>
-                <a:sym typeface="+mn-ea"/>
-              </a:rPr>
-              <a:t>、</a:t>
-            </a:r>
-            <a:r>
-              <a:rPr lang="en-US" altLang="zh-CN" sz="1400" dirty="0">
-                <a:solidFill>
-                  <a:schemeClr val="tx1"/>
-                </a:solidFill>
-                <a:latin typeface="微软雅黑" charset="-122"/>
-                <a:ea typeface="微软雅黑" charset="-122"/>
-                <a:sym typeface="+mn-ea"/>
-              </a:rPr>
-              <a:t>B </a:t>
-            </a:r>
-            <a:r>
-              <a:rPr lang="zh-CN" altLang="en-US" sz="1400" dirty="0">
-                <a:solidFill>
-                  <a:schemeClr val="tx1"/>
-                </a:solidFill>
-                <a:latin typeface="微软雅黑" charset="-122"/>
-                <a:ea typeface="微软雅黑" charset="-122"/>
-                <a:sym typeface="+mn-ea"/>
-              </a:rPr>
-              <a:t>分别使用</a:t>
-            </a:r>
-            <a:r>
-              <a:rPr lang="en-US" altLang="zh-CN" sz="1400" dirty="0">
-                <a:solidFill>
-                  <a:schemeClr val="tx1"/>
-                </a:solidFill>
-                <a:latin typeface="微软雅黑" charset="-122"/>
-                <a:ea typeface="微软雅黑" charset="-122"/>
-                <a:sym typeface="+mn-ea"/>
-              </a:rPr>
-              <a:t> 8</a:t>
-            </a:r>
-            <a:r>
-              <a:rPr lang="zh-CN" altLang="en-US" sz="1400" dirty="0">
-                <a:solidFill>
-                  <a:schemeClr val="tx1"/>
-                </a:solidFill>
-                <a:latin typeface="微软雅黑" charset="-122"/>
-                <a:ea typeface="微软雅黑" charset="-122"/>
-                <a:sym typeface="+mn-ea"/>
-              </a:rPr>
-              <a:t>、</a:t>
-            </a:r>
-            <a:r>
-              <a:rPr lang="en-US" altLang="zh-CN" sz="1400" dirty="0">
-                <a:solidFill>
-                  <a:schemeClr val="tx1"/>
-                </a:solidFill>
-                <a:latin typeface="微软雅黑" charset="-122"/>
-                <a:ea typeface="微软雅黑" charset="-122"/>
-                <a:sym typeface="+mn-ea"/>
-              </a:rPr>
-              <a:t>7 </a:t>
-            </a:r>
-            <a:r>
-              <a:rPr lang="zh-CN" altLang="en-US" sz="1400" dirty="0">
-                <a:solidFill>
-                  <a:schemeClr val="tx1"/>
-                </a:solidFill>
-                <a:latin typeface="微软雅黑" charset="-122"/>
-                <a:ea typeface="微软雅黑" charset="-122"/>
-                <a:sym typeface="+mn-ea"/>
-              </a:rPr>
-              <a:t>个探头。作者扫描实测功率角谱检查环境，再形成</a:t>
-            </a:r>
-            <a:r>
-              <a:rPr lang="en-US" altLang="zh-CN" sz="1400" dirty="0">
-                <a:solidFill>
-                  <a:schemeClr val="tx1"/>
-                </a:solidFill>
-                <a:latin typeface="微软雅黑" charset="-122"/>
-                <a:ea typeface="微软雅黑" charset="-122"/>
-                <a:sym typeface="+mn-ea"/>
-              </a:rPr>
-              <a:t> 1000 </a:t>
-            </a:r>
-            <a:r>
-              <a:rPr lang="zh-CN" altLang="en-US" sz="1400" dirty="0">
-                <a:solidFill>
-                  <a:schemeClr val="tx1"/>
-                </a:solidFill>
-                <a:latin typeface="微软雅黑" charset="-122"/>
-                <a:ea typeface="微软雅黑" charset="-122"/>
-                <a:sym typeface="+mn-ea"/>
-              </a:rPr>
-              <a:t>个模型验证样本。</a:t>
-            </a:r>
-            <a:r>
-              <a:rPr lang="en-US" altLang="zh-CN" sz="1400" dirty="0">
-                <a:solidFill>
-                  <a:schemeClr val="tx1"/>
-                </a:solidFill>
-                <a:latin typeface="微软雅黑" charset="-122"/>
-                <a:ea typeface="微软雅黑" charset="-122"/>
-                <a:sym typeface="+mn-ea"/>
-              </a:rPr>
-              <a:t>Top-1 </a:t>
-            </a:r>
-            <a:r>
-              <a:rPr lang="zh-CN" altLang="en-US" sz="1400" dirty="0">
-                <a:solidFill>
-                  <a:schemeClr val="tx1"/>
-                </a:solidFill>
-                <a:latin typeface="微软雅黑" charset="-122"/>
-                <a:ea typeface="微软雅黑" charset="-122"/>
-                <a:sym typeface="+mn-ea"/>
-              </a:rPr>
-              <a:t>预测准确率为：仿真基准</a:t>
-            </a:r>
-            <a:r>
-              <a:rPr lang="en-US" altLang="zh-CN" sz="1400" dirty="0">
-                <a:solidFill>
-                  <a:schemeClr val="tx1"/>
-                </a:solidFill>
-                <a:latin typeface="微软雅黑" charset="-122"/>
-                <a:ea typeface="微软雅黑" charset="-122"/>
-                <a:sym typeface="+mn-ea"/>
-              </a:rPr>
-              <a:t> 97.7%</a:t>
-            </a:r>
-            <a:r>
-              <a:rPr lang="zh-CN" altLang="en-US" sz="1400" dirty="0">
-                <a:solidFill>
-                  <a:schemeClr val="tx1"/>
-                </a:solidFill>
-                <a:latin typeface="微软雅黑" charset="-122"/>
-                <a:ea typeface="微软雅黑" charset="-122"/>
-                <a:sym typeface="+mn-ea"/>
-              </a:rPr>
-              <a:t>，方法</a:t>
-            </a:r>
-            <a:r>
-              <a:rPr lang="en-US" altLang="zh-CN" sz="1400" dirty="0">
-                <a:solidFill>
-                  <a:schemeClr val="tx1"/>
-                </a:solidFill>
-                <a:latin typeface="微软雅黑" charset="-122"/>
-                <a:ea typeface="微软雅黑" charset="-122"/>
-                <a:sym typeface="+mn-ea"/>
-              </a:rPr>
-              <a:t> A </a:t>
-            </a:r>
-            <a:r>
-              <a:rPr lang="zh-CN" altLang="en-US" sz="1400" dirty="0">
-                <a:solidFill>
-                  <a:schemeClr val="tx1"/>
-                </a:solidFill>
-                <a:latin typeface="微软雅黑" charset="-122"/>
-                <a:ea typeface="微软雅黑" charset="-122"/>
-                <a:sym typeface="+mn-ea"/>
-              </a:rPr>
-              <a:t>实测数据</a:t>
-            </a:r>
-            <a:r>
-              <a:rPr lang="en-US" altLang="zh-CN" sz="1400" dirty="0">
-                <a:solidFill>
-                  <a:schemeClr val="tx1"/>
-                </a:solidFill>
-                <a:latin typeface="微软雅黑" charset="-122"/>
-                <a:ea typeface="微软雅黑" charset="-122"/>
-                <a:sym typeface="+mn-ea"/>
-              </a:rPr>
-              <a:t> 73.1%</a:t>
-            </a:r>
-            <a:r>
-              <a:rPr lang="zh-CN" altLang="en-US" sz="1400" dirty="0">
-                <a:solidFill>
-                  <a:schemeClr val="tx1"/>
-                </a:solidFill>
-                <a:latin typeface="微软雅黑" charset="-122"/>
-                <a:ea typeface="微软雅黑" charset="-122"/>
-                <a:sym typeface="+mn-ea"/>
-              </a:rPr>
-              <a:t>，方法</a:t>
-            </a:r>
-            <a:r>
-              <a:rPr lang="en-US" altLang="zh-CN" sz="1400" dirty="0">
-                <a:solidFill>
-                  <a:schemeClr val="tx1"/>
-                </a:solidFill>
-                <a:latin typeface="微软雅黑" charset="-122"/>
-                <a:ea typeface="微软雅黑" charset="-122"/>
-                <a:sym typeface="+mn-ea"/>
-              </a:rPr>
-              <a:t> B </a:t>
-            </a:r>
-            <a:r>
-              <a:rPr lang="zh-CN" altLang="en-US" sz="1400" dirty="0">
-                <a:solidFill>
-                  <a:schemeClr val="tx1"/>
-                </a:solidFill>
-                <a:latin typeface="微软雅黑" charset="-122"/>
-                <a:ea typeface="微软雅黑" charset="-122"/>
-                <a:sym typeface="+mn-ea"/>
-              </a:rPr>
-              <a:t>实测数据</a:t>
-            </a:r>
-            <a:r>
-              <a:rPr lang="en-US" altLang="zh-CN" sz="1400" dirty="0">
-                <a:solidFill>
-                  <a:schemeClr val="tx1"/>
-                </a:solidFill>
-                <a:latin typeface="微软雅黑" charset="-122"/>
-                <a:ea typeface="微软雅黑" charset="-122"/>
-                <a:sym typeface="+mn-ea"/>
-              </a:rPr>
-              <a:t> 93.5%</a:t>
-            </a:r>
-            <a:r>
-              <a:rPr lang="zh-CN" altLang="en-US" sz="1400" dirty="0">
-                <a:solidFill>
-                  <a:schemeClr val="tx1"/>
-                </a:solidFill>
-                <a:latin typeface="微软雅黑" charset="-122"/>
-                <a:ea typeface="微软雅黑" charset="-122"/>
-                <a:sym typeface="+mn-ea"/>
-              </a:rPr>
-              <a:t>。方法</a:t>
-            </a:r>
-            <a:r>
-              <a:rPr lang="en-US" altLang="zh-CN" sz="1400" dirty="0">
-                <a:solidFill>
-                  <a:schemeClr val="tx1"/>
-                </a:solidFill>
-                <a:latin typeface="微软雅黑" charset="-122"/>
-                <a:ea typeface="微软雅黑" charset="-122"/>
-                <a:sym typeface="+mn-ea"/>
-              </a:rPr>
-              <a:t> B </a:t>
-            </a:r>
-            <a:r>
-              <a:rPr lang="zh-CN" altLang="en-US" sz="1400" dirty="0">
-                <a:solidFill>
-                  <a:schemeClr val="tx1"/>
-                </a:solidFill>
-                <a:latin typeface="微软雅黑" charset="-122"/>
-                <a:ea typeface="微软雅黑" charset="-122"/>
-                <a:sym typeface="+mn-ea"/>
-              </a:rPr>
-              <a:t>更接近基准，说明测试环境会影响同一模型的评估结果。</a:t>
-            </a:r>
-            <a:endParaRPr lang="zh-CN" altLang="en-US" sz="1400" dirty="0">
-              <a:solidFill>
-                <a:schemeClr val="tx1"/>
-              </a:solidFill>
-              <a:latin typeface="微软雅黑" charset="-122"/>
-              <a:ea typeface="微软雅黑" charset="-122"/>
-              <a:sym typeface="+mn-ea"/>
-            </a:endParaRPr>
-          </a:p>
-          <a:p>
-            <a:pPr indent="0">
-              <a:lnSpc>
-                <a:spcPct val="120000"/>
-              </a:lnSpc>
-              <a:buFont typeface="Arial" panose="020B0604020202020204" pitchFamily="34" charset="0"/>
-              <a:buNone/>
-            </a:pPr>
+              <a:t>专利给出判据和示意案例，未提供定量对照实验或通用门限。</a:t>
+            </a:r>
             <a:r>
               <a:rPr lang="zh-CN" altLang="en-US" sz="1400" b="1" dirty="0">
                 <a:solidFill>
@@ -17461,79 +19003,7 @@
                 <a:ea typeface="微软雅黑" charset="-122"/>
                 <a:sym typeface="+mn-ea"/>
               </a:rPr>
-              <a:t>研究成熟度与启示：</a:t>
-            </a:r>
-            <a:endParaRPr lang="zh-CN" altLang="en-US" sz="1400" b="1" dirty="0">
-              <a:solidFill>
-                <a:schemeClr val="tx1"/>
-              </a:solidFill>
-              <a:latin typeface="微软雅黑" charset="-122"/>
-              <a:ea typeface="微软雅黑" charset="-122"/>
-              <a:sym typeface="+mn-ea"/>
-            </a:endParaRPr>
-          </a:p>
-          <a:p>
-            <a:pPr indent="0">
-              <a:lnSpc>
-                <a:spcPct val="120000"/>
-              </a:lnSpc>
-              <a:buFont typeface="Arial" panose="020B0604020202020204" pitchFamily="34" charset="0"/>
-              <a:buNone/>
-            </a:pPr>
-            <a:r>
-              <a:rPr lang="zh-CN" altLang="en-US" sz="1400" dirty="0">
-                <a:solidFill>
-                  <a:schemeClr val="tx1"/>
-                </a:solidFill>
-                <a:latin typeface="微软雅黑" charset="-122"/>
-                <a:ea typeface="微软雅黑" charset="-122"/>
-                <a:sym typeface="+mn-ea"/>
-              </a:rPr>
-              <a:t>论文包含算法、真实</a:t>
-            </a:r>
-            <a:r>
-              <a:rPr lang="en-US" altLang="zh-CN" sz="1400" dirty="0">
-                <a:solidFill>
-                  <a:schemeClr val="tx1"/>
-                </a:solidFill>
-                <a:latin typeface="微软雅黑" charset="-122"/>
-                <a:ea typeface="微软雅黑" charset="-122"/>
-                <a:sym typeface="+mn-ea"/>
-              </a:rPr>
-              <a:t> OTA </a:t>
-            </a:r>
-            <a:r>
-              <a:rPr lang="zh-CN" altLang="en-US" sz="1400" dirty="0">
-                <a:solidFill>
-                  <a:schemeClr val="tx1"/>
-                </a:solidFill>
-                <a:latin typeface="微软雅黑" charset="-122"/>
-                <a:ea typeface="微软雅黑" charset="-122"/>
-                <a:sym typeface="+mn-ea"/>
-              </a:rPr>
-              <a:t>装置和实测验证，可支撑实验室测试方法研究，但未交代可复现的商用手机集成接口。</a:t>
-            </a:r>
-            <a:r>
-              <a:rPr lang="zh-CN" altLang="en-US" sz="1400" b="1" dirty="0">
-                <a:solidFill>
-                  <a:schemeClr val="tx1"/>
-                </a:solidFill>
-                <a:latin typeface="微软雅黑" charset="-122"/>
-                <a:ea typeface="微软雅黑" charset="-122"/>
-                <a:sym typeface="+mn-ea"/>
-              </a:rPr>
-              <a:t>比较不同模型版本前，应先检查参考条件和环境误差是否一致。</a:t>
-            </a:r>
-            <a:r>
-              <a:rPr lang="zh-CN" altLang="en-US" sz="1400" dirty="0">
-                <a:solidFill>
-                  <a:schemeClr val="tx1"/>
-                </a:solidFill>
-                <a:latin typeface="微软雅黑" charset="-122"/>
-                <a:ea typeface="微软雅黑" charset="-122"/>
-                <a:sym typeface="+mn-ea"/>
-              </a:rPr>
-              <a:t>完整验收还需要接入终端测量与预测结果，配置用例和合格门限；环境改进带来的评估变化，也不能直接解释为模型算法提升。</a:t>
+              <a:t>应用重点是明确参考、配对、容差和复测规则，并保留两个维度的结果。</a:t>
             </a:r>
             <a:endParaRPr lang="zh-CN" altLang="en-US" sz="1400" dirty="0">
               <a:solidFill>
@@ -17554,8 +19024,8 @@
         </p:nvSpPr>
         <p:spPr>
           <a:xfrm>
-            <a:off x="6318584" y="162490"/>
-            <a:ext cx="4655541" cy="803879"/>
+            <a:off x="6632607" y="324566"/>
+            <a:ext cx="4331389" cy="641803"/>
           </a:xfrm>
           <a:prstGeom prst="rect">
             <a:avLst/>
@@ -17572,7 +19042,7 @@
                 <a:ea typeface="Times New Roman" panose="02020603050405020304" charset="0"/>
                 <a:cs typeface="Times New Roman" panose="02020603050405020304" charset="0"/>
               </a:rPr>
-              <a:t>[7] WANG Z, YAN M, ZHAO W, et al. Over-the-air testing on artificial intelligence-based beam management evaluation of millimeter-wave devices[J]. IEEE Transactions on Antennas and Propagation, 2026, 74(3): 2770-2781. DOI: 10.1109/TAP.2025.3637525.</a:t>
+              <a:t>[5] APPLE INC. Beam measurement accuracy test metric for artificial intelligence / machine language (AI/ML) based beam management: WO2025212462A1[P]. 2025-10-09.</a:t>
             </a:r>
             <a:endParaRPr lang="en-US" altLang="zh-CN" sz="1200">
               <a:latin typeface="Times New Roman" panose="02020603050405020304" charset="0"/>

--- a/2026.10.10AI与通信融合研究进展调研三.pptx
+++ b/2026.10.10AI与通信融合研究进展调研三.pptx
@@ -583,93 +583,6 @@
         <p:txBody>
           <a:bodyPr/>
           <a:p>
-            <a:r>
-              <a:rPr lang="zh-CN" altLang="en-US" sz="1800">
-                <a:solidFill>
-                  <a:schemeClr val="tx1"/>
-                </a:solidFill>
-              </a:rPr>
-              <a:t>这一篇进一步帮助我们理解怎样组织测试。它主要面向网络侧控制应用。关注怎样把通信 </a:t>
-            </a:r>
-            <a:r>
-              <a:rPr lang="en-US" altLang="zh-CN" sz="1800">
-                <a:solidFill>
-                  <a:schemeClr val="tx1"/>
-                </a:solidFill>
-              </a:rPr>
-              <a:t>AI </a:t>
-            </a:r>
-            <a:r>
-              <a:rPr lang="zh-CN" altLang="en-US" sz="1800">
-                <a:solidFill>
-                  <a:schemeClr val="tx1"/>
-                </a:solidFill>
-              </a:rPr>
-              <a:t>测试组织成一套能重复运行的系统。测试人员先配置场景和步骤，服务器再统一分发任务，由执行节点施加测试条件并收集反馈。这样，模型更新前后可以在相同用例下进行比较，也方便复现已经发现的问题。</a:t>
-            </a:r>
-            <a:endParaRPr lang="zh-CN" altLang="en-US" sz="1800">
-              <a:solidFill>
-                <a:schemeClr val="tx1"/>
-              </a:solidFill>
-            </a:endParaRPr>
-          </a:p>
-          <a:p>
-            <a:r>
-              <a:rPr lang="zh-CN" altLang="en-US" sz="1800">
-                <a:solidFill>
-                  <a:schemeClr val="tx1"/>
-                </a:solidFill>
-              </a:rPr>
-              <a:t>框架还引入测试侧 </a:t>
-            </a:r>
-            <a:r>
-              <a:rPr lang="en-US" altLang="zh-CN" sz="1800">
-                <a:solidFill>
-                  <a:schemeClr val="tx1"/>
-                </a:solidFill>
-              </a:rPr>
-              <a:t>AI</a:t>
-            </a:r>
-            <a:r>
-              <a:rPr lang="zh-CN" altLang="en-US" sz="1800">
-                <a:solidFill>
-                  <a:schemeClr val="tx1"/>
-                </a:solidFill>
-              </a:rPr>
-              <a:t>，尝试根据反馈寻找容易失效的输入。被测 </a:t>
-            </a:r>
-            <a:r>
-              <a:rPr lang="en-US" altLang="zh-CN" sz="1800">
-                <a:solidFill>
-                  <a:schemeClr val="tx1"/>
-                </a:solidFill>
-              </a:rPr>
-              <a:t>AI </a:t>
-            </a:r>
-            <a:r>
-              <a:rPr lang="zh-CN" altLang="en-US" sz="1800">
-                <a:solidFill>
-                  <a:schemeClr val="tx1"/>
-                </a:solidFill>
-              </a:rPr>
-              <a:t>负责通信决策，测试侧 </a:t>
-            </a:r>
-            <a:r>
-              <a:rPr lang="en-US" altLang="zh-CN" sz="1800">
-                <a:solidFill>
-                  <a:schemeClr val="tx1"/>
-                </a:solidFill>
-              </a:rPr>
-              <a:t>AI </a:t>
-            </a:r>
-            <a:r>
-              <a:rPr lang="zh-CN" altLang="en-US" sz="1800">
-                <a:solidFill>
-                  <a:schemeClr val="tx1"/>
-                </a:solidFill>
-              </a:rPr>
-              <a:t>负责探索测试场景。</a:t>
-            </a:r>
             <a:endParaRPr lang="zh-CN" altLang="en-US"/>
           </a:p>
         </p:txBody>
@@ -725,44 +638,6 @@
         <p:txBody>
           <a:bodyPr/>
           <a:p>
-            <a:r>
-              <a:rPr lang="zh-CN" altLang="en-US" sz="1800">
-                <a:solidFill>
-                  <a:schemeClr val="tx1"/>
-                </a:solidFill>
-              </a:rPr>
-              <a:t>最后一篇直接关注终端波束预测怎样在无线实验室中验证。模型只测部分波束，却要推断其他候选，因此实验室不仅要提供输入，还要准确呈现用于核验预测的无线环境。</a:t>
-            </a:r>
-            <a:endParaRPr lang="zh-CN" altLang="en-US" sz="1800">
-              <a:solidFill>
-                <a:schemeClr val="tx1"/>
-              </a:solidFill>
-            </a:endParaRPr>
-          </a:p>
-          <a:p>
-            <a:r>
-              <a:rPr lang="zh-CN" altLang="en-US" sz="1800">
-                <a:solidFill>
-                  <a:schemeClr val="tx1"/>
-                </a:solidFill>
-              </a:rPr>
-              <a:t>作者考虑不同发射波束对传播路径的影响，在多探头暗室中重建相应信道，并提出完整覆盖和针对指定用例的两种方案。评价时先用 BPSP 检查环境重建质量，再看模型是否预测对最佳波束。</a:t>
-            </a:r>
-            <a:endParaRPr lang="zh-CN" altLang="en-US" sz="1800">
-              <a:solidFill>
-                <a:schemeClr val="tx1"/>
-              </a:solidFill>
-            </a:endParaRPr>
-          </a:p>
-          <a:p>
-            <a:r>
-              <a:rPr lang="zh-CN" altLang="en-US" sz="1800">
-                <a:solidFill>
-                  <a:schemeClr val="tx1"/>
-                </a:solidFill>
-              </a:rPr>
-              <a:t>本文既有暗室实测，也有模型验证。方案 B 的测量数据预测准确率达到 93.5%，接近 97.7% 的仿真基准。</a:t>
-            </a:r>
             <a:endParaRPr lang="zh-CN" altLang="en-US"/>
           </a:p>
         </p:txBody>
@@ -815,10 +690,6 @@
           <a:bodyPr/>
           <a:lstStyle/>
           <a:p>
-            <a:r>
-              <a:rPr lang="zh-CN" altLang="en-US" dirty="0"/>
-              <a:t>以上是全部汇报内容，感谢批评指正，谢谢！</a:t>
-            </a:r>
             <a:endParaRPr lang="zh-CN" altLang="en-US" dirty="0"/>
           </a:p>
         </p:txBody>
@@ -894,14 +765,6 @@
         <p:txBody>
           <a:bodyPr/>
           <a:p>
-            <a:r>
-              <a:rPr lang="zh-CN" altLang="en-US" sz="1800">
-                <a:solidFill>
-                  <a:schemeClr val="tx1"/>
-                </a:solidFill>
-              </a:rPr>
-              <a:t>这次调研分为两个方向。第一个方向看苹果怎样通过 AI 改善通信体验，包括吞吐量预测、业务流与承载映射，以及无线测量预测。这里主要讲模型结果怎样进入实际通信流程，最终影响什么通信表现。第二个方向进一步研究，这些 AI 功能应该怎样测试和验证。四篇材料分别覆盖模型状态管理、测试判据、自动化执行和无线环境构建。前两篇和最后一篇直接围绕终端波束预测展开，OAIC-T 则提供网络侧测试平台的架构参考。两个方向联系起来看就是先明确 AI 功能改变了什么，再确定需要测量什么、取得什么参考，以及怎样判断这些变化是否可靠。</a:t>
-            </a:r>
             <a:endParaRPr lang="zh-CN" altLang="en-US"/>
           </a:p>
         </p:txBody>
@@ -957,14 +820,6 @@
         <p:txBody>
           <a:bodyPr/>
           <a:p>
-            <a:r>
-              <a:rPr lang="zh-CN" altLang="en-US" sz="1800">
-                <a:solidFill>
-                  <a:schemeClr val="tx1"/>
-                </a:solidFill>
-              </a:rPr>
-              <a:t>首先来看方向一。第一篇关注的是：播放器怎样判断当前网络能够支持多高的视频码率。播放刚启动时，终端还没有积累足够的下载记录；切换网络后，原来的吞吐量估计也可能不再适用。因此，苹果将历史模型给出的预测与当前观测得到的即时估计结合起来。历史经验在观测不足时提供参考，随着下载数据积累，即时估计逐步反映当前网络的实际表现，两者融合后，再由播放器选择下一段视频的码率。关键在于能否根据两路估计的可靠程度合理调整权重。验证时，除了检查吞吐量估计误差，还需要观察持续高估是否会增加卡顿、低估是否会导致选择较低画质的视频版本，从实际播放结果来判断方案的价值。</a:t>
-            </a:r>
             <a:endParaRPr lang="zh-CN" altLang="en-US"/>
           </a:p>
         </p:txBody>
@@ -1020,44 +875,6 @@
         <p:txBody>
           <a:bodyPr/>
           <a:p>
-            <a:r>
-              <a:rPr lang="zh-CN" altLang="en-US" sz="1800">
-                <a:solidFill>
-                  <a:schemeClr val="tx1"/>
-                </a:solidFill>
-              </a:rPr>
-              <a:t>第二篇关注手机同时运行多种业务时，怎样选择合适的无线承载。我们知道实时通话重视低时延，视频传输则需要足够的吞吐量，后台上传则可以容忍一定等待。5G 将数据组织为具有不同服务质量要求的 QoS 流，再映射到数据无线承载，多个流也可以共用一个承载。</a:t>
-            </a:r>
-            <a:endParaRPr lang="zh-CN" altLang="en-US" sz="1800">
-              <a:solidFill>
-                <a:schemeClr val="tx1"/>
-              </a:solidFill>
-            </a:endParaRPr>
-          </a:p>
-          <a:p>
-            <a:r>
-              <a:rPr lang="zh-CN" altLang="en-US" sz="1800">
-                <a:solidFill>
-                  <a:schemeClr val="tx1"/>
-                </a:solidFill>
-              </a:rPr>
-              <a:t>苹果提出利用深度 Q 网络，结合业务要求、当前映射及承载运行状态，选择流与承载的对应关系，并在训练中利用实际吞吐量、时延等反馈改进策略。业务或承载发生变化时，模型可以重新选择；信息不足时向网络请求补充，模型不可用时采用固定映射。</a:t>
-            </a:r>
-            <a:endParaRPr lang="zh-CN" altLang="en-US" sz="1800">
-              <a:solidFill>
-                <a:schemeClr val="tx1"/>
-              </a:solidFill>
-            </a:endParaRPr>
-          </a:p>
-          <a:p>
-            <a:r>
-              <a:rPr lang="zh-CN" altLang="en-US" sz="1800">
-                <a:solidFill>
-                  <a:schemeClr val="tx1"/>
-                </a:solidFill>
-              </a:rPr>
-              <a:t>其价值在于让承载选择适应业务和网络变化，但尚未提供量化收益。验证时应确认映射可执行，并检查各类业务是否真正达标。</a:t>
-            </a:r>
             <a:endParaRPr lang="zh-CN" altLang="en-US"/>
           </a:p>
         </p:txBody>
@@ -1106,26 +923,6 @@
         <p:txBody>
           <a:bodyPr/>
           <a:p>
-            <a:r>
-              <a:rPr lang="zh-CN" altLang="en-US"/>
-              <a:t>这张图展示承载映射策略怎样通过交互学习。左边是终端，中间是基站，右边举例说明一个 </a:t>
-            </a:r>
-            <a:r>
-              <a:rPr lang="en-US" altLang="zh-CN"/>
-              <a:t>QoS </a:t>
-            </a:r>
-            <a:r>
-              <a:rPr lang="zh-CN" altLang="en-US"/>
-              <a:t>流从原承载调整到另一承载。终端先根据当前状态选择动作，基站检测映射变化，再根据实际 </a:t>
-            </a:r>
-            <a:r>
-              <a:rPr lang="en-US" altLang="zh-CN"/>
-              <a:t>QoS </a:t>
-            </a:r>
-            <a:r>
-              <a:rPr lang="zh-CN" altLang="en-US"/>
-              <a:t>表现返回奖励。终端利用反馈更新模型，并继续尝试和评价后续选择。图中的循环表示多次训练交互，使模型逐步学会怎样选择承载；训练完成后的运行推理，则利用已学到的模型作决策。</a:t>
-            </a:r>
             <a:endParaRPr lang="zh-CN" altLang="en-US"/>
           </a:p>
         </p:txBody>
@@ -1181,14 +978,6 @@
         <p:txBody>
           <a:bodyPr/>
           <a:p>
-            <a:r>
-              <a:rPr lang="zh-CN" altLang="en-US" sz="1800">
-                <a:solidFill>
-                  <a:schemeClr val="tx1"/>
-                </a:solidFill>
-              </a:rPr>
-              <a:t>第三篇关注手机移动过程中，怎样利用无线测量预测辅助切换。已有的测量反映的是过去或当前状态，而实际切换时，无线环境可能已经变化。苹果提出了两类预测：一类是根据已有测量估计后续时刻的信号状态，另一类是利用邻近波束推断其他波束的信息，为移动性管理提供更及时、完整的依据。网络通过配置决定这些预测能否参与切换条件判断，以及需要达到怎样的可靠程度。同时，终端或网络利用对应实测监测预测误差，失准时停止或切换模型，恢复实际测量。验证时，需要把预测准确性与实际切换结果结合起来观察。</a:t>
-            </a:r>
             <a:endParaRPr lang="zh-CN" altLang="en-US"/>
           </a:p>
         </p:txBody>
@@ -1237,10 +1026,6 @@
         <p:txBody>
           <a:bodyPr/>
           <a:p>
-            <a:r>
-              <a:rPr lang="zh-CN" altLang="en-US"/>
-              <a:t>这张图从上到下展示预测模型如何投入使用。左边是终端侧服务器，中间是手机，右边是基站。手机先报告预测能力，按照网络配置采集数据，并由服务器完成图示的离线训练。模型准备好后，手机通知网络，由网络选择并激活模型。随后，预测在手机上运行，手机按配置上报实际或预测测量。流程下半部分是性能监控：终端或网络将预测与对应实测比较，必要时切换或停用模型，恢复传统测量报告。（这个讲完记得停一下等老板指示）</a:t>
-            </a:r>
             <a:endParaRPr lang="zh-CN" altLang="en-US"/>
           </a:p>
         </p:txBody>
@@ -1296,61 +1081,6 @@
         <p:txBody>
           <a:bodyPr/>
           <a:p>
-            <a:r>
-              <a:rPr lang="zh-CN" altLang="en-US" sz="1800">
-                <a:solidFill>
-                  <a:schemeClr val="tx1"/>
-                </a:solidFill>
-              </a:rPr>
-              <a:t>然后是</a:t>
-            </a:r>
-            <a:r>
-              <a:rPr lang="zh-CN" altLang="en-US" sz="1800">
-                <a:solidFill>
-                  <a:schemeClr val="tx1"/>
-                </a:solidFill>
-                <a:cs typeface="Arial" panose="020B0604020202020204" pitchFamily="34" charset="0"/>
-              </a:rPr>
-              <a:t>方向二</a:t>
-            </a:r>
-            <a:r>
-              <a:rPr lang="zh-CN" altLang="en-US" sz="1800">
-                <a:solidFill>
-                  <a:schemeClr val="tx1"/>
-                </a:solidFill>
-              </a:rPr>
-              <a:t>关注的是，波束预测模型部署到手机后，怎样判断它还能不能可靠地参与通信。环境发生变化时，过去表现良好的模型也可能失准，因此需要在运行中继续检查。</a:t>
-            </a:r>
-            <a:endParaRPr lang="zh-CN" altLang="en-US" sz="1800">
-              <a:solidFill>
-                <a:schemeClr val="tx1"/>
-              </a:solidFill>
-            </a:endParaRPr>
-          </a:p>
-          <a:p>
-            <a:r>
-              <a:rPr lang="zh-CN" altLang="en-US" sz="1800">
-                <a:solidFill>
-                  <a:schemeClr val="tx1"/>
-                </a:solidFill>
-              </a:rPr>
-              <a:t>苹果把监测分为三个层面：先判断当前输入和环境是否适合模型，再检查预测输出有没有异常，随后通过基站配合取得对应波束的实测结果，核验预测准确性。这三层检查分别回答“是否适用”“是否异常”和“是否准确”。</a:t>
-            </a:r>
-            <a:endParaRPr lang="zh-CN" altLang="en-US" sz="1800">
-              <a:solidFill>
-                <a:schemeClr val="tx1"/>
-              </a:solidFill>
-            </a:endParaRPr>
-          </a:p>
-          <a:p>
-            <a:r>
-              <a:rPr lang="zh-CN" altLang="en-US" sz="1800">
-                <a:solidFill>
-                  <a:schemeClr val="tx1"/>
-                </a:solidFill>
-              </a:rPr>
-              <a:t>方案还区分模型评估与实际使用。候选模型可以先运行并接受验证，输出暂不影响通信，再根据结果决定是否采用。这篇的主要价值就是为模型持续使用和替换提供依据。</a:t>
-            </a:r>
             <a:endParaRPr lang="zh-CN" altLang="en-US"/>
           </a:p>
         </p:txBody>
@@ -1406,29 +1136,6 @@
         <p:txBody>
           <a:bodyPr/>
           <a:p>
-            <a:r>
-              <a:rPr lang="zh-CN" altLang="en-US" sz="1800">
-                <a:solidFill>
-                  <a:schemeClr val="tx1"/>
-                </a:solidFill>
-              </a:rPr>
-              <a:t>这一篇进一步关注，怎样判断波束预测模型的输出是否合格。这里有两件事需要同时检查：一是候选波束选得对不对，二是对应的功率预测准不准。选中了正确波束，并不代表功率估计可靠；某个波束的功率预测较准，也不能说明候选排序正确。</a:t>
-            </a:r>
-            <a:endParaRPr lang="zh-CN" altLang="en-US" sz="1800">
-              <a:solidFill>
-                <a:schemeClr val="tx1"/>
-              </a:solidFill>
-            </a:endParaRPr>
-          </a:p>
-          <a:p>
-            <a:r>
-              <a:rPr lang="zh-CN" altLang="en-US" sz="1800">
-                <a:solidFill>
-                  <a:schemeClr val="tx1"/>
-                </a:solidFill>
-              </a:rPr>
-              <a:t>苹果提出将波束标识和接收功率放在两个维度上，设置共同的容差范围，再对实测与预测进行联合判断。方案还允许按候选排名配置不同容差，并在规定情况下再次测量，考虑无线信号的短时变化。这篇的价值是让验收依据更完整，具体门限仍需结合测试要求确定。</a:t>
-            </a:r>
             <a:endParaRPr lang="zh-CN" altLang="en-US"/>
           </a:p>
         </p:txBody>
@@ -10811,6 +10518,9 @@
                 <a:solidFill>
                   <a:schemeClr val="tx1"/>
                 </a:solidFill>
+                <a:highlight>
+                  <a:srgbClr val="FFFF00"/>
+                </a:highlight>
                 <a:latin typeface="微软雅黑" charset="-122"/>
                 <a:ea typeface="微软雅黑" charset="-122"/>
                 <a:sym typeface="+mn-ea"/>
@@ -10822,6 +10532,9 @@
                 <a:solidFill>
                   <a:schemeClr val="tx1"/>
                 </a:solidFill>
+                <a:highlight>
+                  <a:srgbClr val="FFFF00"/>
+                </a:highlight>
                 <a:latin typeface="微软雅黑" charset="-122"/>
                 <a:ea typeface="微软雅黑" charset="-122"/>
                 <a:sym typeface="+mn-ea"/>
@@ -10833,6 +10546,9 @@
                 <a:solidFill>
                   <a:schemeClr val="tx1"/>
                 </a:solidFill>
+                <a:highlight>
+                  <a:srgbClr val="FFFF00"/>
+                </a:highlight>
                 <a:latin typeface="微软雅黑" charset="-122"/>
                 <a:ea typeface="微软雅黑" charset="-122"/>
                 <a:sym typeface="+mn-ea"/>
@@ -10844,6 +10560,9 @@
                 <a:solidFill>
                   <a:schemeClr val="tx1"/>
                 </a:solidFill>
+                <a:highlight>
+                  <a:srgbClr val="FFFF00"/>
+                </a:highlight>
                 <a:latin typeface="微软雅黑" charset="-122"/>
                 <a:ea typeface="微软雅黑" charset="-122"/>
                 <a:sym typeface="+mn-ea"/>
@@ -10855,6 +10574,9 @@
                 <a:solidFill>
                   <a:schemeClr val="tx1"/>
                 </a:solidFill>
+                <a:highlight>
+                  <a:srgbClr val="FFFF00"/>
+                </a:highlight>
                 <a:latin typeface="微软雅黑" charset="-122"/>
                 <a:ea typeface="微软雅黑" charset="-122"/>
                 <a:sym typeface="+mn-ea"/>
@@ -10866,6 +10588,9 @@
                 <a:solidFill>
                   <a:schemeClr val="tx1"/>
                 </a:solidFill>
+                <a:highlight>
+                  <a:srgbClr val="FFFF00"/>
+                </a:highlight>
                 <a:latin typeface="微软雅黑" charset="-122"/>
                 <a:ea typeface="微软雅黑" charset="-122"/>
                 <a:sym typeface="+mn-ea"/>
@@ -10877,6 +10602,9 @@
                 <a:solidFill>
                   <a:schemeClr val="tx1"/>
                 </a:solidFill>
+                <a:highlight>
+                  <a:srgbClr val="FFFF00"/>
+                </a:highlight>
                 <a:latin typeface="微软雅黑" charset="-122"/>
                 <a:ea typeface="微软雅黑" charset="-122"/>
                 <a:sym typeface="+mn-ea"/>
@@ -10888,6 +10616,9 @@
                 <a:solidFill>
                   <a:srgbClr val="000000"/>
                 </a:solidFill>
+                <a:highlight>
+                  <a:srgbClr val="FFFF00"/>
+                </a:highlight>
                 <a:latin typeface="微软雅黑" charset="-122"/>
                 <a:ea typeface="微软雅黑" charset="-122"/>
                 <a:cs typeface="+mn-ea"/>
@@ -10900,6 +10631,9 @@
                 <a:solidFill>
                   <a:srgbClr val="000000"/>
                 </a:solidFill>
+                <a:highlight>
+                  <a:srgbClr val="FFFF00"/>
+                </a:highlight>
                 <a:latin typeface="微软雅黑" charset="0"/>
                 <a:ea typeface="微软雅黑" charset="0"/>
                 <a:cs typeface="+mn-ea"/>
@@ -10912,6 +10646,9 @@
                 <a:solidFill>
                   <a:srgbClr val="000000"/>
                 </a:solidFill>
+                <a:highlight>
+                  <a:srgbClr val="FFFF00"/>
+                </a:highlight>
                 <a:latin typeface="微软雅黑" charset="-122"/>
                 <a:ea typeface="微软雅黑" charset="-122"/>
                 <a:cs typeface="+mn-ea"/>
@@ -10923,6 +10660,9 @@
               <a:solidFill>
                 <a:schemeClr val="tx1"/>
               </a:solidFill>
+              <a:highlight>
+                <a:srgbClr val="FFFF00"/>
+              </a:highlight>
               <a:latin typeface="微软雅黑" charset="-122"/>
               <a:ea typeface="微软雅黑" charset="-122"/>
               <a:sym typeface="+mn-ea"/>
@@ -13203,6 +12943,9 @@
                 <a:solidFill>
                   <a:schemeClr val="tx1"/>
                 </a:solidFill>
+                <a:highlight>
+                  <a:srgbClr val="FFFF00"/>
+                </a:highlight>
                 <a:latin typeface="微软雅黑" charset="-122"/>
                 <a:ea typeface="微软雅黑" charset="-122"/>
                 <a:sym typeface="+mn-ea"/>
@@ -13214,6 +12957,9 @@
                 <a:solidFill>
                   <a:schemeClr val="tx1"/>
                 </a:solidFill>
+                <a:highlight>
+                  <a:srgbClr val="FFFF00"/>
+                </a:highlight>
                 <a:latin typeface="微软雅黑" charset="0"/>
                 <a:ea typeface="微软雅黑" charset="0"/>
                 <a:sym typeface="+mn-ea"/>
@@ -13225,6 +12971,9 @@
                 <a:solidFill>
                   <a:schemeClr val="tx1"/>
                 </a:solidFill>
+                <a:highlight>
+                  <a:srgbClr val="FFFF00"/>
+                </a:highlight>
                 <a:latin typeface="微软雅黑" charset="-122"/>
                 <a:ea typeface="微软雅黑" charset="-122"/>
                 <a:sym typeface="+mn-ea"/>
@@ -13236,6 +12985,9 @@
                 <a:solidFill>
                   <a:srgbClr val="000000"/>
                 </a:solidFill>
+                <a:highlight>
+                  <a:srgbClr val="FFFF00"/>
+                </a:highlight>
                 <a:latin typeface="微软雅黑" charset="-122"/>
                 <a:ea typeface="微软雅黑" charset="-122"/>
                 <a:cs typeface="+mn-ea"/>
@@ -13247,6 +12999,9 @@
               <a:solidFill>
                 <a:schemeClr val="tx1"/>
               </a:solidFill>
+              <a:highlight>
+                <a:srgbClr val="FFFF00"/>
+              </a:highlight>
               <a:latin typeface="微软雅黑" charset="-122"/>
               <a:ea typeface="微软雅黑" charset="-122"/>
               <a:sym typeface="+mn-ea"/>
@@ -13941,6 +13696,9 @@
                 <a:solidFill>
                   <a:schemeClr val="tx1"/>
                 </a:solidFill>
+                <a:highlight>
+                  <a:srgbClr val="FFFF00"/>
+                </a:highlight>
                 <a:latin typeface="微软雅黑" charset="-122"/>
                 <a:ea typeface="微软雅黑" charset="-122"/>
                 <a:sym typeface="+mn-ea"/>
@@ -13952,6 +13710,9 @@
                 <a:solidFill>
                   <a:schemeClr val="tx1"/>
                 </a:solidFill>
+                <a:highlight>
+                  <a:srgbClr val="FFFF00"/>
+                </a:highlight>
                 <a:latin typeface="微软雅黑" charset="-122"/>
                 <a:ea typeface="微软雅黑" charset="-122"/>
                 <a:sym typeface="+mn-ea"/>
@@ -13963,6 +13724,9 @@
                 <a:solidFill>
                   <a:schemeClr val="tx1"/>
                 </a:solidFill>
+                <a:highlight>
+                  <a:srgbClr val="FFFF00"/>
+                </a:highlight>
                 <a:latin typeface="微软雅黑" charset="-122"/>
                 <a:ea typeface="微软雅黑" charset="-122"/>
                 <a:sym typeface="+mn-ea"/>
@@ -13974,6 +13738,9 @@
                 <a:solidFill>
                   <a:srgbClr val="000000"/>
                 </a:solidFill>
+                <a:highlight>
+                  <a:srgbClr val="FFFF00"/>
+                </a:highlight>
                 <a:latin typeface="微软雅黑" charset="-122"/>
                 <a:ea typeface="微软雅黑" charset="-122"/>
                 <a:cs typeface="+mn-ea"/>
@@ -13986,6 +13753,9 @@
                 <a:solidFill>
                   <a:srgbClr val="000000"/>
                 </a:solidFill>
+                <a:highlight>
+                  <a:srgbClr val="FFFF00"/>
+                </a:highlight>
                 <a:latin typeface="微软雅黑" charset="0"/>
                 <a:ea typeface="微软雅黑" charset="0"/>
                 <a:cs typeface="+mn-ea"/>
@@ -13998,6 +13768,9 @@
                 <a:solidFill>
                   <a:srgbClr val="000000"/>
                 </a:solidFill>
+                <a:highlight>
+                  <a:srgbClr val="FFFF00"/>
+                </a:highlight>
                 <a:latin typeface="微软雅黑" charset="-122"/>
                 <a:ea typeface="微软雅黑" charset="-122"/>
                 <a:cs typeface="+mn-ea"/>
@@ -14009,6 +13782,9 @@
               <a:solidFill>
                 <a:schemeClr val="tx1"/>
               </a:solidFill>
+              <a:highlight>
+                <a:srgbClr val="FFFF00"/>
+              </a:highlight>
               <a:latin typeface="微软雅黑" charset="-122"/>
               <a:ea typeface="微软雅黑" charset="-122"/>
               <a:sym typeface="+mn-ea"/>
@@ -17194,13 +16970,30 @@
                 <a:ea typeface="微软雅黑" charset="-122"/>
                 <a:sym typeface="+mn-ea"/>
               </a:rPr>
-              <a:t>. </a:t>
+              <a:t>.</a:t>
+            </a:r>
+            <a:r>
+              <a:rPr lang="en-US" altLang="zh-CN" b="1" dirty="0">
+                <a:solidFill>
+                  <a:schemeClr val="tx1"/>
+                </a:solidFill>
+                <a:highlight>
+                  <a:srgbClr val="FFFF00"/>
+                </a:highlight>
+                <a:latin typeface="微软雅黑" charset="-122"/>
+                <a:ea typeface="微软雅黑" charset="-122"/>
+                <a:sym typeface="+mn-ea"/>
+              </a:rPr>
+              <a:t> </a:t>
             </a:r>
             <a:r>
               <a:rPr lang="zh-CN" altLang="en-US" b="1" dirty="0">
                 <a:solidFill>
                   <a:schemeClr val="tx1"/>
                 </a:solidFill>
+                <a:highlight>
+                  <a:srgbClr val="FFFF00"/>
+                </a:highlight>
                 <a:latin typeface="微软雅黑" charset="-122"/>
                 <a:ea typeface="微软雅黑" charset="-122"/>
                 <a:sym typeface="+mn-ea"/>
@@ -17212,6 +17005,9 @@
                 <a:solidFill>
                   <a:schemeClr val="tx1"/>
                 </a:solidFill>
+                <a:highlight>
+                  <a:srgbClr val="FFFF00"/>
+                </a:highlight>
                 <a:latin typeface="微软雅黑" charset="0"/>
                 <a:ea typeface="微软雅黑" charset="0"/>
                 <a:sym typeface="+mn-ea"/>
@@ -17223,6 +17019,9 @@
                 <a:solidFill>
                   <a:schemeClr val="tx1"/>
                 </a:solidFill>
+                <a:highlight>
+                  <a:srgbClr val="FFFF00"/>
+                </a:highlight>
                 <a:latin typeface="微软雅黑" charset="-122"/>
                 <a:ea typeface="微软雅黑" charset="-122"/>
                 <a:sym typeface="+mn-ea"/>
@@ -17234,6 +17033,9 @@
                 <a:solidFill>
                   <a:srgbClr val="000000"/>
                 </a:solidFill>
+                <a:highlight>
+                  <a:srgbClr val="FFFF00"/>
+                </a:highlight>
                 <a:latin typeface="微软雅黑" charset="-122"/>
                 <a:ea typeface="微软雅黑" charset="-122"/>
                 <a:cs typeface="+mn-ea"/>
@@ -17246,6 +17048,9 @@
                 <a:solidFill>
                   <a:srgbClr val="000000"/>
                 </a:solidFill>
+                <a:highlight>
+                  <a:srgbClr val="FFFF00"/>
+                </a:highlight>
                 <a:latin typeface="微软雅黑" charset="0"/>
                 <a:ea typeface="微软雅黑" charset="0"/>
                 <a:cs typeface="+mn-ea"/>
@@ -17258,6 +17063,9 @@
                 <a:solidFill>
                   <a:srgbClr val="000000"/>
                 </a:solidFill>
+                <a:highlight>
+                  <a:srgbClr val="FFFF00"/>
+                </a:highlight>
                 <a:latin typeface="微软雅黑" charset="-122"/>
                 <a:ea typeface="微软雅黑" charset="-122"/>
                 <a:cs typeface="+mn-ea"/>
@@ -17269,6 +17077,9 @@
               <a:solidFill>
                 <a:schemeClr val="tx1"/>
               </a:solidFill>
+              <a:highlight>
+                <a:srgbClr val="FFFF00"/>
+              </a:highlight>
               <a:latin typeface="微软雅黑" charset="-122"/>
               <a:ea typeface="微软雅黑" charset="-122"/>
               <a:sym typeface="+mn-ea"/>
